--- a/studies/lifetime_cost/reports/AdaptiveCache_talk.pptx
+++ b/studies/lifetime_cost/reports/AdaptiveCache_talk.pptx
@@ -10,6 +10,18 @@
     <p:sldId id="258" r:id="rId9"/>
     <p:sldId id="259" r:id="rId10"/>
     <p:sldId id="260" r:id="rId11"/>
+    <p:sldId id="261" r:id="rId12"/>
+    <p:sldId id="262" r:id="rId13"/>
+    <p:sldId id="263" r:id="rId14"/>
+    <p:sldId id="264" r:id="rId15"/>
+    <p:sldId id="265" r:id="rId16"/>
+    <p:sldId id="266" r:id="rId17"/>
+    <p:sldId id="267" r:id="rId18"/>
+    <p:sldId id="268" r:id="rId19"/>
+    <p:sldId id="269" r:id="rId20"/>
+    <p:sldId id="270" r:id="rId21"/>
+    <p:sldId id="271" r:id="rId22"/>
+    <p:sldId id="272" r:id="rId23"/>
   </p:sldIdLst>
   <p:sldSz cx="12191695" cy="6858000" type="screen4x3"/>
   <p:notesSz cx="6858000" cy="9144000"/>
@@ -3224,7 +3236,7 @@
         <p:spPr>
           <a:xfrm>
             <a:off x="1097280" y="2057400"/>
-            <a:ext cx="10058400" cy="1463040"/>
+            <a:ext cx="10058400" cy="2194560"/>
           </a:xfrm>
           <a:prstGeom prst="rect">
             <a:avLst/>
@@ -3239,37 +3251,37 @@
           <a:p>
             <a:pPr algn="l"/>
             <a:r>
-              <a:rPr sz="4400" b="1" i="0">
+              <a:rPr sz="4200" b="1" i="0">
                 <a:solidFill>
                   <a:srgbClr val="FFFFFF"/>
                 </a:solidFill>
                 <a:latin typeface="Calibri"/>
               </a:rPr>
-              <a:t>When less is more —</a:t>
+              <a:t>Compacting an AI agent's</a:t>
             </a:r>
           </a:p>
           <a:p>
             <a:pPr algn="l"/>
             <a:r>
-              <a:rPr sz="4400" b="1" i="0">
+              <a:rPr sz="4200" b="1" i="0">
                 <a:solidFill>
                   <a:srgbClr val="FFFFFF"/>
                 </a:solidFill>
                 <a:latin typeface="Calibri"/>
               </a:rPr>
-              <a:t>a memory experiment</a:t>
+              <a:t>working memory:</a:t>
             </a:r>
           </a:p>
           <a:p>
             <a:pPr algn="l"/>
             <a:r>
-              <a:rPr sz="4400" b="1" i="0">
+              <a:rPr sz="4200" b="1" i="0">
                 <a:solidFill>
                   <a:srgbClr val="FFFFFF"/>
                 </a:solidFill>
                 <a:latin typeface="Calibri"/>
               </a:rPr>
-              <a:t>in AI agents</a:t>
+              <a:t>12 ways to drop old data</a:t>
             </a:r>
           </a:p>
         </p:txBody>
@@ -3282,7 +3294,7 @@
         </p:nvSpPr>
         <p:spPr>
           <a:xfrm>
-            <a:off x="1097280" y="4937760"/>
+            <a:off x="1097280" y="5029200"/>
             <a:ext cx="10058400" cy="457200"/>
           </a:xfrm>
           <a:prstGeom prst="rect">
@@ -3298,13 +3310,13 @@
           <a:p>
             <a:pPr algn="l"/>
             <a:r>
-              <a:rPr sz="1800" b="0" i="1">
+              <a:rPr sz="1700" b="0" i="1">
                 <a:solidFill>
                   <a:srgbClr val="6077C7"/>
                 </a:solidFill>
                 <a:latin typeface="Calibri"/>
               </a:rPr>
-              <a:t>I gave four AI agents the same bug to fix.</a:t>
+              <a:t>What we learned from running 12 strategies on real coding and customer-service tasks.</a:t>
             </a:r>
           </a:p>
         </p:txBody>
@@ -3312,6 +3324,3344 @@
       <p:sp>
         <p:nvSpPr>
           <p:cNvPr id="7" name="TextBox 6"/>
+          <p:cNvSpPr txBox="1"/>
+          <p:nvPr/>
+        </p:nvSpPr>
+        <p:spPr>
+          <a:xfrm>
+            <a:off x="1097280" y="6126480"/>
+            <a:ext cx="10058400" cy="365760"/>
+          </a:xfrm>
+          <a:prstGeom prst="rect">
+            <a:avLst/>
+          </a:prstGeom>
+          <a:noFill/>
+        </p:spPr>
+        <p:txBody>
+          <a:bodyPr wrap="square" lIns="0" rIns="0" tIns="0" bIns="0">
+            <a:spAutoFit/>
+          </a:bodyPr>
+          <a:lstStyle/>
+          <a:p>
+            <a:pPr algn="l"/>
+            <a:r>
+              <a:rPr sz="1200" b="0" i="0">
+                <a:solidFill>
+                  <a:srgbClr val="6077C7"/>
+                </a:solidFill>
+                <a:latin typeface="Calibri"/>
+              </a:rPr>
+              <a:t>Vlad Cainamisir  ·  Harvard  ·  AdaptiveCache project</a:t>
+            </a:r>
+          </a:p>
+        </p:txBody>
+      </p:sp>
+    </p:spTree>
+  </p:cSld>
+  <p:clrMapOvr>
+    <a:masterClrMapping/>
+  </p:clrMapOvr>
+</p:sld>
+</file>
+
+<file path=ppt/slides/slide10.xml><?xml version="1.0" encoding="utf-8"?>
+<p:sld xmlns:a="http://schemas.openxmlformats.org/drawingml/2006/main" xmlns:p="http://schemas.openxmlformats.org/presentationml/2006/main" xmlns:r="http://schemas.openxmlformats.org/officeDocument/2006/relationships">
+  <p:cSld>
+    <p:spTree>
+      <p:nvGrpSpPr>
+        <p:cNvPr id="1" name=""/>
+        <p:cNvGrpSpPr/>
+        <p:nvPr/>
+      </p:nvGrpSpPr>
+      <p:grpSpPr/>
+      <p:sp>
+        <p:nvSpPr>
+          <p:cNvPr id="2" name="Rectangle 1"/>
+          <p:cNvSpPr/>
+          <p:nvPr/>
+        </p:nvSpPr>
+        <p:spPr>
+          <a:xfrm>
+            <a:off x="0" y="0"/>
+            <a:ext cx="12191695" cy="6858000"/>
+          </a:xfrm>
+          <a:prstGeom prst="rect">
+            <a:avLst/>
+          </a:prstGeom>
+          <a:solidFill>
+            <a:srgbClr val="F8F6F0"/>
+          </a:solidFill>
+          <a:ln>
+            <a:noFill/>
+          </a:ln>
+          <a:effectLst/>
+        </p:spPr>
+        <p:style>
+          <a:lnRef idx="1">
+            <a:schemeClr val="accent1"/>
+          </a:lnRef>
+          <a:fillRef idx="3">
+            <a:schemeClr val="accent1"/>
+          </a:fillRef>
+          <a:effectRef idx="2">
+            <a:schemeClr val="accent1"/>
+          </a:effectRef>
+          <a:fontRef idx="minor">
+            <a:schemeClr val="lt1"/>
+          </a:fontRef>
+        </p:style>
+        <p:txBody>
+          <a:bodyPr rtlCol="0" anchor="ctr"/>
+          <a:lstStyle/>
+          <a:p>
+            <a:pPr algn="ctr"/>
+          </a:p>
+        </p:txBody>
+      </p:sp>
+      <p:sp>
+        <p:nvSpPr>
+          <p:cNvPr id="3" name="Rounded Rectangle 2"/>
+          <p:cNvSpPr/>
+          <p:nvPr/>
+        </p:nvSpPr>
+        <p:spPr>
+          <a:xfrm>
+            <a:off x="548640" y="411480"/>
+            <a:ext cx="2286000" cy="411480"/>
+          </a:xfrm>
+          <a:prstGeom prst="roundRect">
+            <a:avLst/>
+          </a:prstGeom>
+          <a:solidFill>
+            <a:srgbClr val="E69F00"/>
+          </a:solidFill>
+          <a:ln>
+            <a:noFill/>
+          </a:ln>
+          <a:effectLst/>
+        </p:spPr>
+        <p:style>
+          <a:lnRef idx="1">
+            <a:schemeClr val="accent1"/>
+          </a:lnRef>
+          <a:fillRef idx="3">
+            <a:schemeClr val="accent1"/>
+          </a:fillRef>
+          <a:effectRef idx="2">
+            <a:schemeClr val="accent1"/>
+          </a:effectRef>
+          <a:fontRef idx="minor">
+            <a:schemeClr val="lt1"/>
+          </a:fontRef>
+        </p:style>
+        <p:txBody>
+          <a:bodyPr rtlCol="0" anchor="ctr"/>
+          <a:lstStyle/>
+          <a:p>
+            <a:pPr algn="ctr"/>
+          </a:p>
+        </p:txBody>
+      </p:sp>
+      <p:sp>
+        <p:nvSpPr>
+          <p:cNvPr id="4" name="TextBox 3"/>
+          <p:cNvSpPr txBox="1"/>
+          <p:nvPr/>
+        </p:nvSpPr>
+        <p:spPr>
+          <a:xfrm>
+            <a:off x="548640" y="411480"/>
+            <a:ext cx="2286000" cy="411480"/>
+          </a:xfrm>
+          <a:prstGeom prst="rect">
+            <a:avLst/>
+          </a:prstGeom>
+          <a:noFill/>
+        </p:spPr>
+        <p:txBody>
+          <a:bodyPr wrap="square" lIns="0" rIns="0" tIns="0" bIns="0" anchor="ctr">
+            <a:spAutoFit/>
+          </a:bodyPr>
+          <a:lstStyle/>
+          <a:p>
+            <a:pPr algn="ctr"/>
+            <a:r>
+              <a:rPr sz="1100" b="1" i="0">
+                <a:solidFill>
+                  <a:srgbClr val="FFFFFF"/>
+                </a:solidFill>
+                <a:latin typeface="Calibri"/>
+              </a:rPr>
+              <a:t>HEURISTIC</a:t>
+            </a:r>
+          </a:p>
+        </p:txBody>
+      </p:sp>
+      <p:sp>
+        <p:nvSpPr>
+          <p:cNvPr id="5" name="TextBox 4"/>
+          <p:cNvSpPr txBox="1"/>
+          <p:nvPr/>
+        </p:nvSpPr>
+        <p:spPr>
+          <a:xfrm>
+            <a:off x="3017520" y="411480"/>
+            <a:ext cx="8686800" cy="457200"/>
+          </a:xfrm>
+          <a:prstGeom prst="rect">
+            <a:avLst/>
+          </a:prstGeom>
+          <a:noFill/>
+        </p:spPr>
+        <p:txBody>
+          <a:bodyPr wrap="square" lIns="0" rIns="0" tIns="0" bIns="0" anchor="ctr">
+            <a:spAutoFit/>
+          </a:bodyPr>
+          <a:lstStyle/>
+          <a:p>
+            <a:pPr algn="l"/>
+            <a:r>
+              <a:rPr sz="2200" b="1" i="0">
+                <a:solidFill>
+                  <a:srgbClr val="1E3A8A"/>
+                </a:solidFill>
+                <a:latin typeface="Calibri"/>
+              </a:rPr>
+              <a:t>evict_oldest</a:t>
+            </a:r>
+          </a:p>
+        </p:txBody>
+      </p:sp>
+      <p:sp>
+        <p:nvSpPr>
+          <p:cNvPr id="6" name="Rectangle 5"/>
+          <p:cNvSpPr/>
+          <p:nvPr/>
+        </p:nvSpPr>
+        <p:spPr>
+          <a:xfrm>
+            <a:off x="548640" y="960120"/>
+            <a:ext cx="8229600" cy="548640"/>
+          </a:xfrm>
+          <a:prstGeom prst="rect">
+            <a:avLst/>
+          </a:prstGeom>
+          <a:solidFill>
+            <a:srgbClr val="E69F00"/>
+          </a:solidFill>
+          <a:ln>
+            <a:noFill/>
+          </a:ln>
+          <a:effectLst/>
+        </p:spPr>
+        <p:style>
+          <a:lnRef idx="1">
+            <a:schemeClr val="accent1"/>
+          </a:lnRef>
+          <a:fillRef idx="3">
+            <a:schemeClr val="accent1"/>
+          </a:fillRef>
+          <a:effectRef idx="2">
+            <a:schemeClr val="accent1"/>
+          </a:effectRef>
+          <a:fontRef idx="minor">
+            <a:schemeClr val="lt1"/>
+          </a:fontRef>
+        </p:style>
+        <p:txBody>
+          <a:bodyPr rtlCol="0" anchor="ctr"/>
+          <a:lstStyle/>
+          <a:p>
+            <a:pPr algn="ctr"/>
+          </a:p>
+        </p:txBody>
+      </p:sp>
+      <p:sp>
+        <p:nvSpPr>
+          <p:cNvPr id="7" name="TextBox 6"/>
+          <p:cNvSpPr txBox="1"/>
+          <p:nvPr/>
+        </p:nvSpPr>
+        <p:spPr>
+          <a:xfrm>
+            <a:off x="777240" y="960120"/>
+            <a:ext cx="7863840" cy="548640"/>
+          </a:xfrm>
+          <a:prstGeom prst="rect">
+            <a:avLst/>
+          </a:prstGeom>
+          <a:noFill/>
+        </p:spPr>
+        <p:txBody>
+          <a:bodyPr wrap="square" lIns="0" rIns="0" tIns="0" bIns="0" anchor="ctr">
+            <a:spAutoFit/>
+          </a:bodyPr>
+          <a:lstStyle/>
+          <a:p>
+            <a:pPr algn="l"/>
+            <a:r>
+              <a:rPr sz="1400" b="1" i="0">
+                <a:solidFill>
+                  <a:srgbClr val="FFFFFF"/>
+                </a:solidFill>
+                <a:latin typeface="Calibri"/>
+              </a:rPr>
+              <a:t>FIFO baseline — drops irreplaceable old context too</a:t>
+            </a:r>
+          </a:p>
+        </p:txBody>
+      </p:sp>
+      <p:sp>
+        <p:nvSpPr>
+          <p:cNvPr id="8" name="Rectangle 7"/>
+          <p:cNvSpPr/>
+          <p:nvPr/>
+        </p:nvSpPr>
+        <p:spPr>
+          <a:xfrm>
+            <a:off x="8897112" y="960120"/>
+            <a:ext cx="2743200" cy="548640"/>
+          </a:xfrm>
+          <a:prstGeom prst="rect">
+            <a:avLst/>
+          </a:prstGeom>
+          <a:solidFill>
+            <a:srgbClr val="FFFFFF"/>
+          </a:solidFill>
+          <a:ln w="15875">
+            <a:solidFill>
+              <a:srgbClr val="E69F00"/>
+            </a:solidFill>
+          </a:ln>
+          <a:effectLst/>
+        </p:spPr>
+        <p:style>
+          <a:lnRef idx="1">
+            <a:schemeClr val="accent1"/>
+          </a:lnRef>
+          <a:fillRef idx="3">
+            <a:schemeClr val="accent1"/>
+          </a:fillRef>
+          <a:effectRef idx="2">
+            <a:schemeClr val="accent1"/>
+          </a:effectRef>
+          <a:fontRef idx="minor">
+            <a:schemeClr val="lt1"/>
+          </a:fontRef>
+        </p:style>
+        <p:txBody>
+          <a:bodyPr rtlCol="0" anchor="ctr"/>
+          <a:lstStyle/>
+          <a:p>
+            <a:pPr algn="ctr"/>
+          </a:p>
+        </p:txBody>
+      </p:sp>
+      <p:sp>
+        <p:nvSpPr>
+          <p:cNvPr id="9" name="TextBox 8"/>
+          <p:cNvSpPr txBox="1"/>
+          <p:nvPr/>
+        </p:nvSpPr>
+        <p:spPr>
+          <a:xfrm>
+            <a:off x="8988552" y="960120"/>
+            <a:ext cx="2606040" cy="548640"/>
+          </a:xfrm>
+          <a:prstGeom prst="rect">
+            <a:avLst/>
+          </a:prstGeom>
+          <a:noFill/>
+        </p:spPr>
+        <p:txBody>
+          <a:bodyPr wrap="square" lIns="0" rIns="0" tIns="0" bIns="0" anchor="ctr">
+            <a:spAutoFit/>
+          </a:bodyPr>
+          <a:lstStyle/>
+          <a:p>
+            <a:pPr algn="ctr"/>
+            <a:r>
+              <a:rPr sz="1000" b="1" i="0">
+                <a:solidFill>
+                  <a:srgbClr val="E69F00"/>
+                </a:solidFill>
+                <a:latin typeface="Calibri"/>
+              </a:rPr>
+              <a:t>6 trajectories  ·  Phase C</a:t>
+            </a:r>
+          </a:p>
+        </p:txBody>
+      </p:sp>
+      <p:pic>
+        <p:nvPicPr>
+          <p:cNvPr id="10" name="Picture 9" descr="method_06_evict_oldest.png"/>
+          <p:cNvPicPr>
+            <a:picLocks noChangeAspect="1"/>
+          </p:cNvPicPr>
+          <p:nvPr/>
+        </p:nvPicPr>
+        <p:blipFill>
+          <a:blip r:embed="rId2"/>
+          <a:stretch>
+            <a:fillRect/>
+          </a:stretch>
+        </p:blipFill>
+        <p:spPr>
+          <a:xfrm>
+            <a:off x="548640" y="1751494"/>
+            <a:ext cx="11091672" cy="4452290"/>
+          </a:xfrm>
+          <a:prstGeom prst="rect">
+            <a:avLst/>
+          </a:prstGeom>
+        </p:spPr>
+      </p:pic>
+      <p:sp>
+        <p:nvSpPr>
+          <p:cNvPr id="11" name="TextBox 10"/>
+          <p:cNvSpPr txBox="1"/>
+          <p:nvPr/>
+        </p:nvSpPr>
+        <p:spPr>
+          <a:xfrm>
+            <a:off x="457200" y="6492240"/>
+            <a:ext cx="7315200" cy="274320"/>
+          </a:xfrm>
+          <a:prstGeom prst="rect">
+            <a:avLst/>
+          </a:prstGeom>
+          <a:noFill/>
+        </p:spPr>
+        <p:txBody>
+          <a:bodyPr wrap="square" lIns="0" rIns="0" tIns="0" bIns="0">
+            <a:spAutoFit/>
+          </a:bodyPr>
+          <a:lstStyle/>
+          <a:p>
+            <a:pPr algn="l"/>
+            <a:r>
+              <a:rPr sz="1000" b="0" i="0">
+                <a:solidFill>
+                  <a:srgbClr val="6B7280"/>
+                </a:solidFill>
+                <a:latin typeface="Calibri"/>
+              </a:rPr>
+              <a:t>AdaptiveCache · Vlad Cainamisir · Harvard</a:t>
+            </a:r>
+          </a:p>
+        </p:txBody>
+      </p:sp>
+      <p:sp>
+        <p:nvSpPr>
+          <p:cNvPr id="12" name="TextBox 11"/>
+          <p:cNvSpPr txBox="1"/>
+          <p:nvPr/>
+        </p:nvSpPr>
+        <p:spPr>
+          <a:xfrm>
+            <a:off x="8534095" y="6492240"/>
+            <a:ext cx="3200400" cy="274320"/>
+          </a:xfrm>
+          <a:prstGeom prst="rect">
+            <a:avLst/>
+          </a:prstGeom>
+          <a:noFill/>
+        </p:spPr>
+        <p:txBody>
+          <a:bodyPr wrap="square" lIns="0" rIns="0" tIns="0" bIns="0">
+            <a:spAutoFit/>
+          </a:bodyPr>
+          <a:lstStyle/>
+          <a:p>
+            <a:pPr algn="r"/>
+            <a:r>
+              <a:rPr sz="1000" b="0" i="0">
+                <a:solidFill>
+                  <a:srgbClr val="6B7280"/>
+                </a:solidFill>
+                <a:latin typeface="Calibri"/>
+              </a:rPr>
+              <a:t>10 / 17</a:t>
+            </a:r>
+          </a:p>
+        </p:txBody>
+      </p:sp>
+    </p:spTree>
+  </p:cSld>
+  <p:clrMapOvr>
+    <a:masterClrMapping/>
+  </p:clrMapOvr>
+</p:sld>
+</file>
+
+<file path=ppt/slides/slide11.xml><?xml version="1.0" encoding="utf-8"?>
+<p:sld xmlns:a="http://schemas.openxmlformats.org/drawingml/2006/main" xmlns:p="http://schemas.openxmlformats.org/presentationml/2006/main" xmlns:r="http://schemas.openxmlformats.org/officeDocument/2006/relationships">
+  <p:cSld>
+    <p:spTree>
+      <p:nvGrpSpPr>
+        <p:cNvPr id="1" name=""/>
+        <p:cNvGrpSpPr/>
+        <p:nvPr/>
+      </p:nvGrpSpPr>
+      <p:grpSpPr/>
+      <p:sp>
+        <p:nvSpPr>
+          <p:cNvPr id="2" name="Rectangle 1"/>
+          <p:cNvSpPr/>
+          <p:nvPr/>
+        </p:nvSpPr>
+        <p:spPr>
+          <a:xfrm>
+            <a:off x="0" y="0"/>
+            <a:ext cx="12191695" cy="6858000"/>
+          </a:xfrm>
+          <a:prstGeom prst="rect">
+            <a:avLst/>
+          </a:prstGeom>
+          <a:solidFill>
+            <a:srgbClr val="F8F6F0"/>
+          </a:solidFill>
+          <a:ln>
+            <a:noFill/>
+          </a:ln>
+          <a:effectLst/>
+        </p:spPr>
+        <p:style>
+          <a:lnRef idx="1">
+            <a:schemeClr val="accent1"/>
+          </a:lnRef>
+          <a:fillRef idx="3">
+            <a:schemeClr val="accent1"/>
+          </a:fillRef>
+          <a:effectRef idx="2">
+            <a:schemeClr val="accent1"/>
+          </a:effectRef>
+          <a:fontRef idx="minor">
+            <a:schemeClr val="lt1"/>
+          </a:fontRef>
+        </p:style>
+        <p:txBody>
+          <a:bodyPr rtlCol="0" anchor="ctr"/>
+          <a:lstStyle/>
+          <a:p>
+            <a:pPr algn="ctr"/>
+          </a:p>
+        </p:txBody>
+      </p:sp>
+      <p:sp>
+        <p:nvSpPr>
+          <p:cNvPr id="3" name="Rounded Rectangle 2"/>
+          <p:cNvSpPr/>
+          <p:nvPr/>
+        </p:nvSpPr>
+        <p:spPr>
+          <a:xfrm>
+            <a:off x="548640" y="411480"/>
+            <a:ext cx="2286000" cy="411480"/>
+          </a:xfrm>
+          <a:prstGeom prst="roundRect">
+            <a:avLst/>
+          </a:prstGeom>
+          <a:solidFill>
+            <a:srgbClr val="E69F00"/>
+          </a:solidFill>
+          <a:ln>
+            <a:noFill/>
+          </a:ln>
+          <a:effectLst/>
+        </p:spPr>
+        <p:style>
+          <a:lnRef idx="1">
+            <a:schemeClr val="accent1"/>
+          </a:lnRef>
+          <a:fillRef idx="3">
+            <a:schemeClr val="accent1"/>
+          </a:fillRef>
+          <a:effectRef idx="2">
+            <a:schemeClr val="accent1"/>
+          </a:effectRef>
+          <a:fontRef idx="minor">
+            <a:schemeClr val="lt1"/>
+          </a:fontRef>
+        </p:style>
+        <p:txBody>
+          <a:bodyPr rtlCol="0" anchor="ctr"/>
+          <a:lstStyle/>
+          <a:p>
+            <a:pPr algn="ctr"/>
+          </a:p>
+        </p:txBody>
+      </p:sp>
+      <p:sp>
+        <p:nvSpPr>
+          <p:cNvPr id="4" name="TextBox 3"/>
+          <p:cNvSpPr txBox="1"/>
+          <p:nvPr/>
+        </p:nvSpPr>
+        <p:spPr>
+          <a:xfrm>
+            <a:off x="548640" y="411480"/>
+            <a:ext cx="2286000" cy="411480"/>
+          </a:xfrm>
+          <a:prstGeom prst="rect">
+            <a:avLst/>
+          </a:prstGeom>
+          <a:noFill/>
+        </p:spPr>
+        <p:txBody>
+          <a:bodyPr wrap="square" lIns="0" rIns="0" tIns="0" bIns="0" anchor="ctr">
+            <a:spAutoFit/>
+          </a:bodyPr>
+          <a:lstStyle/>
+          <a:p>
+            <a:pPr algn="ctr"/>
+            <a:r>
+              <a:rPr sz="1100" b="1" i="0">
+                <a:solidFill>
+                  <a:srgbClr val="FFFFFF"/>
+                </a:solidFill>
+                <a:latin typeface="Calibri"/>
+              </a:rPr>
+              <a:t>HEURISTIC</a:t>
+            </a:r>
+          </a:p>
+        </p:txBody>
+      </p:sp>
+      <p:sp>
+        <p:nvSpPr>
+          <p:cNvPr id="5" name="TextBox 4"/>
+          <p:cNvSpPr txBox="1"/>
+          <p:nvPr/>
+        </p:nvSpPr>
+        <p:spPr>
+          <a:xfrm>
+            <a:off x="3017520" y="411480"/>
+            <a:ext cx="8686800" cy="457200"/>
+          </a:xfrm>
+          <a:prstGeom prst="rect">
+            <a:avLst/>
+          </a:prstGeom>
+          <a:noFill/>
+        </p:spPr>
+        <p:txBody>
+          <a:bodyPr wrap="square" lIns="0" rIns="0" tIns="0" bIns="0" anchor="ctr">
+            <a:spAutoFit/>
+          </a:bodyPr>
+          <a:lstStyle/>
+          <a:p>
+            <a:pPr algn="l"/>
+            <a:r>
+              <a:rPr sz="2200" b="1" i="0">
+                <a:solidFill>
+                  <a:srgbClr val="1E3A8A"/>
+                </a:solidFill>
+                <a:latin typeface="Calibri"/>
+              </a:rPr>
+              <a:t>smart_evict</a:t>
+            </a:r>
+          </a:p>
+        </p:txBody>
+      </p:sp>
+      <p:sp>
+        <p:nvSpPr>
+          <p:cNvPr id="6" name="Rectangle 5"/>
+          <p:cNvSpPr/>
+          <p:nvPr/>
+        </p:nvSpPr>
+        <p:spPr>
+          <a:xfrm>
+            <a:off x="548640" y="960120"/>
+            <a:ext cx="8229600" cy="548640"/>
+          </a:xfrm>
+          <a:prstGeom prst="rect">
+            <a:avLst/>
+          </a:prstGeom>
+          <a:solidFill>
+            <a:srgbClr val="009E73"/>
+          </a:solidFill>
+          <a:ln>
+            <a:noFill/>
+          </a:ln>
+          <a:effectLst/>
+        </p:spPr>
+        <p:style>
+          <a:lnRef idx="1">
+            <a:schemeClr val="accent1"/>
+          </a:lnRef>
+          <a:fillRef idx="3">
+            <a:schemeClr val="accent1"/>
+          </a:fillRef>
+          <a:effectRef idx="2">
+            <a:schemeClr val="accent1"/>
+          </a:effectRef>
+          <a:fontRef idx="minor">
+            <a:schemeClr val="lt1"/>
+          </a:fontRef>
+        </p:style>
+        <p:txBody>
+          <a:bodyPr rtlCol="0" anchor="ctr"/>
+          <a:lstStyle/>
+          <a:p>
+            <a:pPr algn="ctr"/>
+          </a:p>
+        </p:txBody>
+      </p:sp>
+      <p:sp>
+        <p:nvSpPr>
+          <p:cNvPr id="7" name="TextBox 6"/>
+          <p:cNvSpPr txBox="1"/>
+          <p:nvPr/>
+        </p:nvSpPr>
+        <p:spPr>
+          <a:xfrm>
+            <a:off x="777240" y="960120"/>
+            <a:ext cx="7863840" cy="548640"/>
+          </a:xfrm>
+          <a:prstGeom prst="rect">
+            <a:avLst/>
+          </a:prstGeom>
+          <a:noFill/>
+        </p:spPr>
+        <p:txBody>
+          <a:bodyPr wrap="square" lIns="0" rIns="0" tIns="0" bIns="0" anchor="ctr">
+            <a:spAutoFit/>
+          </a:bodyPr>
+          <a:lstStyle/>
+          <a:p>
+            <a:pPr algn="l"/>
+            <a:r>
+              <a:rPr sz="1400" b="1" i="0">
+                <a:solidFill>
+                  <a:srgbClr val="FFFFFF"/>
+                </a:solidFill>
+                <a:latin typeface="Calibri"/>
+              </a:rPr>
+              <a:t>WINS on weak Qwen3 — prevents catastrophic OOC failures</a:t>
+            </a:r>
+          </a:p>
+        </p:txBody>
+      </p:sp>
+      <p:sp>
+        <p:nvSpPr>
+          <p:cNvPr id="8" name="Rectangle 7"/>
+          <p:cNvSpPr/>
+          <p:nvPr/>
+        </p:nvSpPr>
+        <p:spPr>
+          <a:xfrm>
+            <a:off x="8897112" y="960120"/>
+            <a:ext cx="2743200" cy="548640"/>
+          </a:xfrm>
+          <a:prstGeom prst="rect">
+            <a:avLst/>
+          </a:prstGeom>
+          <a:solidFill>
+            <a:srgbClr val="FFFFFF"/>
+          </a:solidFill>
+          <a:ln w="15875">
+            <a:solidFill>
+              <a:srgbClr val="009E73"/>
+            </a:solidFill>
+          </a:ln>
+          <a:effectLst/>
+        </p:spPr>
+        <p:style>
+          <a:lnRef idx="1">
+            <a:schemeClr val="accent1"/>
+          </a:lnRef>
+          <a:fillRef idx="3">
+            <a:schemeClr val="accent1"/>
+          </a:fillRef>
+          <a:effectRef idx="2">
+            <a:schemeClr val="accent1"/>
+          </a:effectRef>
+          <a:fontRef idx="minor">
+            <a:schemeClr val="lt1"/>
+          </a:fontRef>
+        </p:style>
+        <p:txBody>
+          <a:bodyPr rtlCol="0" anchor="ctr"/>
+          <a:lstStyle/>
+          <a:p>
+            <a:pPr algn="ctr"/>
+          </a:p>
+        </p:txBody>
+      </p:sp>
+      <p:sp>
+        <p:nvSpPr>
+          <p:cNvPr id="9" name="TextBox 8"/>
+          <p:cNvSpPr txBox="1"/>
+          <p:nvPr/>
+        </p:nvSpPr>
+        <p:spPr>
+          <a:xfrm>
+            <a:off x="8988552" y="960120"/>
+            <a:ext cx="2606040" cy="548640"/>
+          </a:xfrm>
+          <a:prstGeom prst="rect">
+            <a:avLst/>
+          </a:prstGeom>
+          <a:noFill/>
+        </p:spPr>
+        <p:txBody>
+          <a:bodyPr wrap="square" lIns="0" rIns="0" tIns="0" bIns="0" anchor="ctr">
+            <a:spAutoFit/>
+          </a:bodyPr>
+          <a:lstStyle/>
+          <a:p>
+            <a:pPr algn="ctr"/>
+            <a:r>
+              <a:rPr sz="1000" b="1" i="0">
+                <a:solidFill>
+                  <a:srgbClr val="009E73"/>
+                </a:solidFill>
+                <a:latin typeface="Calibri"/>
+              </a:rPr>
+              <a:t>59 trajectories  ·  14 phases</a:t>
+            </a:r>
+          </a:p>
+        </p:txBody>
+      </p:sp>
+      <p:pic>
+        <p:nvPicPr>
+          <p:cNvPr id="10" name="Picture 9" descr="method_07_smart_evict.png"/>
+          <p:cNvPicPr>
+            <a:picLocks noChangeAspect="1"/>
+          </p:cNvPicPr>
+          <p:nvPr/>
+        </p:nvPicPr>
+        <p:blipFill>
+          <a:blip r:embed="rId2"/>
+          <a:stretch>
+            <a:fillRect/>
+          </a:stretch>
+        </p:blipFill>
+        <p:spPr>
+          <a:xfrm>
+            <a:off x="548640" y="1835540"/>
+            <a:ext cx="11091672" cy="4284198"/>
+          </a:xfrm>
+          <a:prstGeom prst="rect">
+            <a:avLst/>
+          </a:prstGeom>
+        </p:spPr>
+      </p:pic>
+      <p:sp>
+        <p:nvSpPr>
+          <p:cNvPr id="11" name="TextBox 10"/>
+          <p:cNvSpPr txBox="1"/>
+          <p:nvPr/>
+        </p:nvSpPr>
+        <p:spPr>
+          <a:xfrm>
+            <a:off x="457200" y="6492240"/>
+            <a:ext cx="7315200" cy="274320"/>
+          </a:xfrm>
+          <a:prstGeom prst="rect">
+            <a:avLst/>
+          </a:prstGeom>
+          <a:noFill/>
+        </p:spPr>
+        <p:txBody>
+          <a:bodyPr wrap="square" lIns="0" rIns="0" tIns="0" bIns="0">
+            <a:spAutoFit/>
+          </a:bodyPr>
+          <a:lstStyle/>
+          <a:p>
+            <a:pPr algn="l"/>
+            <a:r>
+              <a:rPr sz="1000" b="0" i="0">
+                <a:solidFill>
+                  <a:srgbClr val="6B7280"/>
+                </a:solidFill>
+                <a:latin typeface="Calibri"/>
+              </a:rPr>
+              <a:t>AdaptiveCache · Vlad Cainamisir · Harvard</a:t>
+            </a:r>
+          </a:p>
+        </p:txBody>
+      </p:sp>
+      <p:sp>
+        <p:nvSpPr>
+          <p:cNvPr id="12" name="TextBox 11"/>
+          <p:cNvSpPr txBox="1"/>
+          <p:nvPr/>
+        </p:nvSpPr>
+        <p:spPr>
+          <a:xfrm>
+            <a:off x="8534095" y="6492240"/>
+            <a:ext cx="3200400" cy="274320"/>
+          </a:xfrm>
+          <a:prstGeom prst="rect">
+            <a:avLst/>
+          </a:prstGeom>
+          <a:noFill/>
+        </p:spPr>
+        <p:txBody>
+          <a:bodyPr wrap="square" lIns="0" rIns="0" tIns="0" bIns="0">
+            <a:spAutoFit/>
+          </a:bodyPr>
+          <a:lstStyle/>
+          <a:p>
+            <a:pPr algn="r"/>
+            <a:r>
+              <a:rPr sz="1000" b="0" i="0">
+                <a:solidFill>
+                  <a:srgbClr val="6B7280"/>
+                </a:solidFill>
+                <a:latin typeface="Calibri"/>
+              </a:rPr>
+              <a:t>11 / 17</a:t>
+            </a:r>
+          </a:p>
+        </p:txBody>
+      </p:sp>
+    </p:spTree>
+  </p:cSld>
+  <p:clrMapOvr>
+    <a:masterClrMapping/>
+  </p:clrMapOvr>
+</p:sld>
+</file>
+
+<file path=ppt/slides/slide12.xml><?xml version="1.0" encoding="utf-8"?>
+<p:sld xmlns:a="http://schemas.openxmlformats.org/drawingml/2006/main" xmlns:p="http://schemas.openxmlformats.org/presentationml/2006/main" xmlns:r="http://schemas.openxmlformats.org/officeDocument/2006/relationships">
+  <p:cSld>
+    <p:spTree>
+      <p:nvGrpSpPr>
+        <p:cNvPr id="1" name=""/>
+        <p:cNvGrpSpPr/>
+        <p:nvPr/>
+      </p:nvGrpSpPr>
+      <p:grpSpPr/>
+      <p:sp>
+        <p:nvSpPr>
+          <p:cNvPr id="2" name="Rectangle 1"/>
+          <p:cNvSpPr/>
+          <p:nvPr/>
+        </p:nvSpPr>
+        <p:spPr>
+          <a:xfrm>
+            <a:off x="0" y="0"/>
+            <a:ext cx="12191695" cy="6858000"/>
+          </a:xfrm>
+          <a:prstGeom prst="rect">
+            <a:avLst/>
+          </a:prstGeom>
+          <a:solidFill>
+            <a:srgbClr val="F8F6F0"/>
+          </a:solidFill>
+          <a:ln>
+            <a:noFill/>
+          </a:ln>
+          <a:effectLst/>
+        </p:spPr>
+        <p:style>
+          <a:lnRef idx="1">
+            <a:schemeClr val="accent1"/>
+          </a:lnRef>
+          <a:fillRef idx="3">
+            <a:schemeClr val="accent1"/>
+          </a:fillRef>
+          <a:effectRef idx="2">
+            <a:schemeClr val="accent1"/>
+          </a:effectRef>
+          <a:fontRef idx="minor">
+            <a:schemeClr val="lt1"/>
+          </a:fontRef>
+        </p:style>
+        <p:txBody>
+          <a:bodyPr rtlCol="0" anchor="ctr"/>
+          <a:lstStyle/>
+          <a:p>
+            <a:pPr algn="ctr"/>
+          </a:p>
+        </p:txBody>
+      </p:sp>
+      <p:sp>
+        <p:nvSpPr>
+          <p:cNvPr id="3" name="Rounded Rectangle 2"/>
+          <p:cNvSpPr/>
+          <p:nvPr/>
+        </p:nvSpPr>
+        <p:spPr>
+          <a:xfrm>
+            <a:off x="548640" y="411480"/>
+            <a:ext cx="2286000" cy="411480"/>
+          </a:xfrm>
+          <a:prstGeom prst="roundRect">
+            <a:avLst/>
+          </a:prstGeom>
+          <a:solidFill>
+            <a:srgbClr val="CC79A7"/>
+          </a:solidFill>
+          <a:ln>
+            <a:noFill/>
+          </a:ln>
+          <a:effectLst/>
+        </p:spPr>
+        <p:style>
+          <a:lnRef idx="1">
+            <a:schemeClr val="accent1"/>
+          </a:lnRef>
+          <a:fillRef idx="3">
+            <a:schemeClr val="accent1"/>
+          </a:fillRef>
+          <a:effectRef idx="2">
+            <a:schemeClr val="accent1"/>
+          </a:effectRef>
+          <a:fontRef idx="minor">
+            <a:schemeClr val="lt1"/>
+          </a:fontRef>
+        </p:style>
+        <p:txBody>
+          <a:bodyPr rtlCol="0" anchor="ctr"/>
+          <a:lstStyle/>
+          <a:p>
+            <a:pPr algn="ctr"/>
+          </a:p>
+        </p:txBody>
+      </p:sp>
+      <p:sp>
+        <p:nvSpPr>
+          <p:cNvPr id="4" name="TextBox 3"/>
+          <p:cNvSpPr txBox="1"/>
+          <p:nvPr/>
+        </p:nvSpPr>
+        <p:spPr>
+          <a:xfrm>
+            <a:off x="548640" y="411480"/>
+            <a:ext cx="2286000" cy="411480"/>
+          </a:xfrm>
+          <a:prstGeom prst="rect">
+            <a:avLst/>
+          </a:prstGeom>
+          <a:noFill/>
+        </p:spPr>
+        <p:txBody>
+          <a:bodyPr wrap="square" lIns="0" rIns="0" tIns="0" bIns="0" anchor="ctr">
+            <a:spAutoFit/>
+          </a:bodyPr>
+          <a:lstStyle/>
+          <a:p>
+            <a:pPr algn="ctr"/>
+            <a:r>
+              <a:rPr sz="1100" b="1" i="0">
+                <a:solidFill>
+                  <a:srgbClr val="FFFFFF"/>
+                </a:solidFill>
+                <a:latin typeface="Calibri"/>
+              </a:rPr>
+              <a:t>LLM-SCORED</a:t>
+            </a:r>
+          </a:p>
+        </p:txBody>
+      </p:sp>
+      <p:sp>
+        <p:nvSpPr>
+          <p:cNvPr id="5" name="TextBox 4"/>
+          <p:cNvSpPr txBox="1"/>
+          <p:nvPr/>
+        </p:nvSpPr>
+        <p:spPr>
+          <a:xfrm>
+            <a:off x="3017520" y="411480"/>
+            <a:ext cx="8686800" cy="457200"/>
+          </a:xfrm>
+          <a:prstGeom prst="rect">
+            <a:avLst/>
+          </a:prstGeom>
+          <a:noFill/>
+        </p:spPr>
+        <p:txBody>
+          <a:bodyPr wrap="square" lIns="0" rIns="0" tIns="0" bIns="0" anchor="ctr">
+            <a:spAutoFit/>
+          </a:bodyPr>
+          <a:lstStyle/>
+          <a:p>
+            <a:pPr algn="l"/>
+            <a:r>
+              <a:rPr sz="2200" b="1" i="0">
+                <a:solidFill>
+                  <a:srgbClr val="1E3A8A"/>
+                </a:solidFill>
+                <a:latin typeface="Calibri"/>
+              </a:rPr>
+              <a:t>score_periodic</a:t>
+            </a:r>
+          </a:p>
+        </p:txBody>
+      </p:sp>
+      <p:sp>
+        <p:nvSpPr>
+          <p:cNvPr id="6" name="Rectangle 5"/>
+          <p:cNvSpPr/>
+          <p:nvPr/>
+        </p:nvSpPr>
+        <p:spPr>
+          <a:xfrm>
+            <a:off x="548640" y="960120"/>
+            <a:ext cx="8229600" cy="548640"/>
+          </a:xfrm>
+          <a:prstGeom prst="rect">
+            <a:avLst/>
+          </a:prstGeom>
+          <a:solidFill>
+            <a:srgbClr val="E69F00"/>
+          </a:solidFill>
+          <a:ln>
+            <a:noFill/>
+          </a:ln>
+          <a:effectLst/>
+        </p:spPr>
+        <p:style>
+          <a:lnRef idx="1">
+            <a:schemeClr val="accent1"/>
+          </a:lnRef>
+          <a:fillRef idx="3">
+            <a:schemeClr val="accent1"/>
+          </a:fillRef>
+          <a:effectRef idx="2">
+            <a:schemeClr val="accent1"/>
+          </a:effectRef>
+          <a:fontRef idx="minor">
+            <a:schemeClr val="lt1"/>
+          </a:fontRef>
+        </p:style>
+        <p:txBody>
+          <a:bodyPr rtlCol="0" anchor="ctr"/>
+          <a:lstStyle/>
+          <a:p>
+            <a:pPr algn="ctr"/>
+          </a:p>
+        </p:txBody>
+      </p:sp>
+      <p:sp>
+        <p:nvSpPr>
+          <p:cNvPr id="7" name="TextBox 6"/>
+          <p:cNvSpPr txBox="1"/>
+          <p:nvPr/>
+        </p:nvSpPr>
+        <p:spPr>
+          <a:xfrm>
+            <a:off x="777240" y="960120"/>
+            <a:ext cx="7863840" cy="548640"/>
+          </a:xfrm>
+          <a:prstGeom prst="rect">
+            <a:avLst/>
+          </a:prstGeom>
+          <a:noFill/>
+        </p:spPr>
+        <p:txBody>
+          <a:bodyPr wrap="square" lIns="0" rIns="0" tIns="0" bIns="0" anchor="ctr">
+            <a:spAutoFit/>
+          </a:bodyPr>
+          <a:lstStyle/>
+          <a:p>
+            <a:pPr algn="l"/>
+            <a:r>
+              <a:rPr sz="1400" b="1" i="0">
+                <a:solidFill>
+                  <a:srgbClr val="FFFFFF"/>
+                </a:solidFill>
+                <a:latin typeface="Calibri"/>
+              </a:rPr>
+              <a:t>LLM scorer overhead exceeds bytes saved</a:t>
+            </a:r>
+          </a:p>
+        </p:txBody>
+      </p:sp>
+      <p:sp>
+        <p:nvSpPr>
+          <p:cNvPr id="8" name="Rectangle 7"/>
+          <p:cNvSpPr/>
+          <p:nvPr/>
+        </p:nvSpPr>
+        <p:spPr>
+          <a:xfrm>
+            <a:off x="8897112" y="960120"/>
+            <a:ext cx="2743200" cy="548640"/>
+          </a:xfrm>
+          <a:prstGeom prst="rect">
+            <a:avLst/>
+          </a:prstGeom>
+          <a:solidFill>
+            <a:srgbClr val="FFFFFF"/>
+          </a:solidFill>
+          <a:ln w="15875">
+            <a:solidFill>
+              <a:srgbClr val="E69F00"/>
+            </a:solidFill>
+          </a:ln>
+          <a:effectLst/>
+        </p:spPr>
+        <p:style>
+          <a:lnRef idx="1">
+            <a:schemeClr val="accent1"/>
+          </a:lnRef>
+          <a:fillRef idx="3">
+            <a:schemeClr val="accent1"/>
+          </a:fillRef>
+          <a:effectRef idx="2">
+            <a:schemeClr val="accent1"/>
+          </a:effectRef>
+          <a:fontRef idx="minor">
+            <a:schemeClr val="lt1"/>
+          </a:fontRef>
+        </p:style>
+        <p:txBody>
+          <a:bodyPr rtlCol="0" anchor="ctr"/>
+          <a:lstStyle/>
+          <a:p>
+            <a:pPr algn="ctr"/>
+          </a:p>
+        </p:txBody>
+      </p:sp>
+      <p:sp>
+        <p:nvSpPr>
+          <p:cNvPr id="9" name="TextBox 8"/>
+          <p:cNvSpPr txBox="1"/>
+          <p:nvPr/>
+        </p:nvSpPr>
+        <p:spPr>
+          <a:xfrm>
+            <a:off x="8988552" y="960120"/>
+            <a:ext cx="2606040" cy="548640"/>
+          </a:xfrm>
+          <a:prstGeom prst="rect">
+            <a:avLst/>
+          </a:prstGeom>
+          <a:noFill/>
+        </p:spPr>
+        <p:txBody>
+          <a:bodyPr wrap="square" lIns="0" rIns="0" tIns="0" bIns="0" anchor="ctr">
+            <a:spAutoFit/>
+          </a:bodyPr>
+          <a:lstStyle/>
+          <a:p>
+            <a:pPr algn="ctr"/>
+            <a:r>
+              <a:rPr sz="1000" b="1" i="0">
+                <a:solidFill>
+                  <a:srgbClr val="E69F00"/>
+                </a:solidFill>
+                <a:latin typeface="Calibri"/>
+              </a:rPr>
+              <a:t>limited tests  ·  Phase C v8</a:t>
+            </a:r>
+          </a:p>
+        </p:txBody>
+      </p:sp>
+      <p:pic>
+        <p:nvPicPr>
+          <p:cNvPr id="10" name="Picture 9" descr="method_08_score_periodic.png"/>
+          <p:cNvPicPr>
+            <a:picLocks noChangeAspect="1"/>
+          </p:cNvPicPr>
+          <p:nvPr/>
+        </p:nvPicPr>
+        <p:blipFill>
+          <a:blip r:embed="rId2"/>
+          <a:stretch>
+            <a:fillRect/>
+          </a:stretch>
+        </p:blipFill>
+        <p:spPr>
+          <a:xfrm>
+            <a:off x="548640" y="1751494"/>
+            <a:ext cx="11091672" cy="4452290"/>
+          </a:xfrm>
+          <a:prstGeom prst="rect">
+            <a:avLst/>
+          </a:prstGeom>
+        </p:spPr>
+      </p:pic>
+      <p:sp>
+        <p:nvSpPr>
+          <p:cNvPr id="11" name="TextBox 10"/>
+          <p:cNvSpPr txBox="1"/>
+          <p:nvPr/>
+        </p:nvSpPr>
+        <p:spPr>
+          <a:xfrm>
+            <a:off x="457200" y="6492240"/>
+            <a:ext cx="7315200" cy="274320"/>
+          </a:xfrm>
+          <a:prstGeom prst="rect">
+            <a:avLst/>
+          </a:prstGeom>
+          <a:noFill/>
+        </p:spPr>
+        <p:txBody>
+          <a:bodyPr wrap="square" lIns="0" rIns="0" tIns="0" bIns="0">
+            <a:spAutoFit/>
+          </a:bodyPr>
+          <a:lstStyle/>
+          <a:p>
+            <a:pPr algn="l"/>
+            <a:r>
+              <a:rPr sz="1000" b="0" i="0">
+                <a:solidFill>
+                  <a:srgbClr val="6B7280"/>
+                </a:solidFill>
+                <a:latin typeface="Calibri"/>
+              </a:rPr>
+              <a:t>AdaptiveCache · Vlad Cainamisir · Harvard</a:t>
+            </a:r>
+          </a:p>
+        </p:txBody>
+      </p:sp>
+      <p:sp>
+        <p:nvSpPr>
+          <p:cNvPr id="12" name="TextBox 11"/>
+          <p:cNvSpPr txBox="1"/>
+          <p:nvPr/>
+        </p:nvSpPr>
+        <p:spPr>
+          <a:xfrm>
+            <a:off x="8534095" y="6492240"/>
+            <a:ext cx="3200400" cy="274320"/>
+          </a:xfrm>
+          <a:prstGeom prst="rect">
+            <a:avLst/>
+          </a:prstGeom>
+          <a:noFill/>
+        </p:spPr>
+        <p:txBody>
+          <a:bodyPr wrap="square" lIns="0" rIns="0" tIns="0" bIns="0">
+            <a:spAutoFit/>
+          </a:bodyPr>
+          <a:lstStyle/>
+          <a:p>
+            <a:pPr algn="r"/>
+            <a:r>
+              <a:rPr sz="1000" b="0" i="0">
+                <a:solidFill>
+                  <a:srgbClr val="6B7280"/>
+                </a:solidFill>
+                <a:latin typeface="Calibri"/>
+              </a:rPr>
+              <a:t>12 / 17</a:t>
+            </a:r>
+          </a:p>
+        </p:txBody>
+      </p:sp>
+    </p:spTree>
+  </p:cSld>
+  <p:clrMapOvr>
+    <a:masterClrMapping/>
+  </p:clrMapOvr>
+</p:sld>
+</file>
+
+<file path=ppt/slides/slide13.xml><?xml version="1.0" encoding="utf-8"?>
+<p:sld xmlns:a="http://schemas.openxmlformats.org/drawingml/2006/main" xmlns:p="http://schemas.openxmlformats.org/presentationml/2006/main" xmlns:r="http://schemas.openxmlformats.org/officeDocument/2006/relationships">
+  <p:cSld>
+    <p:spTree>
+      <p:nvGrpSpPr>
+        <p:cNvPr id="1" name=""/>
+        <p:cNvGrpSpPr/>
+        <p:nvPr/>
+      </p:nvGrpSpPr>
+      <p:grpSpPr/>
+      <p:sp>
+        <p:nvSpPr>
+          <p:cNvPr id="2" name="Rectangle 1"/>
+          <p:cNvSpPr/>
+          <p:nvPr/>
+        </p:nvSpPr>
+        <p:spPr>
+          <a:xfrm>
+            <a:off x="0" y="0"/>
+            <a:ext cx="12191695" cy="6858000"/>
+          </a:xfrm>
+          <a:prstGeom prst="rect">
+            <a:avLst/>
+          </a:prstGeom>
+          <a:solidFill>
+            <a:srgbClr val="F8F6F0"/>
+          </a:solidFill>
+          <a:ln>
+            <a:noFill/>
+          </a:ln>
+          <a:effectLst/>
+        </p:spPr>
+        <p:style>
+          <a:lnRef idx="1">
+            <a:schemeClr val="accent1"/>
+          </a:lnRef>
+          <a:fillRef idx="3">
+            <a:schemeClr val="accent1"/>
+          </a:fillRef>
+          <a:effectRef idx="2">
+            <a:schemeClr val="accent1"/>
+          </a:effectRef>
+          <a:fontRef idx="minor">
+            <a:schemeClr val="lt1"/>
+          </a:fontRef>
+        </p:style>
+        <p:txBody>
+          <a:bodyPr rtlCol="0" anchor="ctr"/>
+          <a:lstStyle/>
+          <a:p>
+            <a:pPr algn="ctr"/>
+          </a:p>
+        </p:txBody>
+      </p:sp>
+      <p:sp>
+        <p:nvSpPr>
+          <p:cNvPr id="3" name="Rounded Rectangle 2"/>
+          <p:cNvSpPr/>
+          <p:nvPr/>
+        </p:nvSpPr>
+        <p:spPr>
+          <a:xfrm>
+            <a:off x="548640" y="411480"/>
+            <a:ext cx="2286000" cy="411480"/>
+          </a:xfrm>
+          <a:prstGeom prst="roundRect">
+            <a:avLst/>
+          </a:prstGeom>
+          <a:solidFill>
+            <a:srgbClr val="CC79A7"/>
+          </a:solidFill>
+          <a:ln>
+            <a:noFill/>
+          </a:ln>
+          <a:effectLst/>
+        </p:spPr>
+        <p:style>
+          <a:lnRef idx="1">
+            <a:schemeClr val="accent1"/>
+          </a:lnRef>
+          <a:fillRef idx="3">
+            <a:schemeClr val="accent1"/>
+          </a:fillRef>
+          <a:effectRef idx="2">
+            <a:schemeClr val="accent1"/>
+          </a:effectRef>
+          <a:fontRef idx="minor">
+            <a:schemeClr val="lt1"/>
+          </a:fontRef>
+        </p:style>
+        <p:txBody>
+          <a:bodyPr rtlCol="0" anchor="ctr"/>
+          <a:lstStyle/>
+          <a:p>
+            <a:pPr algn="ctr"/>
+          </a:p>
+        </p:txBody>
+      </p:sp>
+      <p:sp>
+        <p:nvSpPr>
+          <p:cNvPr id="4" name="TextBox 3"/>
+          <p:cNvSpPr txBox="1"/>
+          <p:nvPr/>
+        </p:nvSpPr>
+        <p:spPr>
+          <a:xfrm>
+            <a:off x="548640" y="411480"/>
+            <a:ext cx="2286000" cy="411480"/>
+          </a:xfrm>
+          <a:prstGeom prst="rect">
+            <a:avLst/>
+          </a:prstGeom>
+          <a:noFill/>
+        </p:spPr>
+        <p:txBody>
+          <a:bodyPr wrap="square" lIns="0" rIns="0" tIns="0" bIns="0" anchor="ctr">
+            <a:spAutoFit/>
+          </a:bodyPr>
+          <a:lstStyle/>
+          <a:p>
+            <a:pPr algn="ctr"/>
+            <a:r>
+              <a:rPr sz="1100" b="1" i="0">
+                <a:solidFill>
+                  <a:srgbClr val="FFFFFF"/>
+                </a:solidFill>
+                <a:latin typeface="Calibri"/>
+              </a:rPr>
+              <a:t>LLM-SCORED</a:t>
+            </a:r>
+          </a:p>
+        </p:txBody>
+      </p:sp>
+      <p:sp>
+        <p:nvSpPr>
+          <p:cNvPr id="5" name="TextBox 4"/>
+          <p:cNvSpPr txBox="1"/>
+          <p:nvPr/>
+        </p:nvSpPr>
+        <p:spPr>
+          <a:xfrm>
+            <a:off x="3017520" y="411480"/>
+            <a:ext cx="8686800" cy="457200"/>
+          </a:xfrm>
+          <a:prstGeom prst="rect">
+            <a:avLst/>
+          </a:prstGeom>
+          <a:noFill/>
+        </p:spPr>
+        <p:txBody>
+          <a:bodyPr wrap="square" lIns="0" rIns="0" tIns="0" bIns="0" anchor="ctr">
+            <a:spAutoFit/>
+          </a:bodyPr>
+          <a:lstStyle/>
+          <a:p>
+            <a:pPr algn="l"/>
+            <a:r>
+              <a:rPr sz="2200" b="1" i="0">
+                <a:solidFill>
+                  <a:srgbClr val="1E3A8A"/>
+                </a:solidFill>
+                <a:latin typeface="Calibri"/>
+              </a:rPr>
+              <a:t>llm_reorganizer</a:t>
+            </a:r>
+          </a:p>
+        </p:txBody>
+      </p:sp>
+      <p:sp>
+        <p:nvSpPr>
+          <p:cNvPr id="6" name="Rectangle 5"/>
+          <p:cNvSpPr/>
+          <p:nvPr/>
+        </p:nvSpPr>
+        <p:spPr>
+          <a:xfrm>
+            <a:off x="548640" y="960120"/>
+            <a:ext cx="8229600" cy="548640"/>
+          </a:xfrm>
+          <a:prstGeom prst="rect">
+            <a:avLst/>
+          </a:prstGeom>
+          <a:solidFill>
+            <a:srgbClr val="E69F00"/>
+          </a:solidFill>
+          <a:ln>
+            <a:noFill/>
+          </a:ln>
+          <a:effectLst/>
+        </p:spPr>
+        <p:style>
+          <a:lnRef idx="1">
+            <a:schemeClr val="accent1"/>
+          </a:lnRef>
+          <a:fillRef idx="3">
+            <a:schemeClr val="accent1"/>
+          </a:fillRef>
+          <a:effectRef idx="2">
+            <a:schemeClr val="accent1"/>
+          </a:effectRef>
+          <a:fontRef idx="minor">
+            <a:schemeClr val="lt1"/>
+          </a:fontRef>
+        </p:style>
+        <p:txBody>
+          <a:bodyPr rtlCol="0" anchor="ctr"/>
+          <a:lstStyle/>
+          <a:p>
+            <a:pPr algn="ctr"/>
+          </a:p>
+        </p:txBody>
+      </p:sp>
+      <p:sp>
+        <p:nvSpPr>
+          <p:cNvPr id="7" name="TextBox 6"/>
+          <p:cNvSpPr txBox="1"/>
+          <p:nvPr/>
+        </p:nvSpPr>
+        <p:spPr>
+          <a:xfrm>
+            <a:off x="777240" y="960120"/>
+            <a:ext cx="7863840" cy="548640"/>
+          </a:xfrm>
+          <a:prstGeom prst="rect">
+            <a:avLst/>
+          </a:prstGeom>
+          <a:noFill/>
+        </p:spPr>
+        <p:txBody>
+          <a:bodyPr wrap="square" lIns="0" rIns="0" tIns="0" bIns="0" anchor="ctr">
+            <a:spAutoFit/>
+          </a:bodyPr>
+          <a:lstStyle/>
+          <a:p>
+            <a:pPr algn="l"/>
+            <a:r>
+              <a:rPr sz="1400" b="1" i="0">
+                <a:solidFill>
+                  <a:srgbClr val="FFFFFF"/>
+                </a:solidFill>
+                <a:latin typeface="Calibri"/>
+              </a:rPr>
+              <a:t>Reorder + score — same overhead problem</a:t>
+            </a:r>
+          </a:p>
+        </p:txBody>
+      </p:sp>
+      <p:sp>
+        <p:nvSpPr>
+          <p:cNvPr id="8" name="Rectangle 7"/>
+          <p:cNvSpPr/>
+          <p:nvPr/>
+        </p:nvSpPr>
+        <p:spPr>
+          <a:xfrm>
+            <a:off x="8897112" y="960120"/>
+            <a:ext cx="2743200" cy="548640"/>
+          </a:xfrm>
+          <a:prstGeom prst="rect">
+            <a:avLst/>
+          </a:prstGeom>
+          <a:solidFill>
+            <a:srgbClr val="FFFFFF"/>
+          </a:solidFill>
+          <a:ln w="15875">
+            <a:solidFill>
+              <a:srgbClr val="E69F00"/>
+            </a:solidFill>
+          </a:ln>
+          <a:effectLst/>
+        </p:spPr>
+        <p:style>
+          <a:lnRef idx="1">
+            <a:schemeClr val="accent1"/>
+          </a:lnRef>
+          <a:fillRef idx="3">
+            <a:schemeClr val="accent1"/>
+          </a:fillRef>
+          <a:effectRef idx="2">
+            <a:schemeClr val="accent1"/>
+          </a:effectRef>
+          <a:fontRef idx="minor">
+            <a:schemeClr val="lt1"/>
+          </a:fontRef>
+        </p:style>
+        <p:txBody>
+          <a:bodyPr rtlCol="0" anchor="ctr"/>
+          <a:lstStyle/>
+          <a:p>
+            <a:pPr algn="ctr"/>
+          </a:p>
+        </p:txBody>
+      </p:sp>
+      <p:sp>
+        <p:nvSpPr>
+          <p:cNvPr id="9" name="TextBox 8"/>
+          <p:cNvSpPr txBox="1"/>
+          <p:nvPr/>
+        </p:nvSpPr>
+        <p:spPr>
+          <a:xfrm>
+            <a:off x="8988552" y="960120"/>
+            <a:ext cx="2606040" cy="548640"/>
+          </a:xfrm>
+          <a:prstGeom prst="rect">
+            <a:avLst/>
+          </a:prstGeom>
+          <a:noFill/>
+        </p:spPr>
+        <p:txBody>
+          <a:bodyPr wrap="square" lIns="0" rIns="0" tIns="0" bIns="0" anchor="ctr">
+            <a:spAutoFit/>
+          </a:bodyPr>
+          <a:lstStyle/>
+          <a:p>
+            <a:pPr algn="ctr"/>
+            <a:r>
+              <a:rPr sz="1000" b="1" i="0">
+                <a:solidFill>
+                  <a:srgbClr val="E69F00"/>
+                </a:solidFill>
+                <a:latin typeface="Calibri"/>
+              </a:rPr>
+              <a:t>30 trajectories  ·  9 phases</a:t>
+            </a:r>
+          </a:p>
+        </p:txBody>
+      </p:sp>
+      <p:pic>
+        <p:nvPicPr>
+          <p:cNvPr id="10" name="Picture 9" descr="method_09_llm_reorganizer.png"/>
+          <p:cNvPicPr>
+            <a:picLocks noChangeAspect="1"/>
+          </p:cNvPicPr>
+          <p:nvPr/>
+        </p:nvPicPr>
+        <p:blipFill>
+          <a:blip r:embed="rId2"/>
+          <a:stretch>
+            <a:fillRect/>
+          </a:stretch>
+        </p:blipFill>
+        <p:spPr>
+          <a:xfrm>
+            <a:off x="548640" y="1751494"/>
+            <a:ext cx="11091672" cy="4452290"/>
+          </a:xfrm>
+          <a:prstGeom prst="rect">
+            <a:avLst/>
+          </a:prstGeom>
+        </p:spPr>
+      </p:pic>
+      <p:sp>
+        <p:nvSpPr>
+          <p:cNvPr id="11" name="TextBox 10"/>
+          <p:cNvSpPr txBox="1"/>
+          <p:nvPr/>
+        </p:nvSpPr>
+        <p:spPr>
+          <a:xfrm>
+            <a:off x="457200" y="6492240"/>
+            <a:ext cx="7315200" cy="274320"/>
+          </a:xfrm>
+          <a:prstGeom prst="rect">
+            <a:avLst/>
+          </a:prstGeom>
+          <a:noFill/>
+        </p:spPr>
+        <p:txBody>
+          <a:bodyPr wrap="square" lIns="0" rIns="0" tIns="0" bIns="0">
+            <a:spAutoFit/>
+          </a:bodyPr>
+          <a:lstStyle/>
+          <a:p>
+            <a:pPr algn="l"/>
+            <a:r>
+              <a:rPr sz="1000" b="0" i="0">
+                <a:solidFill>
+                  <a:srgbClr val="6B7280"/>
+                </a:solidFill>
+                <a:latin typeface="Calibri"/>
+              </a:rPr>
+              <a:t>AdaptiveCache · Vlad Cainamisir · Harvard</a:t>
+            </a:r>
+          </a:p>
+        </p:txBody>
+      </p:sp>
+      <p:sp>
+        <p:nvSpPr>
+          <p:cNvPr id="12" name="TextBox 11"/>
+          <p:cNvSpPr txBox="1"/>
+          <p:nvPr/>
+        </p:nvSpPr>
+        <p:spPr>
+          <a:xfrm>
+            <a:off x="8534095" y="6492240"/>
+            <a:ext cx="3200400" cy="274320"/>
+          </a:xfrm>
+          <a:prstGeom prst="rect">
+            <a:avLst/>
+          </a:prstGeom>
+          <a:noFill/>
+        </p:spPr>
+        <p:txBody>
+          <a:bodyPr wrap="square" lIns="0" rIns="0" tIns="0" bIns="0">
+            <a:spAutoFit/>
+          </a:bodyPr>
+          <a:lstStyle/>
+          <a:p>
+            <a:pPr algn="r"/>
+            <a:r>
+              <a:rPr sz="1000" b="0" i="0">
+                <a:solidFill>
+                  <a:srgbClr val="6B7280"/>
+                </a:solidFill>
+                <a:latin typeface="Calibri"/>
+              </a:rPr>
+              <a:t>13 / 17</a:t>
+            </a:r>
+          </a:p>
+        </p:txBody>
+      </p:sp>
+    </p:spTree>
+  </p:cSld>
+  <p:clrMapOvr>
+    <a:masterClrMapping/>
+  </p:clrMapOvr>
+</p:sld>
+</file>
+
+<file path=ppt/slides/slide14.xml><?xml version="1.0" encoding="utf-8"?>
+<p:sld xmlns:a="http://schemas.openxmlformats.org/drawingml/2006/main" xmlns:p="http://schemas.openxmlformats.org/presentationml/2006/main" xmlns:r="http://schemas.openxmlformats.org/officeDocument/2006/relationships">
+  <p:cSld>
+    <p:spTree>
+      <p:nvGrpSpPr>
+        <p:cNvPr id="1" name=""/>
+        <p:cNvGrpSpPr/>
+        <p:nvPr/>
+      </p:nvGrpSpPr>
+      <p:grpSpPr/>
+      <p:sp>
+        <p:nvSpPr>
+          <p:cNvPr id="2" name="Rectangle 1"/>
+          <p:cNvSpPr/>
+          <p:nvPr/>
+        </p:nvSpPr>
+        <p:spPr>
+          <a:xfrm>
+            <a:off x="0" y="0"/>
+            <a:ext cx="12191695" cy="6858000"/>
+          </a:xfrm>
+          <a:prstGeom prst="rect">
+            <a:avLst/>
+          </a:prstGeom>
+          <a:solidFill>
+            <a:srgbClr val="F8F6F0"/>
+          </a:solidFill>
+          <a:ln>
+            <a:noFill/>
+          </a:ln>
+          <a:effectLst/>
+        </p:spPr>
+        <p:style>
+          <a:lnRef idx="1">
+            <a:schemeClr val="accent1"/>
+          </a:lnRef>
+          <a:fillRef idx="3">
+            <a:schemeClr val="accent1"/>
+          </a:fillRef>
+          <a:effectRef idx="2">
+            <a:schemeClr val="accent1"/>
+          </a:effectRef>
+          <a:fontRef idx="minor">
+            <a:schemeClr val="lt1"/>
+          </a:fontRef>
+        </p:style>
+        <p:txBody>
+          <a:bodyPr rtlCol="0" anchor="ctr"/>
+          <a:lstStyle/>
+          <a:p>
+            <a:pPr algn="ctr"/>
+          </a:p>
+        </p:txBody>
+      </p:sp>
+      <p:sp>
+        <p:nvSpPr>
+          <p:cNvPr id="3" name="Rounded Rectangle 2"/>
+          <p:cNvSpPr/>
+          <p:nvPr/>
+        </p:nvSpPr>
+        <p:spPr>
+          <a:xfrm>
+            <a:off x="548640" y="411480"/>
+            <a:ext cx="2286000" cy="411480"/>
+          </a:xfrm>
+          <a:prstGeom prst="roundRect">
+            <a:avLst/>
+          </a:prstGeom>
+          <a:solidFill>
+            <a:srgbClr val="0072B2"/>
+          </a:solidFill>
+          <a:ln>
+            <a:noFill/>
+          </a:ln>
+          <a:effectLst/>
+        </p:spPr>
+        <p:style>
+          <a:lnRef idx="1">
+            <a:schemeClr val="accent1"/>
+          </a:lnRef>
+          <a:fillRef idx="3">
+            <a:schemeClr val="accent1"/>
+          </a:fillRef>
+          <a:effectRef idx="2">
+            <a:schemeClr val="accent1"/>
+          </a:effectRef>
+          <a:fontRef idx="minor">
+            <a:schemeClr val="lt1"/>
+          </a:fontRef>
+        </p:style>
+        <p:txBody>
+          <a:bodyPr rtlCol="0" anchor="ctr"/>
+          <a:lstStyle/>
+          <a:p>
+            <a:pPr algn="ctr"/>
+          </a:p>
+        </p:txBody>
+      </p:sp>
+      <p:sp>
+        <p:nvSpPr>
+          <p:cNvPr id="4" name="TextBox 3"/>
+          <p:cNvSpPr txBox="1"/>
+          <p:nvPr/>
+        </p:nvSpPr>
+        <p:spPr>
+          <a:xfrm>
+            <a:off x="548640" y="411480"/>
+            <a:ext cx="2286000" cy="411480"/>
+          </a:xfrm>
+          <a:prstGeom prst="rect">
+            <a:avLst/>
+          </a:prstGeom>
+          <a:noFill/>
+        </p:spPr>
+        <p:txBody>
+          <a:bodyPr wrap="square" lIns="0" rIns="0" tIns="0" bIns="0" anchor="ctr">
+            <a:spAutoFit/>
+          </a:bodyPr>
+          <a:lstStyle/>
+          <a:p>
+            <a:pPr algn="ctr"/>
+            <a:r>
+              <a:rPr sz="1100" b="1" i="0">
+                <a:solidFill>
+                  <a:srgbClr val="FFFFFF"/>
+                </a:solidFill>
+                <a:latin typeface="Calibri"/>
+              </a:rPr>
+              <a:t>ACTION-GRAPH</a:t>
+            </a:r>
+          </a:p>
+        </p:txBody>
+      </p:sp>
+      <p:sp>
+        <p:nvSpPr>
+          <p:cNvPr id="5" name="TextBox 4"/>
+          <p:cNvSpPr txBox="1"/>
+          <p:nvPr/>
+        </p:nvSpPr>
+        <p:spPr>
+          <a:xfrm>
+            <a:off x="3017520" y="411480"/>
+            <a:ext cx="8686800" cy="457200"/>
+          </a:xfrm>
+          <a:prstGeom prst="rect">
+            <a:avLst/>
+          </a:prstGeom>
+          <a:noFill/>
+        </p:spPr>
+        <p:txBody>
+          <a:bodyPr wrap="square" lIns="0" rIns="0" tIns="0" bIns="0" anchor="ctr">
+            <a:spAutoFit/>
+          </a:bodyPr>
+          <a:lstStyle/>
+          <a:p>
+            <a:pPr algn="l"/>
+            <a:r>
+              <a:rPr sz="2200" b="1" i="0">
+                <a:solidFill>
+                  <a:srgbClr val="1E3A8A"/>
+                </a:solidFill>
+                <a:latin typeface="Calibri"/>
+              </a:rPr>
+              <a:t>consumption_evict_plain</a:t>
+            </a:r>
+          </a:p>
+        </p:txBody>
+      </p:sp>
+      <p:sp>
+        <p:nvSpPr>
+          <p:cNvPr id="6" name="Rectangle 5"/>
+          <p:cNvSpPr/>
+          <p:nvPr/>
+        </p:nvSpPr>
+        <p:spPr>
+          <a:xfrm>
+            <a:off x="548640" y="960120"/>
+            <a:ext cx="8229600" cy="548640"/>
+          </a:xfrm>
+          <a:prstGeom prst="rect">
+            <a:avLst/>
+          </a:prstGeom>
+          <a:solidFill>
+            <a:srgbClr val="009E73"/>
+          </a:solidFill>
+          <a:ln>
+            <a:noFill/>
+          </a:ln>
+          <a:effectLst/>
+        </p:spPr>
+        <p:style>
+          <a:lnRef idx="1">
+            <a:schemeClr val="accent1"/>
+          </a:lnRef>
+          <a:fillRef idx="3">
+            <a:schemeClr val="accent1"/>
+          </a:fillRef>
+          <a:effectRef idx="2">
+            <a:schemeClr val="accent1"/>
+          </a:effectRef>
+          <a:fontRef idx="minor">
+            <a:schemeClr val="lt1"/>
+          </a:fontRef>
+        </p:style>
+        <p:txBody>
+          <a:bodyPr rtlCol="0" anchor="ctr"/>
+          <a:lstStyle/>
+          <a:p>
+            <a:pPr algn="ctr"/>
+          </a:p>
+        </p:txBody>
+      </p:sp>
+      <p:sp>
+        <p:nvSpPr>
+          <p:cNvPr id="7" name="TextBox 6"/>
+          <p:cNvSpPr txBox="1"/>
+          <p:nvPr/>
+        </p:nvSpPr>
+        <p:spPr>
+          <a:xfrm>
+            <a:off x="777240" y="960120"/>
+            <a:ext cx="7863840" cy="548640"/>
+          </a:xfrm>
+          <a:prstGeom prst="rect">
+            <a:avLst/>
+          </a:prstGeom>
+          <a:noFill/>
+        </p:spPr>
+        <p:txBody>
+          <a:bodyPr wrap="square" lIns="0" rIns="0" tIns="0" bIns="0" anchor="ctr">
+            <a:spAutoFit/>
+          </a:bodyPr>
+          <a:lstStyle/>
+          <a:p>
+            <a:pPr algn="l"/>
+            <a:r>
+              <a:rPr sz="1400" b="1" i="0">
+                <a:solidFill>
+                  <a:srgbClr val="FFFFFF"/>
+                </a:solidFill>
+                <a:latin typeface="Calibri"/>
+              </a:rPr>
+              <a:t>WINS pytest-7490 in 4 edits  ·  ties on retail chain (5/10)</a:t>
+            </a:r>
+          </a:p>
+        </p:txBody>
+      </p:sp>
+      <p:sp>
+        <p:nvSpPr>
+          <p:cNvPr id="8" name="Rectangle 7"/>
+          <p:cNvSpPr/>
+          <p:nvPr/>
+        </p:nvSpPr>
+        <p:spPr>
+          <a:xfrm>
+            <a:off x="8897112" y="960120"/>
+            <a:ext cx="2743200" cy="548640"/>
+          </a:xfrm>
+          <a:prstGeom prst="rect">
+            <a:avLst/>
+          </a:prstGeom>
+          <a:solidFill>
+            <a:srgbClr val="FFFFFF"/>
+          </a:solidFill>
+          <a:ln w="15875">
+            <a:solidFill>
+              <a:srgbClr val="009E73"/>
+            </a:solidFill>
+          </a:ln>
+          <a:effectLst/>
+        </p:spPr>
+        <p:style>
+          <a:lnRef idx="1">
+            <a:schemeClr val="accent1"/>
+          </a:lnRef>
+          <a:fillRef idx="3">
+            <a:schemeClr val="accent1"/>
+          </a:fillRef>
+          <a:effectRef idx="2">
+            <a:schemeClr val="accent1"/>
+          </a:effectRef>
+          <a:fontRef idx="minor">
+            <a:schemeClr val="lt1"/>
+          </a:fontRef>
+        </p:style>
+        <p:txBody>
+          <a:bodyPr rtlCol="0" anchor="ctr"/>
+          <a:lstStyle/>
+          <a:p>
+            <a:pPr algn="ctr"/>
+          </a:p>
+        </p:txBody>
+      </p:sp>
+      <p:sp>
+        <p:nvSpPr>
+          <p:cNvPr id="9" name="TextBox 8"/>
+          <p:cNvSpPr txBox="1"/>
+          <p:nvPr/>
+        </p:nvSpPr>
+        <p:spPr>
+          <a:xfrm>
+            <a:off x="8988552" y="960120"/>
+            <a:ext cx="2606040" cy="548640"/>
+          </a:xfrm>
+          <a:prstGeom prst="rect">
+            <a:avLst/>
+          </a:prstGeom>
+          <a:noFill/>
+        </p:spPr>
+        <p:txBody>
+          <a:bodyPr wrap="square" lIns="0" rIns="0" tIns="0" bIns="0" anchor="ctr">
+            <a:spAutoFit/>
+          </a:bodyPr>
+          <a:lstStyle/>
+          <a:p>
+            <a:pPr algn="ctr"/>
+            <a:r>
+              <a:rPr sz="1000" b="1" i="0">
+                <a:solidFill>
+                  <a:srgbClr val="009E73"/>
+                </a:solidFill>
+                <a:latin typeface="Calibri"/>
+              </a:rPr>
+              <a:t>Phase D 2× + Phase E (10 customers)</a:t>
+            </a:r>
+          </a:p>
+        </p:txBody>
+      </p:sp>
+      <p:pic>
+        <p:nvPicPr>
+          <p:cNvPr id="10" name="Picture 9" descr="method_10_consumption_evict_plain.png"/>
+          <p:cNvPicPr>
+            <a:picLocks noChangeAspect="1"/>
+          </p:cNvPicPr>
+          <p:nvPr/>
+        </p:nvPicPr>
+        <p:blipFill>
+          <a:blip r:embed="rId2"/>
+          <a:stretch>
+            <a:fillRect/>
+          </a:stretch>
+        </p:blipFill>
+        <p:spPr>
+          <a:xfrm>
+            <a:off x="548640" y="2113454"/>
+            <a:ext cx="11091672" cy="3728371"/>
+          </a:xfrm>
+          <a:prstGeom prst="rect">
+            <a:avLst/>
+          </a:prstGeom>
+        </p:spPr>
+      </p:pic>
+      <p:sp>
+        <p:nvSpPr>
+          <p:cNvPr id="11" name="TextBox 10"/>
+          <p:cNvSpPr txBox="1"/>
+          <p:nvPr/>
+        </p:nvSpPr>
+        <p:spPr>
+          <a:xfrm>
+            <a:off x="457200" y="6492240"/>
+            <a:ext cx="7315200" cy="274320"/>
+          </a:xfrm>
+          <a:prstGeom prst="rect">
+            <a:avLst/>
+          </a:prstGeom>
+          <a:noFill/>
+        </p:spPr>
+        <p:txBody>
+          <a:bodyPr wrap="square" lIns="0" rIns="0" tIns="0" bIns="0">
+            <a:spAutoFit/>
+          </a:bodyPr>
+          <a:lstStyle/>
+          <a:p>
+            <a:pPr algn="l"/>
+            <a:r>
+              <a:rPr sz="1000" b="0" i="0">
+                <a:solidFill>
+                  <a:srgbClr val="6B7280"/>
+                </a:solidFill>
+                <a:latin typeface="Calibri"/>
+              </a:rPr>
+              <a:t>AdaptiveCache · Vlad Cainamisir · Harvard</a:t>
+            </a:r>
+          </a:p>
+        </p:txBody>
+      </p:sp>
+      <p:sp>
+        <p:nvSpPr>
+          <p:cNvPr id="12" name="TextBox 11"/>
+          <p:cNvSpPr txBox="1"/>
+          <p:nvPr/>
+        </p:nvSpPr>
+        <p:spPr>
+          <a:xfrm>
+            <a:off x="8534095" y="6492240"/>
+            <a:ext cx="3200400" cy="274320"/>
+          </a:xfrm>
+          <a:prstGeom prst="rect">
+            <a:avLst/>
+          </a:prstGeom>
+          <a:noFill/>
+        </p:spPr>
+        <p:txBody>
+          <a:bodyPr wrap="square" lIns="0" rIns="0" tIns="0" bIns="0">
+            <a:spAutoFit/>
+          </a:bodyPr>
+          <a:lstStyle/>
+          <a:p>
+            <a:pPr algn="r"/>
+            <a:r>
+              <a:rPr sz="1000" b="0" i="0">
+                <a:solidFill>
+                  <a:srgbClr val="6B7280"/>
+                </a:solidFill>
+                <a:latin typeface="Calibri"/>
+              </a:rPr>
+              <a:t>14 / 17</a:t>
+            </a:r>
+          </a:p>
+        </p:txBody>
+      </p:sp>
+    </p:spTree>
+  </p:cSld>
+  <p:clrMapOvr>
+    <a:masterClrMapping/>
+  </p:clrMapOvr>
+</p:sld>
+</file>
+
+<file path=ppt/slides/slide15.xml><?xml version="1.0" encoding="utf-8"?>
+<p:sld xmlns:a="http://schemas.openxmlformats.org/drawingml/2006/main" xmlns:p="http://schemas.openxmlformats.org/presentationml/2006/main" xmlns:r="http://schemas.openxmlformats.org/officeDocument/2006/relationships">
+  <p:cSld>
+    <p:spTree>
+      <p:nvGrpSpPr>
+        <p:cNvPr id="1" name=""/>
+        <p:cNvGrpSpPr/>
+        <p:nvPr/>
+      </p:nvGrpSpPr>
+      <p:grpSpPr/>
+      <p:sp>
+        <p:nvSpPr>
+          <p:cNvPr id="2" name="Rectangle 1"/>
+          <p:cNvSpPr/>
+          <p:nvPr/>
+        </p:nvSpPr>
+        <p:spPr>
+          <a:xfrm>
+            <a:off x="0" y="0"/>
+            <a:ext cx="12191695" cy="6858000"/>
+          </a:xfrm>
+          <a:prstGeom prst="rect">
+            <a:avLst/>
+          </a:prstGeom>
+          <a:solidFill>
+            <a:srgbClr val="F8F6F0"/>
+          </a:solidFill>
+          <a:ln>
+            <a:noFill/>
+          </a:ln>
+          <a:effectLst/>
+        </p:spPr>
+        <p:style>
+          <a:lnRef idx="1">
+            <a:schemeClr val="accent1"/>
+          </a:lnRef>
+          <a:fillRef idx="3">
+            <a:schemeClr val="accent1"/>
+          </a:fillRef>
+          <a:effectRef idx="2">
+            <a:schemeClr val="accent1"/>
+          </a:effectRef>
+          <a:fontRef idx="minor">
+            <a:schemeClr val="lt1"/>
+          </a:fontRef>
+        </p:style>
+        <p:txBody>
+          <a:bodyPr rtlCol="0" anchor="ctr"/>
+          <a:lstStyle/>
+          <a:p>
+            <a:pPr algn="ctr"/>
+          </a:p>
+        </p:txBody>
+      </p:sp>
+      <p:sp>
+        <p:nvSpPr>
+          <p:cNvPr id="3" name="Rounded Rectangle 2"/>
+          <p:cNvSpPr/>
+          <p:nvPr/>
+        </p:nvSpPr>
+        <p:spPr>
+          <a:xfrm>
+            <a:off x="548640" y="411480"/>
+            <a:ext cx="2286000" cy="411480"/>
+          </a:xfrm>
+          <a:prstGeom prst="roundRect">
+            <a:avLst/>
+          </a:prstGeom>
+          <a:solidFill>
+            <a:srgbClr val="0072B2"/>
+          </a:solidFill>
+          <a:ln>
+            <a:noFill/>
+          </a:ln>
+          <a:effectLst/>
+        </p:spPr>
+        <p:style>
+          <a:lnRef idx="1">
+            <a:schemeClr val="accent1"/>
+          </a:lnRef>
+          <a:fillRef idx="3">
+            <a:schemeClr val="accent1"/>
+          </a:fillRef>
+          <a:effectRef idx="2">
+            <a:schemeClr val="accent1"/>
+          </a:effectRef>
+          <a:fontRef idx="minor">
+            <a:schemeClr val="lt1"/>
+          </a:fontRef>
+        </p:style>
+        <p:txBody>
+          <a:bodyPr rtlCol="0" anchor="ctr"/>
+          <a:lstStyle/>
+          <a:p>
+            <a:pPr algn="ctr"/>
+          </a:p>
+        </p:txBody>
+      </p:sp>
+      <p:sp>
+        <p:nvSpPr>
+          <p:cNvPr id="4" name="TextBox 3"/>
+          <p:cNvSpPr txBox="1"/>
+          <p:nvPr/>
+        </p:nvSpPr>
+        <p:spPr>
+          <a:xfrm>
+            <a:off x="548640" y="411480"/>
+            <a:ext cx="2286000" cy="411480"/>
+          </a:xfrm>
+          <a:prstGeom prst="rect">
+            <a:avLst/>
+          </a:prstGeom>
+          <a:noFill/>
+        </p:spPr>
+        <p:txBody>
+          <a:bodyPr wrap="square" lIns="0" rIns="0" tIns="0" bIns="0" anchor="ctr">
+            <a:spAutoFit/>
+          </a:bodyPr>
+          <a:lstStyle/>
+          <a:p>
+            <a:pPr algn="ctr"/>
+            <a:r>
+              <a:rPr sz="1100" b="1" i="0">
+                <a:solidFill>
+                  <a:srgbClr val="FFFFFF"/>
+                </a:solidFill>
+                <a:latin typeface="Calibri"/>
+              </a:rPr>
+              <a:t>ACTION-GRAPH</a:t>
+            </a:r>
+          </a:p>
+        </p:txBody>
+      </p:sp>
+      <p:sp>
+        <p:nvSpPr>
+          <p:cNvPr id="5" name="TextBox 4"/>
+          <p:cNvSpPr txBox="1"/>
+          <p:nvPr/>
+        </p:nvSpPr>
+        <p:spPr>
+          <a:xfrm>
+            <a:off x="3017520" y="411480"/>
+            <a:ext cx="8686800" cy="457200"/>
+          </a:xfrm>
+          <a:prstGeom prst="rect">
+            <a:avLst/>
+          </a:prstGeom>
+          <a:noFill/>
+        </p:spPr>
+        <p:txBody>
+          <a:bodyPr wrap="square" lIns="0" rIns="0" tIns="0" bIns="0" anchor="ctr">
+            <a:spAutoFit/>
+          </a:bodyPr>
+          <a:lstStyle/>
+          <a:p>
+            <a:pPr algn="l"/>
+            <a:r>
+              <a:rPr sz="2200" b="1" i="0">
+                <a:solidFill>
+                  <a:srgbClr val="1E3A8A"/>
+                </a:solidFill>
+                <a:latin typeface="Calibri"/>
+              </a:rPr>
+              <a:t>consumption_evict_facts</a:t>
+            </a:r>
+          </a:p>
+        </p:txBody>
+      </p:sp>
+      <p:sp>
+        <p:nvSpPr>
+          <p:cNvPr id="6" name="Rectangle 5"/>
+          <p:cNvSpPr/>
+          <p:nvPr/>
+        </p:nvSpPr>
+        <p:spPr>
+          <a:xfrm>
+            <a:off x="548640" y="960120"/>
+            <a:ext cx="8229600" cy="548640"/>
+          </a:xfrm>
+          <a:prstGeom prst="rect">
+            <a:avLst/>
+          </a:prstGeom>
+          <a:solidFill>
+            <a:srgbClr val="E69F00"/>
+          </a:solidFill>
+          <a:ln>
+            <a:noFill/>
+          </a:ln>
+          <a:effectLst/>
+        </p:spPr>
+        <p:style>
+          <a:lnRef idx="1">
+            <a:schemeClr val="accent1"/>
+          </a:lnRef>
+          <a:fillRef idx="3">
+            <a:schemeClr val="accent1"/>
+          </a:fillRef>
+          <a:effectRef idx="2">
+            <a:schemeClr val="accent1"/>
+          </a:effectRef>
+          <a:fontRef idx="minor">
+            <a:schemeClr val="lt1"/>
+          </a:fontRef>
+        </p:style>
+        <p:txBody>
+          <a:bodyPr rtlCol="0" anchor="ctr"/>
+          <a:lstStyle/>
+          <a:p>
+            <a:pPr algn="ctr"/>
+          </a:p>
+        </p:txBody>
+      </p:sp>
+      <p:sp>
+        <p:nvSpPr>
+          <p:cNvPr id="7" name="TextBox 6"/>
+          <p:cNvSpPr txBox="1"/>
+          <p:nvPr/>
+        </p:nvSpPr>
+        <p:spPr>
+          <a:xfrm>
+            <a:off x="777240" y="960120"/>
+            <a:ext cx="7863840" cy="548640"/>
+          </a:xfrm>
+          <a:prstGeom prst="rect">
+            <a:avLst/>
+          </a:prstGeom>
+          <a:noFill/>
+        </p:spPr>
+        <p:txBody>
+          <a:bodyPr wrap="square" lIns="0" rIns="0" tIns="0" bIns="0" anchor="ctr">
+            <a:spAutoFit/>
+          </a:bodyPr>
+          <a:lstStyle/>
+          <a:p>
+            <a:pPr algn="l"/>
+            <a:r>
+              <a:rPr sz="1400" b="1" i="0">
+                <a:solidFill>
+                  <a:srgbClr val="FFFFFF"/>
+                </a:solidFill>
+                <a:latin typeface="Calibri"/>
+              </a:rPr>
+              <a:t>LOSES pytest-7490 — 18 edits, 0/2 success (mechanism finding)</a:t>
+            </a:r>
+          </a:p>
+        </p:txBody>
+      </p:sp>
+      <p:sp>
+        <p:nvSpPr>
+          <p:cNvPr id="8" name="Rectangle 7"/>
+          <p:cNvSpPr/>
+          <p:nvPr/>
+        </p:nvSpPr>
+        <p:spPr>
+          <a:xfrm>
+            <a:off x="8897112" y="960120"/>
+            <a:ext cx="2743200" cy="548640"/>
+          </a:xfrm>
+          <a:prstGeom prst="rect">
+            <a:avLst/>
+          </a:prstGeom>
+          <a:solidFill>
+            <a:srgbClr val="FFFFFF"/>
+          </a:solidFill>
+          <a:ln w="15875">
+            <a:solidFill>
+              <a:srgbClr val="E69F00"/>
+            </a:solidFill>
+          </a:ln>
+          <a:effectLst/>
+        </p:spPr>
+        <p:style>
+          <a:lnRef idx="1">
+            <a:schemeClr val="accent1"/>
+          </a:lnRef>
+          <a:fillRef idx="3">
+            <a:schemeClr val="accent1"/>
+          </a:fillRef>
+          <a:effectRef idx="2">
+            <a:schemeClr val="accent1"/>
+          </a:effectRef>
+          <a:fontRef idx="minor">
+            <a:schemeClr val="lt1"/>
+          </a:fontRef>
+        </p:style>
+        <p:txBody>
+          <a:bodyPr rtlCol="0" anchor="ctr"/>
+          <a:lstStyle/>
+          <a:p>
+            <a:pPr algn="ctr"/>
+          </a:p>
+        </p:txBody>
+      </p:sp>
+      <p:sp>
+        <p:nvSpPr>
+          <p:cNvPr id="9" name="TextBox 8"/>
+          <p:cNvSpPr txBox="1"/>
+          <p:nvPr/>
+        </p:nvSpPr>
+        <p:spPr>
+          <a:xfrm>
+            <a:off x="8988552" y="960120"/>
+            <a:ext cx="2606040" cy="548640"/>
+          </a:xfrm>
+          <a:prstGeom prst="rect">
+            <a:avLst/>
+          </a:prstGeom>
+          <a:noFill/>
+        </p:spPr>
+        <p:txBody>
+          <a:bodyPr wrap="square" lIns="0" rIns="0" tIns="0" bIns="0" anchor="ctr">
+            <a:spAutoFit/>
+          </a:bodyPr>
+          <a:lstStyle/>
+          <a:p>
+            <a:pPr algn="ctr"/>
+            <a:r>
+              <a:rPr sz="1000" b="1" i="0">
+                <a:solidFill>
+                  <a:srgbClr val="E69F00"/>
+                </a:solidFill>
+                <a:latin typeface="Calibri"/>
+              </a:rPr>
+              <a:t>Phase D 2×</a:t>
+            </a:r>
+          </a:p>
+        </p:txBody>
+      </p:sp>
+      <p:pic>
+        <p:nvPicPr>
+          <p:cNvPr id="10" name="Picture 9" descr="method_11_consumption_evict_facts.png"/>
+          <p:cNvPicPr>
+            <a:picLocks noChangeAspect="1"/>
+          </p:cNvPicPr>
+          <p:nvPr/>
+        </p:nvPicPr>
+        <p:blipFill>
+          <a:blip r:embed="rId2"/>
+          <a:stretch>
+            <a:fillRect/>
+          </a:stretch>
+        </p:blipFill>
+        <p:spPr>
+          <a:xfrm>
+            <a:off x="548640" y="1973302"/>
+            <a:ext cx="11091672" cy="4008674"/>
+          </a:xfrm>
+          <a:prstGeom prst="rect">
+            <a:avLst/>
+          </a:prstGeom>
+        </p:spPr>
+      </p:pic>
+      <p:sp>
+        <p:nvSpPr>
+          <p:cNvPr id="11" name="TextBox 10"/>
+          <p:cNvSpPr txBox="1"/>
+          <p:nvPr/>
+        </p:nvSpPr>
+        <p:spPr>
+          <a:xfrm>
+            <a:off x="457200" y="6492240"/>
+            <a:ext cx="7315200" cy="274320"/>
+          </a:xfrm>
+          <a:prstGeom prst="rect">
+            <a:avLst/>
+          </a:prstGeom>
+          <a:noFill/>
+        </p:spPr>
+        <p:txBody>
+          <a:bodyPr wrap="square" lIns="0" rIns="0" tIns="0" bIns="0">
+            <a:spAutoFit/>
+          </a:bodyPr>
+          <a:lstStyle/>
+          <a:p>
+            <a:pPr algn="l"/>
+            <a:r>
+              <a:rPr sz="1000" b="0" i="0">
+                <a:solidFill>
+                  <a:srgbClr val="6B7280"/>
+                </a:solidFill>
+                <a:latin typeface="Calibri"/>
+              </a:rPr>
+              <a:t>AdaptiveCache · Vlad Cainamisir · Harvard</a:t>
+            </a:r>
+          </a:p>
+        </p:txBody>
+      </p:sp>
+      <p:sp>
+        <p:nvSpPr>
+          <p:cNvPr id="12" name="TextBox 11"/>
+          <p:cNvSpPr txBox="1"/>
+          <p:nvPr/>
+        </p:nvSpPr>
+        <p:spPr>
+          <a:xfrm>
+            <a:off x="8534095" y="6492240"/>
+            <a:ext cx="3200400" cy="274320"/>
+          </a:xfrm>
+          <a:prstGeom prst="rect">
+            <a:avLst/>
+          </a:prstGeom>
+          <a:noFill/>
+        </p:spPr>
+        <p:txBody>
+          <a:bodyPr wrap="square" lIns="0" rIns="0" tIns="0" bIns="0">
+            <a:spAutoFit/>
+          </a:bodyPr>
+          <a:lstStyle/>
+          <a:p>
+            <a:pPr algn="r"/>
+            <a:r>
+              <a:rPr sz="1000" b="0" i="0">
+                <a:solidFill>
+                  <a:srgbClr val="6B7280"/>
+                </a:solidFill>
+                <a:latin typeface="Calibri"/>
+              </a:rPr>
+              <a:t>15 / 17</a:t>
+            </a:r>
+          </a:p>
+        </p:txBody>
+      </p:sp>
+    </p:spTree>
+  </p:cSld>
+  <p:clrMapOvr>
+    <a:masterClrMapping/>
+  </p:clrMapOvr>
+</p:sld>
+</file>
+
+<file path=ppt/slides/slide16.xml><?xml version="1.0" encoding="utf-8"?>
+<p:sld xmlns:a="http://schemas.openxmlformats.org/drawingml/2006/main" xmlns:p="http://schemas.openxmlformats.org/presentationml/2006/main" xmlns:r="http://schemas.openxmlformats.org/officeDocument/2006/relationships">
+  <p:cSld>
+    <p:spTree>
+      <p:nvGrpSpPr>
+        <p:cNvPr id="1" name=""/>
+        <p:cNvGrpSpPr/>
+        <p:nvPr/>
+      </p:nvGrpSpPr>
+      <p:grpSpPr/>
+      <p:sp>
+        <p:nvSpPr>
+          <p:cNvPr id="2" name="Rectangle 1"/>
+          <p:cNvSpPr/>
+          <p:nvPr/>
+        </p:nvSpPr>
+        <p:spPr>
+          <a:xfrm>
+            <a:off x="0" y="0"/>
+            <a:ext cx="12191695" cy="6858000"/>
+          </a:xfrm>
+          <a:prstGeom prst="rect">
+            <a:avLst/>
+          </a:prstGeom>
+          <a:solidFill>
+            <a:srgbClr val="F8F6F0"/>
+          </a:solidFill>
+          <a:ln>
+            <a:noFill/>
+          </a:ln>
+          <a:effectLst/>
+        </p:spPr>
+        <p:style>
+          <a:lnRef idx="1">
+            <a:schemeClr val="accent1"/>
+          </a:lnRef>
+          <a:fillRef idx="3">
+            <a:schemeClr val="accent1"/>
+          </a:fillRef>
+          <a:effectRef idx="2">
+            <a:schemeClr val="accent1"/>
+          </a:effectRef>
+          <a:fontRef idx="minor">
+            <a:schemeClr val="lt1"/>
+          </a:fontRef>
+        </p:style>
+        <p:txBody>
+          <a:bodyPr rtlCol="0" anchor="ctr"/>
+          <a:lstStyle/>
+          <a:p>
+            <a:pPr algn="ctr"/>
+          </a:p>
+        </p:txBody>
+      </p:sp>
+      <p:sp>
+        <p:nvSpPr>
+          <p:cNvPr id="3" name="Rounded Rectangle 2"/>
+          <p:cNvSpPr/>
+          <p:nvPr/>
+        </p:nvSpPr>
+        <p:spPr>
+          <a:xfrm>
+            <a:off x="548640" y="411480"/>
+            <a:ext cx="2286000" cy="411480"/>
+          </a:xfrm>
+          <a:prstGeom prst="roundRect">
+            <a:avLst/>
+          </a:prstGeom>
+          <a:solidFill>
+            <a:srgbClr val="0072B2"/>
+          </a:solidFill>
+          <a:ln>
+            <a:noFill/>
+          </a:ln>
+          <a:effectLst/>
+        </p:spPr>
+        <p:style>
+          <a:lnRef idx="1">
+            <a:schemeClr val="accent1"/>
+          </a:lnRef>
+          <a:fillRef idx="3">
+            <a:schemeClr val="accent1"/>
+          </a:fillRef>
+          <a:effectRef idx="2">
+            <a:schemeClr val="accent1"/>
+          </a:effectRef>
+          <a:fontRef idx="minor">
+            <a:schemeClr val="lt1"/>
+          </a:fontRef>
+        </p:style>
+        <p:txBody>
+          <a:bodyPr rtlCol="0" anchor="ctr"/>
+          <a:lstStyle/>
+          <a:p>
+            <a:pPr algn="ctr"/>
+          </a:p>
+        </p:txBody>
+      </p:sp>
+      <p:sp>
+        <p:nvSpPr>
+          <p:cNvPr id="4" name="TextBox 3"/>
+          <p:cNvSpPr txBox="1"/>
+          <p:nvPr/>
+        </p:nvSpPr>
+        <p:spPr>
+          <a:xfrm>
+            <a:off x="548640" y="411480"/>
+            <a:ext cx="2286000" cy="411480"/>
+          </a:xfrm>
+          <a:prstGeom prst="rect">
+            <a:avLst/>
+          </a:prstGeom>
+          <a:noFill/>
+        </p:spPr>
+        <p:txBody>
+          <a:bodyPr wrap="square" lIns="0" rIns="0" tIns="0" bIns="0" anchor="ctr">
+            <a:spAutoFit/>
+          </a:bodyPr>
+          <a:lstStyle/>
+          <a:p>
+            <a:pPr algn="ctr"/>
+            <a:r>
+              <a:rPr sz="1100" b="1" i="0">
+                <a:solidFill>
+                  <a:srgbClr val="FFFFFF"/>
+                </a:solidFill>
+                <a:latin typeface="Calibri"/>
+              </a:rPr>
+              <a:t>ACTION-GRAPH</a:t>
+            </a:r>
+          </a:p>
+        </p:txBody>
+      </p:sp>
+      <p:sp>
+        <p:nvSpPr>
+          <p:cNvPr id="5" name="TextBox 4"/>
+          <p:cNvSpPr txBox="1"/>
+          <p:nvPr/>
+        </p:nvSpPr>
+        <p:spPr>
+          <a:xfrm>
+            <a:off x="3017520" y="411480"/>
+            <a:ext cx="8686800" cy="457200"/>
+          </a:xfrm>
+          <a:prstGeom prst="rect">
+            <a:avLst/>
+          </a:prstGeom>
+          <a:noFill/>
+        </p:spPr>
+        <p:txBody>
+          <a:bodyPr wrap="square" lIns="0" rIns="0" tIns="0" bIns="0" anchor="ctr">
+            <a:spAutoFit/>
+          </a:bodyPr>
+          <a:lstStyle/>
+          <a:p>
+            <a:pPr algn="l"/>
+            <a:r>
+              <a:rPr sz="2200" b="1" i="0">
+                <a:solidFill>
+                  <a:srgbClr val="1E3A8A"/>
+                </a:solidFill>
+                <a:latin typeface="Calibri"/>
+              </a:rPr>
+              <a:t>consumption_evict_outline</a:t>
+            </a:r>
+          </a:p>
+        </p:txBody>
+      </p:sp>
+      <p:sp>
+        <p:nvSpPr>
+          <p:cNvPr id="6" name="Rectangle 5"/>
+          <p:cNvSpPr/>
+          <p:nvPr/>
+        </p:nvSpPr>
+        <p:spPr>
+          <a:xfrm>
+            <a:off x="548640" y="960120"/>
+            <a:ext cx="8229600" cy="548640"/>
+          </a:xfrm>
+          <a:prstGeom prst="rect">
+            <a:avLst/>
+          </a:prstGeom>
+          <a:solidFill>
+            <a:srgbClr val="009E73"/>
+          </a:solidFill>
+          <a:ln>
+            <a:noFill/>
+          </a:ln>
+          <a:effectLst/>
+        </p:spPr>
+        <p:style>
+          <a:lnRef idx="1">
+            <a:schemeClr val="accent1"/>
+          </a:lnRef>
+          <a:fillRef idx="3">
+            <a:schemeClr val="accent1"/>
+          </a:fillRef>
+          <a:effectRef idx="2">
+            <a:schemeClr val="accent1"/>
+          </a:effectRef>
+          <a:fontRef idx="minor">
+            <a:schemeClr val="lt1"/>
+          </a:fontRef>
+        </p:style>
+        <p:txBody>
+          <a:bodyPr rtlCol="0" anchor="ctr"/>
+          <a:lstStyle/>
+          <a:p>
+            <a:pPr algn="ctr"/>
+          </a:p>
+        </p:txBody>
+      </p:sp>
+      <p:sp>
+        <p:nvSpPr>
+          <p:cNvPr id="7" name="TextBox 6"/>
+          <p:cNvSpPr txBox="1"/>
+          <p:nvPr/>
+        </p:nvSpPr>
+        <p:spPr>
+          <a:xfrm>
+            <a:off x="777240" y="960120"/>
+            <a:ext cx="7863840" cy="548640"/>
+          </a:xfrm>
+          <a:prstGeom prst="rect">
+            <a:avLst/>
+          </a:prstGeom>
+          <a:noFill/>
+        </p:spPr>
+        <p:txBody>
+          <a:bodyPr wrap="square" lIns="0" rIns="0" tIns="0" bIns="0" anchor="ctr">
+            <a:spAutoFit/>
+          </a:bodyPr>
+          <a:lstStyle/>
+          <a:p>
+            <a:pPr algn="l"/>
+            <a:r>
+              <a:rPr sz="1400" b="1" i="0">
+                <a:solidFill>
+                  <a:srgbClr val="FFFFFF"/>
+                </a:solidFill>
+                <a:latin typeface="Calibri"/>
+              </a:rPr>
+              <a:t>Ties plain on retail chain (5/10) — cleanest design point</a:t>
+            </a:r>
+          </a:p>
+        </p:txBody>
+      </p:sp>
+      <p:sp>
+        <p:nvSpPr>
+          <p:cNvPr id="8" name="Rectangle 7"/>
+          <p:cNvSpPr/>
+          <p:nvPr/>
+        </p:nvSpPr>
+        <p:spPr>
+          <a:xfrm>
+            <a:off x="8897112" y="960120"/>
+            <a:ext cx="2743200" cy="548640"/>
+          </a:xfrm>
+          <a:prstGeom prst="rect">
+            <a:avLst/>
+          </a:prstGeom>
+          <a:solidFill>
+            <a:srgbClr val="FFFFFF"/>
+          </a:solidFill>
+          <a:ln w="15875">
+            <a:solidFill>
+              <a:srgbClr val="009E73"/>
+            </a:solidFill>
+          </a:ln>
+          <a:effectLst/>
+        </p:spPr>
+        <p:style>
+          <a:lnRef idx="1">
+            <a:schemeClr val="accent1"/>
+          </a:lnRef>
+          <a:fillRef idx="3">
+            <a:schemeClr val="accent1"/>
+          </a:fillRef>
+          <a:effectRef idx="2">
+            <a:schemeClr val="accent1"/>
+          </a:effectRef>
+          <a:fontRef idx="minor">
+            <a:schemeClr val="lt1"/>
+          </a:fontRef>
+        </p:style>
+        <p:txBody>
+          <a:bodyPr rtlCol="0" anchor="ctr"/>
+          <a:lstStyle/>
+          <a:p>
+            <a:pPr algn="ctr"/>
+          </a:p>
+        </p:txBody>
+      </p:sp>
+      <p:sp>
+        <p:nvSpPr>
+          <p:cNvPr id="9" name="TextBox 8"/>
+          <p:cNvSpPr txBox="1"/>
+          <p:nvPr/>
+        </p:nvSpPr>
+        <p:spPr>
+          <a:xfrm>
+            <a:off x="8988552" y="960120"/>
+            <a:ext cx="2606040" cy="548640"/>
+          </a:xfrm>
+          <a:prstGeom prst="rect">
+            <a:avLst/>
+          </a:prstGeom>
+          <a:noFill/>
+        </p:spPr>
+        <p:txBody>
+          <a:bodyPr wrap="square" lIns="0" rIns="0" tIns="0" bIns="0" anchor="ctr">
+            <a:spAutoFit/>
+          </a:bodyPr>
+          <a:lstStyle/>
+          <a:p>
+            <a:pPr algn="ctr"/>
+            <a:r>
+              <a:rPr sz="1000" b="1" i="0">
+                <a:solidFill>
+                  <a:srgbClr val="009E73"/>
+                </a:solidFill>
+                <a:latin typeface="Calibri"/>
+              </a:rPr>
+              <a:t>Phase E (10 customers)</a:t>
+            </a:r>
+          </a:p>
+        </p:txBody>
+      </p:sp>
+      <p:pic>
+        <p:nvPicPr>
+          <p:cNvPr id="10" name="Picture 9" descr="method_12_consumption_evict_outline.png"/>
+          <p:cNvPicPr>
+            <a:picLocks noChangeAspect="1"/>
+          </p:cNvPicPr>
+          <p:nvPr/>
+        </p:nvPicPr>
+        <p:blipFill>
+          <a:blip r:embed="rId2"/>
+          <a:stretch>
+            <a:fillRect/>
+          </a:stretch>
+        </p:blipFill>
+        <p:spPr>
+          <a:xfrm>
+            <a:off x="548640" y="1751494"/>
+            <a:ext cx="11091672" cy="4452290"/>
+          </a:xfrm>
+          <a:prstGeom prst="rect">
+            <a:avLst/>
+          </a:prstGeom>
+        </p:spPr>
+      </p:pic>
+      <p:sp>
+        <p:nvSpPr>
+          <p:cNvPr id="11" name="TextBox 10"/>
+          <p:cNvSpPr txBox="1"/>
+          <p:nvPr/>
+        </p:nvSpPr>
+        <p:spPr>
+          <a:xfrm>
+            <a:off x="457200" y="6492240"/>
+            <a:ext cx="7315200" cy="274320"/>
+          </a:xfrm>
+          <a:prstGeom prst="rect">
+            <a:avLst/>
+          </a:prstGeom>
+          <a:noFill/>
+        </p:spPr>
+        <p:txBody>
+          <a:bodyPr wrap="square" lIns="0" rIns="0" tIns="0" bIns="0">
+            <a:spAutoFit/>
+          </a:bodyPr>
+          <a:lstStyle/>
+          <a:p>
+            <a:pPr algn="l"/>
+            <a:r>
+              <a:rPr sz="1000" b="0" i="0">
+                <a:solidFill>
+                  <a:srgbClr val="6B7280"/>
+                </a:solidFill>
+                <a:latin typeface="Calibri"/>
+              </a:rPr>
+              <a:t>AdaptiveCache · Vlad Cainamisir · Harvard</a:t>
+            </a:r>
+          </a:p>
+        </p:txBody>
+      </p:sp>
+      <p:sp>
+        <p:nvSpPr>
+          <p:cNvPr id="12" name="TextBox 11"/>
+          <p:cNvSpPr txBox="1"/>
+          <p:nvPr/>
+        </p:nvSpPr>
+        <p:spPr>
+          <a:xfrm>
+            <a:off x="8534095" y="6492240"/>
+            <a:ext cx="3200400" cy="274320"/>
+          </a:xfrm>
+          <a:prstGeom prst="rect">
+            <a:avLst/>
+          </a:prstGeom>
+          <a:noFill/>
+        </p:spPr>
+        <p:txBody>
+          <a:bodyPr wrap="square" lIns="0" rIns="0" tIns="0" bIns="0">
+            <a:spAutoFit/>
+          </a:bodyPr>
+          <a:lstStyle/>
+          <a:p>
+            <a:pPr algn="r"/>
+            <a:r>
+              <a:rPr sz="1000" b="0" i="0">
+                <a:solidFill>
+                  <a:srgbClr val="6B7280"/>
+                </a:solidFill>
+                <a:latin typeface="Calibri"/>
+              </a:rPr>
+              <a:t>16 / 17</a:t>
+            </a:r>
+          </a:p>
+        </p:txBody>
+      </p:sp>
+    </p:spTree>
+  </p:cSld>
+  <p:clrMapOvr>
+    <a:masterClrMapping/>
+  </p:clrMapOvr>
+</p:sld>
+</file>
+
+<file path=ppt/slides/slide17.xml><?xml version="1.0" encoding="utf-8"?>
+<p:sld xmlns:a="http://schemas.openxmlformats.org/drawingml/2006/main" xmlns:p="http://schemas.openxmlformats.org/presentationml/2006/main" xmlns:r="http://schemas.openxmlformats.org/officeDocument/2006/relationships">
+  <p:cSld>
+    <p:spTree>
+      <p:nvGrpSpPr>
+        <p:cNvPr id="1" name=""/>
+        <p:cNvGrpSpPr/>
+        <p:nvPr/>
+      </p:nvGrpSpPr>
+      <p:grpSpPr/>
+      <p:sp>
+        <p:nvSpPr>
+          <p:cNvPr id="2" name="Rectangle 1"/>
+          <p:cNvSpPr/>
+          <p:nvPr/>
+        </p:nvSpPr>
+        <p:spPr>
+          <a:xfrm>
+            <a:off x="0" y="0"/>
+            <a:ext cx="12191695" cy="6858000"/>
+          </a:xfrm>
+          <a:prstGeom prst="rect">
+            <a:avLst/>
+          </a:prstGeom>
+          <a:solidFill>
+            <a:srgbClr val="14255C"/>
+          </a:solidFill>
+          <a:ln>
+            <a:noFill/>
+          </a:ln>
+          <a:effectLst/>
+        </p:spPr>
+        <p:style>
+          <a:lnRef idx="1">
+            <a:schemeClr val="accent1"/>
+          </a:lnRef>
+          <a:fillRef idx="3">
+            <a:schemeClr val="accent1"/>
+          </a:fillRef>
+          <a:effectRef idx="2">
+            <a:schemeClr val="accent1"/>
+          </a:effectRef>
+          <a:fontRef idx="minor">
+            <a:schemeClr val="lt1"/>
+          </a:fontRef>
+        </p:style>
+        <p:txBody>
+          <a:bodyPr rtlCol="0" anchor="ctr"/>
+          <a:lstStyle/>
+          <a:p>
+            <a:pPr algn="ctr"/>
+          </a:p>
+        </p:txBody>
+      </p:sp>
+      <p:sp>
+        <p:nvSpPr>
+          <p:cNvPr id="3" name="Rectangle 2"/>
+          <p:cNvSpPr/>
+          <p:nvPr/>
+        </p:nvSpPr>
+        <p:spPr>
+          <a:xfrm>
+            <a:off x="0" y="0"/>
+            <a:ext cx="320040" cy="6858000"/>
+          </a:xfrm>
+          <a:prstGeom prst="rect">
+            <a:avLst/>
+          </a:prstGeom>
+          <a:solidFill>
+            <a:srgbClr val="E69F00"/>
+          </a:solidFill>
+          <a:ln>
+            <a:noFill/>
+          </a:ln>
+          <a:effectLst/>
+        </p:spPr>
+        <p:style>
+          <a:lnRef idx="1">
+            <a:schemeClr val="accent1"/>
+          </a:lnRef>
+          <a:fillRef idx="3">
+            <a:schemeClr val="accent1"/>
+          </a:fillRef>
+          <a:effectRef idx="2">
+            <a:schemeClr val="accent1"/>
+          </a:effectRef>
+          <a:fontRef idx="minor">
+            <a:schemeClr val="lt1"/>
+          </a:fontRef>
+        </p:style>
+        <p:txBody>
+          <a:bodyPr rtlCol="0" anchor="ctr"/>
+          <a:lstStyle/>
+          <a:p>
+            <a:pPr algn="ctr"/>
+          </a:p>
+        </p:txBody>
+      </p:sp>
+      <p:sp>
+        <p:nvSpPr>
+          <p:cNvPr id="4" name="TextBox 3"/>
+          <p:cNvSpPr txBox="1"/>
+          <p:nvPr/>
+        </p:nvSpPr>
+        <p:spPr>
+          <a:xfrm>
+            <a:off x="1097280" y="914400"/>
+            <a:ext cx="10058400" cy="457200"/>
+          </a:xfrm>
+          <a:prstGeom prst="rect">
+            <a:avLst/>
+          </a:prstGeom>
+          <a:noFill/>
+        </p:spPr>
+        <p:txBody>
+          <a:bodyPr wrap="square" lIns="0" rIns="0" tIns="0" bIns="0">
+            <a:spAutoFit/>
+          </a:bodyPr>
+          <a:lstStyle/>
+          <a:p>
+            <a:pPr algn="l"/>
+            <a:r>
+              <a:rPr sz="1400" b="1" i="0">
+                <a:solidFill>
+                  <a:srgbClr val="E69F00"/>
+                </a:solidFill>
+                <a:latin typeface="Calibri"/>
+              </a:rPr>
+              <a:t>WHAT WE LEARNED</a:t>
+            </a:r>
+          </a:p>
+        </p:txBody>
+      </p:sp>
+      <p:sp>
+        <p:nvSpPr>
+          <p:cNvPr id="5" name="TextBox 4"/>
+          <p:cNvSpPr txBox="1"/>
+          <p:nvPr/>
+        </p:nvSpPr>
+        <p:spPr>
+          <a:xfrm>
+            <a:off x="1097280" y="1554480"/>
+            <a:ext cx="10058400" cy="1280160"/>
+          </a:xfrm>
+          <a:prstGeom prst="rect">
+            <a:avLst/>
+          </a:prstGeom>
+          <a:noFill/>
+        </p:spPr>
+        <p:txBody>
+          <a:bodyPr wrap="square" lIns="0" rIns="0" tIns="0" bIns="0">
+            <a:spAutoFit/>
+          </a:bodyPr>
+          <a:lstStyle/>
+          <a:p>
+            <a:pPr algn="l"/>
+            <a:r>
+              <a:rPr sz="3400" b="1" i="0">
+                <a:solidFill>
+                  <a:srgbClr val="FFFFFF"/>
+                </a:solidFill>
+                <a:latin typeface="Calibri"/>
+              </a:rPr>
+              <a:t>What you leave behind</a:t>
+            </a:r>
+          </a:p>
+          <a:p>
+            <a:pPr algn="l"/>
+            <a:r>
+              <a:rPr sz="3400" b="1" i="0">
+                <a:solidFill>
+                  <a:srgbClr val="FFFFFF"/>
+                </a:solidFill>
+                <a:latin typeface="Calibri"/>
+              </a:rPr>
+              <a:t>matters more than what you remove.</a:t>
+            </a:r>
+          </a:p>
+        </p:txBody>
+      </p:sp>
+      <p:sp>
+        <p:nvSpPr>
+          <p:cNvPr id="6" name="TextBox 5"/>
+          <p:cNvSpPr txBox="1"/>
+          <p:nvPr/>
+        </p:nvSpPr>
+        <p:spPr>
+          <a:xfrm>
+            <a:off x="1097280" y="3566160"/>
+            <a:ext cx="10058400" cy="457200"/>
+          </a:xfrm>
+          <a:prstGeom prst="rect">
+            <a:avLst/>
+          </a:prstGeom>
+          <a:noFill/>
+        </p:spPr>
+        <p:txBody>
+          <a:bodyPr wrap="square" lIns="0" rIns="0" tIns="0" bIns="0">
+            <a:spAutoFit/>
+          </a:bodyPr>
+          <a:lstStyle/>
+          <a:p>
+            <a:pPr algn="l"/>
+            <a:r>
+              <a:rPr sz="1700" b="0" i="0">
+                <a:solidFill>
+                  <a:srgbClr val="6077C7"/>
+                </a:solidFill>
+                <a:latin typeface="Calibri"/>
+              </a:rPr>
+              <a:t>1.  On strong agents, no compaction beats every heuristic — the cliff tax dominates.</a:t>
+            </a:r>
+          </a:p>
+        </p:txBody>
+      </p:sp>
+      <p:sp>
+        <p:nvSpPr>
+          <p:cNvPr id="7" name="TextBox 6"/>
+          <p:cNvSpPr txBox="1"/>
+          <p:nvPr/>
+        </p:nvSpPr>
+        <p:spPr>
+          <a:xfrm>
+            <a:off x="1097280" y="4160520"/>
+            <a:ext cx="10058400" cy="457200"/>
+          </a:xfrm>
+          <a:prstGeom prst="rect">
+            <a:avLst/>
+          </a:prstGeom>
+          <a:noFill/>
+        </p:spPr>
+        <p:txBody>
+          <a:bodyPr wrap="square" lIns="0" rIns="0" tIns="0" bIns="0">
+            <a:spAutoFit/>
+          </a:bodyPr>
+          <a:lstStyle/>
+          <a:p>
+            <a:pPr algn="l"/>
+            <a:r>
+              <a:rPr sz="1700" b="0" i="0">
+                <a:solidFill>
+                  <a:srgbClr val="6077C7"/>
+                </a:solidFill>
+                <a:latin typeface="Calibri"/>
+              </a:rPr>
+              <a:t>2.  Drop-with-hole (no rewrite) is the only family that avoids the tax.</a:t>
+            </a:r>
+          </a:p>
+        </p:txBody>
+      </p:sp>
+      <p:sp>
+        <p:nvSpPr>
+          <p:cNvPr id="8" name="TextBox 7"/>
+          <p:cNvSpPr txBox="1"/>
+          <p:nvPr/>
+        </p:nvSpPr>
+        <p:spPr>
+          <a:xfrm>
+            <a:off x="1097280" y="4754880"/>
+            <a:ext cx="10058400" cy="457200"/>
+          </a:xfrm>
+          <a:prstGeom prst="rect">
+            <a:avLst/>
+          </a:prstGeom>
+          <a:noFill/>
+        </p:spPr>
+        <p:txBody>
+          <a:bodyPr wrap="square" lIns="0" rIns="0" tIns="0" bIns="0">
+            <a:spAutoFit/>
+          </a:bodyPr>
+          <a:lstStyle/>
+          <a:p>
+            <a:pPr algn="l"/>
+            <a:r>
+              <a:rPr sz="1700" b="0" i="0">
+                <a:solidFill>
+                  <a:srgbClr val="6077C7"/>
+                </a:solidFill>
+                <a:latin typeface="Calibri"/>
+              </a:rPr>
+              <a:t>3.  Placeholder design dominates: minimal markers win, summaries anchor.</a:t>
+            </a:r>
+          </a:p>
+        </p:txBody>
+      </p:sp>
+      <p:sp>
+        <p:nvSpPr>
+          <p:cNvPr id="9" name="TextBox 8"/>
           <p:cNvSpPr txBox="1"/>
           <p:nvPr/>
         </p:nvSpPr>
@@ -3333,20 +6683,20 @@
           <a:p>
             <a:pPr algn="l"/>
             <a:r>
-              <a:rPr sz="1800" b="0" i="1">
+              <a:rPr sz="1700" b="0" i="0">
                 <a:solidFill>
                   <a:srgbClr val="6077C7"/>
                 </a:solidFill>
                 <a:latin typeface="Calibri"/>
               </a:rPr>
-              <a:t>The one that succeeded was the one I told the least.</a:t>
-            </a:r>
-          </a:p>
-        </p:txBody>
-      </p:sp>
-      <p:sp>
-        <p:nvSpPr>
-          <p:cNvPr id="8" name="TextBox 7"/>
+              <a:t>4.  Compaction wins on weak agents (Qwen3) — preventing context overflow.</a:t>
+            </a:r>
+          </a:p>
+        </p:txBody>
+      </p:sp>
+      <p:sp>
+        <p:nvSpPr>
+          <p:cNvPr id="10" name="TextBox 9"/>
           <p:cNvSpPr txBox="1"/>
           <p:nvPr/>
         </p:nvSpPr>
@@ -3374,7 +6724,77 @@
                 </a:solidFill>
                 <a:latin typeface="Calibri"/>
               </a:rPr>
-              <a:t>Vlad Cainamisir  ·  Harvard  ·  AdaptiveCache project</a:t>
+              <a:t>Thank you.   ·   github.com/vladcainamisir/adaptivecache</a:t>
+            </a:r>
+          </a:p>
+        </p:txBody>
+      </p:sp>
+      <p:sp>
+        <p:nvSpPr>
+          <p:cNvPr id="11" name="TextBox 10"/>
+          <p:cNvSpPr txBox="1"/>
+          <p:nvPr/>
+        </p:nvSpPr>
+        <p:spPr>
+          <a:xfrm>
+            <a:off x="457200" y="6492240"/>
+            <a:ext cx="7315200" cy="274320"/>
+          </a:xfrm>
+          <a:prstGeom prst="rect">
+            <a:avLst/>
+          </a:prstGeom>
+          <a:noFill/>
+        </p:spPr>
+        <p:txBody>
+          <a:bodyPr wrap="square" lIns="0" rIns="0" tIns="0" bIns="0">
+            <a:spAutoFit/>
+          </a:bodyPr>
+          <a:lstStyle/>
+          <a:p>
+            <a:pPr algn="l"/>
+            <a:r>
+              <a:rPr sz="1000" b="0" i="0">
+                <a:solidFill>
+                  <a:srgbClr val="6077C7"/>
+                </a:solidFill>
+                <a:latin typeface="Calibri"/>
+              </a:rPr>
+              <a:t>AdaptiveCache · Vlad Cainamisir · Harvard</a:t>
+            </a:r>
+          </a:p>
+        </p:txBody>
+      </p:sp>
+      <p:sp>
+        <p:nvSpPr>
+          <p:cNvPr id="12" name="TextBox 11"/>
+          <p:cNvSpPr txBox="1"/>
+          <p:nvPr/>
+        </p:nvSpPr>
+        <p:spPr>
+          <a:xfrm>
+            <a:off x="8534095" y="6492240"/>
+            <a:ext cx="3200400" cy="274320"/>
+          </a:xfrm>
+          <a:prstGeom prst="rect">
+            <a:avLst/>
+          </a:prstGeom>
+          <a:noFill/>
+        </p:spPr>
+        <p:txBody>
+          <a:bodyPr wrap="square" lIns="0" rIns="0" tIns="0" bIns="0">
+            <a:spAutoFit/>
+          </a:bodyPr>
+          <a:lstStyle/>
+          <a:p>
+            <a:pPr algn="r"/>
+            <a:r>
+              <a:rPr sz="1000" b="0" i="0">
+                <a:solidFill>
+                  <a:srgbClr val="6077C7"/>
+                </a:solidFill>
+                <a:latin typeface="Calibri"/>
+              </a:rPr>
+              <a:t>17 / 17</a:t>
             </a:r>
           </a:p>
         </p:txBody>
@@ -3412,7 +6832,7 @@
             <a:avLst/>
           </a:prstGeom>
           <a:solidFill>
-            <a:srgbClr val="F8F6F0"/>
+            <a:srgbClr val="14255C"/>
           </a:solidFill>
           <a:ln>
             <a:noFill/>
@@ -3443,95 +6863,23 @@
       </p:sp>
       <p:sp>
         <p:nvSpPr>
-          <p:cNvPr id="3" name="TextBox 2"/>
-          <p:cNvSpPr txBox="1"/>
-          <p:nvPr/>
-        </p:nvSpPr>
-        <p:spPr>
-          <a:xfrm>
-            <a:off x="548640" y="457200"/>
-            <a:ext cx="10972800" cy="548640"/>
-          </a:xfrm>
-          <a:prstGeom prst="rect">
-            <a:avLst/>
-          </a:prstGeom>
-          <a:noFill/>
-        </p:spPr>
-        <p:txBody>
-          <a:bodyPr wrap="square" lIns="0" rIns="0" tIns="0" bIns="0">
-            <a:spAutoFit/>
-          </a:bodyPr>
-          <a:lstStyle/>
-          <a:p>
-            <a:pPr algn="l"/>
-            <a:r>
-              <a:rPr sz="2800" b="1" i="0">
-                <a:solidFill>
-                  <a:srgbClr val="1E3A8A"/>
-                </a:solidFill>
-                <a:latin typeface="Calibri"/>
-              </a:rPr>
-              <a:t>An AI agent's memory fills up — what should we leave behind?</a:t>
-            </a:r>
-          </a:p>
-        </p:txBody>
-      </p:sp>
-      <p:sp>
-        <p:nvSpPr>
-          <p:cNvPr id="4" name="TextBox 3"/>
-          <p:cNvSpPr txBox="1"/>
-          <p:nvPr/>
-        </p:nvSpPr>
-        <p:spPr>
-          <a:xfrm>
-            <a:off x="548640" y="1051560"/>
-            <a:ext cx="10972800" cy="365760"/>
-          </a:xfrm>
-          <a:prstGeom prst="rect">
-            <a:avLst/>
-          </a:prstGeom>
-          <a:noFill/>
-        </p:spPr>
-        <p:txBody>
-          <a:bodyPr wrap="square" lIns="0" rIns="0" tIns="0" bIns="0">
-            <a:spAutoFit/>
-          </a:bodyPr>
-          <a:lstStyle/>
-          <a:p>
-            <a:pPr algn="l"/>
-            <a:r>
-              <a:rPr sz="1400" b="0" i="1">
-                <a:solidFill>
-                  <a:srgbClr val="6B7280"/>
-                </a:solidFill>
-                <a:latin typeface="Calibri"/>
-              </a:rPr>
-              <a:t>Compaction = drop old observations and leave a placeholder. The question is: what should the placeholder say?</a:t>
-            </a:r>
-          </a:p>
-        </p:txBody>
-      </p:sp>
-      <p:sp>
-        <p:nvSpPr>
-          <p:cNvPr id="5" name="Rectangle 4"/>
+          <p:cNvPr id="3" name="Rectangle 2"/>
           <p:cNvSpPr/>
           <p:nvPr/>
         </p:nvSpPr>
         <p:spPr>
           <a:xfrm>
-            <a:off x="822960" y="2011680"/>
-            <a:ext cx="5029200" cy="3108960"/>
+            <a:off x="0" y="0"/>
+            <a:ext cx="320040" cy="6858000"/>
           </a:xfrm>
           <a:prstGeom prst="rect">
             <a:avLst/>
           </a:prstGeom>
           <a:solidFill>
-            <a:srgbClr val="FFF4C8"/>
+            <a:srgbClr val="E69F00"/>
           </a:solidFill>
-          <a:ln w="9525">
-            <a:solidFill>
-              <a:srgbClr val="CCB870"/>
-            </a:solidFill>
+          <a:ln>
+            <a:noFill/>
           </a:ln>
           <a:effectLst/>
         </p:spPr>
@@ -3559,14 +6907,14 @@
       </p:sp>
       <p:sp>
         <p:nvSpPr>
-          <p:cNvPr id="6" name="TextBox 5"/>
-          <p:cNvSpPr txBox="1"/>
-          <p:nvPr/>
-        </p:nvSpPr>
-        <p:spPr>
-          <a:xfrm>
-            <a:off x="1005840" y="2194560"/>
-            <a:ext cx="4663440" cy="411480"/>
+          <p:cNvPr id="4" name="TextBox 3"/>
+          <p:cNvSpPr txBox="1"/>
+          <p:nvPr/>
+        </p:nvSpPr>
+        <p:spPr>
+          <a:xfrm>
+            <a:off x="1097280" y="640080"/>
+            <a:ext cx="10058400" cy="457200"/>
           </a:xfrm>
           <a:prstGeom prst="rect">
             <a:avLst/>
@@ -3581,62 +6929,27 @@
           <a:p>
             <a:pPr algn="l"/>
             <a:r>
-              <a:rPr sz="1200" b="1" i="0">
-                <a:solidFill>
-                  <a:srgbClr val="1E3A8A"/>
-                </a:solidFill>
-                <a:latin typeface="Calibri"/>
-              </a:rPr>
-              <a:t>PLAIN POST-IT</a:t>
-            </a:r>
-          </a:p>
-        </p:txBody>
-      </p:sp>
-      <p:sp>
-        <p:nvSpPr>
-          <p:cNvPr id="7" name="TextBox 6"/>
-          <p:cNvSpPr txBox="1"/>
-          <p:nvPr/>
-        </p:nvSpPr>
-        <p:spPr>
-          <a:xfrm>
-            <a:off x="1005840" y="2651760"/>
-            <a:ext cx="4663440" cy="548640"/>
-          </a:xfrm>
-          <a:prstGeom prst="rect">
-            <a:avLst/>
-          </a:prstGeom>
-          <a:noFill/>
-        </p:spPr>
-        <p:txBody>
-          <a:bodyPr wrap="square" lIns="0" rIns="0" tIns="0" bIns="0" anchor="ctr">
-            <a:spAutoFit/>
-          </a:bodyPr>
-          <a:lstStyle/>
-          <a:p>
-            <a:pPr algn="ctr"/>
-            <a:r>
-              <a:rPr sz="2400" b="1" i="0">
-                <a:solidFill>
-                  <a:srgbClr val="1F2937"/>
-                </a:solidFill>
-                <a:latin typeface="Consolas"/>
-              </a:rPr>
-              <a:t>[I read this file]</a:t>
-            </a:r>
-          </a:p>
-        </p:txBody>
-      </p:sp>
-      <p:sp>
-        <p:nvSpPr>
-          <p:cNvPr id="8" name="TextBox 7"/>
-          <p:cNvSpPr txBox="1"/>
-          <p:nvPr/>
-        </p:nvSpPr>
-        <p:spPr>
-          <a:xfrm>
-            <a:off x="1005840" y="3566160"/>
-            <a:ext cx="4663440" cy="1463040"/>
+              <a:rPr sz="1400" b="1" i="0">
+                <a:solidFill>
+                  <a:srgbClr val="E69F00"/>
+                </a:solidFill>
+                <a:latin typeface="Calibri"/>
+              </a:rPr>
+              <a:t>WHAT WE RAN</a:t>
+            </a:r>
+          </a:p>
+        </p:txBody>
+      </p:sp>
+      <p:sp>
+        <p:nvSpPr>
+          <p:cNvPr id="5" name="TextBox 4"/>
+          <p:cNvSpPr txBox="1"/>
+          <p:nvPr/>
+        </p:nvSpPr>
+        <p:spPr>
+          <a:xfrm>
+            <a:off x="1097280" y="1143000"/>
+            <a:ext cx="10058400" cy="640080"/>
           </a:xfrm>
           <a:prstGeom prst="rect">
             <a:avLst/>
@@ -3651,202 +6964,27 @@
           <a:p>
             <a:pPr algn="l"/>
             <a:r>
-              <a:rPr sz="1500" b="0" i="0">
-                <a:solidFill>
-                  <a:srgbClr val="1F2937"/>
-                </a:solidFill>
-                <a:latin typeface="Calibri"/>
-              </a:rPr>
-              <a:t>Just a marker. The agent has to re-read the file if it needs the content again.</a:t>
-            </a:r>
-          </a:p>
-        </p:txBody>
-      </p:sp>
-      <p:sp>
-        <p:nvSpPr>
-          <p:cNvPr id="9" name="Rectangle 8"/>
+              <a:rPr sz="2200" b="1" i="0">
+                <a:solidFill>
+                  <a:srgbClr val="FFFFFF"/>
+                </a:solidFill>
+                <a:latin typeface="Calibri"/>
+              </a:rPr>
+              <a:t>Six months of compaction experiments, in numbers.</a:t>
+            </a:r>
+          </a:p>
+        </p:txBody>
+      </p:sp>
+      <p:sp>
+        <p:nvSpPr>
+          <p:cNvPr id="6" name="Rectangle 5"/>
           <p:cNvSpPr/>
           <p:nvPr/>
         </p:nvSpPr>
         <p:spPr>
           <a:xfrm>
-            <a:off x="6355080" y="2011680"/>
-            <a:ext cx="5029200" cy="3108960"/>
-          </a:xfrm>
-          <a:prstGeom prst="rect">
-            <a:avLst/>
-          </a:prstGeom>
-          <a:solidFill>
-            <a:srgbClr val="FFF4C8"/>
-          </a:solidFill>
-          <a:ln w="9525">
-            <a:solidFill>
-              <a:srgbClr val="CCB870"/>
-            </a:solidFill>
-          </a:ln>
-          <a:effectLst/>
-        </p:spPr>
-        <p:style>
-          <a:lnRef idx="1">
-            <a:schemeClr val="accent1"/>
-          </a:lnRef>
-          <a:fillRef idx="3">
-            <a:schemeClr val="accent1"/>
-          </a:fillRef>
-          <a:effectRef idx="2">
-            <a:schemeClr val="accent1"/>
-          </a:effectRef>
-          <a:fontRef idx="minor">
-            <a:schemeClr val="lt1"/>
-          </a:fontRef>
-        </p:style>
-        <p:txBody>
-          <a:bodyPr rtlCol="0" anchor="ctr"/>
-          <a:lstStyle/>
-          <a:p>
-            <a:pPr algn="ctr"/>
-          </a:p>
-        </p:txBody>
-      </p:sp>
-      <p:sp>
-        <p:nvSpPr>
-          <p:cNvPr id="10" name="TextBox 9"/>
-          <p:cNvSpPr txBox="1"/>
-          <p:nvPr/>
-        </p:nvSpPr>
-        <p:spPr>
-          <a:xfrm>
-            <a:off x="6537960" y="2194560"/>
-            <a:ext cx="4663440" cy="411480"/>
-          </a:xfrm>
-          <a:prstGeom prst="rect">
-            <a:avLst/>
-          </a:prstGeom>
-          <a:noFill/>
-        </p:spPr>
-        <p:txBody>
-          <a:bodyPr wrap="square" lIns="0" rIns="0" tIns="0" bIns="0">
-            <a:spAutoFit/>
-          </a:bodyPr>
-          <a:lstStyle/>
-          <a:p>
-            <a:pPr algn="l"/>
-            <a:r>
-              <a:rPr sz="1200" b="1" i="0">
-                <a:solidFill>
-                  <a:srgbClr val="1E3A8A"/>
-                </a:solidFill>
-                <a:latin typeface="Calibri"/>
-              </a:rPr>
-              <a:t>DETAILED POST-IT</a:t>
-            </a:r>
-          </a:p>
-        </p:txBody>
-      </p:sp>
-      <p:sp>
-        <p:nvSpPr>
-          <p:cNvPr id="11" name="TextBox 10"/>
-          <p:cNvSpPr txBox="1"/>
-          <p:nvPr/>
-        </p:nvSpPr>
-        <p:spPr>
-          <a:xfrm>
-            <a:off x="6537960" y="2606040"/>
-            <a:ext cx="4663440" cy="914400"/>
-          </a:xfrm>
-          <a:prstGeom prst="rect">
-            <a:avLst/>
-          </a:prstGeom>
-          <a:noFill/>
-        </p:spPr>
-        <p:txBody>
-          <a:bodyPr wrap="square" lIns="0" rIns="0" tIns="0" bIns="0" anchor="ctr">
-            <a:spAutoFit/>
-          </a:bodyPr>
-          <a:lstStyle/>
-          <a:p>
-            <a:pPr algn="ctr"/>
-            <a:r>
-              <a:rPr sz="1400" b="1" i="0">
-                <a:solidFill>
-                  <a:srgbClr val="1F2937"/>
-                </a:solidFill>
-                <a:latin typeface="Consolas"/>
-              </a:rPr>
-              <a:t>[I read this file. It contained:</a:t>
-            </a:r>
-          </a:p>
-          <a:p>
-            <a:pPr algn="ctr"/>
-            <a:r>
-              <a:rPr sz="1400" b="1" i="0">
-                <a:solidFill>
-                  <a:srgbClr val="1F2937"/>
-                </a:solidFill>
-                <a:latin typeface="Consolas"/>
-              </a:rPr>
-              <a:t> setup, configure, runtest,</a:t>
-            </a:r>
-          </a:p>
-          <a:p>
-            <a:pPr algn="ctr"/>
-            <a:r>
-              <a:rPr sz="1400" b="1" i="0">
-                <a:solidFill>
-                  <a:srgbClr val="1F2937"/>
-                </a:solidFill>
-                <a:latin typeface="Consolas"/>
-              </a:rPr>
-              <a:t> makereport, evaluate]</a:t>
-            </a:r>
-          </a:p>
-        </p:txBody>
-      </p:sp>
-      <p:sp>
-        <p:nvSpPr>
-          <p:cNvPr id="12" name="TextBox 11"/>
-          <p:cNvSpPr txBox="1"/>
-          <p:nvPr/>
-        </p:nvSpPr>
-        <p:spPr>
-          <a:xfrm>
-            <a:off x="6537960" y="3566160"/>
-            <a:ext cx="4663440" cy="1463040"/>
-          </a:xfrm>
-          <a:prstGeom prst="rect">
-            <a:avLst/>
-          </a:prstGeom>
-          <a:noFill/>
-        </p:spPr>
-        <p:txBody>
-          <a:bodyPr wrap="square" lIns="0" rIns="0" tIns="0" bIns="0">
-            <a:spAutoFit/>
-          </a:bodyPr>
-          <a:lstStyle/>
-          <a:p>
-            <a:pPr algn="l"/>
-            <a:r>
-              <a:rPr sz="1500" b="0" i="0">
-                <a:solidFill>
-                  <a:srgbClr val="1F2937"/>
-                </a:solidFill>
-                <a:latin typeface="Calibri"/>
-              </a:rPr>
-              <a:t>Same eviction, but the placeholder summarizes what was inside. More information → should be better, right?</a:t>
-            </a:r>
-          </a:p>
-        </p:txBody>
-      </p:sp>
-      <p:sp>
-        <p:nvSpPr>
-          <p:cNvPr id="13" name="Rectangle 12"/>
-          <p:cNvSpPr/>
-          <p:nvPr/>
-        </p:nvSpPr>
-        <p:spPr>
-          <a:xfrm>
-            <a:off x="548640" y="5532120"/>
-            <a:ext cx="11091672" cy="640080"/>
+            <a:off x="1097280" y="2331720"/>
+            <a:ext cx="3383280" cy="1691640"/>
           </a:xfrm>
           <a:prstGeom prst="rect">
             <a:avLst/>
@@ -3883,14 +7021,356 @@
       </p:sp>
       <p:sp>
         <p:nvSpPr>
+          <p:cNvPr id="7" name="TextBox 6"/>
+          <p:cNvSpPr txBox="1"/>
+          <p:nvPr/>
+        </p:nvSpPr>
+        <p:spPr>
+          <a:xfrm>
+            <a:off x="1097280" y="2423160"/>
+            <a:ext cx="3383280" cy="868680"/>
+          </a:xfrm>
+          <a:prstGeom prst="rect">
+            <a:avLst/>
+          </a:prstGeom>
+          <a:noFill/>
+        </p:spPr>
+        <p:txBody>
+          <a:bodyPr wrap="square" lIns="0" rIns="0" tIns="0" bIns="0" anchor="ctr">
+            <a:spAutoFit/>
+          </a:bodyPr>
+          <a:lstStyle/>
+          <a:p>
+            <a:pPr algn="ctr"/>
+            <a:r>
+              <a:rPr sz="4600" b="1" i="0">
+                <a:solidFill>
+                  <a:srgbClr val="E69F00"/>
+                </a:solidFill>
+                <a:latin typeface="Calibri"/>
+              </a:rPr>
+              <a:t>500+</a:t>
+            </a:r>
+          </a:p>
+        </p:txBody>
+      </p:sp>
+      <p:sp>
+        <p:nvSpPr>
+          <p:cNvPr id="8" name="TextBox 7"/>
+          <p:cNvSpPr txBox="1"/>
+          <p:nvPr/>
+        </p:nvSpPr>
+        <p:spPr>
+          <a:xfrm>
+            <a:off x="1234439" y="3337560"/>
+            <a:ext cx="3108960" cy="594360"/>
+          </a:xfrm>
+          <a:prstGeom prst="rect">
+            <a:avLst/>
+          </a:prstGeom>
+          <a:noFill/>
+        </p:spPr>
+        <p:txBody>
+          <a:bodyPr wrap="square" lIns="0" rIns="0" tIns="0" bIns="0">
+            <a:spAutoFit/>
+          </a:bodyPr>
+          <a:lstStyle/>
+          <a:p>
+            <a:pPr algn="ctr"/>
+            <a:r>
+              <a:rPr sz="1200" b="0" i="0">
+                <a:solidFill>
+                  <a:srgbClr val="6077C7"/>
+                </a:solidFill>
+                <a:latin typeface="Calibri"/>
+              </a:rPr>
+              <a:t>agent trajectories</a:t>
+            </a:r>
+          </a:p>
+        </p:txBody>
+      </p:sp>
+      <p:sp>
+        <p:nvSpPr>
+          <p:cNvPr id="9" name="Rectangle 8"/>
+          <p:cNvSpPr/>
+          <p:nvPr/>
+        </p:nvSpPr>
+        <p:spPr>
+          <a:xfrm>
+            <a:off x="4709160" y="2331720"/>
+            <a:ext cx="3383280" cy="1691640"/>
+          </a:xfrm>
+          <a:prstGeom prst="rect">
+            <a:avLst/>
+          </a:prstGeom>
+          <a:solidFill>
+            <a:srgbClr val="1E3A8A"/>
+          </a:solidFill>
+          <a:ln>
+            <a:noFill/>
+          </a:ln>
+          <a:effectLst/>
+        </p:spPr>
+        <p:style>
+          <a:lnRef idx="1">
+            <a:schemeClr val="accent1"/>
+          </a:lnRef>
+          <a:fillRef idx="3">
+            <a:schemeClr val="accent1"/>
+          </a:fillRef>
+          <a:effectRef idx="2">
+            <a:schemeClr val="accent1"/>
+          </a:effectRef>
+          <a:fontRef idx="minor">
+            <a:schemeClr val="lt1"/>
+          </a:fontRef>
+        </p:style>
+        <p:txBody>
+          <a:bodyPr rtlCol="0" anchor="ctr"/>
+          <a:lstStyle/>
+          <a:p>
+            <a:pPr algn="ctr"/>
+          </a:p>
+        </p:txBody>
+      </p:sp>
+      <p:sp>
+        <p:nvSpPr>
+          <p:cNvPr id="10" name="TextBox 9"/>
+          <p:cNvSpPr txBox="1"/>
+          <p:nvPr/>
+        </p:nvSpPr>
+        <p:spPr>
+          <a:xfrm>
+            <a:off x="4709160" y="2423160"/>
+            <a:ext cx="3383280" cy="868680"/>
+          </a:xfrm>
+          <a:prstGeom prst="rect">
+            <a:avLst/>
+          </a:prstGeom>
+          <a:noFill/>
+        </p:spPr>
+        <p:txBody>
+          <a:bodyPr wrap="square" lIns="0" rIns="0" tIns="0" bIns="0" anchor="ctr">
+            <a:spAutoFit/>
+          </a:bodyPr>
+          <a:lstStyle/>
+          <a:p>
+            <a:pPr algn="ctr"/>
+            <a:r>
+              <a:rPr sz="4600" b="1" i="0">
+                <a:solidFill>
+                  <a:srgbClr val="E69F00"/>
+                </a:solidFill>
+                <a:latin typeface="Calibri"/>
+              </a:rPr>
+              <a:t>12</a:t>
+            </a:r>
+          </a:p>
+        </p:txBody>
+      </p:sp>
+      <p:sp>
+        <p:nvSpPr>
+          <p:cNvPr id="11" name="TextBox 10"/>
+          <p:cNvSpPr txBox="1"/>
+          <p:nvPr/>
+        </p:nvSpPr>
+        <p:spPr>
+          <a:xfrm>
+            <a:off x="4846320" y="3337560"/>
+            <a:ext cx="3108960" cy="594360"/>
+          </a:xfrm>
+          <a:prstGeom prst="rect">
+            <a:avLst/>
+          </a:prstGeom>
+          <a:noFill/>
+        </p:spPr>
+        <p:txBody>
+          <a:bodyPr wrap="square" lIns="0" rIns="0" tIns="0" bIns="0">
+            <a:spAutoFit/>
+          </a:bodyPr>
+          <a:lstStyle/>
+          <a:p>
+            <a:pPr algn="ctr"/>
+            <a:r>
+              <a:rPr sz="1200" b="0" i="0">
+                <a:solidFill>
+                  <a:srgbClr val="6077C7"/>
+                </a:solidFill>
+                <a:latin typeface="Calibri"/>
+              </a:rPr>
+              <a:t>compaction strategies tested</a:t>
+            </a:r>
+          </a:p>
+        </p:txBody>
+      </p:sp>
+      <p:sp>
+        <p:nvSpPr>
+          <p:cNvPr id="12" name="Rectangle 11"/>
+          <p:cNvSpPr/>
+          <p:nvPr/>
+        </p:nvSpPr>
+        <p:spPr>
+          <a:xfrm>
+            <a:off x="8321040" y="2331720"/>
+            <a:ext cx="3383280" cy="1691640"/>
+          </a:xfrm>
+          <a:prstGeom prst="rect">
+            <a:avLst/>
+          </a:prstGeom>
+          <a:solidFill>
+            <a:srgbClr val="1E3A8A"/>
+          </a:solidFill>
+          <a:ln>
+            <a:noFill/>
+          </a:ln>
+          <a:effectLst/>
+        </p:spPr>
+        <p:style>
+          <a:lnRef idx="1">
+            <a:schemeClr val="accent1"/>
+          </a:lnRef>
+          <a:fillRef idx="3">
+            <a:schemeClr val="accent1"/>
+          </a:fillRef>
+          <a:effectRef idx="2">
+            <a:schemeClr val="accent1"/>
+          </a:effectRef>
+          <a:fontRef idx="minor">
+            <a:schemeClr val="lt1"/>
+          </a:fontRef>
+        </p:style>
+        <p:txBody>
+          <a:bodyPr rtlCol="0" anchor="ctr"/>
+          <a:lstStyle/>
+          <a:p>
+            <a:pPr algn="ctr"/>
+          </a:p>
+        </p:txBody>
+      </p:sp>
+      <p:sp>
+        <p:nvSpPr>
+          <p:cNvPr id="13" name="TextBox 12"/>
+          <p:cNvSpPr txBox="1"/>
+          <p:nvPr/>
+        </p:nvSpPr>
+        <p:spPr>
+          <a:xfrm>
+            <a:off x="8321040" y="2423160"/>
+            <a:ext cx="3383280" cy="868680"/>
+          </a:xfrm>
+          <a:prstGeom prst="rect">
+            <a:avLst/>
+          </a:prstGeom>
+          <a:noFill/>
+        </p:spPr>
+        <p:txBody>
+          <a:bodyPr wrap="square" lIns="0" rIns="0" tIns="0" bIns="0" anchor="ctr">
+            <a:spAutoFit/>
+          </a:bodyPr>
+          <a:lstStyle/>
+          <a:p>
+            <a:pPr algn="ctr"/>
+            <a:r>
+              <a:rPr sz="4600" b="1" i="0">
+                <a:solidFill>
+                  <a:srgbClr val="E69F00"/>
+                </a:solidFill>
+                <a:latin typeface="Calibri"/>
+              </a:rPr>
+              <a:t>15K+</a:t>
+            </a:r>
+          </a:p>
+        </p:txBody>
+      </p:sp>
+      <p:sp>
+        <p:nvSpPr>
           <p:cNvPr id="14" name="TextBox 13"/>
           <p:cNvSpPr txBox="1"/>
           <p:nvPr/>
         </p:nvSpPr>
         <p:spPr>
           <a:xfrm>
-            <a:off x="640080" y="5623560"/>
-            <a:ext cx="10972800" cy="457200"/>
+            <a:off x="8458200" y="3337560"/>
+            <a:ext cx="3108960" cy="594360"/>
+          </a:xfrm>
+          <a:prstGeom prst="rect">
+            <a:avLst/>
+          </a:prstGeom>
+          <a:noFill/>
+        </p:spPr>
+        <p:txBody>
+          <a:bodyPr wrap="square" lIns="0" rIns="0" tIns="0" bIns="0">
+            <a:spAutoFit/>
+          </a:bodyPr>
+          <a:lstStyle/>
+          <a:p>
+            <a:pPr algn="ctr"/>
+            <a:r>
+              <a:rPr sz="1200" b="0" i="0">
+                <a:solidFill>
+                  <a:srgbClr val="6077C7"/>
+                </a:solidFill>
+                <a:latin typeface="Calibri"/>
+              </a:rPr>
+              <a:t>agent steps recorded</a:t>
+            </a:r>
+          </a:p>
+        </p:txBody>
+      </p:sp>
+      <p:sp>
+        <p:nvSpPr>
+          <p:cNvPr id="15" name="Rectangle 14"/>
+          <p:cNvSpPr/>
+          <p:nvPr/>
+        </p:nvSpPr>
+        <p:spPr>
+          <a:xfrm>
+            <a:off x="1097280" y="4206240"/>
+            <a:ext cx="3383280" cy="1691640"/>
+          </a:xfrm>
+          <a:prstGeom prst="rect">
+            <a:avLst/>
+          </a:prstGeom>
+          <a:solidFill>
+            <a:srgbClr val="1E3A8A"/>
+          </a:solidFill>
+          <a:ln>
+            <a:noFill/>
+          </a:ln>
+          <a:effectLst/>
+        </p:spPr>
+        <p:style>
+          <a:lnRef idx="1">
+            <a:schemeClr val="accent1"/>
+          </a:lnRef>
+          <a:fillRef idx="3">
+            <a:schemeClr val="accent1"/>
+          </a:fillRef>
+          <a:effectRef idx="2">
+            <a:schemeClr val="accent1"/>
+          </a:effectRef>
+          <a:fontRef idx="minor">
+            <a:schemeClr val="lt1"/>
+          </a:fontRef>
+        </p:style>
+        <p:txBody>
+          <a:bodyPr rtlCol="0" anchor="ctr"/>
+          <a:lstStyle/>
+          <a:p>
+            <a:pPr algn="ctr"/>
+          </a:p>
+        </p:txBody>
+      </p:sp>
+      <p:sp>
+        <p:nvSpPr>
+          <p:cNvPr id="16" name="TextBox 15"/>
+          <p:cNvSpPr txBox="1"/>
+          <p:nvPr/>
+        </p:nvSpPr>
+        <p:spPr>
+          <a:xfrm>
+            <a:off x="1097280" y="4297679"/>
+            <a:ext cx="3383280" cy="868680"/>
           </a:xfrm>
           <a:prstGeom prst="rect">
             <a:avLst/>
@@ -3905,20 +7385,318 @@
           <a:p>
             <a:pPr algn="ctr"/>
             <a:r>
-              <a:rPr sz="1500" b="0" i="1">
-                <a:solidFill>
-                  <a:srgbClr val="FFFFFF"/>
-                </a:solidFill>
-                <a:latin typeface="Calibri"/>
-              </a:rPr>
-              <a:t>Reasonable expectation: the detailed Post-it should help the AI more.</a:t>
-            </a:r>
-          </a:p>
-        </p:txBody>
-      </p:sp>
-      <p:sp>
-        <p:nvSpPr>
-          <p:cNvPr id="15" name="TextBox 14"/>
+              <a:rPr sz="4600" b="1" i="0">
+                <a:solidFill>
+                  <a:srgbClr val="E69F00"/>
+                </a:solidFill>
+                <a:latin typeface="Calibri"/>
+              </a:rPr>
+              <a:t>3</a:t>
+            </a:r>
+          </a:p>
+        </p:txBody>
+      </p:sp>
+      <p:sp>
+        <p:nvSpPr>
+          <p:cNvPr id="17" name="TextBox 16"/>
+          <p:cNvSpPr txBox="1"/>
+          <p:nvPr/>
+        </p:nvSpPr>
+        <p:spPr>
+          <a:xfrm>
+            <a:off x="1234439" y="5212079"/>
+            <a:ext cx="3108960" cy="594360"/>
+          </a:xfrm>
+          <a:prstGeom prst="rect">
+            <a:avLst/>
+          </a:prstGeom>
+          <a:noFill/>
+        </p:spPr>
+        <p:txBody>
+          <a:bodyPr wrap="square" lIns="0" rIns="0" tIns="0" bIns="0">
+            <a:spAutoFit/>
+          </a:bodyPr>
+          <a:lstStyle/>
+          <a:p>
+            <a:pPr algn="ctr"/>
+            <a:r>
+              <a:rPr sz="1200" b="0" i="0">
+                <a:solidFill>
+                  <a:srgbClr val="6077C7"/>
+                </a:solidFill>
+                <a:latin typeface="Calibri"/>
+              </a:rPr>
+              <a:t>benchmarks · SWE-bench Lite, τ-bench, long-doc</a:t>
+            </a:r>
+          </a:p>
+        </p:txBody>
+      </p:sp>
+      <p:sp>
+        <p:nvSpPr>
+          <p:cNvPr id="18" name="Rectangle 17"/>
+          <p:cNvSpPr/>
+          <p:nvPr/>
+        </p:nvSpPr>
+        <p:spPr>
+          <a:xfrm>
+            <a:off x="4709160" y="4206240"/>
+            <a:ext cx="3383280" cy="1691640"/>
+          </a:xfrm>
+          <a:prstGeom prst="rect">
+            <a:avLst/>
+          </a:prstGeom>
+          <a:solidFill>
+            <a:srgbClr val="1E3A8A"/>
+          </a:solidFill>
+          <a:ln>
+            <a:noFill/>
+          </a:ln>
+          <a:effectLst/>
+        </p:spPr>
+        <p:style>
+          <a:lnRef idx="1">
+            <a:schemeClr val="accent1"/>
+          </a:lnRef>
+          <a:fillRef idx="3">
+            <a:schemeClr val="accent1"/>
+          </a:fillRef>
+          <a:effectRef idx="2">
+            <a:schemeClr val="accent1"/>
+          </a:effectRef>
+          <a:fontRef idx="minor">
+            <a:schemeClr val="lt1"/>
+          </a:fontRef>
+        </p:style>
+        <p:txBody>
+          <a:bodyPr rtlCol="0" anchor="ctr"/>
+          <a:lstStyle/>
+          <a:p>
+            <a:pPr algn="ctr"/>
+          </a:p>
+        </p:txBody>
+      </p:sp>
+      <p:sp>
+        <p:nvSpPr>
+          <p:cNvPr id="19" name="TextBox 18"/>
+          <p:cNvSpPr txBox="1"/>
+          <p:nvPr/>
+        </p:nvSpPr>
+        <p:spPr>
+          <a:xfrm>
+            <a:off x="4709160" y="4297679"/>
+            <a:ext cx="3383280" cy="868680"/>
+          </a:xfrm>
+          <a:prstGeom prst="rect">
+            <a:avLst/>
+          </a:prstGeom>
+          <a:noFill/>
+        </p:spPr>
+        <p:txBody>
+          <a:bodyPr wrap="square" lIns="0" rIns="0" tIns="0" bIns="0" anchor="ctr">
+            <a:spAutoFit/>
+          </a:bodyPr>
+          <a:lstStyle/>
+          <a:p>
+            <a:pPr algn="ctr"/>
+            <a:r>
+              <a:rPr sz="4600" b="1" i="0">
+                <a:solidFill>
+                  <a:srgbClr val="E69F00"/>
+                </a:solidFill>
+                <a:latin typeface="Calibri"/>
+              </a:rPr>
+              <a:t>500M+</a:t>
+            </a:r>
+          </a:p>
+        </p:txBody>
+      </p:sp>
+      <p:sp>
+        <p:nvSpPr>
+          <p:cNvPr id="20" name="TextBox 19"/>
+          <p:cNvSpPr txBox="1"/>
+          <p:nvPr/>
+        </p:nvSpPr>
+        <p:spPr>
+          <a:xfrm>
+            <a:off x="4846320" y="5212079"/>
+            <a:ext cx="3108960" cy="594360"/>
+          </a:xfrm>
+          <a:prstGeom prst="rect">
+            <a:avLst/>
+          </a:prstGeom>
+          <a:noFill/>
+        </p:spPr>
+        <p:txBody>
+          <a:bodyPr wrap="square" lIns="0" rIns="0" tIns="0" bIns="0">
+            <a:spAutoFit/>
+          </a:bodyPr>
+          <a:lstStyle/>
+          <a:p>
+            <a:pPr algn="ctr"/>
+            <a:r>
+              <a:rPr sz="1200" b="0" i="0">
+                <a:solidFill>
+                  <a:srgbClr val="6077C7"/>
+                </a:solidFill>
+                <a:latin typeface="Calibri"/>
+              </a:rPr>
+              <a:t>input tokens (cached + uncached)</a:t>
+            </a:r>
+          </a:p>
+        </p:txBody>
+      </p:sp>
+      <p:sp>
+        <p:nvSpPr>
+          <p:cNvPr id="21" name="Rectangle 20"/>
+          <p:cNvSpPr/>
+          <p:nvPr/>
+        </p:nvSpPr>
+        <p:spPr>
+          <a:xfrm>
+            <a:off x="8321040" y="4206240"/>
+            <a:ext cx="3383280" cy="1691640"/>
+          </a:xfrm>
+          <a:prstGeom prst="rect">
+            <a:avLst/>
+          </a:prstGeom>
+          <a:solidFill>
+            <a:srgbClr val="1E3A8A"/>
+          </a:solidFill>
+          <a:ln>
+            <a:noFill/>
+          </a:ln>
+          <a:effectLst/>
+        </p:spPr>
+        <p:style>
+          <a:lnRef idx="1">
+            <a:schemeClr val="accent1"/>
+          </a:lnRef>
+          <a:fillRef idx="3">
+            <a:schemeClr val="accent1"/>
+          </a:fillRef>
+          <a:effectRef idx="2">
+            <a:schemeClr val="accent1"/>
+          </a:effectRef>
+          <a:fontRef idx="minor">
+            <a:schemeClr val="lt1"/>
+          </a:fontRef>
+        </p:style>
+        <p:txBody>
+          <a:bodyPr rtlCol="0" anchor="ctr"/>
+          <a:lstStyle/>
+          <a:p>
+            <a:pPr algn="ctr"/>
+          </a:p>
+        </p:txBody>
+      </p:sp>
+      <p:sp>
+        <p:nvSpPr>
+          <p:cNvPr id="22" name="TextBox 21"/>
+          <p:cNvSpPr txBox="1"/>
+          <p:nvPr/>
+        </p:nvSpPr>
+        <p:spPr>
+          <a:xfrm>
+            <a:off x="8321040" y="4297679"/>
+            <a:ext cx="3383280" cy="868680"/>
+          </a:xfrm>
+          <a:prstGeom prst="rect">
+            <a:avLst/>
+          </a:prstGeom>
+          <a:noFill/>
+        </p:spPr>
+        <p:txBody>
+          <a:bodyPr wrap="square" lIns="0" rIns="0" tIns="0" bIns="0" anchor="ctr">
+            <a:spAutoFit/>
+          </a:bodyPr>
+          <a:lstStyle/>
+          <a:p>
+            <a:pPr algn="ctr"/>
+            <a:r>
+              <a:rPr sz="4600" b="1" i="0">
+                <a:solidFill>
+                  <a:srgbClr val="E69F00"/>
+                </a:solidFill>
+                <a:latin typeface="Calibri"/>
+              </a:rPr>
+              <a:t>25+</a:t>
+            </a:r>
+          </a:p>
+        </p:txBody>
+      </p:sp>
+      <p:sp>
+        <p:nvSpPr>
+          <p:cNvPr id="23" name="TextBox 22"/>
+          <p:cNvSpPr txBox="1"/>
+          <p:nvPr/>
+        </p:nvSpPr>
+        <p:spPr>
+          <a:xfrm>
+            <a:off x="8458200" y="5212079"/>
+            <a:ext cx="3108960" cy="594360"/>
+          </a:xfrm>
+          <a:prstGeom prst="rect">
+            <a:avLst/>
+          </a:prstGeom>
+          <a:noFill/>
+        </p:spPr>
+        <p:txBody>
+          <a:bodyPr wrap="square" lIns="0" rIns="0" tIns="0" bIns="0">
+            <a:spAutoFit/>
+          </a:bodyPr>
+          <a:lstStyle/>
+          <a:p>
+            <a:pPr algn="ctr"/>
+            <a:r>
+              <a:rPr sz="1200" b="0" i="0">
+                <a:solidFill>
+                  <a:srgbClr val="6077C7"/>
+                </a:solidFill>
+                <a:latin typeface="Calibri"/>
+              </a:rPr>
+              <a:t>experimental phases</a:t>
+            </a:r>
+          </a:p>
+        </p:txBody>
+      </p:sp>
+      <p:sp>
+        <p:nvSpPr>
+          <p:cNvPr id="24" name="TextBox 23"/>
+          <p:cNvSpPr txBox="1"/>
+          <p:nvPr/>
+        </p:nvSpPr>
+        <p:spPr>
+          <a:xfrm>
+            <a:off x="1097280" y="6126480"/>
+            <a:ext cx="10058400" cy="365760"/>
+          </a:xfrm>
+          <a:prstGeom prst="rect">
+            <a:avLst/>
+          </a:prstGeom>
+          <a:noFill/>
+        </p:spPr>
+        <p:txBody>
+          <a:bodyPr wrap="square" lIns="0" rIns="0" tIns="0" bIns="0">
+            <a:spAutoFit/>
+          </a:bodyPr>
+          <a:lstStyle/>
+          <a:p>
+            <a:pPr algn="l"/>
+            <a:r>
+              <a:rPr sz="1100" b="0" i="1">
+                <a:solidFill>
+                  <a:srgbClr val="6077C7"/>
+                </a:solidFill>
+                <a:latin typeface="Calibri"/>
+              </a:rPr>
+              <a:t>Compute  ·  Anthropic Claude Haiku 4.5 (API)  ·  Qwen3-30B-A3B on Blackwell + SEAS cluster + Modal</a:t>
+            </a:r>
+          </a:p>
+        </p:txBody>
+      </p:sp>
+      <p:sp>
+        <p:nvSpPr>
+          <p:cNvPr id="25" name="TextBox 24"/>
           <p:cNvSpPr txBox="1"/>
           <p:nvPr/>
         </p:nvSpPr>
@@ -3942,7 +7720,7 @@
             <a:r>
               <a:rPr sz="1000" b="0" i="0">
                 <a:solidFill>
-                  <a:srgbClr val="6B7280"/>
+                  <a:srgbClr val="6077C7"/>
                 </a:solidFill>
                 <a:latin typeface="Calibri"/>
               </a:rPr>
@@ -3953,7 +7731,7 @@
       </p:sp>
       <p:sp>
         <p:nvSpPr>
-          <p:cNvPr id="16" name="TextBox 15"/>
+          <p:cNvPr id="26" name="TextBox 25"/>
           <p:cNvSpPr txBox="1"/>
           <p:nvPr/>
         </p:nvSpPr>
@@ -3977,11 +7755,11 @@
             <a:r>
               <a:rPr sz="1000" b="0" i="0">
                 <a:solidFill>
-                  <a:srgbClr val="6B7280"/>
-                </a:solidFill>
-                <a:latin typeface="Calibri"/>
-              </a:rPr>
-              <a:t>Slide 2 / 5</a:t>
+                  <a:srgbClr val="6077C7"/>
+                </a:solidFill>
+                <a:latin typeface="Calibri"/>
+              </a:rPr>
+              <a:t>2 / 17</a:t>
             </a:r>
           </a:p>
         </p:txBody>
@@ -4078,7 +7856,7 @@
                 </a:solidFill>
                 <a:latin typeface="Calibri"/>
               </a:rPr>
-              <a:t>Same bug. Same agent. Four runs. Only the Post-it changed.</a:t>
+              <a:t>The problem: agent memory grows step by step.</a:t>
             </a:r>
           </a:p>
         </p:txBody>
@@ -4113,14 +7891,678 @@
                 </a:solidFill>
                 <a:latin typeface="Calibri"/>
               </a:rPr>
-              <a:t>pytest-7490 — a real bug from the pytest test framework.</a:t>
+              <a:t>Each tool call (read file, run test, search) adds 100s–1000s of tokens. Eventually we hit the model's limit.</a:t>
+            </a:r>
+          </a:p>
+        </p:txBody>
+      </p:sp>
+      <p:sp>
+        <p:nvSpPr>
+          <p:cNvPr id="5" name="Rectangle 4"/>
+          <p:cNvSpPr/>
+          <p:nvPr/>
+        </p:nvSpPr>
+        <p:spPr>
+          <a:xfrm>
+            <a:off x="548640" y="1691640"/>
+            <a:ext cx="3611880" cy="2331720"/>
+          </a:xfrm>
+          <a:prstGeom prst="rect">
+            <a:avLst/>
+          </a:prstGeom>
+          <a:solidFill>
+            <a:srgbClr val="FFFFFF"/>
+          </a:solidFill>
+          <a:ln w="19050">
+            <a:solidFill>
+              <a:srgbClr val="1E3A8A"/>
+            </a:solidFill>
+          </a:ln>
+          <a:effectLst/>
+        </p:spPr>
+        <p:style>
+          <a:lnRef idx="1">
+            <a:schemeClr val="accent1"/>
+          </a:lnRef>
+          <a:fillRef idx="3">
+            <a:schemeClr val="accent1"/>
+          </a:fillRef>
+          <a:effectRef idx="2">
+            <a:schemeClr val="accent1"/>
+          </a:effectRef>
+          <a:fontRef idx="minor">
+            <a:schemeClr val="lt1"/>
+          </a:fontRef>
+        </p:style>
+        <p:txBody>
+          <a:bodyPr rtlCol="0" anchor="ctr"/>
+          <a:lstStyle/>
+          <a:p>
+            <a:pPr algn="ctr"/>
+          </a:p>
+        </p:txBody>
+      </p:sp>
+      <p:sp>
+        <p:nvSpPr>
+          <p:cNvPr id="6" name="Rectangle 5"/>
+          <p:cNvSpPr/>
+          <p:nvPr/>
+        </p:nvSpPr>
+        <p:spPr>
+          <a:xfrm>
+            <a:off x="548640" y="1691640"/>
+            <a:ext cx="3611880" cy="502920"/>
+          </a:xfrm>
+          <a:prstGeom prst="rect">
+            <a:avLst/>
+          </a:prstGeom>
+          <a:solidFill>
+            <a:srgbClr val="1E3A8A"/>
+          </a:solidFill>
+          <a:ln>
+            <a:noFill/>
+          </a:ln>
+          <a:effectLst/>
+        </p:spPr>
+        <p:style>
+          <a:lnRef idx="1">
+            <a:schemeClr val="accent1"/>
+          </a:lnRef>
+          <a:fillRef idx="3">
+            <a:schemeClr val="accent1"/>
+          </a:fillRef>
+          <a:effectRef idx="2">
+            <a:schemeClr val="accent1"/>
+          </a:effectRef>
+          <a:fontRef idx="minor">
+            <a:schemeClr val="lt1"/>
+          </a:fontRef>
+        </p:style>
+        <p:txBody>
+          <a:bodyPr rtlCol="0" anchor="ctr"/>
+          <a:lstStyle/>
+          <a:p>
+            <a:pPr algn="ctr"/>
+          </a:p>
+        </p:txBody>
+      </p:sp>
+      <p:sp>
+        <p:nvSpPr>
+          <p:cNvPr id="7" name="TextBox 6"/>
+          <p:cNvSpPr txBox="1"/>
+          <p:nvPr/>
+        </p:nvSpPr>
+        <p:spPr>
+          <a:xfrm>
+            <a:off x="777240" y="1737360"/>
+            <a:ext cx="548640" cy="457200"/>
+          </a:xfrm>
+          <a:prstGeom prst="rect">
+            <a:avLst/>
+          </a:prstGeom>
+          <a:noFill/>
+        </p:spPr>
+        <p:txBody>
+          <a:bodyPr wrap="square" lIns="0" rIns="0" tIns="0" bIns="0" anchor="ctr">
+            <a:spAutoFit/>
+          </a:bodyPr>
+          <a:lstStyle/>
+          <a:p>
+            <a:pPr algn="l"/>
+            <a:r>
+              <a:rPr sz="2000" b="1" i="0">
+                <a:solidFill>
+                  <a:srgbClr val="E69F00"/>
+                </a:solidFill>
+                <a:latin typeface="Calibri"/>
+              </a:rPr>
+              <a:t>1</a:t>
+            </a:r>
+          </a:p>
+        </p:txBody>
+      </p:sp>
+      <p:sp>
+        <p:nvSpPr>
+          <p:cNvPr id="8" name="TextBox 7"/>
+          <p:cNvSpPr txBox="1"/>
+          <p:nvPr/>
+        </p:nvSpPr>
+        <p:spPr>
+          <a:xfrm>
+            <a:off x="1417319" y="1737360"/>
+            <a:ext cx="2606040" cy="457200"/>
+          </a:xfrm>
+          <a:prstGeom prst="rect">
+            <a:avLst/>
+          </a:prstGeom>
+          <a:noFill/>
+        </p:spPr>
+        <p:txBody>
+          <a:bodyPr wrap="square" lIns="0" rIns="0" tIns="0" bIns="0" anchor="ctr">
+            <a:spAutoFit/>
+          </a:bodyPr>
+          <a:lstStyle/>
+          <a:p>
+            <a:pPr algn="l"/>
+            <a:r>
+              <a:rPr sz="1400" b="1" i="0">
+                <a:solidFill>
+                  <a:srgbClr val="FFFFFF"/>
+                </a:solidFill>
+                <a:latin typeface="Calibri"/>
+              </a:rPr>
+              <a:t>Drop old observations</a:t>
+            </a:r>
+          </a:p>
+        </p:txBody>
+      </p:sp>
+      <p:sp>
+        <p:nvSpPr>
+          <p:cNvPr id="9" name="TextBox 8"/>
+          <p:cNvSpPr txBox="1"/>
+          <p:nvPr/>
+        </p:nvSpPr>
+        <p:spPr>
+          <a:xfrm>
+            <a:off x="822959" y="2468880"/>
+            <a:ext cx="3063240" cy="1417319"/>
+          </a:xfrm>
+          <a:prstGeom prst="rect">
+            <a:avLst/>
+          </a:prstGeom>
+          <a:noFill/>
+        </p:spPr>
+        <p:txBody>
+          <a:bodyPr wrap="square" lIns="0" rIns="0" tIns="0" bIns="0">
+            <a:spAutoFit/>
+          </a:bodyPr>
+          <a:lstStyle/>
+          <a:p>
+            <a:pPr algn="l"/>
+            <a:r>
+              <a:rPr sz="1400" b="0" i="0">
+                <a:solidFill>
+                  <a:srgbClr val="1F2937"/>
+                </a:solidFill>
+                <a:latin typeface="Calibri"/>
+              </a:rPr>
+              <a:t>Pick which past tool outputs to evict from the running context.</a:t>
+            </a:r>
+          </a:p>
+        </p:txBody>
+      </p:sp>
+      <p:sp>
+        <p:nvSpPr>
+          <p:cNvPr id="10" name="Rectangle 9"/>
+          <p:cNvSpPr/>
+          <p:nvPr/>
+        </p:nvSpPr>
+        <p:spPr>
+          <a:xfrm>
+            <a:off x="4389120" y="1691640"/>
+            <a:ext cx="3611880" cy="2331720"/>
+          </a:xfrm>
+          <a:prstGeom prst="rect">
+            <a:avLst/>
+          </a:prstGeom>
+          <a:solidFill>
+            <a:srgbClr val="FFFFFF"/>
+          </a:solidFill>
+          <a:ln w="19050">
+            <a:solidFill>
+              <a:srgbClr val="1E3A8A"/>
+            </a:solidFill>
+          </a:ln>
+          <a:effectLst/>
+        </p:spPr>
+        <p:style>
+          <a:lnRef idx="1">
+            <a:schemeClr val="accent1"/>
+          </a:lnRef>
+          <a:fillRef idx="3">
+            <a:schemeClr val="accent1"/>
+          </a:fillRef>
+          <a:effectRef idx="2">
+            <a:schemeClr val="accent1"/>
+          </a:effectRef>
+          <a:fontRef idx="minor">
+            <a:schemeClr val="lt1"/>
+          </a:fontRef>
+        </p:style>
+        <p:txBody>
+          <a:bodyPr rtlCol="0" anchor="ctr"/>
+          <a:lstStyle/>
+          <a:p>
+            <a:pPr algn="ctr"/>
+          </a:p>
+        </p:txBody>
+      </p:sp>
+      <p:sp>
+        <p:nvSpPr>
+          <p:cNvPr id="11" name="Rectangle 10"/>
+          <p:cNvSpPr/>
+          <p:nvPr/>
+        </p:nvSpPr>
+        <p:spPr>
+          <a:xfrm>
+            <a:off x="4389120" y="1691640"/>
+            <a:ext cx="3611880" cy="502920"/>
+          </a:xfrm>
+          <a:prstGeom prst="rect">
+            <a:avLst/>
+          </a:prstGeom>
+          <a:solidFill>
+            <a:srgbClr val="1E3A8A"/>
+          </a:solidFill>
+          <a:ln>
+            <a:noFill/>
+          </a:ln>
+          <a:effectLst/>
+        </p:spPr>
+        <p:style>
+          <a:lnRef idx="1">
+            <a:schemeClr val="accent1"/>
+          </a:lnRef>
+          <a:fillRef idx="3">
+            <a:schemeClr val="accent1"/>
+          </a:fillRef>
+          <a:effectRef idx="2">
+            <a:schemeClr val="accent1"/>
+          </a:effectRef>
+          <a:fontRef idx="minor">
+            <a:schemeClr val="lt1"/>
+          </a:fontRef>
+        </p:style>
+        <p:txBody>
+          <a:bodyPr rtlCol="0" anchor="ctr"/>
+          <a:lstStyle/>
+          <a:p>
+            <a:pPr algn="ctr"/>
+          </a:p>
+        </p:txBody>
+      </p:sp>
+      <p:sp>
+        <p:nvSpPr>
+          <p:cNvPr id="12" name="TextBox 11"/>
+          <p:cNvSpPr txBox="1"/>
+          <p:nvPr/>
+        </p:nvSpPr>
+        <p:spPr>
+          <a:xfrm>
+            <a:off x="4617720" y="1737360"/>
+            <a:ext cx="548640" cy="457200"/>
+          </a:xfrm>
+          <a:prstGeom prst="rect">
+            <a:avLst/>
+          </a:prstGeom>
+          <a:noFill/>
+        </p:spPr>
+        <p:txBody>
+          <a:bodyPr wrap="square" lIns="0" rIns="0" tIns="0" bIns="0" anchor="ctr">
+            <a:spAutoFit/>
+          </a:bodyPr>
+          <a:lstStyle/>
+          <a:p>
+            <a:pPr algn="l"/>
+            <a:r>
+              <a:rPr sz="2000" b="1" i="0">
+                <a:solidFill>
+                  <a:srgbClr val="E69F00"/>
+                </a:solidFill>
+                <a:latin typeface="Calibri"/>
+              </a:rPr>
+              <a:t>2</a:t>
+            </a:r>
+          </a:p>
+        </p:txBody>
+      </p:sp>
+      <p:sp>
+        <p:nvSpPr>
+          <p:cNvPr id="13" name="TextBox 12"/>
+          <p:cNvSpPr txBox="1"/>
+          <p:nvPr/>
+        </p:nvSpPr>
+        <p:spPr>
+          <a:xfrm>
+            <a:off x="5257800" y="1737360"/>
+            <a:ext cx="2606040" cy="457200"/>
+          </a:xfrm>
+          <a:prstGeom prst="rect">
+            <a:avLst/>
+          </a:prstGeom>
+          <a:noFill/>
+        </p:spPr>
+        <p:txBody>
+          <a:bodyPr wrap="square" lIns="0" rIns="0" tIns="0" bIns="0" anchor="ctr">
+            <a:spAutoFit/>
+          </a:bodyPr>
+          <a:lstStyle/>
+          <a:p>
+            <a:pPr algn="l"/>
+            <a:r>
+              <a:rPr sz="1400" b="1" i="0">
+                <a:solidFill>
+                  <a:srgbClr val="FFFFFF"/>
+                </a:solidFill>
+                <a:latin typeface="Calibri"/>
+              </a:rPr>
+              <a:t>Leave a placeholder</a:t>
+            </a:r>
+          </a:p>
+        </p:txBody>
+      </p:sp>
+      <p:sp>
+        <p:nvSpPr>
+          <p:cNvPr id="14" name="TextBox 13"/>
+          <p:cNvSpPr txBox="1"/>
+          <p:nvPr/>
+        </p:nvSpPr>
+        <p:spPr>
+          <a:xfrm>
+            <a:off x="4663440" y="2468880"/>
+            <a:ext cx="3063240" cy="1417319"/>
+          </a:xfrm>
+          <a:prstGeom prst="rect">
+            <a:avLst/>
+          </a:prstGeom>
+          <a:noFill/>
+        </p:spPr>
+        <p:txBody>
+          <a:bodyPr wrap="square" lIns="0" rIns="0" tIns="0" bIns="0">
+            <a:spAutoFit/>
+          </a:bodyPr>
+          <a:lstStyle/>
+          <a:p>
+            <a:pPr algn="l"/>
+            <a:r>
+              <a:rPr sz="1400" b="0" i="0">
+                <a:solidFill>
+                  <a:srgbClr val="1F2937"/>
+                </a:solidFill>
+                <a:latin typeface="Calibri"/>
+              </a:rPr>
+              <a:t>Replace the dropped content with a short marker the agent can still see.</a:t>
+            </a:r>
+          </a:p>
+        </p:txBody>
+      </p:sp>
+      <p:sp>
+        <p:nvSpPr>
+          <p:cNvPr id="15" name="Rectangle 14"/>
+          <p:cNvSpPr/>
+          <p:nvPr/>
+        </p:nvSpPr>
+        <p:spPr>
+          <a:xfrm>
+            <a:off x="8229600" y="1691640"/>
+            <a:ext cx="3611880" cy="2331720"/>
+          </a:xfrm>
+          <a:prstGeom prst="rect">
+            <a:avLst/>
+          </a:prstGeom>
+          <a:solidFill>
+            <a:srgbClr val="FFFFFF"/>
+          </a:solidFill>
+          <a:ln w="19050">
+            <a:solidFill>
+              <a:srgbClr val="1E3A8A"/>
+            </a:solidFill>
+          </a:ln>
+          <a:effectLst/>
+        </p:spPr>
+        <p:style>
+          <a:lnRef idx="1">
+            <a:schemeClr val="accent1"/>
+          </a:lnRef>
+          <a:fillRef idx="3">
+            <a:schemeClr val="accent1"/>
+          </a:fillRef>
+          <a:effectRef idx="2">
+            <a:schemeClr val="accent1"/>
+          </a:effectRef>
+          <a:fontRef idx="minor">
+            <a:schemeClr val="lt1"/>
+          </a:fontRef>
+        </p:style>
+        <p:txBody>
+          <a:bodyPr rtlCol="0" anchor="ctr"/>
+          <a:lstStyle/>
+          <a:p>
+            <a:pPr algn="ctr"/>
+          </a:p>
+        </p:txBody>
+      </p:sp>
+      <p:sp>
+        <p:nvSpPr>
+          <p:cNvPr id="16" name="Rectangle 15"/>
+          <p:cNvSpPr/>
+          <p:nvPr/>
+        </p:nvSpPr>
+        <p:spPr>
+          <a:xfrm>
+            <a:off x="8229600" y="1691640"/>
+            <a:ext cx="3611880" cy="502920"/>
+          </a:xfrm>
+          <a:prstGeom prst="rect">
+            <a:avLst/>
+          </a:prstGeom>
+          <a:solidFill>
+            <a:srgbClr val="1E3A8A"/>
+          </a:solidFill>
+          <a:ln>
+            <a:noFill/>
+          </a:ln>
+          <a:effectLst/>
+        </p:spPr>
+        <p:style>
+          <a:lnRef idx="1">
+            <a:schemeClr val="accent1"/>
+          </a:lnRef>
+          <a:fillRef idx="3">
+            <a:schemeClr val="accent1"/>
+          </a:fillRef>
+          <a:effectRef idx="2">
+            <a:schemeClr val="accent1"/>
+          </a:effectRef>
+          <a:fontRef idx="minor">
+            <a:schemeClr val="lt1"/>
+          </a:fontRef>
+        </p:style>
+        <p:txBody>
+          <a:bodyPr rtlCol="0" anchor="ctr"/>
+          <a:lstStyle/>
+          <a:p>
+            <a:pPr algn="ctr"/>
+          </a:p>
+        </p:txBody>
+      </p:sp>
+      <p:sp>
+        <p:nvSpPr>
+          <p:cNvPr id="17" name="TextBox 16"/>
+          <p:cNvSpPr txBox="1"/>
+          <p:nvPr/>
+        </p:nvSpPr>
+        <p:spPr>
+          <a:xfrm>
+            <a:off x="8458200" y="1737360"/>
+            <a:ext cx="548640" cy="457200"/>
+          </a:xfrm>
+          <a:prstGeom prst="rect">
+            <a:avLst/>
+          </a:prstGeom>
+          <a:noFill/>
+        </p:spPr>
+        <p:txBody>
+          <a:bodyPr wrap="square" lIns="0" rIns="0" tIns="0" bIns="0" anchor="ctr">
+            <a:spAutoFit/>
+          </a:bodyPr>
+          <a:lstStyle/>
+          <a:p>
+            <a:pPr algn="l"/>
+            <a:r>
+              <a:rPr sz="2000" b="1" i="0">
+                <a:solidFill>
+                  <a:srgbClr val="E69F00"/>
+                </a:solidFill>
+                <a:latin typeface="Calibri"/>
+              </a:rPr>
+              <a:t>3</a:t>
+            </a:r>
+          </a:p>
+        </p:txBody>
+      </p:sp>
+      <p:sp>
+        <p:nvSpPr>
+          <p:cNvPr id="18" name="TextBox 17"/>
+          <p:cNvSpPr txBox="1"/>
+          <p:nvPr/>
+        </p:nvSpPr>
+        <p:spPr>
+          <a:xfrm>
+            <a:off x="9098280" y="1737360"/>
+            <a:ext cx="2606040" cy="457200"/>
+          </a:xfrm>
+          <a:prstGeom prst="rect">
+            <a:avLst/>
+          </a:prstGeom>
+          <a:noFill/>
+        </p:spPr>
+        <p:txBody>
+          <a:bodyPr wrap="square" lIns="0" rIns="0" tIns="0" bIns="0" anchor="ctr">
+            <a:spAutoFit/>
+          </a:bodyPr>
+          <a:lstStyle/>
+          <a:p>
+            <a:pPr algn="l"/>
+            <a:r>
+              <a:rPr sz="1400" b="1" i="0">
+                <a:solidFill>
+                  <a:srgbClr val="FFFFFF"/>
+                </a:solidFill>
+                <a:latin typeface="Calibri"/>
+              </a:rPr>
+              <a:t>Pay for the change</a:t>
+            </a:r>
+          </a:p>
+        </p:txBody>
+      </p:sp>
+      <p:sp>
+        <p:nvSpPr>
+          <p:cNvPr id="19" name="TextBox 18"/>
+          <p:cNvSpPr txBox="1"/>
+          <p:nvPr/>
+        </p:nvSpPr>
+        <p:spPr>
+          <a:xfrm>
+            <a:off x="8503920" y="2468880"/>
+            <a:ext cx="3063240" cy="1417319"/>
+          </a:xfrm>
+          <a:prstGeom prst="rect">
+            <a:avLst/>
+          </a:prstGeom>
+          <a:noFill/>
+        </p:spPr>
+        <p:txBody>
+          <a:bodyPr wrap="square" lIns="0" rIns="0" tIns="0" bIns="0">
+            <a:spAutoFit/>
+          </a:bodyPr>
+          <a:lstStyle/>
+          <a:p>
+            <a:pPr algn="l"/>
+            <a:r>
+              <a:rPr sz="1400" b="0" i="0">
+                <a:solidFill>
+                  <a:srgbClr val="1F2937"/>
+                </a:solidFill>
+                <a:latin typeface="Calibri"/>
+              </a:rPr>
+              <a:t>Every rewrite invalidates the prefix cache → input bills uncached at 10× cost.</a:t>
+            </a:r>
+          </a:p>
+        </p:txBody>
+      </p:sp>
+      <p:sp>
+        <p:nvSpPr>
+          <p:cNvPr id="20" name="Rectangle 19"/>
+          <p:cNvSpPr/>
+          <p:nvPr/>
+        </p:nvSpPr>
+        <p:spPr>
+          <a:xfrm>
+            <a:off x="548640" y="4434840"/>
+            <a:ext cx="11091672" cy="640080"/>
+          </a:xfrm>
+          <a:prstGeom prst="rect">
+            <a:avLst/>
+          </a:prstGeom>
+          <a:solidFill>
+            <a:srgbClr val="E69F00"/>
+          </a:solidFill>
+          <a:ln>
+            <a:noFill/>
+          </a:ln>
+          <a:effectLst/>
+        </p:spPr>
+        <p:style>
+          <a:lnRef idx="1">
+            <a:schemeClr val="accent1"/>
+          </a:lnRef>
+          <a:fillRef idx="3">
+            <a:schemeClr val="accent1"/>
+          </a:fillRef>
+          <a:effectRef idx="2">
+            <a:schemeClr val="accent1"/>
+          </a:effectRef>
+          <a:fontRef idx="minor">
+            <a:schemeClr val="lt1"/>
+          </a:fontRef>
+        </p:style>
+        <p:txBody>
+          <a:bodyPr rtlCol="0" anchor="ctr"/>
+          <a:lstStyle/>
+          <a:p>
+            <a:pPr algn="ctr"/>
+          </a:p>
+        </p:txBody>
+      </p:sp>
+      <p:sp>
+        <p:nvSpPr>
+          <p:cNvPr id="21" name="TextBox 20"/>
+          <p:cNvSpPr txBox="1"/>
+          <p:nvPr/>
+        </p:nvSpPr>
+        <p:spPr>
+          <a:xfrm>
+            <a:off x="731520" y="4526280"/>
+            <a:ext cx="10972800" cy="457200"/>
+          </a:xfrm>
+          <a:prstGeom prst="rect">
+            <a:avLst/>
+          </a:prstGeom>
+          <a:noFill/>
+        </p:spPr>
+        <p:txBody>
+          <a:bodyPr wrap="square" lIns="0" rIns="0" tIns="0" bIns="0" anchor="ctr">
+            <a:spAutoFit/>
+          </a:bodyPr>
+          <a:lstStyle/>
+          <a:p>
+            <a:pPr algn="l"/>
+            <a:r>
+              <a:rPr sz="1500" b="1" i="0">
+                <a:solidFill>
+                  <a:srgbClr val="14255C"/>
+                </a:solidFill>
+                <a:latin typeface="Calibri"/>
+              </a:rPr>
+              <a:t>We tested 12 ways of doing steps 1 + 2. The cost of step 3 decides whether they win.</a:t>
             </a:r>
           </a:p>
         </p:txBody>
       </p:sp>
       <p:pic>
         <p:nvPicPr>
-          <p:cNvPr id="5" name="Picture 4" descr="fig3_placeholder_ablation.png"/>
+          <p:cNvPr id="22" name="Picture 21" descr="fig9_method_family_tree.png"/>
           <p:cNvPicPr>
             <a:picLocks noChangeAspect="1"/>
           </p:cNvPicPr>
@@ -4134,8 +8576,8 @@
         </p:blipFill>
         <p:spPr>
           <a:xfrm>
-            <a:off x="1984220" y="1463040"/>
-            <a:ext cx="8220511" cy="4206240"/>
+            <a:off x="4866112" y="5212080"/>
+            <a:ext cx="2456726" cy="1371600"/>
           </a:xfrm>
           <a:prstGeom prst="rect">
             <a:avLst/>
@@ -4144,86 +8586,7 @@
       </p:pic>
       <p:sp>
         <p:nvSpPr>
-          <p:cNvPr id="6" name="Rectangle 5"/>
-          <p:cNvSpPr/>
-          <p:nvPr/>
-        </p:nvSpPr>
-        <p:spPr>
-          <a:xfrm>
-            <a:off x="548640" y="5852160"/>
-            <a:ext cx="11091672" cy="777240"/>
-          </a:xfrm>
-          <a:prstGeom prst="rect">
-            <a:avLst/>
-          </a:prstGeom>
-          <a:solidFill>
-            <a:srgbClr val="E69F00"/>
-          </a:solidFill>
-          <a:ln>
-            <a:noFill/>
-          </a:ln>
-          <a:effectLst/>
-        </p:spPr>
-        <p:style>
-          <a:lnRef idx="1">
-            <a:schemeClr val="accent1"/>
-          </a:lnRef>
-          <a:fillRef idx="3">
-            <a:schemeClr val="accent1"/>
-          </a:fillRef>
-          <a:effectRef idx="2">
-            <a:schemeClr val="accent1"/>
-          </a:effectRef>
-          <a:fontRef idx="minor">
-            <a:schemeClr val="lt1"/>
-          </a:fontRef>
-        </p:style>
-        <p:txBody>
-          <a:bodyPr rtlCol="0" anchor="ctr"/>
-          <a:lstStyle/>
-          <a:p>
-            <a:pPr algn="ctr"/>
-          </a:p>
-        </p:txBody>
-      </p:sp>
-      <p:sp>
-        <p:nvSpPr>
-          <p:cNvPr id="7" name="TextBox 6"/>
-          <p:cNvSpPr txBox="1"/>
-          <p:nvPr/>
-        </p:nvSpPr>
-        <p:spPr>
-          <a:xfrm>
-            <a:off x="731520" y="5943600"/>
-            <a:ext cx="10881360" cy="548640"/>
-          </a:xfrm>
-          <a:prstGeom prst="rect">
-            <a:avLst/>
-          </a:prstGeom>
-          <a:noFill/>
-        </p:spPr>
-        <p:txBody>
-          <a:bodyPr wrap="square" lIns="0" rIns="0" tIns="0" bIns="0" anchor="ctr">
-            <a:spAutoFit/>
-          </a:bodyPr>
-          <a:lstStyle/>
-          <a:p>
-            <a:pPr algn="l"/>
-            <a:r>
-              <a:rPr sz="1700" b="1" i="0">
-                <a:solidFill>
-                  <a:srgbClr val="14255C"/>
-                </a:solidFill>
-                <a:latin typeface="Calibri"/>
-              </a:rPr>
-              <a:t>The DETAILED Post-it lost both runs — agent retried the wrong fix 18 times.</a:t>
-            </a:r>
-          </a:p>
-        </p:txBody>
-      </p:sp>
-      <p:sp>
-        <p:nvSpPr>
-          <p:cNvPr id="8" name="TextBox 7"/>
+          <p:cNvPr id="23" name="TextBox 22"/>
           <p:cNvSpPr txBox="1"/>
           <p:nvPr/>
         </p:nvSpPr>
@@ -4258,7 +8621,7 @@
       </p:sp>
       <p:sp>
         <p:nvSpPr>
-          <p:cNvPr id="9" name="TextBox 8"/>
+          <p:cNvPr id="24" name="TextBox 23"/>
           <p:cNvSpPr txBox="1"/>
           <p:nvPr/>
         </p:nvSpPr>
@@ -4286,7 +8649,7 @@
                 </a:solidFill>
                 <a:latin typeface="Calibri"/>
               </a:rPr>
-              <a:t>Slide 3 / 5</a:t>
+              <a:t>3 / 17</a:t>
             </a:r>
           </a:p>
         </p:txBody>
@@ -4361,7 +8724,7 @@
         </p:nvSpPr>
         <p:spPr>
           <a:xfrm>
-            <a:off x="548640" y="457200"/>
+            <a:off x="548640" y="365760"/>
             <a:ext cx="10972800" cy="548640"/>
           </a:xfrm>
           <a:prstGeom prst="rect">
@@ -4377,73 +8740,27 @@
           <a:p>
             <a:pPr algn="l"/>
             <a:r>
-              <a:rPr sz="2800" b="1" i="0">
+              <a:rPr sz="2400" b="1" i="0">
                 <a:solidFill>
                   <a:srgbClr val="1E3A8A"/>
                 </a:solidFill>
                 <a:latin typeface="Calibri"/>
               </a:rPr>
-              <a:t>Why does more information make things worse?</a:t>
-            </a:r>
-          </a:p>
-        </p:txBody>
-      </p:sp>
-      <p:sp>
-        <p:nvSpPr>
-          <p:cNvPr id="4" name="Rectangle 3"/>
-          <p:cNvSpPr/>
-          <p:nvPr/>
-        </p:nvSpPr>
-        <p:spPr>
-          <a:xfrm>
-            <a:off x="548640" y="1371600"/>
-            <a:ext cx="5486400" cy="4297680"/>
-          </a:xfrm>
-          <a:prstGeom prst="rect">
-            <a:avLst/>
-          </a:prstGeom>
-          <a:solidFill>
-            <a:srgbClr val="FFFFFF"/>
-          </a:solidFill>
-          <a:ln w="25400">
-            <a:solidFill>
-              <a:srgbClr val="009E73"/>
-            </a:solidFill>
-          </a:ln>
-          <a:effectLst/>
-        </p:spPr>
-        <p:style>
-          <a:lnRef idx="1">
-            <a:schemeClr val="accent1"/>
-          </a:lnRef>
-          <a:fillRef idx="3">
-            <a:schemeClr val="accent1"/>
-          </a:fillRef>
-          <a:effectRef idx="2">
-            <a:schemeClr val="accent1"/>
-          </a:effectRef>
-          <a:fontRef idx="minor">
-            <a:schemeClr val="lt1"/>
-          </a:fontRef>
-        </p:style>
-        <p:txBody>
-          <a:bodyPr rtlCol="0" anchor="ctr"/>
-          <a:lstStyle/>
-          <a:p>
-            <a:pPr algn="ctr"/>
-          </a:p>
-        </p:txBody>
-      </p:sp>
-      <p:sp>
-        <p:nvSpPr>
-          <p:cNvPr id="5" name="TextBox 4"/>
-          <p:cNvSpPr txBox="1"/>
-          <p:nvPr/>
-        </p:nvSpPr>
-        <p:spPr>
-          <a:xfrm>
-            <a:off x="731520" y="1508760"/>
-            <a:ext cx="5120640" cy="457200"/>
+              <a:t>The 12 strategies, grouped by family</a:t>
+            </a:r>
+          </a:p>
+        </p:txBody>
+      </p:sp>
+      <p:sp>
+        <p:nvSpPr>
+          <p:cNvPr id="4" name="TextBox 3"/>
+          <p:cNvSpPr txBox="1"/>
+          <p:nvPr/>
+        </p:nvSpPr>
+        <p:spPr>
+          <a:xfrm>
+            <a:off x="548640" y="914400"/>
+            <a:ext cx="10972800" cy="365760"/>
           </a:xfrm>
           <a:prstGeom prst="rect">
             <a:avLst/>
@@ -4458,370 +8775,44 @@
           <a:p>
             <a:pPr algn="l"/>
             <a:r>
-              <a:rPr sz="1500" b="1" i="0">
-                <a:solidFill>
-                  <a:srgbClr val="009E73"/>
-                </a:solidFill>
-                <a:latin typeface="Calibri"/>
-              </a:rPr>
-              <a:t>PLAIN POST-IT  →  succeeds</a:t>
-            </a:r>
-          </a:p>
-        </p:txBody>
-      </p:sp>
+              <a:rPr sz="1300" b="0" i="1">
+                <a:solidFill>
+                  <a:srgbClr val="6B7280"/>
+                </a:solidFill>
+                <a:latin typeface="Calibri"/>
+              </a:rPr>
+              <a:t>Six families. They differ on what signal they use to decide which observations to compact.</a:t>
+            </a:r>
+          </a:p>
+        </p:txBody>
+      </p:sp>
+      <p:pic>
+        <p:nvPicPr>
+          <p:cNvPr id="5" name="Picture 4" descr="fig9_method_family_tree.png"/>
+          <p:cNvPicPr>
+            <a:picLocks noChangeAspect="1"/>
+          </p:cNvPicPr>
+          <p:nvPr/>
+        </p:nvPicPr>
+        <p:blipFill>
+          <a:blip r:embed="rId2"/>
+          <a:stretch>
+            <a:fillRect/>
+          </a:stretch>
+        </p:blipFill>
+        <p:spPr>
+          <a:xfrm>
+            <a:off x="1672368" y="1417320"/>
+            <a:ext cx="8844215" cy="4937760"/>
+          </a:xfrm>
+          <a:prstGeom prst="rect">
+            <a:avLst/>
+          </a:prstGeom>
+        </p:spPr>
+      </p:pic>
       <p:sp>
         <p:nvSpPr>
           <p:cNvPr id="6" name="TextBox 5"/>
-          <p:cNvSpPr txBox="1"/>
-          <p:nvPr/>
-        </p:nvSpPr>
-        <p:spPr>
-          <a:xfrm>
-            <a:off x="731520" y="2057400"/>
-            <a:ext cx="5120640" cy="3657600"/>
-          </a:xfrm>
-          <a:prstGeom prst="rect">
-            <a:avLst/>
-          </a:prstGeom>
-          <a:noFill/>
-        </p:spPr>
-        <p:txBody>
-          <a:bodyPr wrap="square" lIns="0" rIns="0" tIns="0" bIns="0">
-            <a:spAutoFit/>
-          </a:bodyPr>
-          <a:lstStyle/>
-          <a:p>
-            <a:pPr algn="l"/>
-            <a:r>
-              <a:rPr sz="1500" b="0" i="0">
-                <a:solidFill>
-                  <a:srgbClr val="1F2937"/>
-                </a:solidFill>
-                <a:latin typeface="Calibri"/>
-              </a:rPr>
-              <a:t>Agent reads placeholder.</a:t>
-            </a:r>
-          </a:p>
-          <a:p>
-            <a:pPr algn="l"/>
-            <a:r>
-              <a:rPr sz="1500" b="0" i="0">
-                <a:solidFill>
-                  <a:srgbClr val="1F2937"/>
-                </a:solidFill>
-                <a:latin typeface="Calibri"/>
-              </a:rPr>
-              <a:t>Sees nothing actionable.</a:t>
-            </a:r>
-          </a:p>
-          <a:p>
-            <a:pPr algn="l"/>
-            <a:r>
-              <a:rPr sz="1500" b="0" i="0">
-                <a:solidFill>
-                  <a:srgbClr val="1F2937"/>
-                </a:solidFill>
-                <a:latin typeface="Calibri"/>
-              </a:rPr>
-              <a:t>Forced to re-read the file.</a:t>
-            </a:r>
-          </a:p>
-          <a:p>
-            <a:pPr algn="l"/>
-            <a:r>
-              <a:rPr sz="1500" b="0" i="0">
-                <a:solidFill>
-                  <a:srgbClr val="1F2937"/>
-                </a:solidFill>
-                <a:latin typeface="Calibri"/>
-              </a:rPr>
-              <a:t>Notices a detail it missed.</a:t>
-            </a:r>
-          </a:p>
-          <a:p>
-            <a:pPr algn="l"/>
-            <a:r>
-              <a:rPr sz="1500" b="0" i="0">
-                <a:solidFill>
-                  <a:srgbClr val="1F2937"/>
-                </a:solidFill>
-                <a:latin typeface="Calibri"/>
-              </a:rPr>
-              <a:t>Follows the lead to the right region.</a:t>
-            </a:r>
-          </a:p>
-          <a:p>
-            <a:pPr algn="l"/>
-            <a:r>
-              <a:rPr sz="1500" b="0" i="0">
-                <a:solidFill>
-                  <a:srgbClr val="1F2937"/>
-                </a:solidFill>
-                <a:latin typeface="Calibri"/>
-              </a:rPr>
-              <a:t>Fixes the bug in 4 edits.</a:t>
-            </a:r>
-          </a:p>
-        </p:txBody>
-      </p:sp>
-      <p:sp>
-        <p:nvSpPr>
-          <p:cNvPr id="7" name="Rectangle 6"/>
-          <p:cNvSpPr/>
-          <p:nvPr/>
-        </p:nvSpPr>
-        <p:spPr>
-          <a:xfrm>
-            <a:off x="6153912" y="1371600"/>
-            <a:ext cx="5486400" cy="4297680"/>
-          </a:xfrm>
-          <a:prstGeom prst="rect">
-            <a:avLst/>
-          </a:prstGeom>
-          <a:solidFill>
-            <a:srgbClr val="FFFFFF"/>
-          </a:solidFill>
-          <a:ln w="25400">
-            <a:solidFill>
-              <a:srgbClr val="E69F00"/>
-            </a:solidFill>
-          </a:ln>
-          <a:effectLst/>
-        </p:spPr>
-        <p:style>
-          <a:lnRef idx="1">
-            <a:schemeClr val="accent1"/>
-          </a:lnRef>
-          <a:fillRef idx="3">
-            <a:schemeClr val="accent1"/>
-          </a:fillRef>
-          <a:effectRef idx="2">
-            <a:schemeClr val="accent1"/>
-          </a:effectRef>
-          <a:fontRef idx="minor">
-            <a:schemeClr val="lt1"/>
-          </a:fontRef>
-        </p:style>
-        <p:txBody>
-          <a:bodyPr rtlCol="0" anchor="ctr"/>
-          <a:lstStyle/>
-          <a:p>
-            <a:pPr algn="ctr"/>
-          </a:p>
-        </p:txBody>
-      </p:sp>
-      <p:sp>
-        <p:nvSpPr>
-          <p:cNvPr id="8" name="TextBox 7"/>
-          <p:cNvSpPr txBox="1"/>
-          <p:nvPr/>
-        </p:nvSpPr>
-        <p:spPr>
-          <a:xfrm>
-            <a:off x="6336792" y="1508760"/>
-            <a:ext cx="5120640" cy="457200"/>
-          </a:xfrm>
-          <a:prstGeom prst="rect">
-            <a:avLst/>
-          </a:prstGeom>
-          <a:noFill/>
-        </p:spPr>
-        <p:txBody>
-          <a:bodyPr wrap="square" lIns="0" rIns="0" tIns="0" bIns="0">
-            <a:spAutoFit/>
-          </a:bodyPr>
-          <a:lstStyle/>
-          <a:p>
-            <a:pPr algn="l"/>
-            <a:r>
-              <a:rPr sz="1500" b="1" i="0">
-                <a:solidFill>
-                  <a:srgbClr val="E69F00"/>
-                </a:solidFill>
-                <a:latin typeface="Calibri"/>
-              </a:rPr>
-              <a:t>DETAILED POST-IT  →  fails</a:t>
-            </a:r>
-          </a:p>
-        </p:txBody>
-      </p:sp>
-      <p:sp>
-        <p:nvSpPr>
-          <p:cNvPr id="9" name="TextBox 8"/>
-          <p:cNvSpPr txBox="1"/>
-          <p:nvPr/>
-        </p:nvSpPr>
-        <p:spPr>
-          <a:xfrm>
-            <a:off x="6336792" y="2057400"/>
-            <a:ext cx="5120640" cy="3657600"/>
-          </a:xfrm>
-          <a:prstGeom prst="rect">
-            <a:avLst/>
-          </a:prstGeom>
-          <a:noFill/>
-        </p:spPr>
-        <p:txBody>
-          <a:bodyPr wrap="square" lIns="0" rIns="0" tIns="0" bIns="0">
-            <a:spAutoFit/>
-          </a:bodyPr>
-          <a:lstStyle/>
-          <a:p>
-            <a:pPr algn="l"/>
-            <a:r>
-              <a:rPr sz="1500" b="0" i="0">
-                <a:solidFill>
-                  <a:srgbClr val="1F2937"/>
-                </a:solidFill>
-                <a:latin typeface="Calibri"/>
-              </a:rPr>
-              <a:t>Agent reads function names.</a:t>
-            </a:r>
-          </a:p>
-          <a:p>
-            <a:pPr algn="l"/>
-            <a:r>
-              <a:rPr sz="1500" b="0" i="0">
-                <a:solidFill>
-                  <a:srgbClr val="1F2937"/>
-                </a:solidFill>
-                <a:latin typeface="Calibri"/>
-              </a:rPr>
-              <a:t>Picks one and starts editing.</a:t>
-            </a:r>
-          </a:p>
-          <a:p>
-            <a:pPr algn="l"/>
-            <a:r>
-              <a:rPr sz="1500" b="0" i="0">
-                <a:solidFill>
-                  <a:srgbClr val="1F2937"/>
-                </a:solidFill>
-                <a:latin typeface="Calibri"/>
-              </a:rPr>
-              <a:t>Test fails. Tries again. Fails.</a:t>
-            </a:r>
-          </a:p>
-          <a:p>
-            <a:pPr algn="l"/>
-            <a:r>
-              <a:rPr sz="1500" b="0" i="0">
-                <a:solidFill>
-                  <a:srgbClr val="1F2937"/>
-                </a:solidFill>
-                <a:latin typeface="Calibri"/>
-              </a:rPr>
-              <a:t>Never re-reads the actual file —</a:t>
-            </a:r>
-          </a:p>
-          <a:p>
-            <a:pPr algn="l"/>
-            <a:r>
-              <a:rPr sz="1500" b="0" i="0">
-                <a:solidFill>
-                  <a:srgbClr val="1F2937"/>
-                </a:solidFill>
-                <a:latin typeface="Calibri"/>
-              </a:rPr>
-              <a:t>the placeholder seemed enough.</a:t>
-            </a:r>
-          </a:p>
-          <a:p>
-            <a:pPr algn="l"/>
-            <a:r>
-              <a:rPr sz="1500" b="0" i="0">
-                <a:solidFill>
-                  <a:srgbClr val="1F2937"/>
-                </a:solidFill>
-                <a:latin typeface="Calibri"/>
-              </a:rPr>
-              <a:t>18 edits on the wrong function.</a:t>
-            </a:r>
-          </a:p>
-        </p:txBody>
-      </p:sp>
-      <p:sp>
-        <p:nvSpPr>
-          <p:cNvPr id="10" name="Rectangle 9"/>
-          <p:cNvSpPr/>
-          <p:nvPr/>
-        </p:nvSpPr>
-        <p:spPr>
-          <a:xfrm>
-            <a:off x="548640" y="5852160"/>
-            <a:ext cx="11091672" cy="777240"/>
-          </a:xfrm>
-          <a:prstGeom prst="rect">
-            <a:avLst/>
-          </a:prstGeom>
-          <a:solidFill>
-            <a:srgbClr val="1E3A8A"/>
-          </a:solidFill>
-          <a:ln>
-            <a:noFill/>
-          </a:ln>
-          <a:effectLst/>
-        </p:spPr>
-        <p:style>
-          <a:lnRef idx="1">
-            <a:schemeClr val="accent1"/>
-          </a:lnRef>
-          <a:fillRef idx="3">
-            <a:schemeClr val="accent1"/>
-          </a:fillRef>
-          <a:effectRef idx="2">
-            <a:schemeClr val="accent1"/>
-          </a:effectRef>
-          <a:fontRef idx="minor">
-            <a:schemeClr val="lt1"/>
-          </a:fontRef>
-        </p:style>
-        <p:txBody>
-          <a:bodyPr rtlCol="0" anchor="ctr"/>
-          <a:lstStyle/>
-          <a:p>
-            <a:pPr algn="ctr"/>
-          </a:p>
-        </p:txBody>
-      </p:sp>
-      <p:sp>
-        <p:nvSpPr>
-          <p:cNvPr id="11" name="TextBox 10"/>
-          <p:cNvSpPr txBox="1"/>
-          <p:nvPr/>
-        </p:nvSpPr>
-        <p:spPr>
-          <a:xfrm>
-            <a:off x="731520" y="5943600"/>
-            <a:ext cx="10698480" cy="548640"/>
-          </a:xfrm>
-          <a:prstGeom prst="rect">
-            <a:avLst/>
-          </a:prstGeom>
-          <a:noFill/>
-        </p:spPr>
-        <p:txBody>
-          <a:bodyPr wrap="square" lIns="0" rIns="0" tIns="0" bIns="0" anchor="ctr">
-            <a:spAutoFit/>
-          </a:bodyPr>
-          <a:lstStyle/>
-          <a:p>
-            <a:pPr algn="l"/>
-            <a:r>
-              <a:rPr sz="1700" b="1" i="0">
-                <a:solidFill>
-                  <a:srgbClr val="FFFFFF"/>
-                </a:solidFill>
-                <a:latin typeface="Calibri"/>
-              </a:rPr>
-              <a:t>Lesson: a confident-looking summary anchors the agent on the wrong hypothesis.</a:t>
-            </a:r>
-          </a:p>
-        </p:txBody>
-      </p:sp>
-      <p:sp>
-        <p:nvSpPr>
-          <p:cNvPr id="12" name="TextBox 11"/>
           <p:cNvSpPr txBox="1"/>
           <p:nvPr/>
         </p:nvSpPr>
@@ -4856,7 +8847,7 @@
       </p:sp>
       <p:sp>
         <p:nvSpPr>
-          <p:cNvPr id="13" name="TextBox 12"/>
+          <p:cNvPr id="7" name="TextBox 6"/>
           <p:cNvSpPr txBox="1"/>
           <p:nvPr/>
         </p:nvSpPr>
@@ -4884,7 +8875,7 @@
                 </a:solidFill>
                 <a:latin typeface="Calibri"/>
               </a:rPr>
-              <a:t>Slide 4 / 5</a:t>
+              <a:t>4 / 17</a:t>
             </a:r>
           </a:p>
         </p:txBody>
@@ -4922,7 +8913,7 @@
             <a:avLst/>
           </a:prstGeom>
           <a:solidFill>
-            <a:srgbClr val="14255C"/>
+            <a:srgbClr val="F8F6F0"/>
           </a:solidFill>
           <a:ln>
             <a:noFill/>
@@ -4953,14 +8944,558 @@
       </p:sp>
       <p:sp>
         <p:nvSpPr>
-          <p:cNvPr id="3" name="Rectangle 2"/>
+          <p:cNvPr id="3" name="Rounded Rectangle 2"/>
           <p:cNvSpPr/>
           <p:nvPr/>
         </p:nvSpPr>
         <p:spPr>
           <a:xfrm>
+            <a:off x="548640" y="411480"/>
+            <a:ext cx="2286000" cy="411480"/>
+          </a:xfrm>
+          <a:prstGeom prst="roundRect">
+            <a:avLst/>
+          </a:prstGeom>
+          <a:solidFill>
+            <a:srgbClr val="6B7280"/>
+          </a:solidFill>
+          <a:ln>
+            <a:noFill/>
+          </a:ln>
+          <a:effectLst/>
+        </p:spPr>
+        <p:style>
+          <a:lnRef idx="1">
+            <a:schemeClr val="accent1"/>
+          </a:lnRef>
+          <a:fillRef idx="3">
+            <a:schemeClr val="accent1"/>
+          </a:fillRef>
+          <a:effectRef idx="2">
+            <a:schemeClr val="accent1"/>
+          </a:effectRef>
+          <a:fontRef idx="minor">
+            <a:schemeClr val="lt1"/>
+          </a:fontRef>
+        </p:style>
+        <p:txBody>
+          <a:bodyPr rtlCol="0" anchor="ctr"/>
+          <a:lstStyle/>
+          <a:p>
+            <a:pPr algn="ctr"/>
+          </a:p>
+        </p:txBody>
+      </p:sp>
+      <p:sp>
+        <p:nvSpPr>
+          <p:cNvPr id="4" name="TextBox 3"/>
+          <p:cNvSpPr txBox="1"/>
+          <p:nvPr/>
+        </p:nvSpPr>
+        <p:spPr>
+          <a:xfrm>
+            <a:off x="548640" y="411480"/>
+            <a:ext cx="2286000" cy="411480"/>
+          </a:xfrm>
+          <a:prstGeom prst="rect">
+            <a:avLst/>
+          </a:prstGeom>
+          <a:noFill/>
+        </p:spPr>
+        <p:txBody>
+          <a:bodyPr wrap="square" lIns="0" rIns="0" tIns="0" bIns="0" anchor="ctr">
+            <a:spAutoFit/>
+          </a:bodyPr>
+          <a:lstStyle/>
+          <a:p>
+            <a:pPr algn="ctr"/>
+            <a:r>
+              <a:rPr sz="1100" b="1" i="0">
+                <a:solidFill>
+                  <a:srgbClr val="FFFFFF"/>
+                </a:solidFill>
+                <a:latin typeface="Calibri"/>
+              </a:rPr>
+              <a:t>BASELINE</a:t>
+            </a:r>
+          </a:p>
+        </p:txBody>
+      </p:sp>
+      <p:sp>
+        <p:nvSpPr>
+          <p:cNvPr id="5" name="TextBox 4"/>
+          <p:cNvSpPr txBox="1"/>
+          <p:nvPr/>
+        </p:nvSpPr>
+        <p:spPr>
+          <a:xfrm>
+            <a:off x="3017520" y="411480"/>
+            <a:ext cx="8686800" cy="457200"/>
+          </a:xfrm>
+          <a:prstGeom prst="rect">
+            <a:avLst/>
+          </a:prstGeom>
+          <a:noFill/>
+        </p:spPr>
+        <p:txBody>
+          <a:bodyPr wrap="square" lIns="0" rIns="0" tIns="0" bIns="0" anchor="ctr">
+            <a:spAutoFit/>
+          </a:bodyPr>
+          <a:lstStyle/>
+          <a:p>
+            <a:pPr algn="l"/>
+            <a:r>
+              <a:rPr sz="2200" b="1" i="0">
+                <a:solidFill>
+                  <a:srgbClr val="1E3A8A"/>
+                </a:solidFill>
+                <a:latin typeface="Calibri"/>
+              </a:rPr>
+              <a:t>none</a:t>
+            </a:r>
+          </a:p>
+        </p:txBody>
+      </p:sp>
+      <p:sp>
+        <p:nvSpPr>
+          <p:cNvPr id="6" name="Rectangle 5"/>
+          <p:cNvSpPr/>
+          <p:nvPr/>
+        </p:nvSpPr>
+        <p:spPr>
+          <a:xfrm>
+            <a:off x="548640" y="960120"/>
+            <a:ext cx="8229600" cy="548640"/>
+          </a:xfrm>
+          <a:prstGeom prst="rect">
+            <a:avLst/>
+          </a:prstGeom>
+          <a:solidFill>
+            <a:srgbClr val="1E3A8A"/>
+          </a:solidFill>
+          <a:ln>
+            <a:noFill/>
+          </a:ln>
+          <a:effectLst/>
+        </p:spPr>
+        <p:style>
+          <a:lnRef idx="1">
+            <a:schemeClr val="accent1"/>
+          </a:lnRef>
+          <a:fillRef idx="3">
+            <a:schemeClr val="accent1"/>
+          </a:fillRef>
+          <a:effectRef idx="2">
+            <a:schemeClr val="accent1"/>
+          </a:effectRef>
+          <a:fontRef idx="minor">
+            <a:schemeClr val="lt1"/>
+          </a:fontRef>
+        </p:style>
+        <p:txBody>
+          <a:bodyPr rtlCol="0" anchor="ctr"/>
+          <a:lstStyle/>
+          <a:p>
+            <a:pPr algn="ctr"/>
+          </a:p>
+        </p:txBody>
+      </p:sp>
+      <p:sp>
+        <p:nvSpPr>
+          <p:cNvPr id="7" name="TextBox 6"/>
+          <p:cNvSpPr txBox="1"/>
+          <p:nvPr/>
+        </p:nvSpPr>
+        <p:spPr>
+          <a:xfrm>
+            <a:off x="777240" y="960120"/>
+            <a:ext cx="7863840" cy="548640"/>
+          </a:xfrm>
+          <a:prstGeom prst="rect">
+            <a:avLst/>
+          </a:prstGeom>
+          <a:noFill/>
+        </p:spPr>
+        <p:txBody>
+          <a:bodyPr wrap="square" lIns="0" rIns="0" tIns="0" bIns="0" anchor="ctr">
+            <a:spAutoFit/>
+          </a:bodyPr>
+          <a:lstStyle/>
+          <a:p>
+            <a:pPr algn="l"/>
+            <a:r>
+              <a:rPr sz="1400" b="1" i="0">
+                <a:solidFill>
+                  <a:srgbClr val="FFFFFF"/>
+                </a:solidFill>
+                <a:latin typeface="Calibri"/>
+              </a:rPr>
+              <a:t>Pareto-dominates on N=10 SWE-bench Lite (Haiku 4.5)</a:t>
+            </a:r>
+          </a:p>
+        </p:txBody>
+      </p:sp>
+      <p:sp>
+        <p:nvSpPr>
+          <p:cNvPr id="8" name="Rectangle 7"/>
+          <p:cNvSpPr/>
+          <p:nvPr/>
+        </p:nvSpPr>
+        <p:spPr>
+          <a:xfrm>
+            <a:off x="8897112" y="960120"/>
+            <a:ext cx="2743200" cy="548640"/>
+          </a:xfrm>
+          <a:prstGeom prst="rect">
+            <a:avLst/>
+          </a:prstGeom>
+          <a:solidFill>
+            <a:srgbClr val="FFFFFF"/>
+          </a:solidFill>
+          <a:ln w="15875">
+            <a:solidFill>
+              <a:srgbClr val="1E3A8A"/>
+            </a:solidFill>
+          </a:ln>
+          <a:effectLst/>
+        </p:spPr>
+        <p:style>
+          <a:lnRef idx="1">
+            <a:schemeClr val="accent1"/>
+          </a:lnRef>
+          <a:fillRef idx="3">
+            <a:schemeClr val="accent1"/>
+          </a:fillRef>
+          <a:effectRef idx="2">
+            <a:schemeClr val="accent1"/>
+          </a:effectRef>
+          <a:fontRef idx="minor">
+            <a:schemeClr val="lt1"/>
+          </a:fontRef>
+        </p:style>
+        <p:txBody>
+          <a:bodyPr rtlCol="0" anchor="ctr"/>
+          <a:lstStyle/>
+          <a:p>
+            <a:pPr algn="ctr"/>
+          </a:p>
+        </p:txBody>
+      </p:sp>
+      <p:sp>
+        <p:nvSpPr>
+          <p:cNvPr id="9" name="TextBox 8"/>
+          <p:cNvSpPr txBox="1"/>
+          <p:nvPr/>
+        </p:nvSpPr>
+        <p:spPr>
+          <a:xfrm>
+            <a:off x="8988552" y="960120"/>
+            <a:ext cx="2606040" cy="548640"/>
+          </a:xfrm>
+          <a:prstGeom prst="rect">
+            <a:avLst/>
+          </a:prstGeom>
+          <a:noFill/>
+        </p:spPr>
+        <p:txBody>
+          <a:bodyPr wrap="square" lIns="0" rIns="0" tIns="0" bIns="0" anchor="ctr">
+            <a:spAutoFit/>
+          </a:bodyPr>
+          <a:lstStyle/>
+          <a:p>
+            <a:pPr algn="ctr"/>
+            <a:r>
+              <a:rPr sz="1000" b="1" i="0">
+                <a:solidFill>
+                  <a:srgbClr val="1E3A8A"/>
+                </a:solidFill>
+                <a:latin typeface="Calibri"/>
+              </a:rPr>
+              <a:t>84+ trajectories  ·  20 phases</a:t>
+            </a:r>
+          </a:p>
+        </p:txBody>
+      </p:sp>
+      <p:pic>
+        <p:nvPicPr>
+          <p:cNvPr id="10" name="Picture 9" descr="method_01_none.png"/>
+          <p:cNvPicPr>
+            <a:picLocks noChangeAspect="1"/>
+          </p:cNvPicPr>
+          <p:nvPr/>
+        </p:nvPicPr>
+        <p:blipFill>
+          <a:blip r:embed="rId2"/>
+          <a:stretch>
+            <a:fillRect/>
+          </a:stretch>
+        </p:blipFill>
+        <p:spPr>
+          <a:xfrm>
+            <a:off x="548640" y="2089595"/>
+            <a:ext cx="11091672" cy="3776089"/>
+          </a:xfrm>
+          <a:prstGeom prst="rect">
+            <a:avLst/>
+          </a:prstGeom>
+        </p:spPr>
+      </p:pic>
+      <p:sp>
+        <p:nvSpPr>
+          <p:cNvPr id="11" name="TextBox 10"/>
+          <p:cNvSpPr txBox="1"/>
+          <p:nvPr/>
+        </p:nvSpPr>
+        <p:spPr>
+          <a:xfrm>
+            <a:off x="457200" y="6492240"/>
+            <a:ext cx="7315200" cy="274320"/>
+          </a:xfrm>
+          <a:prstGeom prst="rect">
+            <a:avLst/>
+          </a:prstGeom>
+          <a:noFill/>
+        </p:spPr>
+        <p:txBody>
+          <a:bodyPr wrap="square" lIns="0" rIns="0" tIns="0" bIns="0">
+            <a:spAutoFit/>
+          </a:bodyPr>
+          <a:lstStyle/>
+          <a:p>
+            <a:pPr algn="l"/>
+            <a:r>
+              <a:rPr sz="1000" b="0" i="0">
+                <a:solidFill>
+                  <a:srgbClr val="6B7280"/>
+                </a:solidFill>
+                <a:latin typeface="Calibri"/>
+              </a:rPr>
+              <a:t>AdaptiveCache · Vlad Cainamisir · Harvard</a:t>
+            </a:r>
+          </a:p>
+        </p:txBody>
+      </p:sp>
+      <p:sp>
+        <p:nvSpPr>
+          <p:cNvPr id="12" name="TextBox 11"/>
+          <p:cNvSpPr txBox="1"/>
+          <p:nvPr/>
+        </p:nvSpPr>
+        <p:spPr>
+          <a:xfrm>
+            <a:off x="8534095" y="6492240"/>
+            <a:ext cx="3200400" cy="274320"/>
+          </a:xfrm>
+          <a:prstGeom prst="rect">
+            <a:avLst/>
+          </a:prstGeom>
+          <a:noFill/>
+        </p:spPr>
+        <p:txBody>
+          <a:bodyPr wrap="square" lIns="0" rIns="0" tIns="0" bIns="0">
+            <a:spAutoFit/>
+          </a:bodyPr>
+          <a:lstStyle/>
+          <a:p>
+            <a:pPr algn="r"/>
+            <a:r>
+              <a:rPr sz="1000" b="0" i="0">
+                <a:solidFill>
+                  <a:srgbClr val="6B7280"/>
+                </a:solidFill>
+                <a:latin typeface="Calibri"/>
+              </a:rPr>
+              <a:t>5 / 17</a:t>
+            </a:r>
+          </a:p>
+        </p:txBody>
+      </p:sp>
+    </p:spTree>
+  </p:cSld>
+  <p:clrMapOvr>
+    <a:masterClrMapping/>
+  </p:clrMapOvr>
+</p:sld>
+</file>
+
+<file path=ppt/slides/slide6.xml><?xml version="1.0" encoding="utf-8"?>
+<p:sld xmlns:a="http://schemas.openxmlformats.org/drawingml/2006/main" xmlns:p="http://schemas.openxmlformats.org/presentationml/2006/main" xmlns:r="http://schemas.openxmlformats.org/officeDocument/2006/relationships">
+  <p:cSld>
+    <p:spTree>
+      <p:nvGrpSpPr>
+        <p:cNvPr id="1" name=""/>
+        <p:cNvGrpSpPr/>
+        <p:nvPr/>
+      </p:nvGrpSpPr>
+      <p:grpSpPr/>
+      <p:sp>
+        <p:nvSpPr>
+          <p:cNvPr id="2" name="Rectangle 1"/>
+          <p:cNvSpPr/>
+          <p:nvPr/>
+        </p:nvSpPr>
+        <p:spPr>
+          <a:xfrm>
             <a:off x="0" y="0"/>
-            <a:ext cx="320040" cy="6858000"/>
+            <a:ext cx="12191695" cy="6858000"/>
+          </a:xfrm>
+          <a:prstGeom prst="rect">
+            <a:avLst/>
+          </a:prstGeom>
+          <a:solidFill>
+            <a:srgbClr val="F8F6F0"/>
+          </a:solidFill>
+          <a:ln>
+            <a:noFill/>
+          </a:ln>
+          <a:effectLst/>
+        </p:spPr>
+        <p:style>
+          <a:lnRef idx="1">
+            <a:schemeClr val="accent1"/>
+          </a:lnRef>
+          <a:fillRef idx="3">
+            <a:schemeClr val="accent1"/>
+          </a:fillRef>
+          <a:effectRef idx="2">
+            <a:schemeClr val="accent1"/>
+          </a:effectRef>
+          <a:fontRef idx="minor">
+            <a:schemeClr val="lt1"/>
+          </a:fontRef>
+        </p:style>
+        <p:txBody>
+          <a:bodyPr rtlCol="0" anchor="ctr"/>
+          <a:lstStyle/>
+          <a:p>
+            <a:pPr algn="ctr"/>
+          </a:p>
+        </p:txBody>
+      </p:sp>
+      <p:sp>
+        <p:nvSpPr>
+          <p:cNvPr id="3" name="Rounded Rectangle 2"/>
+          <p:cNvSpPr/>
+          <p:nvPr/>
+        </p:nvSpPr>
+        <p:spPr>
+          <a:xfrm>
+            <a:off x="548640" y="411480"/>
+            <a:ext cx="2286000" cy="411480"/>
+          </a:xfrm>
+          <a:prstGeom prst="roundRect">
+            <a:avLst/>
+          </a:prstGeom>
+          <a:solidFill>
+            <a:srgbClr val="9D7CD8"/>
+          </a:solidFill>
+          <a:ln>
+            <a:noFill/>
+          </a:ln>
+          <a:effectLst/>
+        </p:spPr>
+        <p:style>
+          <a:lnRef idx="1">
+            <a:schemeClr val="accent1"/>
+          </a:lnRef>
+          <a:fillRef idx="3">
+            <a:schemeClr val="accent1"/>
+          </a:fillRef>
+          <a:effectRef idx="2">
+            <a:schemeClr val="accent1"/>
+          </a:effectRef>
+          <a:fontRef idx="minor">
+            <a:schemeClr val="lt1"/>
+          </a:fontRef>
+        </p:style>
+        <p:txBody>
+          <a:bodyPr rtlCol="0" anchor="ctr"/>
+          <a:lstStyle/>
+          <a:p>
+            <a:pPr algn="ctr"/>
+          </a:p>
+        </p:txBody>
+      </p:sp>
+      <p:sp>
+        <p:nvSpPr>
+          <p:cNvPr id="4" name="TextBox 3"/>
+          <p:cNvSpPr txBox="1"/>
+          <p:nvPr/>
+        </p:nvSpPr>
+        <p:spPr>
+          <a:xfrm>
+            <a:off x="548640" y="411480"/>
+            <a:ext cx="2286000" cy="411480"/>
+          </a:xfrm>
+          <a:prstGeom prst="rect">
+            <a:avLst/>
+          </a:prstGeom>
+          <a:noFill/>
+        </p:spPr>
+        <p:txBody>
+          <a:bodyPr wrap="square" lIns="0" rIns="0" tIns="0" bIns="0" anchor="ctr">
+            <a:spAutoFit/>
+          </a:bodyPr>
+          <a:lstStyle/>
+          <a:p>
+            <a:pPr algn="ctr"/>
+            <a:r>
+              <a:rPr sz="1100" b="1" i="0">
+                <a:solidFill>
+                  <a:srgbClr val="FFFFFF"/>
+                </a:solidFill>
+                <a:latin typeface="Calibri"/>
+              </a:rPr>
+              <a:t>SUMMARIZE</a:t>
+            </a:r>
+          </a:p>
+        </p:txBody>
+      </p:sp>
+      <p:sp>
+        <p:nvSpPr>
+          <p:cNvPr id="5" name="TextBox 4"/>
+          <p:cNvSpPr txBox="1"/>
+          <p:nvPr/>
+        </p:nvSpPr>
+        <p:spPr>
+          <a:xfrm>
+            <a:off x="3017520" y="411480"/>
+            <a:ext cx="8686800" cy="457200"/>
+          </a:xfrm>
+          <a:prstGeom prst="rect">
+            <a:avLst/>
+          </a:prstGeom>
+          <a:noFill/>
+        </p:spPr>
+        <p:txBody>
+          <a:bodyPr wrap="square" lIns="0" rIns="0" tIns="0" bIns="0" anchor="ctr">
+            <a:spAutoFit/>
+          </a:bodyPr>
+          <a:lstStyle/>
+          <a:p>
+            <a:pPr algn="l"/>
+            <a:r>
+              <a:rPr sz="2200" b="1" i="0">
+                <a:solidFill>
+                  <a:srgbClr val="1E3A8A"/>
+                </a:solidFill>
+                <a:latin typeface="Calibri"/>
+              </a:rPr>
+              <a:t>naive_summary</a:t>
+            </a:r>
+          </a:p>
+        </p:txBody>
+      </p:sp>
+      <p:sp>
+        <p:nvSpPr>
+          <p:cNvPr id="6" name="Rectangle 5"/>
+          <p:cNvSpPr/>
+          <p:nvPr/>
+        </p:nvSpPr>
+        <p:spPr>
+          <a:xfrm>
+            <a:off x="548640" y="960120"/>
+            <a:ext cx="8229600" cy="548640"/>
           </a:xfrm>
           <a:prstGeom prst="rect">
             <a:avLst/>
@@ -4997,14 +9532,584 @@
       </p:sp>
       <p:sp>
         <p:nvSpPr>
+          <p:cNvPr id="7" name="TextBox 6"/>
+          <p:cNvSpPr txBox="1"/>
+          <p:nvPr/>
+        </p:nvSpPr>
+        <p:spPr>
+          <a:xfrm>
+            <a:off x="777240" y="960120"/>
+            <a:ext cx="7863840" cy="548640"/>
+          </a:xfrm>
+          <a:prstGeom prst="rect">
+            <a:avLst/>
+          </a:prstGeom>
+          <a:noFill/>
+        </p:spPr>
+        <p:txBody>
+          <a:bodyPr wrap="square" lIns="0" rIns="0" tIns="0" bIns="0" anchor="ctr">
+            <a:spAutoFit/>
+          </a:bodyPr>
+          <a:lstStyle/>
+          <a:p>
+            <a:pPr algn="l"/>
+            <a:r>
+              <a:rPr sz="1400" b="1" i="0">
+                <a:solidFill>
+                  <a:srgbClr val="FFFFFF"/>
+                </a:solidFill>
+                <a:latin typeface="Calibri"/>
+              </a:rPr>
+              <a:t>Always loses on cost — every fire writes uncached tokens</a:t>
+            </a:r>
+          </a:p>
+        </p:txBody>
+      </p:sp>
+      <p:sp>
+        <p:nvSpPr>
+          <p:cNvPr id="8" name="Rectangle 7"/>
+          <p:cNvSpPr/>
+          <p:nvPr/>
+        </p:nvSpPr>
+        <p:spPr>
+          <a:xfrm>
+            <a:off x="8897112" y="960120"/>
+            <a:ext cx="2743200" cy="548640"/>
+          </a:xfrm>
+          <a:prstGeom prst="rect">
+            <a:avLst/>
+          </a:prstGeom>
+          <a:solidFill>
+            <a:srgbClr val="FFFFFF"/>
+          </a:solidFill>
+          <a:ln w="15875">
+            <a:solidFill>
+              <a:srgbClr val="E69F00"/>
+            </a:solidFill>
+          </a:ln>
+          <a:effectLst/>
+        </p:spPr>
+        <p:style>
+          <a:lnRef idx="1">
+            <a:schemeClr val="accent1"/>
+          </a:lnRef>
+          <a:fillRef idx="3">
+            <a:schemeClr val="accent1"/>
+          </a:fillRef>
+          <a:effectRef idx="2">
+            <a:schemeClr val="accent1"/>
+          </a:effectRef>
+          <a:fontRef idx="minor">
+            <a:schemeClr val="lt1"/>
+          </a:fontRef>
+        </p:style>
+        <p:txBody>
+          <a:bodyPr rtlCol="0" anchor="ctr"/>
+          <a:lstStyle/>
+          <a:p>
+            <a:pPr algn="ctr"/>
+          </a:p>
+        </p:txBody>
+      </p:sp>
+      <p:sp>
+        <p:nvSpPr>
+          <p:cNvPr id="9" name="TextBox 8"/>
+          <p:cNvSpPr txBox="1"/>
+          <p:nvPr/>
+        </p:nvSpPr>
+        <p:spPr>
+          <a:xfrm>
+            <a:off x="8988552" y="960120"/>
+            <a:ext cx="2606040" cy="548640"/>
+          </a:xfrm>
+          <a:prstGeom prst="rect">
+            <a:avLst/>
+          </a:prstGeom>
+          <a:noFill/>
+        </p:spPr>
+        <p:txBody>
+          <a:bodyPr wrap="square" lIns="0" rIns="0" tIns="0" bIns="0" anchor="ctr">
+            <a:spAutoFit/>
+          </a:bodyPr>
+          <a:lstStyle/>
+          <a:p>
+            <a:pPr algn="ctr"/>
+            <a:r>
+              <a:rPr sz="1000" b="1" i="0">
+                <a:solidFill>
+                  <a:srgbClr val="E69F00"/>
+                </a:solidFill>
+                <a:latin typeface="Calibri"/>
+              </a:rPr>
+              <a:t>tested on τ-bench airline + SWE-bench Lite</a:t>
+            </a:r>
+          </a:p>
+        </p:txBody>
+      </p:sp>
+      <p:pic>
+        <p:nvPicPr>
+          <p:cNvPr id="10" name="Picture 9" descr="method_02_naive_summary.png"/>
+          <p:cNvPicPr>
+            <a:picLocks noChangeAspect="1"/>
+          </p:cNvPicPr>
+          <p:nvPr/>
+        </p:nvPicPr>
+        <p:blipFill>
+          <a:blip r:embed="rId2"/>
+          <a:stretch>
+            <a:fillRect/>
+          </a:stretch>
+        </p:blipFill>
+        <p:spPr>
+          <a:xfrm>
+            <a:off x="548640" y="1751494"/>
+            <a:ext cx="11091672" cy="4452290"/>
+          </a:xfrm>
+          <a:prstGeom prst="rect">
+            <a:avLst/>
+          </a:prstGeom>
+        </p:spPr>
+      </p:pic>
+      <p:sp>
+        <p:nvSpPr>
+          <p:cNvPr id="11" name="TextBox 10"/>
+          <p:cNvSpPr txBox="1"/>
+          <p:nvPr/>
+        </p:nvSpPr>
+        <p:spPr>
+          <a:xfrm>
+            <a:off x="457200" y="6492240"/>
+            <a:ext cx="7315200" cy="274320"/>
+          </a:xfrm>
+          <a:prstGeom prst="rect">
+            <a:avLst/>
+          </a:prstGeom>
+          <a:noFill/>
+        </p:spPr>
+        <p:txBody>
+          <a:bodyPr wrap="square" lIns="0" rIns="0" tIns="0" bIns="0">
+            <a:spAutoFit/>
+          </a:bodyPr>
+          <a:lstStyle/>
+          <a:p>
+            <a:pPr algn="l"/>
+            <a:r>
+              <a:rPr sz="1000" b="0" i="0">
+                <a:solidFill>
+                  <a:srgbClr val="6B7280"/>
+                </a:solidFill>
+                <a:latin typeface="Calibri"/>
+              </a:rPr>
+              <a:t>AdaptiveCache · Vlad Cainamisir · Harvard</a:t>
+            </a:r>
+          </a:p>
+        </p:txBody>
+      </p:sp>
+      <p:sp>
+        <p:nvSpPr>
+          <p:cNvPr id="12" name="TextBox 11"/>
+          <p:cNvSpPr txBox="1"/>
+          <p:nvPr/>
+        </p:nvSpPr>
+        <p:spPr>
+          <a:xfrm>
+            <a:off x="8534095" y="6492240"/>
+            <a:ext cx="3200400" cy="274320"/>
+          </a:xfrm>
+          <a:prstGeom prst="rect">
+            <a:avLst/>
+          </a:prstGeom>
+          <a:noFill/>
+        </p:spPr>
+        <p:txBody>
+          <a:bodyPr wrap="square" lIns="0" rIns="0" tIns="0" bIns="0">
+            <a:spAutoFit/>
+          </a:bodyPr>
+          <a:lstStyle/>
+          <a:p>
+            <a:pPr algn="r"/>
+            <a:r>
+              <a:rPr sz="1000" b="0" i="0">
+                <a:solidFill>
+                  <a:srgbClr val="6B7280"/>
+                </a:solidFill>
+                <a:latin typeface="Calibri"/>
+              </a:rPr>
+              <a:t>6 / 17</a:t>
+            </a:r>
+          </a:p>
+        </p:txBody>
+      </p:sp>
+    </p:spTree>
+  </p:cSld>
+  <p:clrMapOvr>
+    <a:masterClrMapping/>
+  </p:clrMapOvr>
+</p:sld>
+</file>
+
+<file path=ppt/slides/slide7.xml><?xml version="1.0" encoding="utf-8"?>
+<p:sld xmlns:a="http://schemas.openxmlformats.org/drawingml/2006/main" xmlns:p="http://schemas.openxmlformats.org/presentationml/2006/main" xmlns:r="http://schemas.openxmlformats.org/officeDocument/2006/relationships">
+  <p:cSld>
+    <p:spTree>
+      <p:nvGrpSpPr>
+        <p:cNvPr id="1" name=""/>
+        <p:cNvGrpSpPr/>
+        <p:nvPr/>
+      </p:nvGrpSpPr>
+      <p:grpSpPr/>
+      <p:sp>
+        <p:nvSpPr>
+          <p:cNvPr id="2" name="Rectangle 1"/>
+          <p:cNvSpPr/>
+          <p:nvPr/>
+        </p:nvSpPr>
+        <p:spPr>
+          <a:xfrm>
+            <a:off x="0" y="0"/>
+            <a:ext cx="12191695" cy="6858000"/>
+          </a:xfrm>
+          <a:prstGeom prst="rect">
+            <a:avLst/>
+          </a:prstGeom>
+          <a:solidFill>
+            <a:srgbClr val="F8F6F0"/>
+          </a:solidFill>
+          <a:ln>
+            <a:noFill/>
+          </a:ln>
+          <a:effectLst/>
+        </p:spPr>
+        <p:style>
+          <a:lnRef idx="1">
+            <a:schemeClr val="accent1"/>
+          </a:lnRef>
+          <a:fillRef idx="3">
+            <a:schemeClr val="accent1"/>
+          </a:fillRef>
+          <a:effectRef idx="2">
+            <a:schemeClr val="accent1"/>
+          </a:effectRef>
+          <a:fontRef idx="minor">
+            <a:schemeClr val="lt1"/>
+          </a:fontRef>
+        </p:style>
+        <p:txBody>
+          <a:bodyPr rtlCol="0" anchor="ctr"/>
+          <a:lstStyle/>
+          <a:p>
+            <a:pPr algn="ctr"/>
+          </a:p>
+        </p:txBody>
+      </p:sp>
+      <p:sp>
+        <p:nvSpPr>
+          <p:cNvPr id="3" name="Rounded Rectangle 2"/>
+          <p:cNvSpPr/>
+          <p:nvPr/>
+        </p:nvSpPr>
+        <p:spPr>
+          <a:xfrm>
+            <a:off x="548640" y="411480"/>
+            <a:ext cx="2286000" cy="411480"/>
+          </a:xfrm>
+          <a:prstGeom prst="roundRect">
+            <a:avLst/>
+          </a:prstGeom>
+          <a:solidFill>
+            <a:srgbClr val="9D7CD8"/>
+          </a:solidFill>
+          <a:ln>
+            <a:noFill/>
+          </a:ln>
+          <a:effectLst/>
+        </p:spPr>
+        <p:style>
+          <a:lnRef idx="1">
+            <a:schemeClr val="accent1"/>
+          </a:lnRef>
+          <a:fillRef idx="3">
+            <a:schemeClr val="accent1"/>
+          </a:fillRef>
+          <a:effectRef idx="2">
+            <a:schemeClr val="accent1"/>
+          </a:effectRef>
+          <a:fontRef idx="minor">
+            <a:schemeClr val="lt1"/>
+          </a:fontRef>
+        </p:style>
+        <p:txBody>
+          <a:bodyPr rtlCol="0" anchor="ctr"/>
+          <a:lstStyle/>
+          <a:p>
+            <a:pPr algn="ctr"/>
+          </a:p>
+        </p:txBody>
+      </p:sp>
+      <p:sp>
+        <p:nvSpPr>
           <p:cNvPr id="4" name="TextBox 3"/>
           <p:cNvSpPr txBox="1"/>
           <p:nvPr/>
         </p:nvSpPr>
         <p:spPr>
           <a:xfrm>
-            <a:off x="1097280" y="914400"/>
-            <a:ext cx="10058400" cy="457200"/>
+            <a:off x="548640" y="411480"/>
+            <a:ext cx="2286000" cy="411480"/>
+          </a:xfrm>
+          <a:prstGeom prst="rect">
+            <a:avLst/>
+          </a:prstGeom>
+          <a:noFill/>
+        </p:spPr>
+        <p:txBody>
+          <a:bodyPr wrap="square" lIns="0" rIns="0" tIns="0" bIns="0" anchor="ctr">
+            <a:spAutoFit/>
+          </a:bodyPr>
+          <a:lstStyle/>
+          <a:p>
+            <a:pPr algn="ctr"/>
+            <a:r>
+              <a:rPr sz="1100" b="1" i="0">
+                <a:solidFill>
+                  <a:srgbClr val="FFFFFF"/>
+                </a:solidFill>
+                <a:latin typeface="Calibri"/>
+              </a:rPr>
+              <a:t>SUMMARIZE</a:t>
+            </a:r>
+          </a:p>
+        </p:txBody>
+      </p:sp>
+      <p:sp>
+        <p:nvSpPr>
+          <p:cNvPr id="5" name="TextBox 4"/>
+          <p:cNvSpPr txBox="1"/>
+          <p:nvPr/>
+        </p:nvSpPr>
+        <p:spPr>
+          <a:xfrm>
+            <a:off x="3017520" y="411480"/>
+            <a:ext cx="8686800" cy="457200"/>
+          </a:xfrm>
+          <a:prstGeom prst="rect">
+            <a:avLst/>
+          </a:prstGeom>
+          <a:noFill/>
+        </p:spPr>
+        <p:txBody>
+          <a:bodyPr wrap="square" lIns="0" rIns="0" tIns="0" bIns="0" anchor="ctr">
+            <a:spAutoFit/>
+          </a:bodyPr>
+          <a:lstStyle/>
+          <a:p>
+            <a:pPr algn="l"/>
+            <a:r>
+              <a:rPr sz="2200" b="1" i="0">
+                <a:solidFill>
+                  <a:srgbClr val="1E3A8A"/>
+                </a:solidFill>
+                <a:latin typeface="Calibri"/>
+              </a:rPr>
+              <a:t>microcompact</a:t>
+            </a:r>
+          </a:p>
+        </p:txBody>
+      </p:sp>
+      <p:sp>
+        <p:nvSpPr>
+          <p:cNvPr id="6" name="Rectangle 5"/>
+          <p:cNvSpPr/>
+          <p:nvPr/>
+        </p:nvSpPr>
+        <p:spPr>
+          <a:xfrm>
+            <a:off x="548640" y="960120"/>
+            <a:ext cx="8229600" cy="548640"/>
+          </a:xfrm>
+          <a:prstGeom prst="rect">
+            <a:avLst/>
+          </a:prstGeom>
+          <a:solidFill>
+            <a:srgbClr val="1E3A8A"/>
+          </a:solidFill>
+          <a:ln>
+            <a:noFill/>
+          </a:ln>
+          <a:effectLst/>
+        </p:spPr>
+        <p:style>
+          <a:lnRef idx="1">
+            <a:schemeClr val="accent1"/>
+          </a:lnRef>
+          <a:fillRef idx="3">
+            <a:schemeClr val="accent1"/>
+          </a:fillRef>
+          <a:effectRef idx="2">
+            <a:schemeClr val="accent1"/>
+          </a:effectRef>
+          <a:fontRef idx="minor">
+            <a:schemeClr val="lt1"/>
+          </a:fontRef>
+        </p:style>
+        <p:txBody>
+          <a:bodyPr rtlCol="0" anchor="ctr"/>
+          <a:lstStyle/>
+          <a:p>
+            <a:pPr algn="ctr"/>
+          </a:p>
+        </p:txBody>
+      </p:sp>
+      <p:sp>
+        <p:nvSpPr>
+          <p:cNvPr id="7" name="TextBox 6"/>
+          <p:cNvSpPr txBox="1"/>
+          <p:nvPr/>
+        </p:nvSpPr>
+        <p:spPr>
+          <a:xfrm>
+            <a:off x="777240" y="960120"/>
+            <a:ext cx="7863840" cy="548640"/>
+          </a:xfrm>
+          <a:prstGeom prst="rect">
+            <a:avLst/>
+          </a:prstGeom>
+          <a:noFill/>
+        </p:spPr>
+        <p:txBody>
+          <a:bodyPr wrap="square" lIns="0" rIns="0" tIns="0" bIns="0" anchor="ctr">
+            <a:spAutoFit/>
+          </a:bodyPr>
+          <a:lstStyle/>
+          <a:p>
+            <a:pPr algn="l"/>
+            <a:r>
+              <a:rPr sz="1400" b="1" i="0">
+                <a:solidFill>
+                  <a:srgbClr val="FFFFFF"/>
+                </a:solidFill>
+                <a:latin typeface="Calibri"/>
+              </a:rPr>
+              <a:t>Rarely fires — needs an outlier-large observation</a:t>
+            </a:r>
+          </a:p>
+        </p:txBody>
+      </p:sp>
+      <p:sp>
+        <p:nvSpPr>
+          <p:cNvPr id="8" name="Rectangle 7"/>
+          <p:cNvSpPr/>
+          <p:nvPr/>
+        </p:nvSpPr>
+        <p:spPr>
+          <a:xfrm>
+            <a:off x="8897112" y="960120"/>
+            <a:ext cx="2743200" cy="548640"/>
+          </a:xfrm>
+          <a:prstGeom prst="rect">
+            <a:avLst/>
+          </a:prstGeom>
+          <a:solidFill>
+            <a:srgbClr val="FFFFFF"/>
+          </a:solidFill>
+          <a:ln w="15875">
+            <a:solidFill>
+              <a:srgbClr val="1E3A8A"/>
+            </a:solidFill>
+          </a:ln>
+          <a:effectLst/>
+        </p:spPr>
+        <p:style>
+          <a:lnRef idx="1">
+            <a:schemeClr val="accent1"/>
+          </a:lnRef>
+          <a:fillRef idx="3">
+            <a:schemeClr val="accent1"/>
+          </a:fillRef>
+          <a:effectRef idx="2">
+            <a:schemeClr val="accent1"/>
+          </a:effectRef>
+          <a:fontRef idx="minor">
+            <a:schemeClr val="lt1"/>
+          </a:fontRef>
+        </p:style>
+        <p:txBody>
+          <a:bodyPr rtlCol="0" anchor="ctr"/>
+          <a:lstStyle/>
+          <a:p>
+            <a:pPr algn="ctr"/>
+          </a:p>
+        </p:txBody>
+      </p:sp>
+      <p:sp>
+        <p:nvSpPr>
+          <p:cNvPr id="9" name="TextBox 8"/>
+          <p:cNvSpPr txBox="1"/>
+          <p:nvPr/>
+        </p:nvSpPr>
+        <p:spPr>
+          <a:xfrm>
+            <a:off x="8988552" y="960120"/>
+            <a:ext cx="2606040" cy="548640"/>
+          </a:xfrm>
+          <a:prstGeom prst="rect">
+            <a:avLst/>
+          </a:prstGeom>
+          <a:noFill/>
+        </p:spPr>
+        <p:txBody>
+          <a:bodyPr wrap="square" lIns="0" rIns="0" tIns="0" bIns="0" anchor="ctr">
+            <a:spAutoFit/>
+          </a:bodyPr>
+          <a:lstStyle/>
+          <a:p>
+            <a:pPr algn="ctr"/>
+            <a:r>
+              <a:rPr sz="1000" b="1" i="0">
+                <a:solidFill>
+                  <a:srgbClr val="1E3A8A"/>
+                </a:solidFill>
+                <a:latin typeface="Calibri"/>
+              </a:rPr>
+              <a:t>10 trajectories  ·  Phase B + C</a:t>
+            </a:r>
+          </a:p>
+        </p:txBody>
+      </p:sp>
+      <p:pic>
+        <p:nvPicPr>
+          <p:cNvPr id="10" name="Picture 9" descr="method_03_microcompact.png"/>
+          <p:cNvPicPr>
+            <a:picLocks noChangeAspect="1"/>
+          </p:cNvPicPr>
+          <p:nvPr/>
+        </p:nvPicPr>
+        <p:blipFill>
+          <a:blip r:embed="rId2"/>
+          <a:stretch>
+            <a:fillRect/>
+          </a:stretch>
+        </p:blipFill>
+        <p:spPr>
+          <a:xfrm>
+            <a:off x="548640" y="1751494"/>
+            <a:ext cx="11091672" cy="4452290"/>
+          </a:xfrm>
+          <a:prstGeom prst="rect">
+            <a:avLst/>
+          </a:prstGeom>
+        </p:spPr>
+      </p:pic>
+      <p:sp>
+        <p:nvSpPr>
+          <p:cNvPr id="11" name="TextBox 10"/>
+          <p:cNvSpPr txBox="1"/>
+          <p:nvPr/>
+        </p:nvSpPr>
+        <p:spPr>
+          <a:xfrm>
+            <a:off x="457200" y="6492240"/>
+            <a:ext cx="7315200" cy="274320"/>
           </a:xfrm>
           <a:prstGeom prst="rect">
             <a:avLst/>
@@ -5019,13 +10124,619 @@
           <a:p>
             <a:pPr algn="l"/>
             <a:r>
+              <a:rPr sz="1000" b="0" i="0">
+                <a:solidFill>
+                  <a:srgbClr val="6B7280"/>
+                </a:solidFill>
+                <a:latin typeface="Calibri"/>
+              </a:rPr>
+              <a:t>AdaptiveCache · Vlad Cainamisir · Harvard</a:t>
+            </a:r>
+          </a:p>
+        </p:txBody>
+      </p:sp>
+      <p:sp>
+        <p:nvSpPr>
+          <p:cNvPr id="12" name="TextBox 11"/>
+          <p:cNvSpPr txBox="1"/>
+          <p:nvPr/>
+        </p:nvSpPr>
+        <p:spPr>
+          <a:xfrm>
+            <a:off x="8534095" y="6492240"/>
+            <a:ext cx="3200400" cy="274320"/>
+          </a:xfrm>
+          <a:prstGeom prst="rect">
+            <a:avLst/>
+          </a:prstGeom>
+          <a:noFill/>
+        </p:spPr>
+        <p:txBody>
+          <a:bodyPr wrap="square" lIns="0" rIns="0" tIns="0" bIns="0">
+            <a:spAutoFit/>
+          </a:bodyPr>
+          <a:lstStyle/>
+          <a:p>
+            <a:pPr algn="r"/>
+            <a:r>
+              <a:rPr sz="1000" b="0" i="0">
+                <a:solidFill>
+                  <a:srgbClr val="6B7280"/>
+                </a:solidFill>
+                <a:latin typeface="Calibri"/>
+              </a:rPr>
+              <a:t>7 / 17</a:t>
+            </a:r>
+          </a:p>
+        </p:txBody>
+      </p:sp>
+    </p:spTree>
+  </p:cSld>
+  <p:clrMapOvr>
+    <a:masterClrMapping/>
+  </p:clrMapOvr>
+</p:sld>
+</file>
+
+<file path=ppt/slides/slide8.xml><?xml version="1.0" encoding="utf-8"?>
+<p:sld xmlns:a="http://schemas.openxmlformats.org/drawingml/2006/main" xmlns:p="http://schemas.openxmlformats.org/presentationml/2006/main" xmlns:r="http://schemas.openxmlformats.org/officeDocument/2006/relationships">
+  <p:cSld>
+    <p:spTree>
+      <p:nvGrpSpPr>
+        <p:cNvPr id="1" name=""/>
+        <p:cNvGrpSpPr/>
+        <p:nvPr/>
+      </p:nvGrpSpPr>
+      <p:grpSpPr/>
+      <p:sp>
+        <p:nvSpPr>
+          <p:cNvPr id="2" name="Rectangle 1"/>
+          <p:cNvSpPr/>
+          <p:nvPr/>
+        </p:nvSpPr>
+        <p:spPr>
+          <a:xfrm>
+            <a:off x="0" y="0"/>
+            <a:ext cx="12191695" cy="6858000"/>
+          </a:xfrm>
+          <a:prstGeom prst="rect">
+            <a:avLst/>
+          </a:prstGeom>
+          <a:solidFill>
+            <a:srgbClr val="F8F6F0"/>
+          </a:solidFill>
+          <a:ln>
+            <a:noFill/>
+          </a:ln>
+          <a:effectLst/>
+        </p:spPr>
+        <p:style>
+          <a:lnRef idx="1">
+            <a:schemeClr val="accent1"/>
+          </a:lnRef>
+          <a:fillRef idx="3">
+            <a:schemeClr val="accent1"/>
+          </a:fillRef>
+          <a:effectRef idx="2">
+            <a:schemeClr val="accent1"/>
+          </a:effectRef>
+          <a:fontRef idx="minor">
+            <a:schemeClr val="lt1"/>
+          </a:fontRef>
+        </p:style>
+        <p:txBody>
+          <a:bodyPr rtlCol="0" anchor="ctr"/>
+          <a:lstStyle/>
+          <a:p>
+            <a:pPr algn="ctr"/>
+          </a:p>
+        </p:txBody>
+      </p:sp>
+      <p:sp>
+        <p:nvSpPr>
+          <p:cNvPr id="3" name="Rounded Rectangle 2"/>
+          <p:cNvSpPr/>
+          <p:nvPr/>
+        </p:nvSpPr>
+        <p:spPr>
+          <a:xfrm>
+            <a:off x="548640" y="411480"/>
+            <a:ext cx="2286000" cy="411480"/>
+          </a:xfrm>
+          <a:prstGeom prst="roundRect">
+            <a:avLst/>
+          </a:prstGeom>
+          <a:solidFill>
+            <a:srgbClr val="9D7CD8"/>
+          </a:solidFill>
+          <a:ln>
+            <a:noFill/>
+          </a:ln>
+          <a:effectLst/>
+        </p:spPr>
+        <p:style>
+          <a:lnRef idx="1">
+            <a:schemeClr val="accent1"/>
+          </a:lnRef>
+          <a:fillRef idx="3">
+            <a:schemeClr val="accent1"/>
+          </a:fillRef>
+          <a:effectRef idx="2">
+            <a:schemeClr val="accent1"/>
+          </a:effectRef>
+          <a:fontRef idx="minor">
+            <a:schemeClr val="lt1"/>
+          </a:fontRef>
+        </p:style>
+        <p:txBody>
+          <a:bodyPr rtlCol="0" anchor="ctr"/>
+          <a:lstStyle/>
+          <a:p>
+            <a:pPr algn="ctr"/>
+          </a:p>
+        </p:txBody>
+      </p:sp>
+      <p:sp>
+        <p:nvSpPr>
+          <p:cNvPr id="4" name="TextBox 3"/>
+          <p:cNvSpPr txBox="1"/>
+          <p:nvPr/>
+        </p:nvSpPr>
+        <p:spPr>
+          <a:xfrm>
+            <a:off x="548640" y="411480"/>
+            <a:ext cx="2286000" cy="411480"/>
+          </a:xfrm>
+          <a:prstGeom prst="rect">
+            <a:avLst/>
+          </a:prstGeom>
+          <a:noFill/>
+        </p:spPr>
+        <p:txBody>
+          <a:bodyPr wrap="square" lIns="0" rIns="0" tIns="0" bIns="0" anchor="ctr">
+            <a:spAutoFit/>
+          </a:bodyPr>
+          <a:lstStyle/>
+          <a:p>
+            <a:pPr algn="ctr"/>
+            <a:r>
+              <a:rPr sz="1100" b="1" i="0">
+                <a:solidFill>
+                  <a:srgbClr val="FFFFFF"/>
+                </a:solidFill>
+                <a:latin typeface="Calibri"/>
+              </a:rPr>
+              <a:t>SUMMARIZE</a:t>
+            </a:r>
+          </a:p>
+        </p:txBody>
+      </p:sp>
+      <p:sp>
+        <p:nvSpPr>
+          <p:cNvPr id="5" name="TextBox 4"/>
+          <p:cNvSpPr txBox="1"/>
+          <p:nvPr/>
+        </p:nvSpPr>
+        <p:spPr>
+          <a:xfrm>
+            <a:off x="3017520" y="411480"/>
+            <a:ext cx="8686800" cy="457200"/>
+          </a:xfrm>
+          <a:prstGeom prst="rect">
+            <a:avLst/>
+          </a:prstGeom>
+          <a:noFill/>
+        </p:spPr>
+        <p:txBody>
+          <a:bodyPr wrap="square" lIns="0" rIns="0" tIns="0" bIns="0" anchor="ctr">
+            <a:spAutoFit/>
+          </a:bodyPr>
+          <a:lstStyle/>
+          <a:p>
+            <a:pPr algn="l"/>
+            <a:r>
+              <a:rPr sz="2200" b="1" i="0">
+                <a:solidFill>
+                  <a:srgbClr val="1E3A8A"/>
+                </a:solidFill>
+                <a:latin typeface="Calibri"/>
+              </a:rPr>
+              <a:t>prefix_preserving</a:t>
+            </a:r>
+          </a:p>
+        </p:txBody>
+      </p:sp>
+      <p:sp>
+        <p:nvSpPr>
+          <p:cNvPr id="6" name="Rectangle 5"/>
+          <p:cNvSpPr/>
+          <p:nvPr/>
+        </p:nvSpPr>
+        <p:spPr>
+          <a:xfrm>
+            <a:off x="548640" y="960120"/>
+            <a:ext cx="8229600" cy="548640"/>
+          </a:xfrm>
+          <a:prstGeom prst="rect">
+            <a:avLst/>
+          </a:prstGeom>
+          <a:solidFill>
+            <a:srgbClr val="E69F00"/>
+          </a:solidFill>
+          <a:ln>
+            <a:noFill/>
+          </a:ln>
+          <a:effectLst/>
+        </p:spPr>
+        <p:style>
+          <a:lnRef idx="1">
+            <a:schemeClr val="accent1"/>
+          </a:lnRef>
+          <a:fillRef idx="3">
+            <a:schemeClr val="accent1"/>
+          </a:fillRef>
+          <a:effectRef idx="2">
+            <a:schemeClr val="accent1"/>
+          </a:effectRef>
+          <a:fontRef idx="minor">
+            <a:schemeClr val="lt1"/>
+          </a:fontRef>
+        </p:style>
+        <p:txBody>
+          <a:bodyPr rtlCol="0" anchor="ctr"/>
+          <a:lstStyle/>
+          <a:p>
+            <a:pPr algn="ctr"/>
+          </a:p>
+        </p:txBody>
+      </p:sp>
+      <p:sp>
+        <p:nvSpPr>
+          <p:cNvPr id="7" name="TextBox 6"/>
+          <p:cNvSpPr txBox="1"/>
+          <p:nvPr/>
+        </p:nvSpPr>
+        <p:spPr>
+          <a:xfrm>
+            <a:off x="777240" y="960120"/>
+            <a:ext cx="7863840" cy="548640"/>
+          </a:xfrm>
+          <a:prstGeom prst="rect">
+            <a:avLst/>
+          </a:prstGeom>
+          <a:noFill/>
+        </p:spPr>
+        <p:txBody>
+          <a:bodyPr wrap="square" lIns="0" rIns="0" tIns="0" bIns="0" anchor="ctr">
+            <a:spAutoFit/>
+          </a:bodyPr>
+          <a:lstStyle/>
+          <a:p>
+            <a:pPr algn="l"/>
+            <a:r>
               <a:rPr sz="1400" b="1" i="0">
                 <a:solidFill>
+                  <a:srgbClr val="FFFFFF"/>
+                </a:solidFill>
+                <a:latin typeface="Calibri"/>
+              </a:rPr>
+              <a:t>Stable cliff cost; loses ~30% on cost vs none</a:t>
+            </a:r>
+          </a:p>
+        </p:txBody>
+      </p:sp>
+      <p:sp>
+        <p:nvSpPr>
+          <p:cNvPr id="8" name="Rectangle 7"/>
+          <p:cNvSpPr/>
+          <p:nvPr/>
+        </p:nvSpPr>
+        <p:spPr>
+          <a:xfrm>
+            <a:off x="8897112" y="960120"/>
+            <a:ext cx="2743200" cy="548640"/>
+          </a:xfrm>
+          <a:prstGeom prst="rect">
+            <a:avLst/>
+          </a:prstGeom>
+          <a:solidFill>
+            <a:srgbClr val="FFFFFF"/>
+          </a:solidFill>
+          <a:ln w="15875">
+            <a:solidFill>
+              <a:srgbClr val="E69F00"/>
+            </a:solidFill>
+          </a:ln>
+          <a:effectLst/>
+        </p:spPr>
+        <p:style>
+          <a:lnRef idx="1">
+            <a:schemeClr val="accent1"/>
+          </a:lnRef>
+          <a:fillRef idx="3">
+            <a:schemeClr val="accent1"/>
+          </a:fillRef>
+          <a:effectRef idx="2">
+            <a:schemeClr val="accent1"/>
+          </a:effectRef>
+          <a:fontRef idx="minor">
+            <a:schemeClr val="lt1"/>
+          </a:fontRef>
+        </p:style>
+        <p:txBody>
+          <a:bodyPr rtlCol="0" anchor="ctr"/>
+          <a:lstStyle/>
+          <a:p>
+            <a:pPr algn="ctr"/>
+          </a:p>
+        </p:txBody>
+      </p:sp>
+      <p:sp>
+        <p:nvSpPr>
+          <p:cNvPr id="9" name="TextBox 8"/>
+          <p:cNvSpPr txBox="1"/>
+          <p:nvPr/>
+        </p:nvSpPr>
+        <p:spPr>
+          <a:xfrm>
+            <a:off x="8988552" y="960120"/>
+            <a:ext cx="2606040" cy="548640"/>
+          </a:xfrm>
+          <a:prstGeom prst="rect">
+            <a:avLst/>
+          </a:prstGeom>
+          <a:noFill/>
+        </p:spPr>
+        <p:txBody>
+          <a:bodyPr wrap="square" lIns="0" rIns="0" tIns="0" bIns="0" anchor="ctr">
+            <a:spAutoFit/>
+          </a:bodyPr>
+          <a:lstStyle/>
+          <a:p>
+            <a:pPr algn="ctr"/>
+            <a:r>
+              <a:rPr sz="1000" b="1" i="0">
+                <a:solidFill>
                   <a:srgbClr val="E69F00"/>
                 </a:solidFill>
                 <a:latin typeface="Calibri"/>
               </a:rPr>
-              <a:t>TAKEAWAYS</a:t>
+              <a:t>28 trajectories  ·  7 phases</a:t>
+            </a:r>
+          </a:p>
+        </p:txBody>
+      </p:sp>
+      <p:pic>
+        <p:nvPicPr>
+          <p:cNvPr id="10" name="Picture 9" descr="method_04_prefix_preserving.png"/>
+          <p:cNvPicPr>
+            <a:picLocks noChangeAspect="1"/>
+          </p:cNvPicPr>
+          <p:nvPr/>
+        </p:nvPicPr>
+        <p:blipFill>
+          <a:blip r:embed="rId2"/>
+          <a:stretch>
+            <a:fillRect/>
+          </a:stretch>
+        </p:blipFill>
+        <p:spPr>
+          <a:xfrm>
+            <a:off x="548640" y="1751494"/>
+            <a:ext cx="11091672" cy="4452290"/>
+          </a:xfrm>
+          <a:prstGeom prst="rect">
+            <a:avLst/>
+          </a:prstGeom>
+        </p:spPr>
+      </p:pic>
+      <p:sp>
+        <p:nvSpPr>
+          <p:cNvPr id="11" name="TextBox 10"/>
+          <p:cNvSpPr txBox="1"/>
+          <p:nvPr/>
+        </p:nvSpPr>
+        <p:spPr>
+          <a:xfrm>
+            <a:off x="457200" y="6492240"/>
+            <a:ext cx="7315200" cy="274320"/>
+          </a:xfrm>
+          <a:prstGeom prst="rect">
+            <a:avLst/>
+          </a:prstGeom>
+          <a:noFill/>
+        </p:spPr>
+        <p:txBody>
+          <a:bodyPr wrap="square" lIns="0" rIns="0" tIns="0" bIns="0">
+            <a:spAutoFit/>
+          </a:bodyPr>
+          <a:lstStyle/>
+          <a:p>
+            <a:pPr algn="l"/>
+            <a:r>
+              <a:rPr sz="1000" b="0" i="0">
+                <a:solidFill>
+                  <a:srgbClr val="6B7280"/>
+                </a:solidFill>
+                <a:latin typeface="Calibri"/>
+              </a:rPr>
+              <a:t>AdaptiveCache · Vlad Cainamisir · Harvard</a:t>
+            </a:r>
+          </a:p>
+        </p:txBody>
+      </p:sp>
+      <p:sp>
+        <p:nvSpPr>
+          <p:cNvPr id="12" name="TextBox 11"/>
+          <p:cNvSpPr txBox="1"/>
+          <p:nvPr/>
+        </p:nvSpPr>
+        <p:spPr>
+          <a:xfrm>
+            <a:off x="8534095" y="6492240"/>
+            <a:ext cx="3200400" cy="274320"/>
+          </a:xfrm>
+          <a:prstGeom prst="rect">
+            <a:avLst/>
+          </a:prstGeom>
+          <a:noFill/>
+        </p:spPr>
+        <p:txBody>
+          <a:bodyPr wrap="square" lIns="0" rIns="0" tIns="0" bIns="0">
+            <a:spAutoFit/>
+          </a:bodyPr>
+          <a:lstStyle/>
+          <a:p>
+            <a:pPr algn="r"/>
+            <a:r>
+              <a:rPr sz="1000" b="0" i="0">
+                <a:solidFill>
+                  <a:srgbClr val="6B7280"/>
+                </a:solidFill>
+                <a:latin typeface="Calibri"/>
+              </a:rPr>
+              <a:t>8 / 17</a:t>
+            </a:r>
+          </a:p>
+        </p:txBody>
+      </p:sp>
+    </p:spTree>
+  </p:cSld>
+  <p:clrMapOvr>
+    <a:masterClrMapping/>
+  </p:clrMapOvr>
+</p:sld>
+</file>
+
+<file path=ppt/slides/slide9.xml><?xml version="1.0" encoding="utf-8"?>
+<p:sld xmlns:a="http://schemas.openxmlformats.org/drawingml/2006/main" xmlns:p="http://schemas.openxmlformats.org/presentationml/2006/main" xmlns:r="http://schemas.openxmlformats.org/officeDocument/2006/relationships">
+  <p:cSld>
+    <p:spTree>
+      <p:nvGrpSpPr>
+        <p:cNvPr id="1" name=""/>
+        <p:cNvGrpSpPr/>
+        <p:nvPr/>
+      </p:nvGrpSpPr>
+      <p:grpSpPr/>
+      <p:sp>
+        <p:nvSpPr>
+          <p:cNvPr id="2" name="Rectangle 1"/>
+          <p:cNvSpPr/>
+          <p:nvPr/>
+        </p:nvSpPr>
+        <p:spPr>
+          <a:xfrm>
+            <a:off x="0" y="0"/>
+            <a:ext cx="12191695" cy="6858000"/>
+          </a:xfrm>
+          <a:prstGeom prst="rect">
+            <a:avLst/>
+          </a:prstGeom>
+          <a:solidFill>
+            <a:srgbClr val="F8F6F0"/>
+          </a:solidFill>
+          <a:ln>
+            <a:noFill/>
+          </a:ln>
+          <a:effectLst/>
+        </p:spPr>
+        <p:style>
+          <a:lnRef idx="1">
+            <a:schemeClr val="accent1"/>
+          </a:lnRef>
+          <a:fillRef idx="3">
+            <a:schemeClr val="accent1"/>
+          </a:fillRef>
+          <a:effectRef idx="2">
+            <a:schemeClr val="accent1"/>
+          </a:effectRef>
+          <a:fontRef idx="minor">
+            <a:schemeClr val="lt1"/>
+          </a:fontRef>
+        </p:style>
+        <p:txBody>
+          <a:bodyPr rtlCol="0" anchor="ctr"/>
+          <a:lstStyle/>
+          <a:p>
+            <a:pPr algn="ctr"/>
+          </a:p>
+        </p:txBody>
+      </p:sp>
+      <p:sp>
+        <p:nvSpPr>
+          <p:cNvPr id="3" name="Rounded Rectangle 2"/>
+          <p:cNvSpPr/>
+          <p:nvPr/>
+        </p:nvSpPr>
+        <p:spPr>
+          <a:xfrm>
+            <a:off x="548640" y="411480"/>
+            <a:ext cx="2286000" cy="411480"/>
+          </a:xfrm>
+          <a:prstGeom prst="roundRect">
+            <a:avLst/>
+          </a:prstGeom>
+          <a:solidFill>
+            <a:srgbClr val="56B4E9"/>
+          </a:solidFill>
+          <a:ln>
+            <a:noFill/>
+          </a:ln>
+          <a:effectLst/>
+        </p:spPr>
+        <p:style>
+          <a:lnRef idx="1">
+            <a:schemeClr val="accent1"/>
+          </a:lnRef>
+          <a:fillRef idx="3">
+            <a:schemeClr val="accent1"/>
+          </a:fillRef>
+          <a:effectRef idx="2">
+            <a:schemeClr val="accent1"/>
+          </a:effectRef>
+          <a:fontRef idx="minor">
+            <a:schemeClr val="lt1"/>
+          </a:fontRef>
+        </p:style>
+        <p:txBody>
+          <a:bodyPr rtlCol="0" anchor="ctr"/>
+          <a:lstStyle/>
+          <a:p>
+            <a:pPr algn="ctr"/>
+          </a:p>
+        </p:txBody>
+      </p:sp>
+      <p:sp>
+        <p:nvSpPr>
+          <p:cNvPr id="4" name="TextBox 3"/>
+          <p:cNvSpPr txBox="1"/>
+          <p:nvPr/>
+        </p:nvSpPr>
+        <p:spPr>
+          <a:xfrm>
+            <a:off x="548640" y="411480"/>
+            <a:ext cx="2286000" cy="411480"/>
+          </a:xfrm>
+          <a:prstGeom prst="rect">
+            <a:avLst/>
+          </a:prstGeom>
+          <a:noFill/>
+        </p:spPr>
+        <p:txBody>
+          <a:bodyPr wrap="square" lIns="0" rIns="0" tIns="0" bIns="0" anchor="ctr">
+            <a:spAutoFit/>
+          </a:bodyPr>
+          <a:lstStyle/>
+          <a:p>
+            <a:pPr algn="ctr"/>
+            <a:r>
+              <a:rPr sz="1100" b="1" i="0">
+                <a:solidFill>
+                  <a:srgbClr val="FFFFFF"/>
+                </a:solidFill>
+                <a:latin typeface="Calibri"/>
+              </a:rPr>
+              <a:t>REORDER</a:t>
             </a:r>
           </a:p>
         </p:txBody>
@@ -5038,8 +10749,227 @@
         </p:nvSpPr>
         <p:spPr>
           <a:xfrm>
-            <a:off x="1097280" y="1554480"/>
-            <a:ext cx="10058400" cy="1097280"/>
+            <a:off x="3017520" y="411480"/>
+            <a:ext cx="8686800" cy="457200"/>
+          </a:xfrm>
+          <a:prstGeom prst="rect">
+            <a:avLst/>
+          </a:prstGeom>
+          <a:noFill/>
+        </p:spPr>
+        <p:txBody>
+          <a:bodyPr wrap="square" lIns="0" rIns="0" tIns="0" bIns="0" anchor="ctr">
+            <a:spAutoFit/>
+          </a:bodyPr>
+          <a:lstStyle/>
+          <a:p>
+            <a:pPr algn="l"/>
+            <a:r>
+              <a:rPr sz="2200" b="1" i="0">
+                <a:solidFill>
+                  <a:srgbClr val="1E3A8A"/>
+                </a:solidFill>
+                <a:latin typeface="Calibri"/>
+              </a:rPr>
+              <a:t>position_aware</a:t>
+            </a:r>
+          </a:p>
+        </p:txBody>
+      </p:sp>
+      <p:sp>
+        <p:nvSpPr>
+          <p:cNvPr id="6" name="Rectangle 5"/>
+          <p:cNvSpPr/>
+          <p:nvPr/>
+        </p:nvSpPr>
+        <p:spPr>
+          <a:xfrm>
+            <a:off x="548640" y="960120"/>
+            <a:ext cx="8229600" cy="548640"/>
+          </a:xfrm>
+          <a:prstGeom prst="rect">
+            <a:avLst/>
+          </a:prstGeom>
+          <a:solidFill>
+            <a:srgbClr val="1E3A8A"/>
+          </a:solidFill>
+          <a:ln>
+            <a:noFill/>
+          </a:ln>
+          <a:effectLst/>
+        </p:spPr>
+        <p:style>
+          <a:lnRef idx="1">
+            <a:schemeClr val="accent1"/>
+          </a:lnRef>
+          <a:fillRef idx="3">
+            <a:schemeClr val="accent1"/>
+          </a:fillRef>
+          <a:effectRef idx="2">
+            <a:schemeClr val="accent1"/>
+          </a:effectRef>
+          <a:fontRef idx="minor">
+            <a:schemeClr val="lt1"/>
+          </a:fontRef>
+        </p:style>
+        <p:txBody>
+          <a:bodyPr rtlCol="0" anchor="ctr"/>
+          <a:lstStyle/>
+          <a:p>
+            <a:pPr algn="ctr"/>
+          </a:p>
+        </p:txBody>
+      </p:sp>
+      <p:sp>
+        <p:nvSpPr>
+          <p:cNvPr id="7" name="TextBox 6"/>
+          <p:cNvSpPr txBox="1"/>
+          <p:nvPr/>
+        </p:nvSpPr>
+        <p:spPr>
+          <a:xfrm>
+            <a:off x="777240" y="960120"/>
+            <a:ext cx="7863840" cy="548640"/>
+          </a:xfrm>
+          <a:prstGeom prst="rect">
+            <a:avLst/>
+          </a:prstGeom>
+          <a:noFill/>
+        </p:spPr>
+        <p:txBody>
+          <a:bodyPr wrap="square" lIns="0" rIns="0" tIns="0" bIns="0" anchor="ctr">
+            <a:spAutoFit/>
+          </a:bodyPr>
+          <a:lstStyle/>
+          <a:p>
+            <a:pPr algn="l"/>
+            <a:r>
+              <a:rPr sz="1400" b="1" i="0">
+                <a:solidFill>
+                  <a:srgbClr val="FFFFFF"/>
+                </a:solidFill>
+                <a:latin typeface="Calibri"/>
+              </a:rPr>
+              <a:t>Proto-AdaptiveCache layout; no cost win at our scale</a:t>
+            </a:r>
+          </a:p>
+        </p:txBody>
+      </p:sp>
+      <p:sp>
+        <p:nvSpPr>
+          <p:cNvPr id="8" name="Rectangle 7"/>
+          <p:cNvSpPr/>
+          <p:nvPr/>
+        </p:nvSpPr>
+        <p:spPr>
+          <a:xfrm>
+            <a:off x="8897112" y="960120"/>
+            <a:ext cx="2743200" cy="548640"/>
+          </a:xfrm>
+          <a:prstGeom prst="rect">
+            <a:avLst/>
+          </a:prstGeom>
+          <a:solidFill>
+            <a:srgbClr val="FFFFFF"/>
+          </a:solidFill>
+          <a:ln w="15875">
+            <a:solidFill>
+              <a:srgbClr val="1E3A8A"/>
+            </a:solidFill>
+          </a:ln>
+          <a:effectLst/>
+        </p:spPr>
+        <p:style>
+          <a:lnRef idx="1">
+            <a:schemeClr val="accent1"/>
+          </a:lnRef>
+          <a:fillRef idx="3">
+            <a:schemeClr val="accent1"/>
+          </a:fillRef>
+          <a:effectRef idx="2">
+            <a:schemeClr val="accent1"/>
+          </a:effectRef>
+          <a:fontRef idx="minor">
+            <a:schemeClr val="lt1"/>
+          </a:fontRef>
+        </p:style>
+        <p:txBody>
+          <a:bodyPr rtlCol="0" anchor="ctr"/>
+          <a:lstStyle/>
+          <a:p>
+            <a:pPr algn="ctr"/>
+          </a:p>
+        </p:txBody>
+      </p:sp>
+      <p:sp>
+        <p:nvSpPr>
+          <p:cNvPr id="9" name="TextBox 8"/>
+          <p:cNvSpPr txBox="1"/>
+          <p:nvPr/>
+        </p:nvSpPr>
+        <p:spPr>
+          <a:xfrm>
+            <a:off x="8988552" y="960120"/>
+            <a:ext cx="2606040" cy="548640"/>
+          </a:xfrm>
+          <a:prstGeom prst="rect">
+            <a:avLst/>
+          </a:prstGeom>
+          <a:noFill/>
+        </p:spPr>
+        <p:txBody>
+          <a:bodyPr wrap="square" lIns="0" rIns="0" tIns="0" bIns="0" anchor="ctr">
+            <a:spAutoFit/>
+          </a:bodyPr>
+          <a:lstStyle/>
+          <a:p>
+            <a:pPr algn="ctr"/>
+            <a:r>
+              <a:rPr sz="1000" b="1" i="0">
+                <a:solidFill>
+                  <a:srgbClr val="1E3A8A"/>
+                </a:solidFill>
+                <a:latin typeface="Calibri"/>
+              </a:rPr>
+              <a:t>12 trajectories  ·  Phase A + C</a:t>
+            </a:r>
+          </a:p>
+        </p:txBody>
+      </p:sp>
+      <p:pic>
+        <p:nvPicPr>
+          <p:cNvPr id="10" name="Picture 9" descr="method_05_position_aware.png"/>
+          <p:cNvPicPr>
+            <a:picLocks noChangeAspect="1"/>
+          </p:cNvPicPr>
+          <p:nvPr/>
+        </p:nvPicPr>
+        <p:blipFill>
+          <a:blip r:embed="rId2"/>
+          <a:stretch>
+            <a:fillRect/>
+          </a:stretch>
+        </p:blipFill>
+        <p:spPr>
+          <a:xfrm>
+            <a:off x="548640" y="2129028"/>
+            <a:ext cx="11091672" cy="3697224"/>
+          </a:xfrm>
+          <a:prstGeom prst="rect">
+            <a:avLst/>
+          </a:prstGeom>
+        </p:spPr>
+      </p:pic>
+      <p:sp>
+        <p:nvSpPr>
+          <p:cNvPr id="11" name="TextBox 10"/>
+          <p:cNvSpPr txBox="1"/>
+          <p:nvPr/>
+        </p:nvSpPr>
+        <p:spPr>
+          <a:xfrm>
+            <a:off x="457200" y="6492240"/>
+            <a:ext cx="7315200" cy="274320"/>
           </a:xfrm>
           <a:prstGeom prst="rect">
             <a:avLst/>
@@ -5054,39 +10984,27 @@
           <a:p>
             <a:pPr algn="l"/>
             <a:r>
-              <a:rPr sz="3400" b="1" i="0">
-                <a:solidFill>
-                  <a:srgbClr val="FFFFFF"/>
-                </a:solidFill>
-                <a:latin typeface="Calibri"/>
-              </a:rPr>
-              <a:t>What you leave behind</a:t>
-            </a:r>
-          </a:p>
-          <a:p>
-            <a:pPr algn="l"/>
-            <a:r>
-              <a:rPr sz="3400" b="1" i="0">
-                <a:solidFill>
-                  <a:srgbClr val="FFFFFF"/>
-                </a:solidFill>
-                <a:latin typeface="Calibri"/>
-              </a:rPr>
-              <a:t>matters more than what you remove.</a:t>
-            </a:r>
-          </a:p>
-        </p:txBody>
-      </p:sp>
-      <p:sp>
-        <p:nvSpPr>
-          <p:cNvPr id="6" name="TextBox 5"/>
-          <p:cNvSpPr txBox="1"/>
-          <p:nvPr/>
-        </p:nvSpPr>
-        <p:spPr>
-          <a:xfrm>
-            <a:off x="1097280" y="3383280"/>
-            <a:ext cx="10058400" cy="457200"/>
+              <a:rPr sz="1000" b="0" i="0">
+                <a:solidFill>
+                  <a:srgbClr val="6B7280"/>
+                </a:solidFill>
+                <a:latin typeface="Calibri"/>
+              </a:rPr>
+              <a:t>AdaptiveCache · Vlad Cainamisir · Harvard</a:t>
+            </a:r>
+          </a:p>
+        </p:txBody>
+      </p:sp>
+      <p:sp>
+        <p:nvSpPr>
+          <p:cNvPr id="12" name="TextBox 11"/>
+          <p:cNvSpPr txBox="1"/>
+          <p:nvPr/>
+        </p:nvSpPr>
+        <p:spPr>
+          <a:xfrm>
+            <a:off x="8534095" y="6492240"/>
+            <a:ext cx="3200400" cy="274320"/>
           </a:xfrm>
           <a:prstGeom prst="rect">
             <a:avLst/>
@@ -5099,155 +11017,15 @@
           </a:bodyPr>
           <a:lstStyle/>
           <a:p>
-            <a:pPr algn="l"/>
-            <a:r>
-              <a:rPr sz="1800" b="0" i="0">
-                <a:solidFill>
-                  <a:srgbClr val="6077C7"/>
-                </a:solidFill>
-                <a:latin typeface="Calibri"/>
-              </a:rPr>
-              <a:t>1.  More context can hurt — it removes the agent's pressure to update.</a:t>
-            </a:r>
-          </a:p>
-        </p:txBody>
-      </p:sp>
-      <p:sp>
-        <p:nvSpPr>
-          <p:cNvPr id="7" name="TextBox 6"/>
-          <p:cNvSpPr txBox="1"/>
-          <p:nvPr/>
-        </p:nvSpPr>
-        <p:spPr>
-          <a:xfrm>
-            <a:off x="1097280" y="4023360"/>
-            <a:ext cx="10058400" cy="457200"/>
-          </a:xfrm>
-          <a:prstGeom prst="rect">
-            <a:avLst/>
-          </a:prstGeom>
-          <a:noFill/>
-        </p:spPr>
-        <p:txBody>
-          <a:bodyPr wrap="square" lIns="0" rIns="0" tIns="0" bIns="0">
-            <a:spAutoFit/>
-          </a:bodyPr>
-          <a:lstStyle/>
-          <a:p>
-            <a:pPr algn="l"/>
-            <a:r>
-              <a:rPr sz="1800" b="0" i="0">
-                <a:solidFill>
-                  <a:srgbClr val="6077C7"/>
-                </a:solidFill>
-                <a:latin typeface="Calibri"/>
-              </a:rPr>
-              <a:t>2.  Empty hints force a fresh look. Confident summaries anchor.</a:t>
-            </a:r>
-          </a:p>
-        </p:txBody>
-      </p:sp>
-      <p:sp>
-        <p:nvSpPr>
-          <p:cNvPr id="8" name="TextBox 7"/>
-          <p:cNvSpPr txBox="1"/>
-          <p:nvPr/>
-        </p:nvSpPr>
-        <p:spPr>
-          <a:xfrm>
-            <a:off x="1097280" y="4663440"/>
-            <a:ext cx="10058400" cy="457200"/>
-          </a:xfrm>
-          <a:prstGeom prst="rect">
-            <a:avLst/>
-          </a:prstGeom>
-          <a:noFill/>
-        </p:spPr>
-        <p:txBody>
-          <a:bodyPr wrap="square" lIns="0" rIns="0" tIns="0" bIns="0">
-            <a:spAutoFit/>
-          </a:bodyPr>
-          <a:lstStyle/>
-          <a:p>
-            <a:pPr algn="l"/>
-            <a:r>
-              <a:rPr sz="1800" b="0" i="0">
-                <a:solidFill>
-                  <a:srgbClr val="6077C7"/>
-                </a:solidFill>
-                <a:latin typeface="Calibri"/>
-              </a:rPr>
-              <a:t>3.  Compaction tested 8 strategies — most lose to doing nothing.</a:t>
-            </a:r>
-          </a:p>
-        </p:txBody>
-      </p:sp>
-      <p:sp>
-        <p:nvSpPr>
-          <p:cNvPr id="9" name="TextBox 8"/>
-          <p:cNvSpPr txBox="1"/>
-          <p:nvPr/>
-        </p:nvSpPr>
-        <p:spPr>
-          <a:xfrm>
-            <a:off x="1097280" y="5303520"/>
-            <a:ext cx="10058400" cy="457200"/>
-          </a:xfrm>
-          <a:prstGeom prst="rect">
-            <a:avLst/>
-          </a:prstGeom>
-          <a:noFill/>
-        </p:spPr>
-        <p:txBody>
-          <a:bodyPr wrap="square" lIns="0" rIns="0" tIns="0" bIns="0">
-            <a:spAutoFit/>
-          </a:bodyPr>
-          <a:lstStyle/>
-          <a:p>
-            <a:pPr algn="l"/>
-            <a:r>
-              <a:rPr sz="1800" b="0" i="0">
-                <a:solidFill>
-                  <a:srgbClr val="E69F00"/>
-                </a:solidFill>
-                <a:latin typeface="Calibri"/>
-              </a:rPr>
-              <a:t>    But when you DO compress: less is more.</a:t>
-            </a:r>
-          </a:p>
-        </p:txBody>
-      </p:sp>
-      <p:sp>
-        <p:nvSpPr>
-          <p:cNvPr id="10" name="TextBox 9"/>
-          <p:cNvSpPr txBox="1"/>
-          <p:nvPr/>
-        </p:nvSpPr>
-        <p:spPr>
-          <a:xfrm>
-            <a:off x="1097280" y="6126480"/>
-            <a:ext cx="10058400" cy="365760"/>
-          </a:xfrm>
-          <a:prstGeom prst="rect">
-            <a:avLst/>
-          </a:prstGeom>
-          <a:noFill/>
-        </p:spPr>
-        <p:txBody>
-          <a:bodyPr wrap="square" lIns="0" rIns="0" tIns="0" bIns="0">
-            <a:spAutoFit/>
-          </a:bodyPr>
-          <a:lstStyle/>
-          <a:p>
-            <a:pPr algn="l"/>
-            <a:r>
-              <a:rPr sz="1200" b="0" i="0">
-                <a:solidFill>
-                  <a:srgbClr val="6077C7"/>
-                </a:solidFill>
-                <a:latin typeface="Calibri"/>
-              </a:rPr>
-              <a:t>Thank you.   ·   github · /vladcainamisir/adaptivecache</a:t>
+            <a:pPr algn="r"/>
+            <a:r>
+              <a:rPr sz="1000" b="0" i="0">
+                <a:solidFill>
+                  <a:srgbClr val="6B7280"/>
+                </a:solidFill>
+                <a:latin typeface="Calibri"/>
+              </a:rPr>
+              <a:t>9 / 17</a:t>
             </a:r>
           </a:p>
         </p:txBody>

--- a/studies/lifetime_cost/reports/AdaptiveCache_talk.pptx
+++ b/studies/lifetime_cost/reports/AdaptiveCache_talk.pptx
@@ -22,6 +22,17 @@
     <p:sldId id="270" r:id="rId21"/>
     <p:sldId id="271" r:id="rId22"/>
     <p:sldId id="272" r:id="rId23"/>
+    <p:sldId id="273" r:id="rId24"/>
+    <p:sldId id="274" r:id="rId25"/>
+    <p:sldId id="275" r:id="rId26"/>
+    <p:sldId id="276" r:id="rId27"/>
+    <p:sldId id="277" r:id="rId28"/>
+    <p:sldId id="278" r:id="rId29"/>
+    <p:sldId id="279" r:id="rId30"/>
+    <p:sldId id="280" r:id="rId31"/>
+    <p:sldId id="281" r:id="rId32"/>
+    <p:sldId id="282" r:id="rId33"/>
+    <p:sldId id="283" r:id="rId34"/>
   </p:sldIdLst>
   <p:sldSz cx="12191695" cy="6858000" type="screen4x3"/>
   <p:notesSz cx="6858000" cy="9144000"/>
@@ -3312,7 +3323,7 @@
             <a:r>
               <a:rPr sz="1700" b="0" i="1">
                 <a:solidFill>
-                  <a:srgbClr val="6077C7"/>
+                  <a:srgbClr val="E8ECF5"/>
                 </a:solidFill>
                 <a:latin typeface="Calibri"/>
               </a:rPr>
@@ -3347,7 +3358,7 @@
             <a:r>
               <a:rPr sz="1200" b="0" i="0">
                 <a:solidFill>
-                  <a:srgbClr val="6077C7"/>
+                  <a:srgbClr val="E8ECF5"/>
                 </a:solidFill>
                 <a:latin typeface="Calibri"/>
               </a:rPr>
@@ -3781,7 +3792,7 @@
                 </a:solidFill>
                 <a:latin typeface="Calibri"/>
               </a:rPr>
-              <a:t>10 / 17</a:t>
+              <a:t>10 / 28</a:t>
             </a:r>
           </a:p>
         </p:txBody>
@@ -4211,7 +4222,7 @@
                 </a:solidFill>
                 <a:latin typeface="Calibri"/>
               </a:rPr>
-              <a:t>11 / 17</a:t>
+              <a:t>11 / 28</a:t>
             </a:r>
           </a:p>
         </p:txBody>
@@ -4641,7 +4652,7 @@
                 </a:solidFill>
                 <a:latin typeface="Calibri"/>
               </a:rPr>
-              <a:t>12 / 17</a:t>
+              <a:t>12 / 28</a:t>
             </a:r>
           </a:p>
         </p:txBody>
@@ -5071,7 +5082,7 @@
                 </a:solidFill>
                 <a:latin typeface="Calibri"/>
               </a:rPr>
-              <a:t>13 / 17</a:t>
+              <a:t>13 / 28</a:t>
             </a:r>
           </a:p>
         </p:txBody>
@@ -5501,7 +5512,7 @@
                 </a:solidFill>
                 <a:latin typeface="Calibri"/>
               </a:rPr>
-              <a:t>14 / 17</a:t>
+              <a:t>14 / 28</a:t>
             </a:r>
           </a:p>
         </p:txBody>
@@ -5931,7 +5942,7 @@
                 </a:solidFill>
                 <a:latin typeface="Calibri"/>
               </a:rPr>
-              <a:t>15 / 17</a:t>
+              <a:t>15 / 28</a:t>
             </a:r>
           </a:p>
         </p:txBody>
@@ -6361,7 +6372,7 @@
                 </a:solidFill>
                 <a:latin typeface="Calibri"/>
               </a:rPr>
-              <a:t>16 / 17</a:t>
+              <a:t>16 / 28</a:t>
             </a:r>
           </a:p>
         </p:txBody>
@@ -6399,7 +6410,7 @@
             <a:avLst/>
           </a:prstGeom>
           <a:solidFill>
-            <a:srgbClr val="14255C"/>
+            <a:srgbClr val="F8F6F0"/>
           </a:solidFill>
           <a:ln>
             <a:noFill/>
@@ -6430,14 +6441,450 @@
       </p:sp>
       <p:sp>
         <p:nvSpPr>
-          <p:cNvPr id="3" name="Rectangle 2"/>
+          <p:cNvPr id="3" name="TextBox 2"/>
+          <p:cNvSpPr txBox="1"/>
+          <p:nvPr/>
+        </p:nvSpPr>
+        <p:spPr>
+          <a:xfrm>
+            <a:off x="548640" y="365760"/>
+            <a:ext cx="10972800" cy="548640"/>
+          </a:xfrm>
+          <a:prstGeom prst="rect">
+            <a:avLst/>
+          </a:prstGeom>
+          <a:noFill/>
+        </p:spPr>
+        <p:txBody>
+          <a:bodyPr wrap="square" lIns="0" rIns="0" tIns="0" bIns="0">
+            <a:spAutoFit/>
+          </a:bodyPr>
+          <a:lstStyle/>
+          <a:p>
+            <a:pPr algn="l"/>
+            <a:r>
+              <a:rPr sz="2400" b="1" i="0">
+                <a:solidFill>
+                  <a:srgbClr val="1E3A8A"/>
+                </a:solidFill>
+                <a:latin typeface="Calibri"/>
+              </a:rPr>
+              <a:t>Headline result — none Pareto-dominates every heuristic</a:t>
+            </a:r>
+          </a:p>
+        </p:txBody>
+      </p:sp>
+      <p:sp>
+        <p:nvSpPr>
+          <p:cNvPr id="4" name="TextBox 3"/>
+          <p:cNvSpPr txBox="1"/>
+          <p:nvPr/>
+        </p:nvSpPr>
+        <p:spPr>
+          <a:xfrm>
+            <a:off x="548640" y="960120"/>
+            <a:ext cx="10972800" cy="365760"/>
+          </a:xfrm>
+          <a:prstGeom prst="rect">
+            <a:avLst/>
+          </a:prstGeom>
+          <a:noFill/>
+        </p:spPr>
+        <p:txBody>
+          <a:bodyPr wrap="square" lIns="0" rIns="0" tIns="0" bIns="0">
+            <a:spAutoFit/>
+          </a:bodyPr>
+          <a:lstStyle/>
+          <a:p>
+            <a:pPr algn="l"/>
+            <a:r>
+              <a:rPr sz="1300" b="0" i="1">
+                <a:solidFill>
+                  <a:srgbClr val="6B7280"/>
+                </a:solidFill>
+                <a:latin typeface="Calibri"/>
+              </a:rPr>
+              <a:t>N=10 SWE-bench Lite, Haiku 4.5. Compaction policies cluster on the wrong side of the frontier.</a:t>
+            </a:r>
+          </a:p>
+        </p:txBody>
+      </p:sp>
+      <p:pic>
+        <p:nvPicPr>
+          <p:cNvPr id="5" name="Picture 4" descr="fig1_pareto_swebench.png"/>
+          <p:cNvPicPr>
+            <a:picLocks noChangeAspect="1"/>
+          </p:cNvPicPr>
+          <p:nvPr/>
+        </p:nvPicPr>
+        <p:blipFill>
+          <a:blip r:embed="rId2"/>
+          <a:stretch>
+            <a:fillRect/>
+          </a:stretch>
+        </p:blipFill>
+        <p:spPr>
+          <a:xfrm>
+            <a:off x="946224" y="1463040"/>
+            <a:ext cx="7068670" cy="4572000"/>
+          </a:xfrm>
+          <a:prstGeom prst="rect">
+            <a:avLst/>
+          </a:prstGeom>
+        </p:spPr>
+      </p:pic>
+      <p:sp>
+        <p:nvSpPr>
+          <p:cNvPr id="6" name="Rectangle 5"/>
           <p:cNvSpPr/>
           <p:nvPr/>
         </p:nvSpPr>
         <p:spPr>
           <a:xfrm>
-            <a:off x="0" y="0"/>
-            <a:ext cx="320040" cy="6858000"/>
+            <a:off x="8686800" y="1645920"/>
+            <a:ext cx="2926080" cy="1325880"/>
+          </a:xfrm>
+          <a:prstGeom prst="rect">
+            <a:avLst/>
+          </a:prstGeom>
+          <a:solidFill>
+            <a:srgbClr val="1E3A8A"/>
+          </a:solidFill>
+          <a:ln>
+            <a:noFill/>
+          </a:ln>
+          <a:effectLst/>
+        </p:spPr>
+        <p:style>
+          <a:lnRef idx="1">
+            <a:schemeClr val="accent1"/>
+          </a:lnRef>
+          <a:fillRef idx="3">
+            <a:schemeClr val="accent1"/>
+          </a:fillRef>
+          <a:effectRef idx="2">
+            <a:schemeClr val="accent1"/>
+          </a:effectRef>
+          <a:fontRef idx="minor">
+            <a:schemeClr val="lt1"/>
+          </a:fontRef>
+        </p:style>
+        <p:txBody>
+          <a:bodyPr rtlCol="0" anchor="ctr"/>
+          <a:lstStyle/>
+          <a:p>
+            <a:pPr algn="ctr"/>
+          </a:p>
+        </p:txBody>
+      </p:sp>
+      <p:sp>
+        <p:nvSpPr>
+          <p:cNvPr id="7" name="TextBox 6"/>
+          <p:cNvSpPr txBox="1"/>
+          <p:nvPr/>
+        </p:nvSpPr>
+        <p:spPr>
+          <a:xfrm>
+            <a:off x="8686800" y="1737360"/>
+            <a:ext cx="2926080" cy="640080"/>
+          </a:xfrm>
+          <a:prstGeom prst="rect">
+            <a:avLst/>
+          </a:prstGeom>
+          <a:noFill/>
+        </p:spPr>
+        <p:txBody>
+          <a:bodyPr wrap="square" lIns="0" rIns="0" tIns="0" bIns="0" anchor="ctr">
+            <a:spAutoFit/>
+          </a:bodyPr>
+          <a:lstStyle/>
+          <a:p>
+            <a:pPr algn="ctr"/>
+            <a:r>
+              <a:rPr sz="2600" b="1" i="0">
+                <a:solidFill>
+                  <a:srgbClr val="E69F00"/>
+                </a:solidFill>
+                <a:latin typeface="Calibri"/>
+              </a:rPr>
+              <a:t>$0.10–0.15</a:t>
+            </a:r>
+          </a:p>
+        </p:txBody>
+      </p:sp>
+      <p:sp>
+        <p:nvSpPr>
+          <p:cNvPr id="8" name="TextBox 7"/>
+          <p:cNvSpPr txBox="1"/>
+          <p:nvPr/>
+        </p:nvSpPr>
+        <p:spPr>
+          <a:xfrm>
+            <a:off x="8778240" y="2423160"/>
+            <a:ext cx="2743200" cy="502920"/>
+          </a:xfrm>
+          <a:prstGeom prst="rect">
+            <a:avLst/>
+          </a:prstGeom>
+          <a:noFill/>
+        </p:spPr>
+        <p:txBody>
+          <a:bodyPr wrap="square" lIns="0" rIns="0" tIns="0" bIns="0">
+            <a:spAutoFit/>
+          </a:bodyPr>
+          <a:lstStyle/>
+          <a:p>
+            <a:pPr algn="ctr"/>
+            <a:r>
+              <a:rPr sz="1000" b="0" i="0">
+                <a:solidFill>
+                  <a:srgbClr val="E8ECF5"/>
+                </a:solidFill>
+                <a:latin typeface="Calibri"/>
+              </a:rPr>
+              <a:t>new uncached input per cliff</a:t>
+            </a:r>
+          </a:p>
+        </p:txBody>
+      </p:sp>
+      <p:sp>
+        <p:nvSpPr>
+          <p:cNvPr id="9" name="Rectangle 8"/>
+          <p:cNvSpPr/>
+          <p:nvPr/>
+        </p:nvSpPr>
+        <p:spPr>
+          <a:xfrm>
+            <a:off x="8686800" y="3154680"/>
+            <a:ext cx="2926080" cy="1325880"/>
+          </a:xfrm>
+          <a:prstGeom prst="rect">
+            <a:avLst/>
+          </a:prstGeom>
+          <a:solidFill>
+            <a:srgbClr val="1E3A8A"/>
+          </a:solidFill>
+          <a:ln>
+            <a:noFill/>
+          </a:ln>
+          <a:effectLst/>
+        </p:spPr>
+        <p:style>
+          <a:lnRef idx="1">
+            <a:schemeClr val="accent1"/>
+          </a:lnRef>
+          <a:fillRef idx="3">
+            <a:schemeClr val="accent1"/>
+          </a:fillRef>
+          <a:effectRef idx="2">
+            <a:schemeClr val="accent1"/>
+          </a:effectRef>
+          <a:fontRef idx="minor">
+            <a:schemeClr val="lt1"/>
+          </a:fontRef>
+        </p:style>
+        <p:txBody>
+          <a:bodyPr rtlCol="0" anchor="ctr"/>
+          <a:lstStyle/>
+          <a:p>
+            <a:pPr algn="ctr"/>
+          </a:p>
+        </p:txBody>
+      </p:sp>
+      <p:sp>
+        <p:nvSpPr>
+          <p:cNvPr id="10" name="TextBox 9"/>
+          <p:cNvSpPr txBox="1"/>
+          <p:nvPr/>
+        </p:nvSpPr>
+        <p:spPr>
+          <a:xfrm>
+            <a:off x="8686800" y="3246120"/>
+            <a:ext cx="2926080" cy="640080"/>
+          </a:xfrm>
+          <a:prstGeom prst="rect">
+            <a:avLst/>
+          </a:prstGeom>
+          <a:noFill/>
+        </p:spPr>
+        <p:txBody>
+          <a:bodyPr wrap="square" lIns="0" rIns="0" tIns="0" bIns="0" anchor="ctr">
+            <a:spAutoFit/>
+          </a:bodyPr>
+          <a:lstStyle/>
+          <a:p>
+            <a:pPr algn="ctr"/>
+            <a:r>
+              <a:rPr sz="2600" b="1" i="0">
+                <a:solidFill>
+                  <a:srgbClr val="E8ECF5"/>
+                </a:solidFill>
+                <a:latin typeface="Calibri"/>
+              </a:rPr>
+              <a:t>5+ steps</a:t>
+            </a:r>
+          </a:p>
+        </p:txBody>
+      </p:sp>
+      <p:sp>
+        <p:nvSpPr>
+          <p:cNvPr id="11" name="TextBox 10"/>
+          <p:cNvSpPr txBox="1"/>
+          <p:nvPr/>
+        </p:nvSpPr>
+        <p:spPr>
+          <a:xfrm>
+            <a:off x="8778240" y="3931920"/>
+            <a:ext cx="2743200" cy="502920"/>
+          </a:xfrm>
+          <a:prstGeom prst="rect">
+            <a:avLst/>
+          </a:prstGeom>
+          <a:noFill/>
+        </p:spPr>
+        <p:txBody>
+          <a:bodyPr wrap="square" lIns="0" rIns="0" tIns="0" bIns="0">
+            <a:spAutoFit/>
+          </a:bodyPr>
+          <a:lstStyle/>
+          <a:p>
+            <a:pPr algn="ctr"/>
+            <a:r>
+              <a:rPr sz="1000" b="0" i="0">
+                <a:solidFill>
+                  <a:srgbClr val="E8ECF5"/>
+                </a:solidFill>
+                <a:latin typeface="Calibri"/>
+              </a:rPr>
+              <a:t>to amortize one cliff back to break-even</a:t>
+            </a:r>
+          </a:p>
+        </p:txBody>
+      </p:sp>
+      <p:sp>
+        <p:nvSpPr>
+          <p:cNvPr id="12" name="Rectangle 11"/>
+          <p:cNvSpPr/>
+          <p:nvPr/>
+        </p:nvSpPr>
+        <p:spPr>
+          <a:xfrm>
+            <a:off x="8686800" y="4663440"/>
+            <a:ext cx="2926080" cy="1325880"/>
+          </a:xfrm>
+          <a:prstGeom prst="rect">
+            <a:avLst/>
+          </a:prstGeom>
+          <a:solidFill>
+            <a:srgbClr val="1E3A8A"/>
+          </a:solidFill>
+          <a:ln>
+            <a:noFill/>
+          </a:ln>
+          <a:effectLst/>
+        </p:spPr>
+        <p:style>
+          <a:lnRef idx="1">
+            <a:schemeClr val="accent1"/>
+          </a:lnRef>
+          <a:fillRef idx="3">
+            <a:schemeClr val="accent1"/>
+          </a:fillRef>
+          <a:effectRef idx="2">
+            <a:schemeClr val="accent1"/>
+          </a:effectRef>
+          <a:fontRef idx="minor">
+            <a:schemeClr val="lt1"/>
+          </a:fontRef>
+        </p:style>
+        <p:txBody>
+          <a:bodyPr rtlCol="0" anchor="ctr"/>
+          <a:lstStyle/>
+          <a:p>
+            <a:pPr algn="ctr"/>
+          </a:p>
+        </p:txBody>
+      </p:sp>
+      <p:sp>
+        <p:nvSpPr>
+          <p:cNvPr id="13" name="TextBox 12"/>
+          <p:cNvSpPr txBox="1"/>
+          <p:nvPr/>
+        </p:nvSpPr>
+        <p:spPr>
+          <a:xfrm>
+            <a:off x="8686800" y="4754879"/>
+            <a:ext cx="2926080" cy="640080"/>
+          </a:xfrm>
+          <a:prstGeom prst="rect">
+            <a:avLst/>
+          </a:prstGeom>
+          <a:noFill/>
+        </p:spPr>
+        <p:txBody>
+          <a:bodyPr wrap="square" lIns="0" rIns="0" tIns="0" bIns="0" anchor="ctr">
+            <a:spAutoFit/>
+          </a:bodyPr>
+          <a:lstStyle/>
+          <a:p>
+            <a:pPr algn="ctr"/>
+            <a:r>
+              <a:rPr sz="2600" b="1" i="0">
+                <a:solidFill>
+                  <a:srgbClr val="E69F00"/>
+                </a:solidFill>
+                <a:latin typeface="Calibri"/>
+              </a:rPr>
+              <a:t>2.2×</a:t>
+            </a:r>
+          </a:p>
+        </p:txBody>
+      </p:sp>
+      <p:sp>
+        <p:nvSpPr>
+          <p:cNvPr id="14" name="TextBox 13"/>
+          <p:cNvSpPr txBox="1"/>
+          <p:nvPr/>
+        </p:nvSpPr>
+        <p:spPr>
+          <a:xfrm>
+            <a:off x="8778240" y="5440679"/>
+            <a:ext cx="2743200" cy="502920"/>
+          </a:xfrm>
+          <a:prstGeom prst="rect">
+            <a:avLst/>
+          </a:prstGeom>
+          <a:noFill/>
+        </p:spPr>
+        <p:txBody>
+          <a:bodyPr wrap="square" lIns="0" rIns="0" tIns="0" bIns="0">
+            <a:spAutoFit/>
+          </a:bodyPr>
+          <a:lstStyle/>
+          <a:p>
+            <a:pPr algn="ctr"/>
+            <a:r>
+              <a:rPr sz="1000" b="0" i="0">
+                <a:solidFill>
+                  <a:srgbClr val="E8ECF5"/>
+                </a:solidFill>
+                <a:latin typeface="Calibri"/>
+              </a:rPr>
+              <a:t>cheapest compaction policy vs none ($/resolved)</a:t>
+            </a:r>
+          </a:p>
+        </p:txBody>
+      </p:sp>
+      <p:sp>
+        <p:nvSpPr>
+          <p:cNvPr id="15" name="Rectangle 14"/>
+          <p:cNvSpPr/>
+          <p:nvPr/>
+        </p:nvSpPr>
+        <p:spPr>
+          <a:xfrm>
+            <a:off x="548640" y="6053328"/>
+            <a:ext cx="11091672" cy="347472"/>
           </a:xfrm>
           <a:prstGeom prst="rect">
             <a:avLst/>
@@ -6474,6 +6921,951 @@
       </p:sp>
       <p:sp>
         <p:nvSpPr>
+          <p:cNvPr id="16" name="TextBox 15"/>
+          <p:cNvSpPr txBox="1"/>
+          <p:nvPr/>
+        </p:nvSpPr>
+        <p:spPr>
+          <a:xfrm>
+            <a:off x="731520" y="6053328"/>
+            <a:ext cx="10972800" cy="347472"/>
+          </a:xfrm>
+          <a:prstGeom prst="rect">
+            <a:avLst/>
+          </a:prstGeom>
+          <a:noFill/>
+        </p:spPr>
+        <p:txBody>
+          <a:bodyPr wrap="square" lIns="0" rIns="0" tIns="0" bIns="0" anchor="ctr">
+            <a:spAutoFit/>
+          </a:bodyPr>
+          <a:lstStyle/>
+          <a:p>
+            <a:pPr algn="l"/>
+            <a:r>
+              <a:rPr sz="1200" b="1" i="0">
+                <a:solidFill>
+                  <a:srgbClr val="14255C"/>
+                </a:solidFill>
+                <a:latin typeface="Calibri"/>
+              </a:rPr>
+              <a:t>The cliff tax is the dominant cost term. Any policy that fires has to fight it.</a:t>
+            </a:r>
+          </a:p>
+        </p:txBody>
+      </p:sp>
+      <p:sp>
+        <p:nvSpPr>
+          <p:cNvPr id="17" name="TextBox 16"/>
+          <p:cNvSpPr txBox="1"/>
+          <p:nvPr/>
+        </p:nvSpPr>
+        <p:spPr>
+          <a:xfrm>
+            <a:off x="457200" y="6492240"/>
+            <a:ext cx="7315200" cy="274320"/>
+          </a:xfrm>
+          <a:prstGeom prst="rect">
+            <a:avLst/>
+          </a:prstGeom>
+          <a:noFill/>
+        </p:spPr>
+        <p:txBody>
+          <a:bodyPr wrap="square" lIns="0" rIns="0" tIns="0" bIns="0">
+            <a:spAutoFit/>
+          </a:bodyPr>
+          <a:lstStyle/>
+          <a:p>
+            <a:pPr algn="l"/>
+            <a:r>
+              <a:rPr sz="1000" b="0" i="0">
+                <a:solidFill>
+                  <a:srgbClr val="6B7280"/>
+                </a:solidFill>
+                <a:latin typeface="Calibri"/>
+              </a:rPr>
+              <a:t>AdaptiveCache · Vlad Cainamisir · Harvard</a:t>
+            </a:r>
+          </a:p>
+        </p:txBody>
+      </p:sp>
+      <p:sp>
+        <p:nvSpPr>
+          <p:cNvPr id="18" name="TextBox 17"/>
+          <p:cNvSpPr txBox="1"/>
+          <p:nvPr/>
+        </p:nvSpPr>
+        <p:spPr>
+          <a:xfrm>
+            <a:off x="8534095" y="6492240"/>
+            <a:ext cx="3200400" cy="274320"/>
+          </a:xfrm>
+          <a:prstGeom prst="rect">
+            <a:avLst/>
+          </a:prstGeom>
+          <a:noFill/>
+        </p:spPr>
+        <p:txBody>
+          <a:bodyPr wrap="square" lIns="0" rIns="0" tIns="0" bIns="0">
+            <a:spAutoFit/>
+          </a:bodyPr>
+          <a:lstStyle/>
+          <a:p>
+            <a:pPr algn="r"/>
+            <a:r>
+              <a:rPr sz="1000" b="0" i="0">
+                <a:solidFill>
+                  <a:srgbClr val="6B7280"/>
+                </a:solidFill>
+                <a:latin typeface="Calibri"/>
+              </a:rPr>
+              <a:t>17 / 28</a:t>
+            </a:r>
+          </a:p>
+        </p:txBody>
+      </p:sp>
+    </p:spTree>
+  </p:cSld>
+  <p:clrMapOvr>
+    <a:masterClrMapping/>
+  </p:clrMapOvr>
+</p:sld>
+</file>
+
+<file path=ppt/slides/slide18.xml><?xml version="1.0" encoding="utf-8"?>
+<p:sld xmlns:a="http://schemas.openxmlformats.org/drawingml/2006/main" xmlns:p="http://schemas.openxmlformats.org/presentationml/2006/main" xmlns:r="http://schemas.openxmlformats.org/officeDocument/2006/relationships">
+  <p:cSld>
+    <p:spTree>
+      <p:nvGrpSpPr>
+        <p:cNvPr id="1" name=""/>
+        <p:cNvGrpSpPr/>
+        <p:nvPr/>
+      </p:nvGrpSpPr>
+      <p:grpSpPr/>
+      <p:sp>
+        <p:nvSpPr>
+          <p:cNvPr id="2" name="Rectangle 1"/>
+          <p:cNvSpPr/>
+          <p:nvPr/>
+        </p:nvSpPr>
+        <p:spPr>
+          <a:xfrm>
+            <a:off x="0" y="0"/>
+            <a:ext cx="12191695" cy="6858000"/>
+          </a:xfrm>
+          <a:prstGeom prst="rect">
+            <a:avLst/>
+          </a:prstGeom>
+          <a:solidFill>
+            <a:srgbClr val="F8F6F0"/>
+          </a:solidFill>
+          <a:ln>
+            <a:noFill/>
+          </a:ln>
+          <a:effectLst/>
+        </p:spPr>
+        <p:style>
+          <a:lnRef idx="1">
+            <a:schemeClr val="accent1"/>
+          </a:lnRef>
+          <a:fillRef idx="3">
+            <a:schemeClr val="accent1"/>
+          </a:fillRef>
+          <a:effectRef idx="2">
+            <a:schemeClr val="accent1"/>
+          </a:effectRef>
+          <a:fontRef idx="minor">
+            <a:schemeClr val="lt1"/>
+          </a:fontRef>
+        </p:style>
+        <p:txBody>
+          <a:bodyPr rtlCol="0" anchor="ctr"/>
+          <a:lstStyle/>
+          <a:p>
+            <a:pPr algn="ctr"/>
+          </a:p>
+        </p:txBody>
+      </p:sp>
+      <p:sp>
+        <p:nvSpPr>
+          <p:cNvPr id="3" name="TextBox 2"/>
+          <p:cNvSpPr txBox="1"/>
+          <p:nvPr/>
+        </p:nvSpPr>
+        <p:spPr>
+          <a:xfrm>
+            <a:off x="548640" y="365760"/>
+            <a:ext cx="10972800" cy="548640"/>
+          </a:xfrm>
+          <a:prstGeom prst="rect">
+            <a:avLst/>
+          </a:prstGeom>
+          <a:noFill/>
+        </p:spPr>
+        <p:txBody>
+          <a:bodyPr wrap="square" lIns="0" rIns="0" tIns="0" bIns="0">
+            <a:spAutoFit/>
+          </a:bodyPr>
+          <a:lstStyle/>
+          <a:p>
+            <a:pPr algn="l"/>
+            <a:r>
+              <a:rPr sz="2200" b="1" i="0">
+                <a:solidFill>
+                  <a:srgbClr val="1E3A8A"/>
+                </a:solidFill>
+                <a:latin typeface="Calibri"/>
+              </a:rPr>
+              <a:t>What didn't work — and the one nugget that did</a:t>
+            </a:r>
+          </a:p>
+        </p:txBody>
+      </p:sp>
+      <p:sp>
+        <p:nvSpPr>
+          <p:cNvPr id="4" name="TextBox 3"/>
+          <p:cNvSpPr txBox="1"/>
+          <p:nvPr/>
+        </p:nvSpPr>
+        <p:spPr>
+          <a:xfrm>
+            <a:off x="548640" y="914400"/>
+            <a:ext cx="10972800" cy="365760"/>
+          </a:xfrm>
+          <a:prstGeom prst="rect">
+            <a:avLst/>
+          </a:prstGeom>
+          <a:noFill/>
+        </p:spPr>
+        <p:txBody>
+          <a:bodyPr wrap="square" lIns="0" rIns="0" tIns="0" bIns="0">
+            <a:spAutoFit/>
+          </a:bodyPr>
+          <a:lstStyle/>
+          <a:p>
+            <a:pPr algn="l"/>
+            <a:r>
+              <a:rPr sz="1200" b="0" i="1">
+                <a:solidFill>
+                  <a:srgbClr val="6B7280"/>
+                </a:solidFill>
+                <a:latin typeface="Calibri"/>
+              </a:rPr>
+              <a:t>Most of Paper 1 is failure modes. Each told us something. One slice did Pareto-improve.</a:t>
+            </a:r>
+          </a:p>
+        </p:txBody>
+      </p:sp>
+      <p:sp>
+        <p:nvSpPr>
+          <p:cNvPr id="5" name="Rectangle 4"/>
+          <p:cNvSpPr/>
+          <p:nvPr/>
+        </p:nvSpPr>
+        <p:spPr>
+          <a:xfrm>
+            <a:off x="548640" y="1417320"/>
+            <a:ext cx="5120640" cy="457200"/>
+          </a:xfrm>
+          <a:prstGeom prst="rect">
+            <a:avLst/>
+          </a:prstGeom>
+          <a:solidFill>
+            <a:srgbClr val="1E3A8A"/>
+          </a:solidFill>
+          <a:ln>
+            <a:noFill/>
+          </a:ln>
+          <a:effectLst/>
+        </p:spPr>
+        <p:style>
+          <a:lnRef idx="1">
+            <a:schemeClr val="accent1"/>
+          </a:lnRef>
+          <a:fillRef idx="3">
+            <a:schemeClr val="accent1"/>
+          </a:fillRef>
+          <a:effectRef idx="2">
+            <a:schemeClr val="accent1"/>
+          </a:effectRef>
+          <a:fontRef idx="minor">
+            <a:schemeClr val="lt1"/>
+          </a:fontRef>
+        </p:style>
+        <p:txBody>
+          <a:bodyPr rtlCol="0" anchor="ctr"/>
+          <a:lstStyle/>
+          <a:p>
+            <a:pPr algn="ctr"/>
+          </a:p>
+        </p:txBody>
+      </p:sp>
+      <p:sp>
+        <p:nvSpPr>
+          <p:cNvPr id="6" name="TextBox 5"/>
+          <p:cNvSpPr txBox="1"/>
+          <p:nvPr/>
+        </p:nvSpPr>
+        <p:spPr>
+          <a:xfrm>
+            <a:off x="777240" y="1463040"/>
+            <a:ext cx="4663440" cy="411480"/>
+          </a:xfrm>
+          <a:prstGeom prst="rect">
+            <a:avLst/>
+          </a:prstGeom>
+          <a:noFill/>
+        </p:spPr>
+        <p:txBody>
+          <a:bodyPr wrap="square" lIns="0" rIns="0" tIns="0" bIns="0" anchor="ctr">
+            <a:spAutoFit/>
+          </a:bodyPr>
+          <a:lstStyle/>
+          <a:p>
+            <a:pPr algn="l"/>
+            <a:r>
+              <a:rPr sz="1400" b="1" i="0">
+                <a:solidFill>
+                  <a:srgbClr val="FFFFFF"/>
+                </a:solidFill>
+                <a:latin typeface="Calibri"/>
+              </a:rPr>
+              <a:t>What didn't work</a:t>
+            </a:r>
+          </a:p>
+        </p:txBody>
+      </p:sp>
+      <p:sp>
+        <p:nvSpPr>
+          <p:cNvPr id="7" name="TextBox 6"/>
+          <p:cNvSpPr txBox="1"/>
+          <p:nvPr/>
+        </p:nvSpPr>
+        <p:spPr>
+          <a:xfrm>
+            <a:off x="777240" y="1965960"/>
+            <a:ext cx="4663440" cy="292608"/>
+          </a:xfrm>
+          <a:prstGeom prst="rect">
+            <a:avLst/>
+          </a:prstGeom>
+          <a:noFill/>
+        </p:spPr>
+        <p:txBody>
+          <a:bodyPr wrap="square" lIns="0" rIns="0" tIns="0" bIns="0">
+            <a:spAutoFit/>
+          </a:bodyPr>
+          <a:lstStyle/>
+          <a:p>
+            <a:pPr algn="l"/>
+            <a:r>
+              <a:rPr sz="1200" b="1" i="0">
+                <a:solidFill>
+                  <a:srgbClr val="1E3A8A"/>
+                </a:solidFill>
+                <a:latin typeface="Calibri"/>
+              </a:rPr>
+              <a:t>LLM-reorganizer</a:t>
+            </a:r>
+          </a:p>
+        </p:txBody>
+      </p:sp>
+      <p:sp>
+        <p:nvSpPr>
+          <p:cNvPr id="8" name="TextBox 7"/>
+          <p:cNvSpPr txBox="1"/>
+          <p:nvPr/>
+        </p:nvSpPr>
+        <p:spPr>
+          <a:xfrm>
+            <a:off x="777240" y="2295144"/>
+            <a:ext cx="4663440" cy="594360"/>
+          </a:xfrm>
+          <a:prstGeom prst="rect">
+            <a:avLst/>
+          </a:prstGeom>
+          <a:noFill/>
+        </p:spPr>
+        <p:txBody>
+          <a:bodyPr wrap="square" lIns="0" rIns="0" tIns="0" bIns="0">
+            <a:spAutoFit/>
+          </a:bodyPr>
+          <a:lstStyle/>
+          <a:p>
+            <a:pPr algn="l"/>
+            <a:r>
+              <a:rPr sz="1050" b="0" i="0">
+                <a:solidFill>
+                  <a:srgbClr val="1F2937"/>
+                </a:solidFill>
+                <a:latin typeface="Calibri"/>
+              </a:rPr>
+              <a:t>Fired 91× across 4 SWE-bench tasks. Still hit context overflow on 3 of 4. Signal fine; cliff cost still wins.</a:t>
+            </a:r>
+          </a:p>
+        </p:txBody>
+      </p:sp>
+      <p:sp>
+        <p:nvSpPr>
+          <p:cNvPr id="9" name="TextBox 8"/>
+          <p:cNvSpPr txBox="1"/>
+          <p:nvPr/>
+        </p:nvSpPr>
+        <p:spPr>
+          <a:xfrm>
+            <a:off x="777240" y="2971800"/>
+            <a:ext cx="4663440" cy="292608"/>
+          </a:xfrm>
+          <a:prstGeom prst="rect">
+            <a:avLst/>
+          </a:prstGeom>
+          <a:noFill/>
+        </p:spPr>
+        <p:txBody>
+          <a:bodyPr wrap="square" lIns="0" rIns="0" tIns="0" bIns="0">
+            <a:spAutoFit/>
+          </a:bodyPr>
+          <a:lstStyle/>
+          <a:p>
+            <a:pPr algn="l"/>
+            <a:r>
+              <a:rPr sz="1200" b="1" i="0">
+                <a:solidFill>
+                  <a:srgbClr val="1E3A8A"/>
+                </a:solidFill>
+                <a:latin typeface="Calibri"/>
+              </a:rPr>
+              <a:t>Tighter τ-bench thresholds</a:t>
+            </a:r>
+          </a:p>
+        </p:txBody>
+      </p:sp>
+      <p:sp>
+        <p:nvSpPr>
+          <p:cNvPr id="10" name="TextBox 9"/>
+          <p:cNvSpPr txBox="1"/>
+          <p:nvPr/>
+        </p:nvSpPr>
+        <p:spPr>
+          <a:xfrm>
+            <a:off x="777240" y="3300984"/>
+            <a:ext cx="4663440" cy="594360"/>
+          </a:xfrm>
+          <a:prstGeom prst="rect">
+            <a:avLst/>
+          </a:prstGeom>
+          <a:noFill/>
+        </p:spPr>
+        <p:txBody>
+          <a:bodyPr wrap="square" lIns="0" rIns="0" tIns="0" bIns="0">
+            <a:spAutoFit/>
+          </a:bodyPr>
+          <a:lstStyle/>
+          <a:p>
+            <a:pPr algn="l"/>
+            <a:r>
+              <a:rPr sz="1050" b="0" i="0">
+                <a:solidFill>
+                  <a:srgbClr val="1F2937"/>
+                </a:solidFill>
+                <a:latin typeface="Calibri"/>
+              </a:rPr>
+              <a:t>Stock τ-bench airline cache already 95% hit (max obs = 953 tok). Nothing to compact.</a:t>
+            </a:r>
+          </a:p>
+        </p:txBody>
+      </p:sp>
+      <p:sp>
+        <p:nvSpPr>
+          <p:cNvPr id="11" name="TextBox 10"/>
+          <p:cNvSpPr txBox="1"/>
+          <p:nvPr/>
+        </p:nvSpPr>
+        <p:spPr>
+          <a:xfrm>
+            <a:off x="777240" y="3977639"/>
+            <a:ext cx="4663440" cy="292608"/>
+          </a:xfrm>
+          <a:prstGeom prst="rect">
+            <a:avLst/>
+          </a:prstGeom>
+          <a:noFill/>
+        </p:spPr>
+        <p:txBody>
+          <a:bodyPr wrap="square" lIns="0" rIns="0" tIns="0" bIns="0">
+            <a:spAutoFit/>
+          </a:bodyPr>
+          <a:lstStyle/>
+          <a:p>
+            <a:pPr algn="l"/>
+            <a:r>
+              <a:rPr sz="1200" b="1" i="0">
+                <a:solidFill>
+                  <a:srgbClr val="1E3A8A"/>
+                </a:solidFill>
+                <a:latin typeface="Calibri"/>
+              </a:rPr>
+              <a:t>Action-graph rules don't port</a:t>
+            </a:r>
+          </a:p>
+        </p:txBody>
+      </p:sp>
+      <p:sp>
+        <p:nvSpPr>
+          <p:cNvPr id="12" name="TextBox 11"/>
+          <p:cNvSpPr txBox="1"/>
+          <p:nvPr/>
+        </p:nvSpPr>
+        <p:spPr>
+          <a:xfrm>
+            <a:off x="777240" y="4306824"/>
+            <a:ext cx="4663440" cy="594360"/>
+          </a:xfrm>
+          <a:prstGeom prst="rect">
+            <a:avLst/>
+          </a:prstGeom>
+          <a:noFill/>
+        </p:spPr>
+        <p:txBody>
+          <a:bodyPr wrap="square" lIns="0" rIns="0" tIns="0" bIns="0">
+            <a:spAutoFit/>
+          </a:bodyPr>
+          <a:lstStyle/>
+          <a:p>
+            <a:pPr algn="l"/>
+            <a:r>
+              <a:rPr sz="1050" b="0" i="0">
+                <a:solidFill>
+                  <a:srgbClr val="1F2937"/>
+                </a:solidFill>
+                <a:latin typeface="Calibri"/>
+              </a:rPr>
+              <a:t>consumption_evict fired 0× on τ-bench retail at chain_size=10. Per-domain tuning required.</a:t>
+            </a:r>
+          </a:p>
+        </p:txBody>
+      </p:sp>
+      <p:sp>
+        <p:nvSpPr>
+          <p:cNvPr id="13" name="TextBox 12"/>
+          <p:cNvSpPr txBox="1"/>
+          <p:nvPr/>
+        </p:nvSpPr>
+        <p:spPr>
+          <a:xfrm>
+            <a:off x="777240" y="4983479"/>
+            <a:ext cx="4663440" cy="292608"/>
+          </a:xfrm>
+          <a:prstGeom prst="rect">
+            <a:avLst/>
+          </a:prstGeom>
+          <a:noFill/>
+        </p:spPr>
+        <p:txBody>
+          <a:bodyPr wrap="square" lIns="0" rIns="0" tIns="0" bIns="0">
+            <a:spAutoFit/>
+          </a:bodyPr>
+          <a:lstStyle/>
+          <a:p>
+            <a:pPr algn="l"/>
+            <a:r>
+              <a:rPr sz="1200" b="1" i="0">
+                <a:solidFill>
+                  <a:srgbClr val="1E3A8A"/>
+                </a:solidFill>
+                <a:latin typeface="Calibri"/>
+              </a:rPr>
+              <a:t>Placeholder design</a:t>
+            </a:r>
+          </a:p>
+        </p:txBody>
+      </p:sp>
+      <p:sp>
+        <p:nvSpPr>
+          <p:cNvPr id="14" name="TextBox 13"/>
+          <p:cNvSpPr txBox="1"/>
+          <p:nvPr/>
+        </p:nvSpPr>
+        <p:spPr>
+          <a:xfrm>
+            <a:off x="777240" y="5312664"/>
+            <a:ext cx="4663440" cy="594360"/>
+          </a:xfrm>
+          <a:prstGeom prst="rect">
+            <a:avLst/>
+          </a:prstGeom>
+          <a:noFill/>
+        </p:spPr>
+        <p:txBody>
+          <a:bodyPr wrap="square" lIns="0" rIns="0" tIns="0" bIns="0">
+            <a:spAutoFit/>
+          </a:bodyPr>
+          <a:lstStyle/>
+          <a:p>
+            <a:pPr algn="l"/>
+            <a:r>
+              <a:rPr sz="1050" b="0" i="0">
+                <a:solidFill>
+                  <a:srgbClr val="1F2937"/>
+                </a:solidFill>
+                <a:latin typeface="Calibri"/>
+              </a:rPr>
+              <a:t>_facts variant anchors agent on wrong region → 18 edits, F2P 0/2. Less is more.</a:t>
+            </a:r>
+          </a:p>
+        </p:txBody>
+      </p:sp>
+      <p:sp>
+        <p:nvSpPr>
+          <p:cNvPr id="15" name="Rectangle 14"/>
+          <p:cNvSpPr/>
+          <p:nvPr/>
+        </p:nvSpPr>
+        <p:spPr>
+          <a:xfrm>
+            <a:off x="5943600" y="1417320"/>
+            <a:ext cx="5943600" cy="457200"/>
+          </a:xfrm>
+          <a:prstGeom prst="rect">
+            <a:avLst/>
+          </a:prstGeom>
+          <a:solidFill>
+            <a:srgbClr val="009E73"/>
+          </a:solidFill>
+          <a:ln>
+            <a:noFill/>
+          </a:ln>
+          <a:effectLst/>
+        </p:spPr>
+        <p:style>
+          <a:lnRef idx="1">
+            <a:schemeClr val="accent1"/>
+          </a:lnRef>
+          <a:fillRef idx="3">
+            <a:schemeClr val="accent1"/>
+          </a:fillRef>
+          <a:effectRef idx="2">
+            <a:schemeClr val="accent1"/>
+          </a:effectRef>
+          <a:fontRef idx="minor">
+            <a:schemeClr val="lt1"/>
+          </a:fontRef>
+        </p:style>
+        <p:txBody>
+          <a:bodyPr rtlCol="0" anchor="ctr"/>
+          <a:lstStyle/>
+          <a:p>
+            <a:pPr algn="ctr"/>
+          </a:p>
+        </p:txBody>
+      </p:sp>
+      <p:sp>
+        <p:nvSpPr>
+          <p:cNvPr id="16" name="TextBox 15"/>
+          <p:cNvSpPr txBox="1"/>
+          <p:nvPr/>
+        </p:nvSpPr>
+        <p:spPr>
+          <a:xfrm>
+            <a:off x="6172200" y="1463040"/>
+            <a:ext cx="5486400" cy="411480"/>
+          </a:xfrm>
+          <a:prstGeom prst="rect">
+            <a:avLst/>
+          </a:prstGeom>
+          <a:noFill/>
+        </p:spPr>
+        <p:txBody>
+          <a:bodyPr wrap="square" lIns="0" rIns="0" tIns="0" bIns="0" anchor="ctr">
+            <a:spAutoFit/>
+          </a:bodyPr>
+          <a:lstStyle/>
+          <a:p>
+            <a:pPr algn="l"/>
+            <a:r>
+              <a:rPr sz="1400" b="1" i="0">
+                <a:solidFill>
+                  <a:srgbClr val="FFFFFF"/>
+                </a:solidFill>
+                <a:latin typeface="Calibri"/>
+              </a:rPr>
+              <a:t>Where compaction DID win</a:t>
+            </a:r>
+          </a:p>
+        </p:txBody>
+      </p:sp>
+      <p:pic>
+        <p:nvPicPr>
+          <p:cNvPr id="17" name="Picture 16" descr="fig7_compaction_wins.png"/>
+          <p:cNvPicPr>
+            <a:picLocks noChangeAspect="1"/>
+          </p:cNvPicPr>
+          <p:nvPr/>
+        </p:nvPicPr>
+        <p:blipFill>
+          <a:blip r:embed="rId2"/>
+          <a:stretch>
+            <a:fillRect/>
+          </a:stretch>
+        </p:blipFill>
+        <p:spPr>
+          <a:xfrm>
+            <a:off x="5943600" y="2298872"/>
+            <a:ext cx="5943600" cy="2808894"/>
+          </a:xfrm>
+          <a:prstGeom prst="rect">
+            <a:avLst/>
+          </a:prstGeom>
+        </p:spPr>
+      </p:pic>
+      <p:sp>
+        <p:nvSpPr>
+          <p:cNvPr id="18" name="TextBox 17"/>
+          <p:cNvSpPr txBox="1"/>
+          <p:nvPr/>
+        </p:nvSpPr>
+        <p:spPr>
+          <a:xfrm>
+            <a:off x="6035040" y="5577840"/>
+            <a:ext cx="5760720" cy="347472"/>
+          </a:xfrm>
+          <a:prstGeom prst="rect">
+            <a:avLst/>
+          </a:prstGeom>
+          <a:noFill/>
+        </p:spPr>
+        <p:txBody>
+          <a:bodyPr wrap="square" lIns="0" rIns="0" tIns="0" bIns="0">
+            <a:spAutoFit/>
+          </a:bodyPr>
+          <a:lstStyle/>
+          <a:p>
+            <a:pPr algn="l"/>
+            <a:r>
+              <a:rPr sz="1100" b="1" i="0">
+                <a:solidFill>
+                  <a:srgbClr val="1E3A8A"/>
+                </a:solidFill>
+                <a:latin typeface="Calibri"/>
+              </a:rPr>
+              <a:t>Phase D v1 (Haiku, N=4):  consumption_evict 3/4 @ $1.03 vs none 2/4 @ $1.20.</a:t>
+            </a:r>
+          </a:p>
+        </p:txBody>
+      </p:sp>
+      <p:sp>
+        <p:nvSpPr>
+          <p:cNvPr id="19" name="TextBox 18"/>
+          <p:cNvSpPr txBox="1"/>
+          <p:nvPr/>
+        </p:nvSpPr>
+        <p:spPr>
+          <a:xfrm>
+            <a:off x="6035040" y="5943600"/>
+            <a:ext cx="5760720" cy="347472"/>
+          </a:xfrm>
+          <a:prstGeom prst="rect">
+            <a:avLst/>
+          </a:prstGeom>
+          <a:noFill/>
+        </p:spPr>
+        <p:txBody>
+          <a:bodyPr wrap="square" lIns="0" rIns="0" tIns="0" bIns="0">
+            <a:spAutoFit/>
+          </a:bodyPr>
+          <a:lstStyle/>
+          <a:p>
+            <a:pPr algn="l"/>
+            <a:r>
+              <a:rPr sz="1050" b="0" i="1">
+                <a:solidFill>
+                  <a:srgbClr val="6B7280"/>
+                </a:solidFill>
+                <a:latin typeface="Calibri"/>
+              </a:rPr>
+              <a:t>More resolved AND cheaper. Didn't fully replicate at N=10, but the slice is real.</a:t>
+            </a:r>
+          </a:p>
+        </p:txBody>
+      </p:sp>
+      <p:sp>
+        <p:nvSpPr>
+          <p:cNvPr id="20" name="TextBox 19"/>
+          <p:cNvSpPr txBox="1"/>
+          <p:nvPr/>
+        </p:nvSpPr>
+        <p:spPr>
+          <a:xfrm>
+            <a:off x="457200" y="6492240"/>
+            <a:ext cx="7315200" cy="274320"/>
+          </a:xfrm>
+          <a:prstGeom prst="rect">
+            <a:avLst/>
+          </a:prstGeom>
+          <a:noFill/>
+        </p:spPr>
+        <p:txBody>
+          <a:bodyPr wrap="square" lIns="0" rIns="0" tIns="0" bIns="0">
+            <a:spAutoFit/>
+          </a:bodyPr>
+          <a:lstStyle/>
+          <a:p>
+            <a:pPr algn="l"/>
+            <a:r>
+              <a:rPr sz="1000" b="0" i="0">
+                <a:solidFill>
+                  <a:srgbClr val="6B7280"/>
+                </a:solidFill>
+                <a:latin typeface="Calibri"/>
+              </a:rPr>
+              <a:t>AdaptiveCache · Vlad Cainamisir · Harvard</a:t>
+            </a:r>
+          </a:p>
+        </p:txBody>
+      </p:sp>
+      <p:sp>
+        <p:nvSpPr>
+          <p:cNvPr id="21" name="TextBox 20"/>
+          <p:cNvSpPr txBox="1"/>
+          <p:nvPr/>
+        </p:nvSpPr>
+        <p:spPr>
+          <a:xfrm>
+            <a:off x="8534095" y="6492240"/>
+            <a:ext cx="3200400" cy="274320"/>
+          </a:xfrm>
+          <a:prstGeom prst="rect">
+            <a:avLst/>
+          </a:prstGeom>
+          <a:noFill/>
+        </p:spPr>
+        <p:txBody>
+          <a:bodyPr wrap="square" lIns="0" rIns="0" tIns="0" bIns="0">
+            <a:spAutoFit/>
+          </a:bodyPr>
+          <a:lstStyle/>
+          <a:p>
+            <a:pPr algn="r"/>
+            <a:r>
+              <a:rPr sz="1000" b="0" i="0">
+                <a:solidFill>
+                  <a:srgbClr val="6B7280"/>
+                </a:solidFill>
+                <a:latin typeface="Calibri"/>
+              </a:rPr>
+              <a:t>18 / 28</a:t>
+            </a:r>
+          </a:p>
+        </p:txBody>
+      </p:sp>
+    </p:spTree>
+  </p:cSld>
+  <p:clrMapOvr>
+    <a:masterClrMapping/>
+  </p:clrMapOvr>
+</p:sld>
+</file>
+
+<file path=ppt/slides/slide19.xml><?xml version="1.0" encoding="utf-8"?>
+<p:sld xmlns:a="http://schemas.openxmlformats.org/drawingml/2006/main" xmlns:p="http://schemas.openxmlformats.org/presentationml/2006/main" xmlns:r="http://schemas.openxmlformats.org/officeDocument/2006/relationships">
+  <p:cSld>
+    <p:spTree>
+      <p:nvGrpSpPr>
+        <p:cNvPr id="1" name=""/>
+        <p:cNvGrpSpPr/>
+        <p:nvPr/>
+      </p:nvGrpSpPr>
+      <p:grpSpPr/>
+      <p:sp>
+        <p:nvSpPr>
+          <p:cNvPr id="2" name="Rectangle 1"/>
+          <p:cNvSpPr/>
+          <p:nvPr/>
+        </p:nvSpPr>
+        <p:spPr>
+          <a:xfrm>
+            <a:off x="0" y="0"/>
+            <a:ext cx="12191695" cy="6858000"/>
+          </a:xfrm>
+          <a:prstGeom prst="rect">
+            <a:avLst/>
+          </a:prstGeom>
+          <a:solidFill>
+            <a:srgbClr val="14255C"/>
+          </a:solidFill>
+          <a:ln>
+            <a:noFill/>
+          </a:ln>
+          <a:effectLst/>
+        </p:spPr>
+        <p:style>
+          <a:lnRef idx="1">
+            <a:schemeClr val="accent1"/>
+          </a:lnRef>
+          <a:fillRef idx="3">
+            <a:schemeClr val="accent1"/>
+          </a:fillRef>
+          <a:effectRef idx="2">
+            <a:schemeClr val="accent1"/>
+          </a:effectRef>
+          <a:fontRef idx="minor">
+            <a:schemeClr val="lt1"/>
+          </a:fontRef>
+        </p:style>
+        <p:txBody>
+          <a:bodyPr rtlCol="0" anchor="ctr"/>
+          <a:lstStyle/>
+          <a:p>
+            <a:pPr algn="ctr"/>
+          </a:p>
+        </p:txBody>
+      </p:sp>
+      <p:sp>
+        <p:nvSpPr>
+          <p:cNvPr id="3" name="Rectangle 2"/>
+          <p:cNvSpPr/>
+          <p:nvPr/>
+        </p:nvSpPr>
+        <p:spPr>
+          <a:xfrm>
+            <a:off x="0" y="0"/>
+            <a:ext cx="320040" cy="6858000"/>
+          </a:xfrm>
+          <a:prstGeom prst="rect">
+            <a:avLst/>
+          </a:prstGeom>
+          <a:solidFill>
+            <a:srgbClr val="E69F00"/>
+          </a:solidFill>
+          <a:ln>
+            <a:noFill/>
+          </a:ln>
+          <a:effectLst/>
+        </p:spPr>
+        <p:style>
+          <a:lnRef idx="1">
+            <a:schemeClr val="accent1"/>
+          </a:lnRef>
+          <a:fillRef idx="3">
+            <a:schemeClr val="accent1"/>
+          </a:fillRef>
+          <a:effectRef idx="2">
+            <a:schemeClr val="accent1"/>
+          </a:effectRef>
+          <a:fontRef idx="minor">
+            <a:schemeClr val="lt1"/>
+          </a:fontRef>
+        </p:style>
+        <p:txBody>
+          <a:bodyPr rtlCol="0" anchor="ctr"/>
+          <a:lstStyle/>
+          <a:p>
+            <a:pPr algn="ctr"/>
+          </a:p>
+        </p:txBody>
+      </p:sp>
+      <p:sp>
+        <p:nvSpPr>
           <p:cNvPr id="4" name="TextBox 3"/>
           <p:cNvSpPr txBox="1"/>
           <p:nvPr/>
@@ -6580,7 +7972,7 @@
             <a:r>
               <a:rPr sz="1700" b="0" i="0">
                 <a:solidFill>
-                  <a:srgbClr val="6077C7"/>
+                  <a:srgbClr val="E8ECF5"/>
                 </a:solidFill>
                 <a:latin typeface="Calibri"/>
               </a:rPr>
@@ -6615,7 +8007,7 @@
             <a:r>
               <a:rPr sz="1700" b="0" i="0">
                 <a:solidFill>
-                  <a:srgbClr val="6077C7"/>
+                  <a:srgbClr val="E8ECF5"/>
                 </a:solidFill>
                 <a:latin typeface="Calibri"/>
               </a:rPr>
@@ -6650,7 +8042,7 @@
             <a:r>
               <a:rPr sz="1700" b="0" i="0">
                 <a:solidFill>
-                  <a:srgbClr val="6077C7"/>
+                  <a:srgbClr val="E8ECF5"/>
                 </a:solidFill>
                 <a:latin typeface="Calibri"/>
               </a:rPr>
@@ -6685,7 +8077,7 @@
             <a:r>
               <a:rPr sz="1700" b="0" i="0">
                 <a:solidFill>
-                  <a:srgbClr val="6077C7"/>
+                  <a:srgbClr val="E8ECF5"/>
                 </a:solidFill>
                 <a:latin typeface="Calibri"/>
               </a:rPr>
@@ -6720,7 +8112,7 @@
             <a:r>
               <a:rPr sz="1200" b="0" i="0">
                 <a:solidFill>
-                  <a:srgbClr val="6077C7"/>
+                  <a:srgbClr val="E8ECF5"/>
                 </a:solidFill>
                 <a:latin typeface="Calibri"/>
               </a:rPr>
@@ -6755,7 +8147,7 @@
             <a:r>
               <a:rPr sz="1000" b="0" i="0">
                 <a:solidFill>
-                  <a:srgbClr val="6077C7"/>
+                  <a:srgbClr val="E8ECF5"/>
                 </a:solidFill>
                 <a:latin typeface="Calibri"/>
               </a:rPr>
@@ -6790,11 +8182,11 @@
             <a:r>
               <a:rPr sz="1000" b="0" i="0">
                 <a:solidFill>
-                  <a:srgbClr val="6077C7"/>
-                </a:solidFill>
-                <a:latin typeface="Calibri"/>
-              </a:rPr>
-              <a:t>17 / 17</a:t>
+                  <a:srgbClr val="E8ECF5"/>
+                </a:solidFill>
+                <a:latin typeface="Calibri"/>
+              </a:rPr>
+              <a:t>19 / 28</a:t>
             </a:r>
           </a:p>
         </p:txBody>
@@ -7080,7 +8472,7 @@
             <a:r>
               <a:rPr sz="1100" b="0" i="0">
                 <a:solidFill>
-                  <a:srgbClr val="6077C7"/>
+                  <a:srgbClr val="E8ECF5"/>
                 </a:solidFill>
                 <a:latin typeface="Calibri"/>
               </a:rPr>
@@ -7194,7 +8586,7 @@
             <a:r>
               <a:rPr sz="1100" b="0" i="0">
                 <a:solidFill>
-                  <a:srgbClr val="6077C7"/>
+                  <a:srgbClr val="E8ECF5"/>
                 </a:solidFill>
                 <a:latin typeface="Calibri"/>
               </a:rPr>
@@ -7308,7 +8700,7 @@
             <a:r>
               <a:rPr sz="1100" b="0" i="0">
                 <a:solidFill>
-                  <a:srgbClr val="6077C7"/>
+                  <a:srgbClr val="E8ECF5"/>
                 </a:solidFill>
                 <a:latin typeface="Calibri"/>
               </a:rPr>
@@ -7422,7 +8814,7 @@
             <a:r>
               <a:rPr sz="1100" b="0" i="0">
                 <a:solidFill>
-                  <a:srgbClr val="6077C7"/>
+                  <a:srgbClr val="E8ECF5"/>
                 </a:solidFill>
                 <a:latin typeface="Calibri"/>
               </a:rPr>
@@ -7536,7 +8928,7 @@
             <a:r>
               <a:rPr sz="1100" b="0" i="0">
                 <a:solidFill>
-                  <a:srgbClr val="6077C7"/>
+                  <a:srgbClr val="E8ECF5"/>
                 </a:solidFill>
                 <a:latin typeface="Calibri"/>
               </a:rPr>
@@ -7650,7 +9042,7 @@
             <a:r>
               <a:rPr sz="1100" b="0" i="0">
                 <a:solidFill>
-                  <a:srgbClr val="6077C7"/>
+                  <a:srgbClr val="E8ECF5"/>
                 </a:solidFill>
                 <a:latin typeface="Calibri"/>
               </a:rPr>
@@ -7764,7 +9156,7 @@
             <a:r>
               <a:rPr sz="1100" b="0" i="0">
                 <a:solidFill>
-                  <a:srgbClr val="6077C7"/>
+                  <a:srgbClr val="E8ECF5"/>
                 </a:solidFill>
                 <a:latin typeface="Calibri"/>
               </a:rPr>
@@ -7878,7 +9270,7 @@
             <a:r>
               <a:rPr sz="1100" b="0" i="0">
                 <a:solidFill>
-                  <a:srgbClr val="6077C7"/>
+                  <a:srgbClr val="E8ECF5"/>
                 </a:solidFill>
                 <a:latin typeface="Calibri"/>
               </a:rPr>
@@ -7913,7 +9305,7 @@
             <a:r>
               <a:rPr sz="1100" b="0" i="1">
                 <a:solidFill>
-                  <a:srgbClr val="6077C7"/>
+                  <a:srgbClr val="E8ECF5"/>
                 </a:solidFill>
                 <a:latin typeface="Calibri"/>
               </a:rPr>
@@ -7948,7 +9340,7 @@
             <a:r>
               <a:rPr sz="1000" b="0" i="0">
                 <a:solidFill>
-                  <a:srgbClr val="6077C7"/>
+                  <a:srgbClr val="E8ECF5"/>
                 </a:solidFill>
                 <a:latin typeface="Calibri"/>
               </a:rPr>
@@ -7983,11 +9375,7462 @@
             <a:r>
               <a:rPr sz="1000" b="0" i="0">
                 <a:solidFill>
-                  <a:srgbClr val="6077C7"/>
-                </a:solidFill>
-                <a:latin typeface="Calibri"/>
-              </a:rPr>
-              <a:t>2 / 17</a:t>
+                  <a:srgbClr val="E8ECF5"/>
+                </a:solidFill>
+                <a:latin typeface="Calibri"/>
+              </a:rPr>
+              <a:t>2 / 28</a:t>
+            </a:r>
+          </a:p>
+        </p:txBody>
+      </p:sp>
+    </p:spTree>
+  </p:cSld>
+  <p:clrMapOvr>
+    <a:masterClrMapping/>
+  </p:clrMapOvr>
+</p:sld>
+</file>
+
+<file path=ppt/slides/slide20.xml><?xml version="1.0" encoding="utf-8"?>
+<p:sld xmlns:a="http://schemas.openxmlformats.org/drawingml/2006/main" xmlns:p="http://schemas.openxmlformats.org/presentationml/2006/main" xmlns:r="http://schemas.openxmlformats.org/officeDocument/2006/relationships">
+  <p:cSld>
+    <p:spTree>
+      <p:nvGrpSpPr>
+        <p:cNvPr id="1" name=""/>
+        <p:cNvGrpSpPr/>
+        <p:nvPr/>
+      </p:nvGrpSpPr>
+      <p:grpSpPr/>
+      <p:sp>
+        <p:nvSpPr>
+          <p:cNvPr id="2" name="Rectangle 1"/>
+          <p:cNvSpPr/>
+          <p:nvPr/>
+        </p:nvSpPr>
+        <p:spPr>
+          <a:xfrm>
+            <a:off x="0" y="0"/>
+            <a:ext cx="12191695" cy="6858000"/>
+          </a:xfrm>
+          <a:prstGeom prst="rect">
+            <a:avLst/>
+          </a:prstGeom>
+          <a:solidFill>
+            <a:srgbClr val="14255C"/>
+          </a:solidFill>
+          <a:ln>
+            <a:noFill/>
+          </a:ln>
+          <a:effectLst/>
+        </p:spPr>
+        <p:style>
+          <a:lnRef idx="1">
+            <a:schemeClr val="accent1"/>
+          </a:lnRef>
+          <a:fillRef idx="3">
+            <a:schemeClr val="accent1"/>
+          </a:fillRef>
+          <a:effectRef idx="2">
+            <a:schemeClr val="accent1"/>
+          </a:effectRef>
+          <a:fontRef idx="minor">
+            <a:schemeClr val="lt1"/>
+          </a:fontRef>
+        </p:style>
+        <p:txBody>
+          <a:bodyPr rtlCol="0" anchor="ctr"/>
+          <a:lstStyle/>
+          <a:p>
+            <a:pPr algn="ctr"/>
+          </a:p>
+        </p:txBody>
+      </p:sp>
+      <p:sp>
+        <p:nvSpPr>
+          <p:cNvPr id="3" name="Rectangle 2"/>
+          <p:cNvSpPr/>
+          <p:nvPr/>
+        </p:nvSpPr>
+        <p:spPr>
+          <a:xfrm>
+            <a:off x="0" y="0"/>
+            <a:ext cx="320040" cy="6858000"/>
+          </a:xfrm>
+          <a:prstGeom prst="rect">
+            <a:avLst/>
+          </a:prstGeom>
+          <a:solidFill>
+            <a:srgbClr val="E69F00"/>
+          </a:solidFill>
+          <a:ln>
+            <a:noFill/>
+          </a:ln>
+          <a:effectLst/>
+        </p:spPr>
+        <p:style>
+          <a:lnRef idx="1">
+            <a:schemeClr val="accent1"/>
+          </a:lnRef>
+          <a:fillRef idx="3">
+            <a:schemeClr val="accent1"/>
+          </a:fillRef>
+          <a:effectRef idx="2">
+            <a:schemeClr val="accent1"/>
+          </a:effectRef>
+          <a:fontRef idx="minor">
+            <a:schemeClr val="lt1"/>
+          </a:fontRef>
+        </p:style>
+        <p:txBody>
+          <a:bodyPr rtlCol="0" anchor="ctr"/>
+          <a:lstStyle/>
+          <a:p>
+            <a:pPr algn="ctr"/>
+          </a:p>
+        </p:txBody>
+      </p:sp>
+      <p:sp>
+        <p:nvSpPr>
+          <p:cNvPr id="4" name="TextBox 3"/>
+          <p:cNvSpPr txBox="1"/>
+          <p:nvPr/>
+        </p:nvSpPr>
+        <p:spPr>
+          <a:xfrm>
+            <a:off x="1097280" y="914400"/>
+            <a:ext cx="10058400" cy="457200"/>
+          </a:xfrm>
+          <a:prstGeom prst="rect">
+            <a:avLst/>
+          </a:prstGeom>
+          <a:noFill/>
+        </p:spPr>
+        <p:txBody>
+          <a:bodyPr wrap="square" lIns="0" rIns="0" tIns="0" bIns="0">
+            <a:spAutoFit/>
+          </a:bodyPr>
+          <a:lstStyle/>
+          <a:p>
+            <a:pPr algn="l"/>
+            <a:r>
+              <a:rPr sz="1400" b="1" i="0">
+                <a:solidFill>
+                  <a:srgbClr val="E69F00"/>
+                </a:solidFill>
+                <a:latin typeface="Calibri"/>
+              </a:rPr>
+              <a:t>A SECOND TRACK — IN FLIGHT</a:t>
+            </a:r>
+          </a:p>
+        </p:txBody>
+      </p:sp>
+      <p:sp>
+        <p:nvSpPr>
+          <p:cNvPr id="5" name="TextBox 4"/>
+          <p:cNvSpPr txBox="1"/>
+          <p:nvPr/>
+        </p:nvSpPr>
+        <p:spPr>
+          <a:xfrm>
+            <a:off x="1097280" y="1554480"/>
+            <a:ext cx="10058400" cy="1828800"/>
+          </a:xfrm>
+          <a:prstGeom prst="rect">
+            <a:avLst/>
+          </a:prstGeom>
+          <a:noFill/>
+        </p:spPr>
+        <p:txBody>
+          <a:bodyPr wrap="square" lIns="0" rIns="0" tIns="0" bIns="0">
+            <a:spAutoFit/>
+          </a:bodyPr>
+          <a:lstStyle/>
+          <a:p>
+            <a:pPr algn="l"/>
+            <a:r>
+              <a:rPr sz="4000" b="1" i="0">
+                <a:solidFill>
+                  <a:srgbClr val="FFFFFF"/>
+                </a:solidFill>
+                <a:latin typeface="Calibri"/>
+              </a:rPr>
+              <a:t>If we can't beat the cliff,</a:t>
+            </a:r>
+          </a:p>
+          <a:p>
+            <a:pPr algn="l"/>
+            <a:r>
+              <a:rPr sz="4000" b="1" i="0">
+                <a:solidFill>
+                  <a:srgbClr val="FFFFFF"/>
+                </a:solidFill>
+                <a:latin typeface="Calibri"/>
+              </a:rPr>
+              <a:t>can we keep the bytes?</a:t>
+            </a:r>
+          </a:p>
+        </p:txBody>
+      </p:sp>
+      <p:sp>
+        <p:nvSpPr>
+          <p:cNvPr id="6" name="TextBox 5"/>
+          <p:cNvSpPr txBox="1"/>
+          <p:nvPr/>
+        </p:nvSpPr>
+        <p:spPr>
+          <a:xfrm>
+            <a:off x="1097280" y="4114800"/>
+            <a:ext cx="10058400" cy="457200"/>
+          </a:xfrm>
+          <a:prstGeom prst="rect">
+            <a:avLst/>
+          </a:prstGeom>
+          <a:noFill/>
+        </p:spPr>
+        <p:txBody>
+          <a:bodyPr wrap="square" lIns="0" rIns="0" tIns="0" bIns="0">
+            <a:spAutoFit/>
+          </a:bodyPr>
+          <a:lstStyle/>
+          <a:p>
+            <a:pPr algn="l"/>
+            <a:r>
+              <a:rPr sz="1800" b="0" i="1">
+                <a:solidFill>
+                  <a:srgbClr val="E8ECF5"/>
+                </a:solidFill>
+                <a:latin typeface="Calibri"/>
+              </a:rPr>
+              <a:t>Paper 2: KV-pointer recall — offload-and-restore as a cliff-free compaction substitute.</a:t>
+            </a:r>
+          </a:p>
+        </p:txBody>
+      </p:sp>
+      <p:sp>
+        <p:nvSpPr>
+          <p:cNvPr id="7" name="TextBox 6"/>
+          <p:cNvSpPr txBox="1"/>
+          <p:nvPr/>
+        </p:nvSpPr>
+        <p:spPr>
+          <a:xfrm>
+            <a:off x="1097280" y="4754880"/>
+            <a:ext cx="10058400" cy="457200"/>
+          </a:xfrm>
+          <a:prstGeom prst="rect">
+            <a:avLst/>
+          </a:prstGeom>
+          <a:noFill/>
+        </p:spPr>
+        <p:txBody>
+          <a:bodyPr wrap="square" lIns="0" rIns="0" tIns="0" bIns="0">
+            <a:spAutoFit/>
+          </a:bodyPr>
+          <a:lstStyle/>
+          <a:p>
+            <a:pPr algn="l"/>
+            <a:r>
+              <a:rPr sz="1500" b="0" i="0">
+                <a:solidFill>
+                  <a:srgbClr val="E8ECF5"/>
+                </a:solidFill>
+                <a:latin typeface="Calibri"/>
+              </a:rPr>
+              <a:t>Status: v0 mechanism shipped. v1 recall in flight. Real-test resolve still flat.</a:t>
+            </a:r>
+          </a:p>
+        </p:txBody>
+      </p:sp>
+      <p:sp>
+        <p:nvSpPr>
+          <p:cNvPr id="8" name="TextBox 7"/>
+          <p:cNvSpPr txBox="1"/>
+          <p:nvPr/>
+        </p:nvSpPr>
+        <p:spPr>
+          <a:xfrm>
+            <a:off x="1097280" y="5349240"/>
+            <a:ext cx="10058400" cy="457200"/>
+          </a:xfrm>
+          <a:prstGeom prst="rect">
+            <a:avLst/>
+          </a:prstGeom>
+          <a:noFill/>
+        </p:spPr>
+        <p:txBody>
+          <a:bodyPr wrap="square" lIns="0" rIns="0" tIns="0" bIns="0">
+            <a:spAutoFit/>
+          </a:bodyPr>
+          <a:lstStyle/>
+          <a:p>
+            <a:pPr algn="l"/>
+            <a:r>
+              <a:rPr sz="1500" b="0" i="1">
+                <a:solidFill>
+                  <a:srgbClr val="E69F00"/>
+                </a:solidFill>
+                <a:latin typeface="Calibri"/>
+              </a:rPr>
+              <a:t>This has been the harder of the two tracks.</a:t>
+            </a:r>
+          </a:p>
+        </p:txBody>
+      </p:sp>
+      <p:sp>
+        <p:nvSpPr>
+          <p:cNvPr id="9" name="TextBox 8"/>
+          <p:cNvSpPr txBox="1"/>
+          <p:nvPr/>
+        </p:nvSpPr>
+        <p:spPr>
+          <a:xfrm>
+            <a:off x="457200" y="6492240"/>
+            <a:ext cx="7315200" cy="274320"/>
+          </a:xfrm>
+          <a:prstGeom prst="rect">
+            <a:avLst/>
+          </a:prstGeom>
+          <a:noFill/>
+        </p:spPr>
+        <p:txBody>
+          <a:bodyPr wrap="square" lIns="0" rIns="0" tIns="0" bIns="0">
+            <a:spAutoFit/>
+          </a:bodyPr>
+          <a:lstStyle/>
+          <a:p>
+            <a:pPr algn="l"/>
+            <a:r>
+              <a:rPr sz="1000" b="0" i="0">
+                <a:solidFill>
+                  <a:srgbClr val="E8ECF5"/>
+                </a:solidFill>
+                <a:latin typeface="Calibri"/>
+              </a:rPr>
+              <a:t>AdaptiveCache · Vlad Cainamisir · Harvard</a:t>
+            </a:r>
+          </a:p>
+        </p:txBody>
+      </p:sp>
+      <p:sp>
+        <p:nvSpPr>
+          <p:cNvPr id="10" name="TextBox 9"/>
+          <p:cNvSpPr txBox="1"/>
+          <p:nvPr/>
+        </p:nvSpPr>
+        <p:spPr>
+          <a:xfrm>
+            <a:off x="8534095" y="6492240"/>
+            <a:ext cx="3200400" cy="274320"/>
+          </a:xfrm>
+          <a:prstGeom prst="rect">
+            <a:avLst/>
+          </a:prstGeom>
+          <a:noFill/>
+        </p:spPr>
+        <p:txBody>
+          <a:bodyPr wrap="square" lIns="0" rIns="0" tIns="0" bIns="0">
+            <a:spAutoFit/>
+          </a:bodyPr>
+          <a:lstStyle/>
+          <a:p>
+            <a:pPr algn="r"/>
+            <a:r>
+              <a:rPr sz="1000" b="0" i="0">
+                <a:solidFill>
+                  <a:srgbClr val="E8ECF5"/>
+                </a:solidFill>
+                <a:latin typeface="Calibri"/>
+              </a:rPr>
+              <a:t>20 / 28</a:t>
+            </a:r>
+          </a:p>
+        </p:txBody>
+      </p:sp>
+    </p:spTree>
+  </p:cSld>
+  <p:clrMapOvr>
+    <a:masterClrMapping/>
+  </p:clrMapOvr>
+</p:sld>
+</file>
+
+<file path=ppt/slides/slide21.xml><?xml version="1.0" encoding="utf-8"?>
+<p:sld xmlns:a="http://schemas.openxmlformats.org/drawingml/2006/main" xmlns:p="http://schemas.openxmlformats.org/presentationml/2006/main" xmlns:r="http://schemas.openxmlformats.org/officeDocument/2006/relationships">
+  <p:cSld>
+    <p:spTree>
+      <p:nvGrpSpPr>
+        <p:cNvPr id="1" name=""/>
+        <p:cNvGrpSpPr/>
+        <p:nvPr/>
+      </p:nvGrpSpPr>
+      <p:grpSpPr/>
+      <p:sp>
+        <p:nvSpPr>
+          <p:cNvPr id="2" name="Rectangle 1"/>
+          <p:cNvSpPr/>
+          <p:nvPr/>
+        </p:nvSpPr>
+        <p:spPr>
+          <a:xfrm>
+            <a:off x="0" y="0"/>
+            <a:ext cx="12191695" cy="6858000"/>
+          </a:xfrm>
+          <a:prstGeom prst="rect">
+            <a:avLst/>
+          </a:prstGeom>
+          <a:solidFill>
+            <a:srgbClr val="F8F6F0"/>
+          </a:solidFill>
+          <a:ln>
+            <a:noFill/>
+          </a:ln>
+          <a:effectLst/>
+        </p:spPr>
+        <p:style>
+          <a:lnRef idx="1">
+            <a:schemeClr val="accent1"/>
+          </a:lnRef>
+          <a:fillRef idx="3">
+            <a:schemeClr val="accent1"/>
+          </a:fillRef>
+          <a:effectRef idx="2">
+            <a:schemeClr val="accent1"/>
+          </a:effectRef>
+          <a:fontRef idx="minor">
+            <a:schemeClr val="lt1"/>
+          </a:fontRef>
+        </p:style>
+        <p:txBody>
+          <a:bodyPr rtlCol="0" anchor="ctr"/>
+          <a:lstStyle/>
+          <a:p>
+            <a:pPr algn="ctr"/>
+          </a:p>
+        </p:txBody>
+      </p:sp>
+      <p:sp>
+        <p:nvSpPr>
+          <p:cNvPr id="3" name="Rounded Rectangle 2"/>
+          <p:cNvSpPr/>
+          <p:nvPr/>
+        </p:nvSpPr>
+        <p:spPr>
+          <a:xfrm>
+            <a:off x="9859975" y="365760"/>
+            <a:ext cx="1783080" cy="384048"/>
+          </a:xfrm>
+          <a:prstGeom prst="roundRect">
+            <a:avLst/>
+          </a:prstGeom>
+          <a:solidFill>
+            <a:srgbClr val="E69F00"/>
+          </a:solidFill>
+          <a:ln>
+            <a:noFill/>
+          </a:ln>
+          <a:effectLst/>
+        </p:spPr>
+        <p:style>
+          <a:lnRef idx="1">
+            <a:schemeClr val="accent1"/>
+          </a:lnRef>
+          <a:fillRef idx="3">
+            <a:schemeClr val="accent1"/>
+          </a:fillRef>
+          <a:effectRef idx="2">
+            <a:schemeClr val="accent1"/>
+          </a:effectRef>
+          <a:fontRef idx="minor">
+            <a:schemeClr val="lt1"/>
+          </a:fontRef>
+        </p:style>
+        <p:txBody>
+          <a:bodyPr rtlCol="0" anchor="ctr"/>
+          <a:lstStyle/>
+          <a:p>
+            <a:pPr algn="ctr"/>
+          </a:p>
+        </p:txBody>
+      </p:sp>
+      <p:sp>
+        <p:nvSpPr>
+          <p:cNvPr id="4" name="TextBox 3"/>
+          <p:cNvSpPr txBox="1"/>
+          <p:nvPr/>
+        </p:nvSpPr>
+        <p:spPr>
+          <a:xfrm>
+            <a:off x="9859975" y="365760"/>
+            <a:ext cx="1783080" cy="384048"/>
+          </a:xfrm>
+          <a:prstGeom prst="rect">
+            <a:avLst/>
+          </a:prstGeom>
+          <a:noFill/>
+        </p:spPr>
+        <p:txBody>
+          <a:bodyPr wrap="square" lIns="0" rIns="0" tIns="0" bIns="0" anchor="ctr">
+            <a:spAutoFit/>
+          </a:bodyPr>
+          <a:lstStyle/>
+          <a:p>
+            <a:pPr algn="ctr"/>
+            <a:r>
+              <a:rPr sz="1000" b="1" i="0">
+                <a:solidFill>
+                  <a:srgbClr val="14255C"/>
+                </a:solidFill>
+                <a:latin typeface="Calibri"/>
+              </a:rPr>
+              <a:t>PAPER 2  ·  EXPLORATORY</a:t>
+            </a:r>
+          </a:p>
+        </p:txBody>
+      </p:sp>
+      <p:sp>
+        <p:nvSpPr>
+          <p:cNvPr id="5" name="TextBox 4"/>
+          <p:cNvSpPr txBox="1"/>
+          <p:nvPr/>
+        </p:nvSpPr>
+        <p:spPr>
+          <a:xfrm>
+            <a:off x="548640" y="365760"/>
+            <a:ext cx="9144000" cy="548640"/>
+          </a:xfrm>
+          <a:prstGeom prst="rect">
+            <a:avLst/>
+          </a:prstGeom>
+          <a:noFill/>
+        </p:spPr>
+        <p:txBody>
+          <a:bodyPr wrap="square" lIns="0" rIns="0" tIns="0" bIns="0">
+            <a:spAutoFit/>
+          </a:bodyPr>
+          <a:lstStyle/>
+          <a:p>
+            <a:pPr algn="l"/>
+            <a:r>
+              <a:rPr sz="2400" b="1" i="0">
+                <a:solidFill>
+                  <a:srgbClr val="1E3A8A"/>
+                </a:solidFill>
+                <a:latin typeface="Calibri"/>
+              </a:rPr>
+              <a:t>The cliff is the wall. So don't change the prefix.</a:t>
+            </a:r>
+          </a:p>
+        </p:txBody>
+      </p:sp>
+      <p:sp>
+        <p:nvSpPr>
+          <p:cNvPr id="6" name="TextBox 5"/>
+          <p:cNvSpPr txBox="1"/>
+          <p:nvPr/>
+        </p:nvSpPr>
+        <p:spPr>
+          <a:xfrm>
+            <a:off x="548640" y="960120"/>
+            <a:ext cx="9144000" cy="365760"/>
+          </a:xfrm>
+          <a:prstGeom prst="rect">
+            <a:avLst/>
+          </a:prstGeom>
+          <a:noFill/>
+        </p:spPr>
+        <p:txBody>
+          <a:bodyPr wrap="square" lIns="0" rIns="0" tIns="0" bIns="0">
+            <a:spAutoFit/>
+          </a:bodyPr>
+          <a:lstStyle/>
+          <a:p>
+            <a:pPr algn="l"/>
+            <a:r>
+              <a:rPr sz="1300" b="0" i="1">
+                <a:solidFill>
+                  <a:srgbClr val="6B7280"/>
+                </a:solidFill>
+                <a:latin typeface="Calibri"/>
+              </a:rPr>
+              <a:t>Paper 1 said heuristic eviction loses to the cache cliff. Paper 2 asks: keep the bytes — only change the prompt rendering.</a:t>
+            </a:r>
+          </a:p>
+        </p:txBody>
+      </p:sp>
+      <p:sp>
+        <p:nvSpPr>
+          <p:cNvPr id="7" name="Rectangle 6"/>
+          <p:cNvSpPr/>
+          <p:nvPr/>
+        </p:nvSpPr>
+        <p:spPr>
+          <a:xfrm>
+            <a:off x="548640" y="1691640"/>
+            <a:ext cx="3611880" cy="3108960"/>
+          </a:xfrm>
+          <a:prstGeom prst="rect">
+            <a:avLst/>
+          </a:prstGeom>
+          <a:solidFill>
+            <a:srgbClr val="FFFFFF"/>
+          </a:solidFill>
+          <a:ln w="19050">
+            <a:solidFill>
+              <a:srgbClr val="1E3A8A"/>
+            </a:solidFill>
+          </a:ln>
+          <a:effectLst/>
+        </p:spPr>
+        <p:style>
+          <a:lnRef idx="1">
+            <a:schemeClr val="accent1"/>
+          </a:lnRef>
+          <a:fillRef idx="3">
+            <a:schemeClr val="accent1"/>
+          </a:fillRef>
+          <a:effectRef idx="2">
+            <a:schemeClr val="accent1"/>
+          </a:effectRef>
+          <a:fontRef idx="minor">
+            <a:schemeClr val="lt1"/>
+          </a:fontRef>
+        </p:style>
+        <p:txBody>
+          <a:bodyPr rtlCol="0" anchor="ctr"/>
+          <a:lstStyle/>
+          <a:p>
+            <a:pPr algn="ctr"/>
+          </a:p>
+        </p:txBody>
+      </p:sp>
+      <p:sp>
+        <p:nvSpPr>
+          <p:cNvPr id="8" name="Rectangle 7"/>
+          <p:cNvSpPr/>
+          <p:nvPr/>
+        </p:nvSpPr>
+        <p:spPr>
+          <a:xfrm>
+            <a:off x="548640" y="1691640"/>
+            <a:ext cx="3611880" cy="502920"/>
+          </a:xfrm>
+          <a:prstGeom prst="rect">
+            <a:avLst/>
+          </a:prstGeom>
+          <a:solidFill>
+            <a:srgbClr val="1E3A8A"/>
+          </a:solidFill>
+          <a:ln>
+            <a:noFill/>
+          </a:ln>
+          <a:effectLst/>
+        </p:spPr>
+        <p:style>
+          <a:lnRef idx="1">
+            <a:schemeClr val="accent1"/>
+          </a:lnRef>
+          <a:fillRef idx="3">
+            <a:schemeClr val="accent1"/>
+          </a:fillRef>
+          <a:effectRef idx="2">
+            <a:schemeClr val="accent1"/>
+          </a:effectRef>
+          <a:fontRef idx="minor">
+            <a:schemeClr val="lt1"/>
+          </a:fontRef>
+        </p:style>
+        <p:txBody>
+          <a:bodyPr rtlCol="0" anchor="ctr"/>
+          <a:lstStyle/>
+          <a:p>
+            <a:pPr algn="ctr"/>
+          </a:p>
+        </p:txBody>
+      </p:sp>
+      <p:sp>
+        <p:nvSpPr>
+          <p:cNvPr id="9" name="TextBox 8"/>
+          <p:cNvSpPr txBox="1"/>
+          <p:nvPr/>
+        </p:nvSpPr>
+        <p:spPr>
+          <a:xfrm>
+            <a:off x="777240" y="1737360"/>
+            <a:ext cx="3154680" cy="457200"/>
+          </a:xfrm>
+          <a:prstGeom prst="rect">
+            <a:avLst/>
+          </a:prstGeom>
+          <a:noFill/>
+        </p:spPr>
+        <p:txBody>
+          <a:bodyPr wrap="square" lIns="0" rIns="0" tIns="0" bIns="0" anchor="ctr">
+            <a:spAutoFit/>
+          </a:bodyPr>
+          <a:lstStyle/>
+          <a:p>
+            <a:pPr algn="l"/>
+            <a:r>
+              <a:rPr sz="1100" b="1" i="0">
+                <a:solidFill>
+                  <a:srgbClr val="E69F00"/>
+                </a:solidFill>
+                <a:latin typeface="Calibri"/>
+              </a:rPr>
+              <a:t>Paper 1 finding</a:t>
+            </a:r>
+          </a:p>
+        </p:txBody>
+      </p:sp>
+      <p:sp>
+        <p:nvSpPr>
+          <p:cNvPr id="10" name="TextBox 9"/>
+          <p:cNvSpPr txBox="1"/>
+          <p:nvPr/>
+        </p:nvSpPr>
+        <p:spPr>
+          <a:xfrm>
+            <a:off x="822959" y="2468880"/>
+            <a:ext cx="3063240" cy="548640"/>
+          </a:xfrm>
+          <a:prstGeom prst="rect">
+            <a:avLst/>
+          </a:prstGeom>
+          <a:noFill/>
+        </p:spPr>
+        <p:txBody>
+          <a:bodyPr wrap="square" lIns="0" rIns="0" tIns="0" bIns="0">
+            <a:spAutoFit/>
+          </a:bodyPr>
+          <a:lstStyle/>
+          <a:p>
+            <a:pPr algn="l"/>
+            <a:r>
+              <a:rPr sz="1800" b="1" i="0">
+                <a:solidFill>
+                  <a:srgbClr val="14255C"/>
+                </a:solidFill>
+                <a:latin typeface="Calibri"/>
+              </a:rPr>
+              <a:t>Cliff tax dominates</a:t>
+            </a:r>
+          </a:p>
+        </p:txBody>
+      </p:sp>
+      <p:sp>
+        <p:nvSpPr>
+          <p:cNvPr id="11" name="TextBox 10"/>
+          <p:cNvSpPr txBox="1"/>
+          <p:nvPr/>
+        </p:nvSpPr>
+        <p:spPr>
+          <a:xfrm>
+            <a:off x="822959" y="3108960"/>
+            <a:ext cx="3063240" cy="1554480"/>
+          </a:xfrm>
+          <a:prstGeom prst="rect">
+            <a:avLst/>
+          </a:prstGeom>
+          <a:noFill/>
+        </p:spPr>
+        <p:txBody>
+          <a:bodyPr wrap="square" lIns="0" rIns="0" tIns="0" bIns="0">
+            <a:spAutoFit/>
+          </a:bodyPr>
+          <a:lstStyle/>
+          <a:p>
+            <a:pPr algn="l"/>
+            <a:r>
+              <a:rPr sz="1300" b="0" i="0">
+                <a:solidFill>
+                  <a:srgbClr val="1F2937"/>
+                </a:solidFill>
+                <a:latin typeface="Calibri"/>
+              </a:rPr>
+              <a:t>Heuristic compaction generates ~$0.10–0.15 of new uncached input per fire. Even good policies lose to no-compaction.</a:t>
+            </a:r>
+          </a:p>
+        </p:txBody>
+      </p:sp>
+      <p:sp>
+        <p:nvSpPr>
+          <p:cNvPr id="12" name="Rectangle 11"/>
+          <p:cNvSpPr/>
+          <p:nvPr/>
+        </p:nvSpPr>
+        <p:spPr>
+          <a:xfrm>
+            <a:off x="4389120" y="1691640"/>
+            <a:ext cx="3611880" cy="3108960"/>
+          </a:xfrm>
+          <a:prstGeom prst="rect">
+            <a:avLst/>
+          </a:prstGeom>
+          <a:solidFill>
+            <a:srgbClr val="FFFFFF"/>
+          </a:solidFill>
+          <a:ln w="19050">
+            <a:solidFill>
+              <a:srgbClr val="1E3A8A"/>
+            </a:solidFill>
+          </a:ln>
+          <a:effectLst/>
+        </p:spPr>
+        <p:style>
+          <a:lnRef idx="1">
+            <a:schemeClr val="accent1"/>
+          </a:lnRef>
+          <a:fillRef idx="3">
+            <a:schemeClr val="accent1"/>
+          </a:fillRef>
+          <a:effectRef idx="2">
+            <a:schemeClr val="accent1"/>
+          </a:effectRef>
+          <a:fontRef idx="minor">
+            <a:schemeClr val="lt1"/>
+          </a:fontRef>
+        </p:style>
+        <p:txBody>
+          <a:bodyPr rtlCol="0" anchor="ctr"/>
+          <a:lstStyle/>
+          <a:p>
+            <a:pPr algn="ctr"/>
+          </a:p>
+        </p:txBody>
+      </p:sp>
+      <p:sp>
+        <p:nvSpPr>
+          <p:cNvPr id="13" name="Rectangle 12"/>
+          <p:cNvSpPr/>
+          <p:nvPr/>
+        </p:nvSpPr>
+        <p:spPr>
+          <a:xfrm>
+            <a:off x="4389120" y="1691640"/>
+            <a:ext cx="3611880" cy="502920"/>
+          </a:xfrm>
+          <a:prstGeom prst="rect">
+            <a:avLst/>
+          </a:prstGeom>
+          <a:solidFill>
+            <a:srgbClr val="1E3A8A"/>
+          </a:solidFill>
+          <a:ln>
+            <a:noFill/>
+          </a:ln>
+          <a:effectLst/>
+        </p:spPr>
+        <p:style>
+          <a:lnRef idx="1">
+            <a:schemeClr val="accent1"/>
+          </a:lnRef>
+          <a:fillRef idx="3">
+            <a:schemeClr val="accent1"/>
+          </a:fillRef>
+          <a:effectRef idx="2">
+            <a:schemeClr val="accent1"/>
+          </a:effectRef>
+          <a:fontRef idx="minor">
+            <a:schemeClr val="lt1"/>
+          </a:fontRef>
+        </p:style>
+        <p:txBody>
+          <a:bodyPr rtlCol="0" anchor="ctr"/>
+          <a:lstStyle/>
+          <a:p>
+            <a:pPr algn="ctr"/>
+          </a:p>
+        </p:txBody>
+      </p:sp>
+      <p:sp>
+        <p:nvSpPr>
+          <p:cNvPr id="14" name="TextBox 13"/>
+          <p:cNvSpPr txBox="1"/>
+          <p:nvPr/>
+        </p:nvSpPr>
+        <p:spPr>
+          <a:xfrm>
+            <a:off x="4617720" y="1737360"/>
+            <a:ext cx="3154680" cy="457200"/>
+          </a:xfrm>
+          <a:prstGeom prst="rect">
+            <a:avLst/>
+          </a:prstGeom>
+          <a:noFill/>
+        </p:spPr>
+        <p:txBody>
+          <a:bodyPr wrap="square" lIns="0" rIns="0" tIns="0" bIns="0" anchor="ctr">
+            <a:spAutoFit/>
+          </a:bodyPr>
+          <a:lstStyle/>
+          <a:p>
+            <a:pPr algn="l"/>
+            <a:r>
+              <a:rPr sz="1100" b="1" i="0">
+                <a:solidFill>
+                  <a:srgbClr val="E69F00"/>
+                </a:solidFill>
+                <a:latin typeface="Calibri"/>
+              </a:rPr>
+              <a:t>Memento (MSR 2024)</a:t>
+            </a:r>
+          </a:p>
+        </p:txBody>
+      </p:sp>
+      <p:sp>
+        <p:nvSpPr>
+          <p:cNvPr id="15" name="TextBox 14"/>
+          <p:cNvSpPr txBox="1"/>
+          <p:nvPr/>
+        </p:nvSpPr>
+        <p:spPr>
+          <a:xfrm>
+            <a:off x="4663440" y="2468880"/>
+            <a:ext cx="3063240" cy="548640"/>
+          </a:xfrm>
+          <a:prstGeom prst="rect">
+            <a:avLst/>
+          </a:prstGeom>
+          <a:noFill/>
+        </p:spPr>
+        <p:txBody>
+          <a:bodyPr wrap="square" lIns="0" rIns="0" tIns="0" bIns="0">
+            <a:spAutoFit/>
+          </a:bodyPr>
+          <a:lstStyle/>
+          <a:p>
+            <a:pPr algn="l"/>
+            <a:r>
+              <a:rPr sz="1800" b="1" i="0">
+                <a:solidFill>
+                  <a:srgbClr val="14255C"/>
+                </a:solidFill>
+                <a:latin typeface="Calibri"/>
+              </a:rPr>
+              <a:t>Mask, don't delete</a:t>
+            </a:r>
+          </a:p>
+        </p:txBody>
+      </p:sp>
+      <p:sp>
+        <p:nvSpPr>
+          <p:cNvPr id="16" name="TextBox 15"/>
+          <p:cNvSpPr txBox="1"/>
+          <p:nvPr/>
+        </p:nvSpPr>
+        <p:spPr>
+          <a:xfrm>
+            <a:off x="4663440" y="3108960"/>
+            <a:ext cx="3063240" cy="1554480"/>
+          </a:xfrm>
+          <a:prstGeom prst="rect">
+            <a:avLst/>
+          </a:prstGeom>
+          <a:noFill/>
+        </p:spPr>
+        <p:txBody>
+          <a:bodyPr wrap="square" lIns="0" rIns="0" tIns="0" bIns="0">
+            <a:spAutoFit/>
+          </a:bodyPr>
+          <a:lstStyle/>
+          <a:p>
+            <a:pPr algn="l"/>
+            <a:r>
+              <a:rPr sz="1300" b="0" i="0">
+                <a:solidFill>
+                  <a:srgbClr val="1F2937"/>
+                </a:solidFill>
+                <a:latin typeface="Calibri"/>
+              </a:rPr>
+              <a:t>KV blocks stay in memory; positions stay numbered. Cliff still happens, but the masked-out KV → faster attention per step.</a:t>
+            </a:r>
+          </a:p>
+        </p:txBody>
+      </p:sp>
+      <p:sp>
+        <p:nvSpPr>
+          <p:cNvPr id="17" name="Rectangle 16"/>
+          <p:cNvSpPr/>
+          <p:nvPr/>
+        </p:nvSpPr>
+        <p:spPr>
+          <a:xfrm>
+            <a:off x="8229600" y="1691640"/>
+            <a:ext cx="3611880" cy="3108960"/>
+          </a:xfrm>
+          <a:prstGeom prst="rect">
+            <a:avLst/>
+          </a:prstGeom>
+          <a:solidFill>
+            <a:srgbClr val="FFFFFF"/>
+          </a:solidFill>
+          <a:ln w="19050">
+            <a:solidFill>
+              <a:srgbClr val="1E3A8A"/>
+            </a:solidFill>
+          </a:ln>
+          <a:effectLst/>
+        </p:spPr>
+        <p:style>
+          <a:lnRef idx="1">
+            <a:schemeClr val="accent1"/>
+          </a:lnRef>
+          <a:fillRef idx="3">
+            <a:schemeClr val="accent1"/>
+          </a:fillRef>
+          <a:effectRef idx="2">
+            <a:schemeClr val="accent1"/>
+          </a:effectRef>
+          <a:fontRef idx="minor">
+            <a:schemeClr val="lt1"/>
+          </a:fontRef>
+        </p:style>
+        <p:txBody>
+          <a:bodyPr rtlCol="0" anchor="ctr"/>
+          <a:lstStyle/>
+          <a:p>
+            <a:pPr algn="ctr"/>
+          </a:p>
+        </p:txBody>
+      </p:sp>
+      <p:sp>
+        <p:nvSpPr>
+          <p:cNvPr id="18" name="Rectangle 17"/>
+          <p:cNvSpPr/>
+          <p:nvPr/>
+        </p:nvSpPr>
+        <p:spPr>
+          <a:xfrm>
+            <a:off x="8229600" y="1691640"/>
+            <a:ext cx="3611880" cy="502920"/>
+          </a:xfrm>
+          <a:prstGeom prst="rect">
+            <a:avLst/>
+          </a:prstGeom>
+          <a:solidFill>
+            <a:srgbClr val="1E3A8A"/>
+          </a:solidFill>
+          <a:ln>
+            <a:noFill/>
+          </a:ln>
+          <a:effectLst/>
+        </p:spPr>
+        <p:style>
+          <a:lnRef idx="1">
+            <a:schemeClr val="accent1"/>
+          </a:lnRef>
+          <a:fillRef idx="3">
+            <a:schemeClr val="accent1"/>
+          </a:fillRef>
+          <a:effectRef idx="2">
+            <a:schemeClr val="accent1"/>
+          </a:effectRef>
+          <a:fontRef idx="minor">
+            <a:schemeClr val="lt1"/>
+          </a:fontRef>
+        </p:style>
+        <p:txBody>
+          <a:bodyPr rtlCol="0" anchor="ctr"/>
+          <a:lstStyle/>
+          <a:p>
+            <a:pPr algn="ctr"/>
+          </a:p>
+        </p:txBody>
+      </p:sp>
+      <p:sp>
+        <p:nvSpPr>
+          <p:cNvPr id="19" name="TextBox 18"/>
+          <p:cNvSpPr txBox="1"/>
+          <p:nvPr/>
+        </p:nvSpPr>
+        <p:spPr>
+          <a:xfrm>
+            <a:off x="8458200" y="1737360"/>
+            <a:ext cx="3154680" cy="457200"/>
+          </a:xfrm>
+          <a:prstGeom prst="rect">
+            <a:avLst/>
+          </a:prstGeom>
+          <a:noFill/>
+        </p:spPr>
+        <p:txBody>
+          <a:bodyPr wrap="square" lIns="0" rIns="0" tIns="0" bIns="0" anchor="ctr">
+            <a:spAutoFit/>
+          </a:bodyPr>
+          <a:lstStyle/>
+          <a:p>
+            <a:pPr algn="l"/>
+            <a:r>
+              <a:rPr sz="1100" b="1" i="0">
+                <a:solidFill>
+                  <a:srgbClr val="E69F00"/>
+                </a:solidFill>
+                <a:latin typeface="Calibri"/>
+              </a:rPr>
+              <a:t>Our addition</a:t>
+            </a:r>
+          </a:p>
+        </p:txBody>
+      </p:sp>
+      <p:sp>
+        <p:nvSpPr>
+          <p:cNvPr id="20" name="TextBox 19"/>
+          <p:cNvSpPr txBox="1"/>
+          <p:nvPr/>
+        </p:nvSpPr>
+        <p:spPr>
+          <a:xfrm>
+            <a:off x="8503920" y="2468880"/>
+            <a:ext cx="3063240" cy="548640"/>
+          </a:xfrm>
+          <a:prstGeom prst="rect">
+            <a:avLst/>
+          </a:prstGeom>
+          <a:noFill/>
+        </p:spPr>
+        <p:txBody>
+          <a:bodyPr wrap="square" lIns="0" rIns="0" tIns="0" bIns="0">
+            <a:spAutoFit/>
+          </a:bodyPr>
+          <a:lstStyle/>
+          <a:p>
+            <a:pPr algn="l"/>
+            <a:r>
+              <a:rPr sz="1800" b="1" i="0">
+                <a:solidFill>
+                  <a:srgbClr val="14255C"/>
+                </a:solidFill>
+                <a:latin typeface="Calibri"/>
+              </a:rPr>
+              <a:t>Bidirectional masking</a:t>
+            </a:r>
+          </a:p>
+        </p:txBody>
+      </p:sp>
+      <p:sp>
+        <p:nvSpPr>
+          <p:cNvPr id="21" name="TextBox 20"/>
+          <p:cNvSpPr txBox="1"/>
+          <p:nvPr/>
+        </p:nvSpPr>
+        <p:spPr>
+          <a:xfrm>
+            <a:off x="8503920" y="3108960"/>
+            <a:ext cx="3063240" cy="1554480"/>
+          </a:xfrm>
+          <a:prstGeom prst="rect">
+            <a:avLst/>
+          </a:prstGeom>
+          <a:noFill/>
+        </p:spPr>
+        <p:txBody>
+          <a:bodyPr wrap="square" lIns="0" rIns="0" tIns="0" bIns="0">
+            <a:spAutoFit/>
+          </a:bodyPr>
+          <a:lstStyle/>
+          <a:p>
+            <a:pPr algn="l"/>
+            <a:r>
+              <a:rPr sz="1300" b="0" i="0">
+                <a:solidFill>
+                  <a:srgbClr val="1F2937"/>
+                </a:solidFill>
+                <a:latin typeface="Calibri"/>
+              </a:rPr>
+              <a:t>Recall the right obs when the agent needs it. v1: re-prefill from obs. v2: keep all KV, recover obs from offload, flip mask. Cost ≈ 0.</a:t>
+            </a:r>
+          </a:p>
+        </p:txBody>
+      </p:sp>
+      <p:sp>
+        <p:nvSpPr>
+          <p:cNvPr id="22" name="Rectangle 21"/>
+          <p:cNvSpPr/>
+          <p:nvPr/>
+        </p:nvSpPr>
+        <p:spPr>
+          <a:xfrm>
+            <a:off x="548640" y="5029200"/>
+            <a:ext cx="11091672" cy="640080"/>
+          </a:xfrm>
+          <a:prstGeom prst="rect">
+            <a:avLst/>
+          </a:prstGeom>
+          <a:solidFill>
+            <a:srgbClr val="E69F00"/>
+          </a:solidFill>
+          <a:ln>
+            <a:noFill/>
+          </a:ln>
+          <a:effectLst/>
+        </p:spPr>
+        <p:style>
+          <a:lnRef idx="1">
+            <a:schemeClr val="accent1"/>
+          </a:lnRef>
+          <a:fillRef idx="3">
+            <a:schemeClr val="accent1"/>
+          </a:fillRef>
+          <a:effectRef idx="2">
+            <a:schemeClr val="accent1"/>
+          </a:effectRef>
+          <a:fontRef idx="minor">
+            <a:schemeClr val="lt1"/>
+          </a:fontRef>
+        </p:style>
+        <p:txBody>
+          <a:bodyPr rtlCol="0" anchor="ctr"/>
+          <a:lstStyle/>
+          <a:p>
+            <a:pPr algn="ctr"/>
+          </a:p>
+        </p:txBody>
+      </p:sp>
+      <p:sp>
+        <p:nvSpPr>
+          <p:cNvPr id="23" name="TextBox 22"/>
+          <p:cNvSpPr txBox="1"/>
+          <p:nvPr/>
+        </p:nvSpPr>
+        <p:spPr>
+          <a:xfrm>
+            <a:off x="731520" y="5120640"/>
+            <a:ext cx="10972800" cy="457200"/>
+          </a:xfrm>
+          <a:prstGeom prst="rect">
+            <a:avLst/>
+          </a:prstGeom>
+          <a:noFill/>
+        </p:spPr>
+        <p:txBody>
+          <a:bodyPr wrap="square" lIns="0" rIns="0" tIns="0" bIns="0" anchor="ctr">
+            <a:spAutoFit/>
+          </a:bodyPr>
+          <a:lstStyle/>
+          <a:p>
+            <a:pPr algn="l"/>
+            <a:r>
+              <a:rPr sz="1500" b="1" i="0">
+                <a:solidFill>
+                  <a:srgbClr val="14255C"/>
+                </a:solidFill>
+                <a:latin typeface="Calibri"/>
+              </a:rPr>
+              <a:t>Mechanism is novel: nobody has shipped bidirectional KV masking on a production agent loop.</a:t>
+            </a:r>
+          </a:p>
+        </p:txBody>
+      </p:sp>
+      <p:sp>
+        <p:nvSpPr>
+          <p:cNvPr id="24" name="TextBox 23"/>
+          <p:cNvSpPr txBox="1"/>
+          <p:nvPr/>
+        </p:nvSpPr>
+        <p:spPr>
+          <a:xfrm>
+            <a:off x="457200" y="6492240"/>
+            <a:ext cx="7315200" cy="274320"/>
+          </a:xfrm>
+          <a:prstGeom prst="rect">
+            <a:avLst/>
+          </a:prstGeom>
+          <a:noFill/>
+        </p:spPr>
+        <p:txBody>
+          <a:bodyPr wrap="square" lIns="0" rIns="0" tIns="0" bIns="0">
+            <a:spAutoFit/>
+          </a:bodyPr>
+          <a:lstStyle/>
+          <a:p>
+            <a:pPr algn="l"/>
+            <a:r>
+              <a:rPr sz="1000" b="0" i="0">
+                <a:solidFill>
+                  <a:srgbClr val="6B7280"/>
+                </a:solidFill>
+                <a:latin typeface="Calibri"/>
+              </a:rPr>
+              <a:t>AdaptiveCache · Vlad Cainamisir · Harvard</a:t>
+            </a:r>
+          </a:p>
+        </p:txBody>
+      </p:sp>
+      <p:sp>
+        <p:nvSpPr>
+          <p:cNvPr id="25" name="TextBox 24"/>
+          <p:cNvSpPr txBox="1"/>
+          <p:nvPr/>
+        </p:nvSpPr>
+        <p:spPr>
+          <a:xfrm>
+            <a:off x="8534095" y="6492240"/>
+            <a:ext cx="3200400" cy="274320"/>
+          </a:xfrm>
+          <a:prstGeom prst="rect">
+            <a:avLst/>
+          </a:prstGeom>
+          <a:noFill/>
+        </p:spPr>
+        <p:txBody>
+          <a:bodyPr wrap="square" lIns="0" rIns="0" tIns="0" bIns="0">
+            <a:spAutoFit/>
+          </a:bodyPr>
+          <a:lstStyle/>
+          <a:p>
+            <a:pPr algn="r"/>
+            <a:r>
+              <a:rPr sz="1000" b="0" i="0">
+                <a:solidFill>
+                  <a:srgbClr val="6B7280"/>
+                </a:solidFill>
+                <a:latin typeface="Calibri"/>
+              </a:rPr>
+              <a:t>21 / 28</a:t>
+            </a:r>
+          </a:p>
+        </p:txBody>
+      </p:sp>
+    </p:spTree>
+  </p:cSld>
+  <p:clrMapOvr>
+    <a:masterClrMapping/>
+  </p:clrMapOvr>
+</p:sld>
+</file>
+
+<file path=ppt/slides/slide22.xml><?xml version="1.0" encoding="utf-8"?>
+<p:sld xmlns:a="http://schemas.openxmlformats.org/drawingml/2006/main" xmlns:p="http://schemas.openxmlformats.org/presentationml/2006/main" xmlns:r="http://schemas.openxmlformats.org/officeDocument/2006/relationships">
+  <p:cSld>
+    <p:spTree>
+      <p:nvGrpSpPr>
+        <p:cNvPr id="1" name=""/>
+        <p:cNvGrpSpPr/>
+        <p:nvPr/>
+      </p:nvGrpSpPr>
+      <p:grpSpPr/>
+      <p:sp>
+        <p:nvSpPr>
+          <p:cNvPr id="2" name="Rectangle 1"/>
+          <p:cNvSpPr/>
+          <p:nvPr/>
+        </p:nvSpPr>
+        <p:spPr>
+          <a:xfrm>
+            <a:off x="0" y="0"/>
+            <a:ext cx="12191695" cy="6858000"/>
+          </a:xfrm>
+          <a:prstGeom prst="rect">
+            <a:avLst/>
+          </a:prstGeom>
+          <a:solidFill>
+            <a:srgbClr val="F8F6F0"/>
+          </a:solidFill>
+          <a:ln>
+            <a:noFill/>
+          </a:ln>
+          <a:effectLst/>
+        </p:spPr>
+        <p:style>
+          <a:lnRef idx="1">
+            <a:schemeClr val="accent1"/>
+          </a:lnRef>
+          <a:fillRef idx="3">
+            <a:schemeClr val="accent1"/>
+          </a:fillRef>
+          <a:effectRef idx="2">
+            <a:schemeClr val="accent1"/>
+          </a:effectRef>
+          <a:fontRef idx="minor">
+            <a:schemeClr val="lt1"/>
+          </a:fontRef>
+        </p:style>
+        <p:txBody>
+          <a:bodyPr rtlCol="0" anchor="ctr"/>
+          <a:lstStyle/>
+          <a:p>
+            <a:pPr algn="ctr"/>
+          </a:p>
+        </p:txBody>
+      </p:sp>
+      <p:sp>
+        <p:nvSpPr>
+          <p:cNvPr id="3" name="Rounded Rectangle 2"/>
+          <p:cNvSpPr/>
+          <p:nvPr/>
+        </p:nvSpPr>
+        <p:spPr>
+          <a:xfrm>
+            <a:off x="9859975" y="365760"/>
+            <a:ext cx="1783080" cy="384048"/>
+          </a:xfrm>
+          <a:prstGeom prst="roundRect">
+            <a:avLst/>
+          </a:prstGeom>
+          <a:solidFill>
+            <a:srgbClr val="E69F00"/>
+          </a:solidFill>
+          <a:ln>
+            <a:noFill/>
+          </a:ln>
+          <a:effectLst/>
+        </p:spPr>
+        <p:style>
+          <a:lnRef idx="1">
+            <a:schemeClr val="accent1"/>
+          </a:lnRef>
+          <a:fillRef idx="3">
+            <a:schemeClr val="accent1"/>
+          </a:fillRef>
+          <a:effectRef idx="2">
+            <a:schemeClr val="accent1"/>
+          </a:effectRef>
+          <a:fontRef idx="minor">
+            <a:schemeClr val="lt1"/>
+          </a:fontRef>
+        </p:style>
+        <p:txBody>
+          <a:bodyPr rtlCol="0" anchor="ctr"/>
+          <a:lstStyle/>
+          <a:p>
+            <a:pPr algn="ctr"/>
+          </a:p>
+        </p:txBody>
+      </p:sp>
+      <p:sp>
+        <p:nvSpPr>
+          <p:cNvPr id="4" name="TextBox 3"/>
+          <p:cNvSpPr txBox="1"/>
+          <p:nvPr/>
+        </p:nvSpPr>
+        <p:spPr>
+          <a:xfrm>
+            <a:off x="9859975" y="365760"/>
+            <a:ext cx="1783080" cy="384048"/>
+          </a:xfrm>
+          <a:prstGeom prst="rect">
+            <a:avLst/>
+          </a:prstGeom>
+          <a:noFill/>
+        </p:spPr>
+        <p:txBody>
+          <a:bodyPr wrap="square" lIns="0" rIns="0" tIns="0" bIns="0" anchor="ctr">
+            <a:spAutoFit/>
+          </a:bodyPr>
+          <a:lstStyle/>
+          <a:p>
+            <a:pPr algn="ctr"/>
+            <a:r>
+              <a:rPr sz="1000" b="1" i="0">
+                <a:solidFill>
+                  <a:srgbClr val="14255C"/>
+                </a:solidFill>
+                <a:latin typeface="Calibri"/>
+              </a:rPr>
+              <a:t>PAPER 2  ·  EXPLORATORY</a:t>
+            </a:r>
+          </a:p>
+        </p:txBody>
+      </p:sp>
+      <p:sp>
+        <p:nvSpPr>
+          <p:cNvPr id="5" name="TextBox 4"/>
+          <p:cNvSpPr txBox="1"/>
+          <p:nvPr/>
+        </p:nvSpPr>
+        <p:spPr>
+          <a:xfrm>
+            <a:off x="548640" y="365760"/>
+            <a:ext cx="9144000" cy="548640"/>
+          </a:xfrm>
+          <a:prstGeom prst="rect">
+            <a:avLst/>
+          </a:prstGeom>
+          <a:noFill/>
+        </p:spPr>
+        <p:txBody>
+          <a:bodyPr wrap="square" lIns="0" rIns="0" tIns="0" bIns="0">
+            <a:spAutoFit/>
+          </a:bodyPr>
+          <a:lstStyle/>
+          <a:p>
+            <a:pPr algn="l"/>
+            <a:r>
+              <a:rPr sz="2200" b="1" i="0">
+                <a:solidFill>
+                  <a:srgbClr val="1E3A8A"/>
+                </a:solidFill>
+                <a:latin typeface="Calibri"/>
+              </a:rPr>
+              <a:t>How? Append a summary; don't rewrite the obs.</a:t>
+            </a:r>
+          </a:p>
+        </p:txBody>
+      </p:sp>
+      <p:sp>
+        <p:nvSpPr>
+          <p:cNvPr id="6" name="TextBox 5"/>
+          <p:cNvSpPr txBox="1"/>
+          <p:nvPr/>
+        </p:nvSpPr>
+        <p:spPr>
+          <a:xfrm>
+            <a:off x="548640" y="914400"/>
+            <a:ext cx="9144000" cy="365760"/>
+          </a:xfrm>
+          <a:prstGeom prst="rect">
+            <a:avLst/>
+          </a:prstGeom>
+          <a:noFill/>
+        </p:spPr>
+        <p:txBody>
+          <a:bodyPr wrap="square" lIns="0" rIns="0" tIns="0" bIns="0">
+            <a:spAutoFit/>
+          </a:bodyPr>
+          <a:lstStyle/>
+          <a:p>
+            <a:pPr algn="l"/>
+            <a:r>
+              <a:rPr sz="1200" b="0" i="1">
+                <a:solidFill>
+                  <a:srgbClr val="6B7280"/>
+                </a:solidFill>
+                <a:latin typeface="Calibri"/>
+              </a:rPr>
+              <a:t>Positions stay coherent (top). Prefix cache: same cliff shape as Paper 1 — Memento's win is downstream of the cliff, not on it (bottom).</a:t>
+            </a:r>
+          </a:p>
+        </p:txBody>
+      </p:sp>
+      <p:pic>
+        <p:nvPicPr>
+          <p:cNvPr id="7" name="Picture 6" descr="fig_memento_mechanism.png"/>
+          <p:cNvPicPr>
+            <a:picLocks noChangeAspect="1"/>
+          </p:cNvPicPr>
+          <p:nvPr/>
+        </p:nvPicPr>
+        <p:blipFill>
+          <a:blip r:embed="rId2"/>
+          <a:stretch>
+            <a:fillRect/>
+          </a:stretch>
+        </p:blipFill>
+        <p:spPr>
+          <a:xfrm>
+            <a:off x="2513703" y="1325880"/>
+            <a:ext cx="7161545" cy="2468880"/>
+          </a:xfrm>
+          <a:prstGeom prst="rect">
+            <a:avLst/>
+          </a:prstGeom>
+        </p:spPr>
+      </p:pic>
+      <p:sp>
+        <p:nvSpPr>
+          <p:cNvPr id="8" name="Rectangle 7"/>
+          <p:cNvSpPr/>
+          <p:nvPr/>
+        </p:nvSpPr>
+        <p:spPr>
+          <a:xfrm>
+            <a:off x="548640" y="3931920"/>
+            <a:ext cx="5440680" cy="2103120"/>
+          </a:xfrm>
+          <a:prstGeom prst="rect">
+            <a:avLst/>
+          </a:prstGeom>
+          <a:solidFill>
+            <a:srgbClr val="FFFFFF"/>
+          </a:solidFill>
+          <a:ln w="19050">
+            <a:solidFill>
+              <a:srgbClr val="1E3A8A"/>
+            </a:solidFill>
+          </a:ln>
+          <a:effectLst/>
+        </p:spPr>
+        <p:style>
+          <a:lnRef idx="1">
+            <a:schemeClr val="accent1"/>
+          </a:lnRef>
+          <a:fillRef idx="3">
+            <a:schemeClr val="accent1"/>
+          </a:fillRef>
+          <a:effectRef idx="2">
+            <a:schemeClr val="accent1"/>
+          </a:effectRef>
+          <a:fontRef idx="minor">
+            <a:schemeClr val="lt1"/>
+          </a:fontRef>
+        </p:style>
+        <p:txBody>
+          <a:bodyPr rtlCol="0" anchor="ctr"/>
+          <a:lstStyle/>
+          <a:p>
+            <a:pPr algn="ctr"/>
+          </a:p>
+        </p:txBody>
+      </p:sp>
+      <p:sp>
+        <p:nvSpPr>
+          <p:cNvPr id="9" name="Rectangle 8"/>
+          <p:cNvSpPr/>
+          <p:nvPr/>
+        </p:nvSpPr>
+        <p:spPr>
+          <a:xfrm>
+            <a:off x="548640" y="3931920"/>
+            <a:ext cx="5440680" cy="457200"/>
+          </a:xfrm>
+          <a:prstGeom prst="rect">
+            <a:avLst/>
+          </a:prstGeom>
+          <a:solidFill>
+            <a:srgbClr val="1E3A8A"/>
+          </a:solidFill>
+          <a:ln>
+            <a:noFill/>
+          </a:ln>
+          <a:effectLst/>
+        </p:spPr>
+        <p:style>
+          <a:lnRef idx="1">
+            <a:schemeClr val="accent1"/>
+          </a:lnRef>
+          <a:fillRef idx="3">
+            <a:schemeClr val="accent1"/>
+          </a:fillRef>
+          <a:effectRef idx="2">
+            <a:schemeClr val="accent1"/>
+          </a:effectRef>
+          <a:fontRef idx="minor">
+            <a:schemeClr val="lt1"/>
+          </a:fontRef>
+        </p:style>
+        <p:txBody>
+          <a:bodyPr rtlCol="0" anchor="ctr"/>
+          <a:lstStyle/>
+          <a:p>
+            <a:pPr algn="ctr"/>
+          </a:p>
+        </p:txBody>
+      </p:sp>
+      <p:sp>
+        <p:nvSpPr>
+          <p:cNvPr id="10" name="TextBox 9"/>
+          <p:cNvSpPr txBox="1"/>
+          <p:nvPr/>
+        </p:nvSpPr>
+        <p:spPr>
+          <a:xfrm>
+            <a:off x="777240" y="3977639"/>
+            <a:ext cx="4983480" cy="411480"/>
+          </a:xfrm>
+          <a:prstGeom prst="rect">
+            <a:avLst/>
+          </a:prstGeom>
+          <a:noFill/>
+        </p:spPr>
+        <p:txBody>
+          <a:bodyPr wrap="square" lIns="0" rIns="0" tIns="0" bIns="0" anchor="ctr">
+            <a:spAutoFit/>
+          </a:bodyPr>
+          <a:lstStyle/>
+          <a:p>
+            <a:pPr algn="l"/>
+            <a:r>
+              <a:rPr sz="1400" b="1" i="0">
+                <a:solidFill>
+                  <a:srgbClr val="FFFFFF"/>
+                </a:solidFill>
+                <a:latin typeface="Calibri"/>
+              </a:rPr>
+              <a:t>Why positions don't break</a:t>
+            </a:r>
+          </a:p>
+        </p:txBody>
+      </p:sp>
+      <p:sp>
+        <p:nvSpPr>
+          <p:cNvPr id="11" name="TextBox 10"/>
+          <p:cNvSpPr txBox="1"/>
+          <p:nvPr/>
+        </p:nvSpPr>
+        <p:spPr>
+          <a:xfrm>
+            <a:off x="822959" y="4526280"/>
+            <a:ext cx="4892040" cy="411480"/>
+          </a:xfrm>
+          <a:prstGeom prst="rect">
+            <a:avLst/>
+          </a:prstGeom>
+          <a:noFill/>
+        </p:spPr>
+        <p:txBody>
+          <a:bodyPr wrap="square" lIns="0" rIns="0" tIns="0" bIns="0">
+            <a:spAutoFit/>
+          </a:bodyPr>
+          <a:lstStyle/>
+          <a:p>
+            <a:pPr algn="l"/>
+            <a:r>
+              <a:rPr sz="1100" b="0" i="0">
+                <a:solidFill>
+                  <a:srgbClr val="1F2937"/>
+                </a:solidFill>
+                <a:latin typeface="Calibri"/>
+              </a:rPr>
+              <a:t>·  KV indices never renumber — masked positions stay numbered.</a:t>
+            </a:r>
+          </a:p>
+        </p:txBody>
+      </p:sp>
+      <p:sp>
+        <p:nvSpPr>
+          <p:cNvPr id="12" name="TextBox 11"/>
+          <p:cNvSpPr txBox="1"/>
+          <p:nvPr/>
+        </p:nvSpPr>
+        <p:spPr>
+          <a:xfrm>
+            <a:off x="822959" y="4892040"/>
+            <a:ext cx="4892040" cy="411480"/>
+          </a:xfrm>
+          <a:prstGeom prst="rect">
+            <a:avLst/>
+          </a:prstGeom>
+          <a:noFill/>
+        </p:spPr>
+        <p:txBody>
+          <a:bodyPr wrap="square" lIns="0" rIns="0" tIns="0" bIns="0">
+            <a:spAutoFit/>
+          </a:bodyPr>
+          <a:lstStyle/>
+          <a:p>
+            <a:pPr algn="l"/>
+            <a:r>
+              <a:rPr sz="1100" b="0" i="0">
+                <a:solidFill>
+                  <a:srgbClr val="1F2937"/>
+                </a:solidFill>
+                <a:latin typeface="Calibri"/>
+              </a:rPr>
+              <a:t>·  RoPE math on subsequent tokens stays consistent.</a:t>
+            </a:r>
+          </a:p>
+        </p:txBody>
+      </p:sp>
+      <p:sp>
+        <p:nvSpPr>
+          <p:cNvPr id="13" name="TextBox 12"/>
+          <p:cNvSpPr txBox="1"/>
+          <p:nvPr/>
+        </p:nvSpPr>
+        <p:spPr>
+          <a:xfrm>
+            <a:off x="822959" y="5257800"/>
+            <a:ext cx="4892040" cy="594360"/>
+          </a:xfrm>
+          <a:prstGeom prst="rect">
+            <a:avLst/>
+          </a:prstGeom>
+          <a:noFill/>
+        </p:spPr>
+        <p:txBody>
+          <a:bodyPr wrap="square" lIns="0" rIns="0" tIns="0" bIns="0">
+            <a:spAutoFit/>
+          </a:bodyPr>
+          <a:lstStyle/>
+          <a:p>
+            <a:pPr algn="l"/>
+            <a:r>
+              <a:rPr sz="1100" b="0" i="0">
+                <a:solidFill>
+                  <a:srgbClr val="1F2937"/>
+                </a:solidFill>
+                <a:latin typeface="Calibri"/>
+              </a:rPr>
+              <a:t>·  Naïve eviction renumbers and breaks attention; Memento masks and preserves it.</a:t>
+            </a:r>
+          </a:p>
+        </p:txBody>
+      </p:sp>
+      <p:sp>
+        <p:nvSpPr>
+          <p:cNvPr id="14" name="Rectangle 13"/>
+          <p:cNvSpPr/>
+          <p:nvPr/>
+        </p:nvSpPr>
+        <p:spPr>
+          <a:xfrm>
+            <a:off x="6217920" y="3931920"/>
+            <a:ext cx="5440680" cy="2103120"/>
+          </a:xfrm>
+          <a:prstGeom prst="rect">
+            <a:avLst/>
+          </a:prstGeom>
+          <a:solidFill>
+            <a:srgbClr val="FFFFFF"/>
+          </a:solidFill>
+          <a:ln w="19050">
+            <a:solidFill>
+              <a:srgbClr val="1E3A8A"/>
+            </a:solidFill>
+          </a:ln>
+          <a:effectLst/>
+        </p:spPr>
+        <p:style>
+          <a:lnRef idx="1">
+            <a:schemeClr val="accent1"/>
+          </a:lnRef>
+          <a:fillRef idx="3">
+            <a:schemeClr val="accent1"/>
+          </a:fillRef>
+          <a:effectRef idx="2">
+            <a:schemeClr val="accent1"/>
+          </a:effectRef>
+          <a:fontRef idx="minor">
+            <a:schemeClr val="lt1"/>
+          </a:fontRef>
+        </p:style>
+        <p:txBody>
+          <a:bodyPr rtlCol="0" anchor="ctr"/>
+          <a:lstStyle/>
+          <a:p>
+            <a:pPr algn="ctr"/>
+          </a:p>
+        </p:txBody>
+      </p:sp>
+      <p:sp>
+        <p:nvSpPr>
+          <p:cNvPr id="15" name="Rectangle 14"/>
+          <p:cNvSpPr/>
+          <p:nvPr/>
+        </p:nvSpPr>
+        <p:spPr>
+          <a:xfrm>
+            <a:off x="6217920" y="3931920"/>
+            <a:ext cx="5440680" cy="457200"/>
+          </a:xfrm>
+          <a:prstGeom prst="rect">
+            <a:avLst/>
+          </a:prstGeom>
+          <a:solidFill>
+            <a:srgbClr val="E69F00"/>
+          </a:solidFill>
+          <a:ln>
+            <a:noFill/>
+          </a:ln>
+          <a:effectLst/>
+        </p:spPr>
+        <p:style>
+          <a:lnRef idx="1">
+            <a:schemeClr val="accent1"/>
+          </a:lnRef>
+          <a:fillRef idx="3">
+            <a:schemeClr val="accent1"/>
+          </a:fillRef>
+          <a:effectRef idx="2">
+            <a:schemeClr val="accent1"/>
+          </a:effectRef>
+          <a:fontRef idx="minor">
+            <a:schemeClr val="lt1"/>
+          </a:fontRef>
+        </p:style>
+        <p:txBody>
+          <a:bodyPr rtlCol="0" anchor="ctr"/>
+          <a:lstStyle/>
+          <a:p>
+            <a:pPr algn="ctr"/>
+          </a:p>
+        </p:txBody>
+      </p:sp>
+      <p:sp>
+        <p:nvSpPr>
+          <p:cNvPr id="16" name="TextBox 15"/>
+          <p:cNvSpPr txBox="1"/>
+          <p:nvPr/>
+        </p:nvSpPr>
+        <p:spPr>
+          <a:xfrm>
+            <a:off x="6446520" y="3977639"/>
+            <a:ext cx="4983480" cy="411480"/>
+          </a:xfrm>
+          <a:prstGeom prst="rect">
+            <a:avLst/>
+          </a:prstGeom>
+          <a:noFill/>
+        </p:spPr>
+        <p:txBody>
+          <a:bodyPr wrap="square" lIns="0" rIns="0" tIns="0" bIns="0" anchor="ctr">
+            <a:spAutoFit/>
+          </a:bodyPr>
+          <a:lstStyle/>
+          <a:p>
+            <a:pPr algn="l"/>
+            <a:r>
+              <a:rPr sz="1400" b="1" i="0">
+                <a:solidFill>
+                  <a:srgbClr val="14255C"/>
+                </a:solidFill>
+                <a:latin typeface="Calibri"/>
+              </a:rPr>
+              <a:t>What about the prefix cache?</a:t>
+            </a:r>
+          </a:p>
+        </p:txBody>
+      </p:sp>
+      <p:sp>
+        <p:nvSpPr>
+          <p:cNvPr id="17" name="TextBox 16"/>
+          <p:cNvSpPr txBox="1"/>
+          <p:nvPr/>
+        </p:nvSpPr>
+        <p:spPr>
+          <a:xfrm>
+            <a:off x="6492240" y="4526280"/>
+            <a:ext cx="4892040" cy="411480"/>
+          </a:xfrm>
+          <a:prstGeom prst="rect">
+            <a:avLst/>
+          </a:prstGeom>
+          <a:noFill/>
+        </p:spPr>
+        <p:txBody>
+          <a:bodyPr wrap="square" lIns="0" rIns="0" tIns="0" bIns="0">
+            <a:spAutoFit/>
+          </a:bodyPr>
+          <a:lstStyle/>
+          <a:p>
+            <a:pPr algn="l"/>
+            <a:r>
+              <a:rPr sz="1100" b="0" i="0">
+                <a:solidFill>
+                  <a:srgbClr val="1F2937"/>
+                </a:solidFill>
+                <a:latin typeface="Calibri"/>
+              </a:rPr>
+              <a:t>·  Memento markers go IN THE MIDDLE — same cliff shape as Paper 1.</a:t>
+            </a:r>
+          </a:p>
+        </p:txBody>
+      </p:sp>
+      <p:sp>
+        <p:nvSpPr>
+          <p:cNvPr id="18" name="TextBox 17"/>
+          <p:cNvSpPr txBox="1"/>
+          <p:nvPr/>
+        </p:nvSpPr>
+        <p:spPr>
+          <a:xfrm>
+            <a:off x="6492240" y="4892040"/>
+            <a:ext cx="4892040" cy="411480"/>
+          </a:xfrm>
+          <a:prstGeom prst="rect">
+            <a:avLst/>
+          </a:prstGeom>
+          <a:noFill/>
+        </p:spPr>
+        <p:txBody>
+          <a:bodyPr wrap="square" lIns="0" rIns="0" tIns="0" bIns="0">
+            <a:spAutoFit/>
+          </a:bodyPr>
+          <a:lstStyle/>
+          <a:p>
+            <a:pPr algn="l"/>
+            <a:r>
+              <a:rPr sz="1100" b="0" i="0">
+                <a:solidFill>
+                  <a:srgbClr val="1F2937"/>
+                </a:solidFill>
+                <a:latin typeface="Calibri"/>
+              </a:rPr>
+              <a:t>·  Win is downstream: smaller masked context → faster O(N²) attention per step.</a:t>
+            </a:r>
+          </a:p>
+        </p:txBody>
+      </p:sp>
+      <p:sp>
+        <p:nvSpPr>
+          <p:cNvPr id="19" name="TextBox 18"/>
+          <p:cNvSpPr txBox="1"/>
+          <p:nvPr/>
+        </p:nvSpPr>
+        <p:spPr>
+          <a:xfrm>
+            <a:off x="6492240" y="5257800"/>
+            <a:ext cx="4892040" cy="594360"/>
+          </a:xfrm>
+          <a:prstGeom prst="rect">
+            <a:avLst/>
+          </a:prstGeom>
+          <a:noFill/>
+        </p:spPr>
+        <p:txBody>
+          <a:bodyPr wrap="square" lIns="0" rIns="0" tIns="0" bIns="0">
+            <a:spAutoFit/>
+          </a:bodyPr>
+          <a:lstStyle/>
+          <a:p>
+            <a:pPr algn="l"/>
+            <a:r>
+              <a:rPr sz="1100" b="0" i="1">
+                <a:solidFill>
+                  <a:srgbClr val="1F2937"/>
+                </a:solidFill>
+                <a:latin typeface="Calibri"/>
+              </a:rPr>
+              <a:t>·  Lost-in-middle is real: mementos drift into the U-shape low-attention zone — partly motivates content-aware recall.</a:t>
+            </a:r>
+          </a:p>
+        </p:txBody>
+      </p:sp>
+      <p:sp>
+        <p:nvSpPr>
+          <p:cNvPr id="20" name="TextBox 19"/>
+          <p:cNvSpPr txBox="1"/>
+          <p:nvPr/>
+        </p:nvSpPr>
+        <p:spPr>
+          <a:xfrm>
+            <a:off x="457200" y="6492240"/>
+            <a:ext cx="7315200" cy="274320"/>
+          </a:xfrm>
+          <a:prstGeom prst="rect">
+            <a:avLst/>
+          </a:prstGeom>
+          <a:noFill/>
+        </p:spPr>
+        <p:txBody>
+          <a:bodyPr wrap="square" lIns="0" rIns="0" tIns="0" bIns="0">
+            <a:spAutoFit/>
+          </a:bodyPr>
+          <a:lstStyle/>
+          <a:p>
+            <a:pPr algn="l"/>
+            <a:r>
+              <a:rPr sz="1000" b="0" i="0">
+                <a:solidFill>
+                  <a:srgbClr val="6B7280"/>
+                </a:solidFill>
+                <a:latin typeface="Calibri"/>
+              </a:rPr>
+              <a:t>AdaptiveCache · Vlad Cainamisir · Harvard</a:t>
+            </a:r>
+          </a:p>
+        </p:txBody>
+      </p:sp>
+      <p:sp>
+        <p:nvSpPr>
+          <p:cNvPr id="21" name="TextBox 20"/>
+          <p:cNvSpPr txBox="1"/>
+          <p:nvPr/>
+        </p:nvSpPr>
+        <p:spPr>
+          <a:xfrm>
+            <a:off x="8534095" y="6492240"/>
+            <a:ext cx="3200400" cy="274320"/>
+          </a:xfrm>
+          <a:prstGeom prst="rect">
+            <a:avLst/>
+          </a:prstGeom>
+          <a:noFill/>
+        </p:spPr>
+        <p:txBody>
+          <a:bodyPr wrap="square" lIns="0" rIns="0" tIns="0" bIns="0">
+            <a:spAutoFit/>
+          </a:bodyPr>
+          <a:lstStyle/>
+          <a:p>
+            <a:pPr algn="r"/>
+            <a:r>
+              <a:rPr sz="1000" b="0" i="0">
+                <a:solidFill>
+                  <a:srgbClr val="6B7280"/>
+                </a:solidFill>
+                <a:latin typeface="Calibri"/>
+              </a:rPr>
+              <a:t>22 / 28</a:t>
+            </a:r>
+          </a:p>
+        </p:txBody>
+      </p:sp>
+    </p:spTree>
+  </p:cSld>
+  <p:clrMapOvr>
+    <a:masterClrMapping/>
+  </p:clrMapOvr>
+</p:sld>
+</file>
+
+<file path=ppt/slides/slide23.xml><?xml version="1.0" encoding="utf-8"?>
+<p:sld xmlns:a="http://schemas.openxmlformats.org/drawingml/2006/main" xmlns:p="http://schemas.openxmlformats.org/presentationml/2006/main" xmlns:r="http://schemas.openxmlformats.org/officeDocument/2006/relationships">
+  <p:cSld>
+    <p:spTree>
+      <p:nvGrpSpPr>
+        <p:cNvPr id="1" name=""/>
+        <p:cNvGrpSpPr/>
+        <p:nvPr/>
+      </p:nvGrpSpPr>
+      <p:grpSpPr/>
+      <p:sp>
+        <p:nvSpPr>
+          <p:cNvPr id="2" name="Rectangle 1"/>
+          <p:cNvSpPr/>
+          <p:nvPr/>
+        </p:nvSpPr>
+        <p:spPr>
+          <a:xfrm>
+            <a:off x="0" y="0"/>
+            <a:ext cx="12191695" cy="6858000"/>
+          </a:xfrm>
+          <a:prstGeom prst="rect">
+            <a:avLst/>
+          </a:prstGeom>
+          <a:solidFill>
+            <a:srgbClr val="F8F6F0"/>
+          </a:solidFill>
+          <a:ln>
+            <a:noFill/>
+          </a:ln>
+          <a:effectLst/>
+        </p:spPr>
+        <p:style>
+          <a:lnRef idx="1">
+            <a:schemeClr val="accent1"/>
+          </a:lnRef>
+          <a:fillRef idx="3">
+            <a:schemeClr val="accent1"/>
+          </a:fillRef>
+          <a:effectRef idx="2">
+            <a:schemeClr val="accent1"/>
+          </a:effectRef>
+          <a:fontRef idx="minor">
+            <a:schemeClr val="lt1"/>
+          </a:fontRef>
+        </p:style>
+        <p:txBody>
+          <a:bodyPr rtlCol="0" anchor="ctr"/>
+          <a:lstStyle/>
+          <a:p>
+            <a:pPr algn="ctr"/>
+          </a:p>
+        </p:txBody>
+      </p:sp>
+      <p:sp>
+        <p:nvSpPr>
+          <p:cNvPr id="3" name="Rounded Rectangle 2"/>
+          <p:cNvSpPr/>
+          <p:nvPr/>
+        </p:nvSpPr>
+        <p:spPr>
+          <a:xfrm>
+            <a:off x="9859975" y="365760"/>
+            <a:ext cx="1783080" cy="384048"/>
+          </a:xfrm>
+          <a:prstGeom prst="roundRect">
+            <a:avLst/>
+          </a:prstGeom>
+          <a:solidFill>
+            <a:srgbClr val="E69F00"/>
+          </a:solidFill>
+          <a:ln>
+            <a:noFill/>
+          </a:ln>
+          <a:effectLst/>
+        </p:spPr>
+        <p:style>
+          <a:lnRef idx="1">
+            <a:schemeClr val="accent1"/>
+          </a:lnRef>
+          <a:fillRef idx="3">
+            <a:schemeClr val="accent1"/>
+          </a:fillRef>
+          <a:effectRef idx="2">
+            <a:schemeClr val="accent1"/>
+          </a:effectRef>
+          <a:fontRef idx="minor">
+            <a:schemeClr val="lt1"/>
+          </a:fontRef>
+        </p:style>
+        <p:txBody>
+          <a:bodyPr rtlCol="0" anchor="ctr"/>
+          <a:lstStyle/>
+          <a:p>
+            <a:pPr algn="ctr"/>
+          </a:p>
+        </p:txBody>
+      </p:sp>
+      <p:sp>
+        <p:nvSpPr>
+          <p:cNvPr id="4" name="TextBox 3"/>
+          <p:cNvSpPr txBox="1"/>
+          <p:nvPr/>
+        </p:nvSpPr>
+        <p:spPr>
+          <a:xfrm>
+            <a:off x="9859975" y="365760"/>
+            <a:ext cx="1783080" cy="384048"/>
+          </a:xfrm>
+          <a:prstGeom prst="rect">
+            <a:avLst/>
+          </a:prstGeom>
+          <a:noFill/>
+        </p:spPr>
+        <p:txBody>
+          <a:bodyPr wrap="square" lIns="0" rIns="0" tIns="0" bIns="0" anchor="ctr">
+            <a:spAutoFit/>
+          </a:bodyPr>
+          <a:lstStyle/>
+          <a:p>
+            <a:pPr algn="ctr"/>
+            <a:r>
+              <a:rPr sz="1000" b="1" i="0">
+                <a:solidFill>
+                  <a:srgbClr val="14255C"/>
+                </a:solidFill>
+                <a:latin typeface="Calibri"/>
+              </a:rPr>
+              <a:t>PAPER 2  ·  EXPLORATORY</a:t>
+            </a:r>
+          </a:p>
+        </p:txBody>
+      </p:sp>
+      <p:sp>
+        <p:nvSpPr>
+          <p:cNvPr id="5" name="TextBox 4"/>
+          <p:cNvSpPr txBox="1"/>
+          <p:nvPr/>
+        </p:nvSpPr>
+        <p:spPr>
+          <a:xfrm>
+            <a:off x="548640" y="365760"/>
+            <a:ext cx="9144000" cy="548640"/>
+          </a:xfrm>
+          <a:prstGeom prst="rect">
+            <a:avLst/>
+          </a:prstGeom>
+          <a:noFill/>
+        </p:spPr>
+        <p:txBody>
+          <a:bodyPr wrap="square" lIns="0" rIns="0" tIns="0" bIns="0">
+            <a:spAutoFit/>
+          </a:bodyPr>
+          <a:lstStyle/>
+          <a:p>
+            <a:pPr algn="l"/>
+            <a:r>
+              <a:rPr sz="2200" b="1" i="0">
+                <a:solidFill>
+                  <a:srgbClr val="1E3A8A"/>
+                </a:solidFill>
+                <a:latin typeface="Calibri"/>
+              </a:rPr>
+              <a:t>Creating a memento — what the writer actually produces</a:t>
+            </a:r>
+          </a:p>
+        </p:txBody>
+      </p:sp>
+      <p:sp>
+        <p:nvSpPr>
+          <p:cNvPr id="6" name="TextBox 5"/>
+          <p:cNvSpPr txBox="1"/>
+          <p:nvPr/>
+        </p:nvSpPr>
+        <p:spPr>
+          <a:xfrm>
+            <a:off x="548640" y="914400"/>
+            <a:ext cx="9144000" cy="365760"/>
+          </a:xfrm>
+          <a:prstGeom prst="rect">
+            <a:avLst/>
+          </a:prstGeom>
+          <a:noFill/>
+        </p:spPr>
+        <p:txBody>
+          <a:bodyPr wrap="square" lIns="0" rIns="0" tIns="0" bIns="0">
+            <a:spAutoFit/>
+          </a:bodyPr>
+          <a:lstStyle/>
+          <a:p>
+            <a:pPr algn="l"/>
+            <a:r>
+              <a:rPr sz="1200" b="0" i="1">
+                <a:solidFill>
+                  <a:srgbClr val="6B7280"/>
+                </a:solidFill>
+                <a:latin typeface="Calibri"/>
+              </a:rPr>
+              <a:t>Real trace from pytest-dev/pytest-7490, step 6. Haiku-as-writer in v0; an SFT'd model in the principled Paper 2.</a:t>
+            </a:r>
+          </a:p>
+        </p:txBody>
+      </p:sp>
+      <p:sp>
+        <p:nvSpPr>
+          <p:cNvPr id="7" name="Rectangle 6"/>
+          <p:cNvSpPr/>
+          <p:nvPr/>
+        </p:nvSpPr>
+        <p:spPr>
+          <a:xfrm>
+            <a:off x="548640" y="1417320"/>
+            <a:ext cx="3703320" cy="457200"/>
+          </a:xfrm>
+          <a:prstGeom prst="rect">
+            <a:avLst/>
+          </a:prstGeom>
+          <a:solidFill>
+            <a:srgbClr val="1E3A8A"/>
+          </a:solidFill>
+          <a:ln>
+            <a:noFill/>
+          </a:ln>
+          <a:effectLst/>
+        </p:spPr>
+        <p:style>
+          <a:lnRef idx="1">
+            <a:schemeClr val="accent1"/>
+          </a:lnRef>
+          <a:fillRef idx="3">
+            <a:schemeClr val="accent1"/>
+          </a:fillRef>
+          <a:effectRef idx="2">
+            <a:schemeClr val="accent1"/>
+          </a:effectRef>
+          <a:fontRef idx="minor">
+            <a:schemeClr val="lt1"/>
+          </a:fontRef>
+        </p:style>
+        <p:txBody>
+          <a:bodyPr rtlCol="0" anchor="ctr"/>
+          <a:lstStyle/>
+          <a:p>
+            <a:pPr algn="ctr"/>
+          </a:p>
+        </p:txBody>
+      </p:sp>
+      <p:sp>
+        <p:nvSpPr>
+          <p:cNvPr id="8" name="TextBox 7"/>
+          <p:cNvSpPr txBox="1"/>
+          <p:nvPr/>
+        </p:nvSpPr>
+        <p:spPr>
+          <a:xfrm>
+            <a:off x="731520" y="1463040"/>
+            <a:ext cx="3337560" cy="411480"/>
+          </a:xfrm>
+          <a:prstGeom prst="rect">
+            <a:avLst/>
+          </a:prstGeom>
+          <a:noFill/>
+        </p:spPr>
+        <p:txBody>
+          <a:bodyPr wrap="square" lIns="0" rIns="0" tIns="0" bIns="0" anchor="ctr">
+            <a:spAutoFit/>
+          </a:bodyPr>
+          <a:lstStyle/>
+          <a:p>
+            <a:pPr algn="l"/>
+            <a:r>
+              <a:rPr sz="1300" b="1" i="0">
+                <a:solidFill>
+                  <a:srgbClr val="FFFFFF"/>
+                </a:solidFill>
+                <a:latin typeface="Calibri"/>
+              </a:rPr>
+              <a:t>1.  The tool call + obs</a:t>
+            </a:r>
+          </a:p>
+        </p:txBody>
+      </p:sp>
+      <p:sp>
+        <p:nvSpPr>
+          <p:cNvPr id="9" name="Rectangle 8"/>
+          <p:cNvSpPr/>
+          <p:nvPr/>
+        </p:nvSpPr>
+        <p:spPr>
+          <a:xfrm>
+            <a:off x="548640" y="1874519"/>
+            <a:ext cx="3703320" cy="4160520"/>
+          </a:xfrm>
+          <a:prstGeom prst="rect">
+            <a:avLst/>
+          </a:prstGeom>
+          <a:solidFill>
+            <a:srgbClr val="FFFFFF"/>
+          </a:solidFill>
+          <a:ln w="15240">
+            <a:solidFill>
+              <a:srgbClr val="1E3A8A"/>
+            </a:solidFill>
+          </a:ln>
+          <a:effectLst/>
+        </p:spPr>
+        <p:style>
+          <a:lnRef idx="1">
+            <a:schemeClr val="accent1"/>
+          </a:lnRef>
+          <a:fillRef idx="3">
+            <a:schemeClr val="accent1"/>
+          </a:fillRef>
+          <a:effectRef idx="2">
+            <a:schemeClr val="accent1"/>
+          </a:effectRef>
+          <a:fontRef idx="minor">
+            <a:schemeClr val="lt1"/>
+          </a:fontRef>
+        </p:style>
+        <p:txBody>
+          <a:bodyPr rtlCol="0" anchor="ctr"/>
+          <a:lstStyle/>
+          <a:p>
+            <a:pPr algn="ctr"/>
+          </a:p>
+        </p:txBody>
+      </p:sp>
+      <p:sp>
+        <p:nvSpPr>
+          <p:cNvPr id="10" name="TextBox 9"/>
+          <p:cNvSpPr txBox="1"/>
+          <p:nvPr/>
+        </p:nvSpPr>
+        <p:spPr>
+          <a:xfrm>
+            <a:off x="731520" y="2011680"/>
+            <a:ext cx="3337560" cy="320040"/>
+          </a:xfrm>
+          <a:prstGeom prst="rect">
+            <a:avLst/>
+          </a:prstGeom>
+          <a:noFill/>
+        </p:spPr>
+        <p:txBody>
+          <a:bodyPr wrap="square" lIns="0" rIns="0" tIns="0" bIns="0">
+            <a:spAutoFit/>
+          </a:bodyPr>
+          <a:lstStyle/>
+          <a:p>
+            <a:pPr algn="l"/>
+            <a:r>
+              <a:rPr sz="1100" b="1" i="0">
+                <a:solidFill>
+                  <a:srgbClr val="1E3A8A"/>
+                </a:solidFill>
+                <a:latin typeface="Consolas"/>
+              </a:rPr>
+              <a:t>read_file('testing/test_mark.py')</a:t>
+            </a:r>
+          </a:p>
+        </p:txBody>
+      </p:sp>
+      <p:sp>
+        <p:nvSpPr>
+          <p:cNvPr id="11" name="TextBox 10"/>
+          <p:cNvSpPr txBox="1"/>
+          <p:nvPr/>
+        </p:nvSpPr>
+        <p:spPr>
+          <a:xfrm>
+            <a:off x="731520" y="2377440"/>
+            <a:ext cx="3337560" cy="274320"/>
+          </a:xfrm>
+          <a:prstGeom prst="rect">
+            <a:avLst/>
+          </a:prstGeom>
+          <a:noFill/>
+        </p:spPr>
+        <p:txBody>
+          <a:bodyPr wrap="square" lIns="0" rIns="0" tIns="0" bIns="0">
+            <a:spAutoFit/>
+          </a:bodyPr>
+          <a:lstStyle/>
+          <a:p>
+            <a:pPr algn="l"/>
+            <a:r>
+              <a:rPr sz="1000" b="0" i="1">
+                <a:solidFill>
+                  <a:srgbClr val="6B7280"/>
+                </a:solidFill>
+                <a:latin typeface="Calibri"/>
+              </a:rPr>
+              <a:t>→ 20,000 chars of code</a:t>
+            </a:r>
+          </a:p>
+        </p:txBody>
+      </p:sp>
+      <p:sp>
+        <p:nvSpPr>
+          <p:cNvPr id="12" name="TextBox 11"/>
+          <p:cNvSpPr txBox="1"/>
+          <p:nvPr/>
+        </p:nvSpPr>
+        <p:spPr>
+          <a:xfrm>
+            <a:off x="731520" y="2743200"/>
+            <a:ext cx="3337560" cy="3154679"/>
+          </a:xfrm>
+          <a:prstGeom prst="rect">
+            <a:avLst/>
+          </a:prstGeom>
+          <a:noFill/>
+        </p:spPr>
+        <p:txBody>
+          <a:bodyPr wrap="square" lIns="0" rIns="0" tIns="0" bIns="0">
+            <a:spAutoFit/>
+          </a:bodyPr>
+          <a:lstStyle/>
+          <a:p>
+            <a:pPr algn="l"/>
+            <a:r>
+              <a:rPr sz="900" b="0" i="0">
+                <a:solidFill>
+                  <a:srgbClr val="1F2937"/>
+                </a:solidFill>
+                <a:latin typeface="Consolas"/>
+              </a:rPr>
+              <a:t>import os</a:t>
+            </a:r>
+          </a:p>
+          <a:p>
+            <a:pPr algn="l"/>
+            <a:r>
+              <a:rPr sz="900" b="0" i="0">
+                <a:solidFill>
+                  <a:srgbClr val="1F2937"/>
+                </a:solidFill>
+                <a:latin typeface="Consolas"/>
+              </a:rPr>
+              <a:t>import sys</a:t>
+            </a:r>
+          </a:p>
+          <a:p>
+            <a:pPr algn="l"/>
+            <a:r>
+              <a:rPr sz="900" b="0" i="0">
+                <a:solidFill>
+                  <a:srgbClr val="1F2937"/>
+                </a:solidFill>
+                <a:latin typeface="Consolas"/>
+              </a:rPr>
+              <a:t>from unittest import mock</a:t>
+            </a:r>
+          </a:p>
+          <a:p>
+            <a:pPr algn="l"/>
+            <a:r>
+              <a:rPr sz="900" b="0" i="0">
+                <a:solidFill>
+                  <a:srgbClr val="1F2937"/>
+                </a:solidFill>
+                <a:latin typeface="Consolas"/>
+              </a:rPr>
+              <a:t/>
+            </a:r>
+          </a:p>
+          <a:p>
+            <a:pPr algn="l"/>
+            <a:r>
+              <a:rPr sz="900" b="0" i="0">
+                <a:solidFill>
+                  <a:srgbClr val="1F2937"/>
+                </a:solidFill>
+                <a:latin typeface="Consolas"/>
+              </a:rPr>
+              <a:t>import pytest</a:t>
+            </a:r>
+          </a:p>
+          <a:p>
+            <a:pPr algn="l"/>
+            <a:r>
+              <a:rPr sz="900" b="0" i="0">
+                <a:solidFill>
+                  <a:srgbClr val="1F2937"/>
+                </a:solidFill>
+                <a:latin typeface="Consolas"/>
+              </a:rPr>
+              <a:t>from _pytest.config import ExitCode</a:t>
+            </a:r>
+          </a:p>
+          <a:p>
+            <a:pPr algn="l"/>
+            <a:r>
+              <a:rPr sz="900" b="0" i="0">
+                <a:solidFill>
+                  <a:srgbClr val="1F2937"/>
+                </a:solidFill>
+                <a:latin typeface="Consolas"/>
+              </a:rPr>
+              <a:t>from _pytest.mark import (</a:t>
+            </a:r>
+          </a:p>
+          <a:p>
+            <a:pPr algn="l"/>
+            <a:r>
+              <a:rPr sz="900" b="0" i="0">
+                <a:solidFill>
+                  <a:srgbClr val="1F2937"/>
+                </a:solidFill>
+                <a:latin typeface="Consolas"/>
+              </a:rPr>
+              <a:t>    EMPTY_PARAMETERSET_OPTION,</a:t>
+            </a:r>
+          </a:p>
+          <a:p>
+            <a:pPr algn="l"/>
+            <a:r>
+              <a:rPr sz="900" b="0" i="0">
+                <a:solidFill>
+                  <a:srgbClr val="1F2937"/>
+                </a:solidFill>
+                <a:latin typeface="Consolas"/>
+              </a:rPr>
+              <a:t>    MarkGenerator as Mark,</a:t>
+            </a:r>
+          </a:p>
+          <a:p>
+            <a:pPr algn="l"/>
+            <a:r>
+              <a:rPr sz="900" b="0" i="0">
+                <a:solidFill>
+                  <a:srgbClr val="1F2937"/>
+                </a:solidFill>
+                <a:latin typeface="Consolas"/>
+              </a:rPr>
+              <a:t>)</a:t>
+            </a:r>
+          </a:p>
+          <a:p>
+            <a:pPr algn="l"/>
+            <a:r>
+              <a:rPr sz="900" b="0" i="0">
+                <a:solidFill>
+                  <a:srgbClr val="1F2937"/>
+                </a:solidFill>
+                <a:latin typeface="Consolas"/>
+              </a:rPr>
+              <a:t>from _pytest.nodes import Collector</a:t>
+            </a:r>
+          </a:p>
+          <a:p>
+            <a:pPr algn="l"/>
+            <a:r>
+              <a:rPr sz="900" b="0" i="0">
+                <a:solidFill>
+                  <a:srgbClr val="1F2937"/>
+                </a:solidFill>
+                <a:latin typeface="Consolas"/>
+              </a:rPr>
+              <a:t/>
+            </a:r>
+          </a:p>
+          <a:p>
+            <a:pPr algn="l"/>
+            <a:r>
+              <a:rPr sz="900" b="0" i="0">
+                <a:solidFill>
+                  <a:srgbClr val="1F2937"/>
+                </a:solidFill>
+                <a:latin typeface="Consolas"/>
+              </a:rPr>
+              <a:t>class TestMark:</a:t>
+            </a:r>
+          </a:p>
+          <a:p>
+            <a:pPr algn="l"/>
+            <a:r>
+              <a:rPr sz="900" b="0" i="0">
+                <a:solidFill>
+                  <a:srgbClr val="1F2937"/>
+                </a:solidFill>
+                <a:latin typeface="Consolas"/>
+              </a:rPr>
+              <a:t>    @pytest.mark.parametrize(</a:t>
+            </a:r>
+          </a:p>
+          <a:p>
+            <a:pPr algn="l"/>
+            <a:r>
+              <a:rPr sz="900" b="0" i="0">
+                <a:solidFill>
+                  <a:srgbClr val="1F2937"/>
+                </a:solidFill>
+                <a:latin typeface="Consolas"/>
+              </a:rPr>
+              <a:t>        "attr", ["mark", "param"])</a:t>
+            </a:r>
+          </a:p>
+          <a:p>
+            <a:pPr algn="l"/>
+            <a:r>
+              <a:rPr sz="900" b="0" i="0">
+                <a:solidFill>
+                  <a:srgbClr val="1F2937"/>
+                </a:solidFill>
+                <a:latin typeface="Consolas"/>
+              </a:rPr>
+              <a:t>    def test_pytest_exists_in_</a:t>
+            </a:r>
+          </a:p>
+          <a:p>
+            <a:pPr algn="l"/>
+            <a:r>
+              <a:rPr sz="900" b="0" i="0">
+                <a:solidFill>
+                  <a:srgbClr val="1F2937"/>
+                </a:solidFill>
+                <a:latin typeface="Consolas"/>
+              </a:rPr>
+              <a:t>            namespace_all(self, ...):</a:t>
+            </a:r>
+          </a:p>
+          <a:p>
+            <a:pPr algn="l"/>
+            <a:r>
+              <a:rPr sz="900" b="0" i="0">
+                <a:solidFill>
+                  <a:srgbClr val="1F2937"/>
+                </a:solidFill>
+                <a:latin typeface="Consolas"/>
+              </a:rPr>
+              <a:t>         ...</a:t>
+            </a:r>
+          </a:p>
+          <a:p>
+            <a:pPr algn="l"/>
+            <a:r>
+              <a:rPr sz="900" b="0" i="0">
+                <a:solidFill>
+                  <a:srgbClr val="1F2937"/>
+                </a:solidFill>
+                <a:latin typeface="Consolas"/>
+              </a:rPr>
+              <a:t>    def test_pytest_mark_</a:t>
+            </a:r>
+          </a:p>
+          <a:p>
+            <a:pPr algn="l"/>
+            <a:r>
+              <a:rPr sz="900" b="0" i="0">
+                <a:solidFill>
+                  <a:srgbClr val="1F2937"/>
+                </a:solidFill>
+                <a:latin typeface="Consolas"/>
+              </a:rPr>
+              <a:t>            notcallable(self, ...):</a:t>
+            </a:r>
+          </a:p>
+          <a:p>
+            <a:pPr algn="l"/>
+            <a:r>
+              <a:rPr sz="900" b="0" i="0">
+                <a:solidFill>
+                  <a:srgbClr val="1F2937"/>
+                </a:solidFill>
+                <a:latin typeface="Consolas"/>
+              </a:rPr>
+              <a:t>         ...</a:t>
+            </a:r>
+          </a:p>
+          <a:p>
+            <a:pPr algn="l"/>
+            <a:r>
+              <a:rPr sz="900" b="0" i="0">
+                <a:solidFill>
+                  <a:srgbClr val="1F2937"/>
+                </a:solidFill>
+                <a:latin typeface="Consolas"/>
+              </a:rPr>
+              <a:t>    [+ ~30 more methods]</a:t>
+            </a:r>
+          </a:p>
+          <a:p>
+            <a:pPr algn="l"/>
+            <a:r>
+              <a:rPr sz="900" b="0" i="0">
+                <a:solidFill>
+                  <a:srgbClr val="1F2937"/>
+                </a:solidFill>
+                <a:latin typeface="Consolas"/>
+              </a:rPr>
+              <a:t>    [+ ~600 more lines]</a:t>
+            </a:r>
+          </a:p>
+        </p:txBody>
+      </p:sp>
+      <p:sp>
+        <p:nvSpPr>
+          <p:cNvPr id="13" name="Rectangle 12"/>
+          <p:cNvSpPr/>
+          <p:nvPr/>
+        </p:nvSpPr>
+        <p:spPr>
+          <a:xfrm>
+            <a:off x="4343399" y="1417320"/>
+            <a:ext cx="3703320" cy="457200"/>
+          </a:xfrm>
+          <a:prstGeom prst="rect">
+            <a:avLst/>
+          </a:prstGeom>
+          <a:solidFill>
+            <a:srgbClr val="E69F00"/>
+          </a:solidFill>
+          <a:ln>
+            <a:noFill/>
+          </a:ln>
+          <a:effectLst/>
+        </p:spPr>
+        <p:style>
+          <a:lnRef idx="1">
+            <a:schemeClr val="accent1"/>
+          </a:lnRef>
+          <a:fillRef idx="3">
+            <a:schemeClr val="accent1"/>
+          </a:fillRef>
+          <a:effectRef idx="2">
+            <a:schemeClr val="accent1"/>
+          </a:effectRef>
+          <a:fontRef idx="minor">
+            <a:schemeClr val="lt1"/>
+          </a:fontRef>
+        </p:style>
+        <p:txBody>
+          <a:bodyPr rtlCol="0" anchor="ctr"/>
+          <a:lstStyle/>
+          <a:p>
+            <a:pPr algn="ctr"/>
+          </a:p>
+        </p:txBody>
+      </p:sp>
+      <p:sp>
+        <p:nvSpPr>
+          <p:cNvPr id="14" name="TextBox 13"/>
+          <p:cNvSpPr txBox="1"/>
+          <p:nvPr/>
+        </p:nvSpPr>
+        <p:spPr>
+          <a:xfrm>
+            <a:off x="4526279" y="1463040"/>
+            <a:ext cx="3337560" cy="411480"/>
+          </a:xfrm>
+          <a:prstGeom prst="rect">
+            <a:avLst/>
+          </a:prstGeom>
+          <a:noFill/>
+        </p:spPr>
+        <p:txBody>
+          <a:bodyPr wrap="square" lIns="0" rIns="0" tIns="0" bIns="0" anchor="ctr">
+            <a:spAutoFit/>
+          </a:bodyPr>
+          <a:lstStyle/>
+          <a:p>
+            <a:pPr algn="l"/>
+            <a:r>
+              <a:rPr sz="1300" b="1" i="0">
+                <a:solidFill>
+                  <a:srgbClr val="14255C"/>
+                </a:solidFill>
+                <a:latin typeface="Calibri"/>
+              </a:rPr>
+              <a:t>2.  The writer summarizes</a:t>
+            </a:r>
+          </a:p>
+        </p:txBody>
+      </p:sp>
+      <p:sp>
+        <p:nvSpPr>
+          <p:cNvPr id="15" name="Rectangle 14"/>
+          <p:cNvSpPr/>
+          <p:nvPr/>
+        </p:nvSpPr>
+        <p:spPr>
+          <a:xfrm>
+            <a:off x="4343399" y="1874519"/>
+            <a:ext cx="3703320" cy="4160520"/>
+          </a:xfrm>
+          <a:prstGeom prst="rect">
+            <a:avLst/>
+          </a:prstGeom>
+          <a:solidFill>
+            <a:srgbClr val="FFFFFF"/>
+          </a:solidFill>
+          <a:ln w="15240">
+            <a:solidFill>
+              <a:srgbClr val="1E3A8A"/>
+            </a:solidFill>
+          </a:ln>
+          <a:effectLst/>
+        </p:spPr>
+        <p:style>
+          <a:lnRef idx="1">
+            <a:schemeClr val="accent1"/>
+          </a:lnRef>
+          <a:fillRef idx="3">
+            <a:schemeClr val="accent1"/>
+          </a:fillRef>
+          <a:effectRef idx="2">
+            <a:schemeClr val="accent1"/>
+          </a:effectRef>
+          <a:fontRef idx="minor">
+            <a:schemeClr val="lt1"/>
+          </a:fontRef>
+        </p:style>
+        <p:txBody>
+          <a:bodyPr rtlCol="0" anchor="ctr"/>
+          <a:lstStyle/>
+          <a:p>
+            <a:pPr algn="ctr"/>
+          </a:p>
+        </p:txBody>
+      </p:sp>
+      <p:sp>
+        <p:nvSpPr>
+          <p:cNvPr id="16" name="TextBox 15"/>
+          <p:cNvSpPr txBox="1"/>
+          <p:nvPr/>
+        </p:nvSpPr>
+        <p:spPr>
+          <a:xfrm>
+            <a:off x="4526279" y="2057400"/>
+            <a:ext cx="3337560" cy="320040"/>
+          </a:xfrm>
+          <a:prstGeom prst="rect">
+            <a:avLst/>
+          </a:prstGeom>
+          <a:noFill/>
+        </p:spPr>
+        <p:txBody>
+          <a:bodyPr wrap="square" lIns="0" rIns="0" tIns="0" bIns="0">
+            <a:spAutoFit/>
+          </a:bodyPr>
+          <a:lstStyle/>
+          <a:p>
+            <a:pPr algn="l"/>
+            <a:r>
+              <a:rPr sz="1100" b="1" i="0">
+                <a:solidFill>
+                  <a:srgbClr val="1E3A8A"/>
+                </a:solidFill>
+                <a:latin typeface="Calibri"/>
+              </a:rPr>
+              <a:t>Haiku 4.5  (v0 placeholder)</a:t>
+            </a:r>
+          </a:p>
+        </p:txBody>
+      </p:sp>
+      <p:sp>
+        <p:nvSpPr>
+          <p:cNvPr id="17" name="TextBox 16"/>
+          <p:cNvSpPr txBox="1"/>
+          <p:nvPr/>
+        </p:nvSpPr>
+        <p:spPr>
+          <a:xfrm>
+            <a:off x="4526279" y="2377440"/>
+            <a:ext cx="3337560" cy="320040"/>
+          </a:xfrm>
+          <a:prstGeom prst="rect">
+            <a:avLst/>
+          </a:prstGeom>
+          <a:noFill/>
+        </p:spPr>
+        <p:txBody>
+          <a:bodyPr wrap="square" lIns="0" rIns="0" tIns="0" bIns="0">
+            <a:spAutoFit/>
+          </a:bodyPr>
+          <a:lstStyle/>
+          <a:p>
+            <a:pPr algn="l"/>
+            <a:r>
+              <a:rPr sz="1000" b="0" i="1">
+                <a:solidFill>
+                  <a:srgbClr val="6B7280"/>
+                </a:solidFill>
+                <a:latin typeface="Calibri"/>
+              </a:rPr>
+              <a:t>→ SFT'd model in Paper 2</a:t>
+            </a:r>
+          </a:p>
+        </p:txBody>
+      </p:sp>
+      <p:sp>
+        <p:nvSpPr>
+          <p:cNvPr id="18" name="TextBox 17"/>
+          <p:cNvSpPr txBox="1"/>
+          <p:nvPr/>
+        </p:nvSpPr>
+        <p:spPr>
+          <a:xfrm>
+            <a:off x="4526279" y="2834640"/>
+            <a:ext cx="3337560" cy="3063239"/>
+          </a:xfrm>
+          <a:prstGeom prst="rect">
+            <a:avLst/>
+          </a:prstGeom>
+          <a:noFill/>
+        </p:spPr>
+        <p:txBody>
+          <a:bodyPr wrap="square" lIns="0" rIns="0" tIns="0" bIns="0">
+            <a:spAutoFit/>
+          </a:bodyPr>
+          <a:lstStyle/>
+          <a:p>
+            <a:pPr algn="l"/>
+            <a:r>
+              <a:rPr sz="1000" b="0" i="0">
+                <a:solidFill>
+                  <a:srgbClr val="1F2937"/>
+                </a:solidFill>
+                <a:latin typeface="Consolas"/>
+              </a:rPr>
+              <a:t>system: "Compress this tool obs</a:t>
+            </a:r>
+          </a:p>
+          <a:p>
+            <a:pPr algn="l"/>
+            <a:r>
+              <a:rPr sz="1000" b="0" i="0">
+                <a:solidFill>
+                  <a:srgbClr val="1F2937"/>
+                </a:solidFill>
+                <a:latin typeface="Consolas"/>
+              </a:rPr>
+              <a:t>into ≤200 tokens. Preserve</a:t>
+            </a:r>
+          </a:p>
+          <a:p>
+            <a:pPr algn="l"/>
+            <a:r>
+              <a:rPr sz="1000" b="0" i="0">
+                <a:solidFill>
+                  <a:srgbClr val="1F2937"/>
+                </a:solidFill>
+                <a:latin typeface="Consolas"/>
+              </a:rPr>
+              <a:t>function names, key signals,</a:t>
+            </a:r>
+          </a:p>
+          <a:p>
+            <a:pPr algn="l"/>
+            <a:r>
+              <a:rPr sz="1000" b="0" i="0">
+                <a:solidFill>
+                  <a:srgbClr val="1F2937"/>
+                </a:solidFill>
+                <a:latin typeface="Consolas"/>
+              </a:rPr>
+              <a:t>what's still actionable."</a:t>
+            </a:r>
+          </a:p>
+          <a:p>
+            <a:pPr algn="l"/>
+            <a:r>
+              <a:rPr sz="1000" b="0" i="0">
+                <a:solidFill>
+                  <a:srgbClr val="1F2937"/>
+                </a:solidFill>
+                <a:latin typeface="Consolas"/>
+              </a:rPr>
+              <a:t/>
+            </a:r>
+          </a:p>
+          <a:p>
+            <a:pPr algn="l"/>
+            <a:r>
+              <a:rPr sz="1000" b="0" i="0">
+                <a:solidFill>
+                  <a:srgbClr val="1F2937"/>
+                </a:solidFill>
+                <a:latin typeface="Consolas"/>
+              </a:rPr>
+              <a:t>user:</a:t>
+            </a:r>
+          </a:p>
+          <a:p>
+            <a:pPr algn="l"/>
+            <a:r>
+              <a:rPr sz="1000" b="0" i="0">
+                <a:solidFill>
+                  <a:srgbClr val="1F2937"/>
+                </a:solidFill>
+                <a:latin typeface="Consolas"/>
+              </a:rPr>
+              <a:t>  tool_name: read_file</a:t>
+            </a:r>
+          </a:p>
+          <a:p>
+            <a:pPr algn="l"/>
+            <a:r>
+              <a:rPr sz="1000" b="0" i="0">
+                <a:solidFill>
+                  <a:srgbClr val="1F2937"/>
+                </a:solidFill>
+                <a:latin typeface="Consolas"/>
+              </a:rPr>
+              <a:t>  tool_args: {path: 'testing/</a:t>
+            </a:r>
+          </a:p>
+          <a:p>
+            <a:pPr algn="l"/>
+            <a:r>
+              <a:rPr sz="1000" b="0" i="0">
+                <a:solidFill>
+                  <a:srgbClr val="1F2937"/>
+                </a:solidFill>
+                <a:latin typeface="Consolas"/>
+              </a:rPr>
+              <a:t>              test_mark.py'}</a:t>
+            </a:r>
+          </a:p>
+          <a:p>
+            <a:pPr algn="l"/>
+            <a:r>
+              <a:rPr sz="1000" b="0" i="0">
+                <a:solidFill>
+                  <a:srgbClr val="1F2937"/>
+                </a:solidFill>
+                <a:latin typeface="Consolas"/>
+              </a:rPr>
+              <a:t>  obs: &lt;20,000 chars&gt;</a:t>
+            </a:r>
+          </a:p>
+          <a:p>
+            <a:pPr algn="l"/>
+            <a:r>
+              <a:rPr sz="1000" b="0" i="0">
+                <a:solidFill>
+                  <a:srgbClr val="1F2937"/>
+                </a:solidFill>
+                <a:latin typeface="Consolas"/>
+              </a:rPr>
+              <a:t/>
+            </a:r>
+          </a:p>
+          <a:p>
+            <a:pPr algn="l"/>
+            <a:r>
+              <a:rPr sz="1000" b="0" i="0">
+                <a:solidFill>
+                  <a:srgbClr val="1F2937"/>
+                </a:solidFill>
+                <a:latin typeface="Consolas"/>
+              </a:rPr>
+              <a:t>assistant: &lt;791 chars&gt;</a:t>
+            </a:r>
+          </a:p>
+        </p:txBody>
+      </p:sp>
+      <p:sp>
+        <p:nvSpPr>
+          <p:cNvPr id="19" name="Rectangle 18"/>
+          <p:cNvSpPr/>
+          <p:nvPr/>
+        </p:nvSpPr>
+        <p:spPr>
+          <a:xfrm>
+            <a:off x="8138159" y="1417320"/>
+            <a:ext cx="3703320" cy="457200"/>
+          </a:xfrm>
+          <a:prstGeom prst="rect">
+            <a:avLst/>
+          </a:prstGeom>
+          <a:solidFill>
+            <a:srgbClr val="009E73"/>
+          </a:solidFill>
+          <a:ln>
+            <a:noFill/>
+          </a:ln>
+          <a:effectLst/>
+        </p:spPr>
+        <p:style>
+          <a:lnRef idx="1">
+            <a:schemeClr val="accent1"/>
+          </a:lnRef>
+          <a:fillRef idx="3">
+            <a:schemeClr val="accent1"/>
+          </a:fillRef>
+          <a:effectRef idx="2">
+            <a:schemeClr val="accent1"/>
+          </a:effectRef>
+          <a:fontRef idx="minor">
+            <a:schemeClr val="lt1"/>
+          </a:fontRef>
+        </p:style>
+        <p:txBody>
+          <a:bodyPr rtlCol="0" anchor="ctr"/>
+          <a:lstStyle/>
+          <a:p>
+            <a:pPr algn="ctr"/>
+          </a:p>
+        </p:txBody>
+      </p:sp>
+      <p:sp>
+        <p:nvSpPr>
+          <p:cNvPr id="20" name="TextBox 19"/>
+          <p:cNvSpPr txBox="1"/>
+          <p:nvPr/>
+        </p:nvSpPr>
+        <p:spPr>
+          <a:xfrm>
+            <a:off x="8321039" y="1463040"/>
+            <a:ext cx="3337560" cy="411480"/>
+          </a:xfrm>
+          <a:prstGeom prst="rect">
+            <a:avLst/>
+          </a:prstGeom>
+          <a:noFill/>
+        </p:spPr>
+        <p:txBody>
+          <a:bodyPr wrap="square" lIns="0" rIns="0" tIns="0" bIns="0" anchor="ctr">
+            <a:spAutoFit/>
+          </a:bodyPr>
+          <a:lstStyle/>
+          <a:p>
+            <a:pPr algn="l"/>
+            <a:r>
+              <a:rPr sz="1300" b="1" i="0">
+                <a:solidFill>
+                  <a:srgbClr val="FFFFFF"/>
+                </a:solidFill>
+                <a:latin typeface="Calibri"/>
+              </a:rPr>
+              <a:t>3.  The memento</a:t>
+            </a:r>
+          </a:p>
+        </p:txBody>
+      </p:sp>
+      <p:sp>
+        <p:nvSpPr>
+          <p:cNvPr id="21" name="Rectangle 20"/>
+          <p:cNvSpPr/>
+          <p:nvPr/>
+        </p:nvSpPr>
+        <p:spPr>
+          <a:xfrm>
+            <a:off x="8138159" y="1874519"/>
+            <a:ext cx="3703320" cy="4160520"/>
+          </a:xfrm>
+          <a:prstGeom prst="rect">
+            <a:avLst/>
+          </a:prstGeom>
+          <a:solidFill>
+            <a:srgbClr val="FFFFFF"/>
+          </a:solidFill>
+          <a:ln w="15240">
+            <a:solidFill>
+              <a:srgbClr val="1E3A8A"/>
+            </a:solidFill>
+          </a:ln>
+          <a:effectLst/>
+        </p:spPr>
+        <p:style>
+          <a:lnRef idx="1">
+            <a:schemeClr val="accent1"/>
+          </a:lnRef>
+          <a:fillRef idx="3">
+            <a:schemeClr val="accent1"/>
+          </a:fillRef>
+          <a:effectRef idx="2">
+            <a:schemeClr val="accent1"/>
+          </a:effectRef>
+          <a:fontRef idx="minor">
+            <a:schemeClr val="lt1"/>
+          </a:fontRef>
+        </p:style>
+        <p:txBody>
+          <a:bodyPr rtlCol="0" anchor="ctr"/>
+          <a:lstStyle/>
+          <a:p>
+            <a:pPr algn="ctr"/>
+          </a:p>
+        </p:txBody>
+      </p:sp>
+      <p:sp>
+        <p:nvSpPr>
+          <p:cNvPr id="22" name="TextBox 21"/>
+          <p:cNvSpPr txBox="1"/>
+          <p:nvPr/>
+        </p:nvSpPr>
+        <p:spPr>
+          <a:xfrm>
+            <a:off x="8321039" y="2057400"/>
+            <a:ext cx="3337560" cy="320040"/>
+          </a:xfrm>
+          <a:prstGeom prst="rect">
+            <a:avLst/>
+          </a:prstGeom>
+          <a:noFill/>
+        </p:spPr>
+        <p:txBody>
+          <a:bodyPr wrap="square" lIns="0" rIns="0" tIns="0" bIns="0">
+            <a:spAutoFit/>
+          </a:bodyPr>
+          <a:lstStyle/>
+          <a:p>
+            <a:pPr algn="l"/>
+            <a:r>
+              <a:rPr sz="1100" b="1" i="0">
+                <a:solidFill>
+                  <a:srgbClr val="1E3A8A"/>
+                </a:solidFill>
+                <a:latin typeface="Calibri"/>
+              </a:rPr>
+              <a:t>791 chars — captures structure</a:t>
+            </a:r>
+          </a:p>
+        </p:txBody>
+      </p:sp>
+      <p:sp>
+        <p:nvSpPr>
+          <p:cNvPr id="23" name="TextBox 22"/>
+          <p:cNvSpPr txBox="1"/>
+          <p:nvPr/>
+        </p:nvSpPr>
+        <p:spPr>
+          <a:xfrm>
+            <a:off x="8321039" y="2377440"/>
+            <a:ext cx="3337560" cy="320040"/>
+          </a:xfrm>
+          <a:prstGeom prst="rect">
+            <a:avLst/>
+          </a:prstGeom>
+          <a:noFill/>
+        </p:spPr>
+        <p:txBody>
+          <a:bodyPr wrap="square" lIns="0" rIns="0" tIns="0" bIns="0">
+            <a:spAutoFit/>
+          </a:bodyPr>
+          <a:lstStyle/>
+          <a:p>
+            <a:pPr algn="l"/>
+            <a:r>
+              <a:rPr sz="1000" b="0" i="1">
+                <a:solidFill>
+                  <a:srgbClr val="6B7280"/>
+                </a:solidFill>
+                <a:latin typeface="Calibri"/>
+              </a:rPr>
+              <a:t>→ replaces the obs in the prompt</a:t>
+            </a:r>
+          </a:p>
+        </p:txBody>
+      </p:sp>
+      <p:sp>
+        <p:nvSpPr>
+          <p:cNvPr id="24" name="TextBox 23"/>
+          <p:cNvSpPr txBox="1"/>
+          <p:nvPr/>
+        </p:nvSpPr>
+        <p:spPr>
+          <a:xfrm>
+            <a:off x="8321039" y="2834640"/>
+            <a:ext cx="3337560" cy="3063239"/>
+          </a:xfrm>
+          <a:prstGeom prst="rect">
+            <a:avLst/>
+          </a:prstGeom>
+          <a:noFill/>
+        </p:spPr>
+        <p:txBody>
+          <a:bodyPr wrap="square" lIns="0" rIns="0" tIns="0" bIns="0">
+            <a:spAutoFit/>
+          </a:bodyPr>
+          <a:lstStyle/>
+          <a:p>
+            <a:pPr algn="l"/>
+            <a:r>
+              <a:rPr sz="1000" b="0" i="0">
+                <a:solidFill>
+                  <a:srgbClr val="1F2937"/>
+                </a:solidFill>
+                <a:latin typeface="Calibri"/>
+              </a:rPr>
+              <a:t>testing/test_mark.py: Test file</a:t>
+            </a:r>
+          </a:p>
+          <a:p>
+            <a:pPr algn="l"/>
+            <a:r>
+              <a:rPr sz="1000" b="0" i="0">
+                <a:solidFill>
+                  <a:srgbClr val="1F2937"/>
+                </a:solidFill>
+                <a:latin typeface="Calibri"/>
+              </a:rPr>
+              <a:t>for pytest marks functionality.</a:t>
+            </a:r>
+          </a:p>
+          <a:p>
+            <a:pPr algn="l"/>
+            <a:r>
+              <a:rPr sz="1000" b="0" i="0">
+                <a:solidFill>
+                  <a:srgbClr val="1F2937"/>
+                </a:solidFill>
+                <a:latin typeface="Calibri"/>
+              </a:rPr>
+              <a:t>Contains TestMark class with</a:t>
+            </a:r>
+          </a:p>
+          <a:p>
+            <a:pPr algn="l"/>
+            <a:r>
+              <a:rPr sz="1000" b="0" i="0">
+                <a:solidFill>
+                  <a:srgbClr val="1F2937"/>
+                </a:solidFill>
+                <a:latin typeface="Calibri"/>
+              </a:rPr>
+              <a:t>methods testing mark namespace</a:t>
+            </a:r>
+          </a:p>
+          <a:p>
+            <a:pPr algn="l"/>
+            <a:r>
+              <a:rPr sz="1000" b="0" i="0">
+                <a:solidFill>
+                  <a:srgbClr val="1F2937"/>
+                </a:solidFill>
+                <a:latin typeface="Calibri"/>
+              </a:rPr>
+              <a:t>(test_pytest_exists_in_namespace_</a:t>
+            </a:r>
+          </a:p>
+          <a:p>
+            <a:pPr algn="l"/>
+            <a:r>
+              <a:rPr sz="1000" b="0" i="0">
+                <a:solidFill>
+                  <a:srgbClr val="1F2937"/>
+                </a:solidFill>
+                <a:latin typeface="Calibri"/>
+              </a:rPr>
+              <a:t>all, test_pytest_mark_notcallable,</a:t>
+            </a:r>
+          </a:p>
+          <a:p>
+            <a:pPr algn="l"/>
+            <a:r>
+              <a:rPr sz="1000" b="0" i="0">
+                <a:solidFill>
+                  <a:srgbClr val="1F2937"/>
+                </a:solidFill>
+                <a:latin typeface="Calibri"/>
+              </a:rPr>
+              <a:t>test_mark_with_param, …).</a:t>
+            </a:r>
+          </a:p>
+          <a:p>
+            <a:pPr algn="l"/>
+            <a:r>
+              <a:rPr sz="1000" b="0" i="0">
+                <a:solidFill>
+                  <a:srgbClr val="1F2937"/>
+                </a:solidFill>
+                <a:latin typeface="Calibri"/>
+              </a:rPr>
+              <a:t>Module-level: test_marked_class_</a:t>
+            </a:r>
+          </a:p>
+          <a:p>
+            <a:pPr algn="l"/>
+            <a:r>
+              <a:rPr sz="1000" b="0" i="0">
+                <a:solidFill>
+                  <a:srgbClr val="1F2937"/>
+                </a:solidFill>
+                <a:latin typeface="Calibri"/>
+              </a:rPr>
+              <a:t>run_twice (parametrized class</a:t>
+            </a:r>
+          </a:p>
+          <a:p>
+            <a:pPr algn="l"/>
+            <a:r>
+              <a:rPr sz="1000" b="0" i="0">
+                <a:solidFill>
+                  <a:srgbClr val="1F2937"/>
+                </a:solidFill>
+                <a:latin typeface="Calibri"/>
+              </a:rPr>
+              <a:t>runs); test_ini_markers (ini</a:t>
+            </a:r>
+          </a:p>
+          <a:p>
+            <a:pPr algn="l"/>
+            <a:r>
+              <a:rPr sz="1000" b="0" i="0">
+                <a:solidFill>
+                  <a:srgbClr val="1F2937"/>
+                </a:solidFill>
+                <a:latin typeface="Calibri"/>
+              </a:rPr>
+              <a:t>config); test_markers_option</a:t>
+            </a:r>
+          </a:p>
+          <a:p>
+            <a:pPr algn="l"/>
+            <a:r>
+              <a:rPr sz="1000" b="0" i="0">
+                <a:solidFill>
+                  <a:srgbClr val="1F2937"/>
+                </a:solidFill>
+                <a:latin typeface="Calibri"/>
+              </a:rPr>
+              <a:t>(--markers flag); test_strict_</a:t>
+            </a:r>
+          </a:p>
+          <a:p>
+            <a:pPr algn="l"/>
+            <a:r>
+              <a:rPr sz="1000" b="0" i="0">
+                <a:solidFill>
+                  <a:srgbClr val="1F2937"/>
+                </a:solidFill>
+                <a:latin typeface="Calibri"/>
+              </a:rPr>
+              <a:t>prohibits_unregistered_markers</a:t>
+            </a:r>
+          </a:p>
+          <a:p>
+            <a:pPr algn="l"/>
+            <a:r>
+              <a:rPr sz="1000" b="0" i="0">
+                <a:solidFill>
+                  <a:srgbClr val="1F2937"/>
+                </a:solidFill>
+                <a:latin typeface="Calibri"/>
+              </a:rPr>
+              <a:t>(--strict-markers); test_mark_</a:t>
+            </a:r>
+          </a:p>
+          <a:p>
+            <a:pPr algn="l"/>
+            <a:r>
+              <a:rPr sz="1000" b="0" i="0">
+                <a:solidFill>
+                  <a:srgbClr val="1F2937"/>
+                </a:solidFill>
+                <a:latin typeface="Calibri"/>
+              </a:rPr>
+              <a:t>option (-m); test_keyword_</a:t>
+            </a:r>
+          </a:p>
+          <a:p>
+            <a:pPr algn="l"/>
+            <a:r>
+              <a:rPr sz="1000" b="0" i="0">
+                <a:solidFill>
+                  <a:srgbClr val="1F2937"/>
+                </a:solidFill>
+                <a:latin typeface="Calibri"/>
+              </a:rPr>
+              <a:t>option (-k); test_keyword_</a:t>
+            </a:r>
+          </a:p>
+          <a:p>
+            <a:pPr algn="l"/>
+            <a:r>
+              <a:rPr sz="1000" b="0" i="0">
+                <a:solidFill>
+                  <a:srgbClr val="1F2937"/>
+                </a:solidFill>
+                <a:latin typeface="Calibri"/>
+              </a:rPr>
+              <a:t>option_considers_mark.</a:t>
+            </a:r>
+          </a:p>
+        </p:txBody>
+      </p:sp>
+      <p:sp>
+        <p:nvSpPr>
+          <p:cNvPr id="25" name="Rectangle 24"/>
+          <p:cNvSpPr/>
+          <p:nvPr/>
+        </p:nvSpPr>
+        <p:spPr>
+          <a:xfrm>
+            <a:off x="548640" y="6144768"/>
+            <a:ext cx="11091672" cy="292608"/>
+          </a:xfrm>
+          <a:prstGeom prst="rect">
+            <a:avLst/>
+          </a:prstGeom>
+          <a:solidFill>
+            <a:srgbClr val="14255C"/>
+          </a:solidFill>
+          <a:ln>
+            <a:noFill/>
+          </a:ln>
+          <a:effectLst/>
+        </p:spPr>
+        <p:style>
+          <a:lnRef idx="1">
+            <a:schemeClr val="accent1"/>
+          </a:lnRef>
+          <a:fillRef idx="3">
+            <a:schemeClr val="accent1"/>
+          </a:fillRef>
+          <a:effectRef idx="2">
+            <a:schemeClr val="accent1"/>
+          </a:effectRef>
+          <a:fontRef idx="minor">
+            <a:schemeClr val="lt1"/>
+          </a:fontRef>
+        </p:style>
+        <p:txBody>
+          <a:bodyPr rtlCol="0" anchor="ctr"/>
+          <a:lstStyle/>
+          <a:p>
+            <a:pPr algn="ctr"/>
+          </a:p>
+        </p:txBody>
+      </p:sp>
+      <p:sp>
+        <p:nvSpPr>
+          <p:cNvPr id="26" name="TextBox 25"/>
+          <p:cNvSpPr txBox="1"/>
+          <p:nvPr/>
+        </p:nvSpPr>
+        <p:spPr>
+          <a:xfrm>
+            <a:off x="731520" y="6144768"/>
+            <a:ext cx="10972800" cy="292608"/>
+          </a:xfrm>
+          <a:prstGeom prst="rect">
+            <a:avLst/>
+          </a:prstGeom>
+          <a:noFill/>
+        </p:spPr>
+        <p:txBody>
+          <a:bodyPr wrap="square" lIns="0" rIns="0" tIns="0" bIns="0" anchor="ctr">
+            <a:spAutoFit/>
+          </a:bodyPr>
+          <a:lstStyle/>
+          <a:p>
+            <a:pPr algn="l"/>
+            <a:r>
+              <a:rPr sz="1100" b="1" i="0">
+                <a:solidFill>
+                  <a:srgbClr val="FFFFFF"/>
+                </a:solidFill>
+                <a:latin typeface="Calibri"/>
+              </a:rPr>
+              <a:t>Compaction event:  20,000 chars  →  791 chars  (96% reduction). The original obs is wrapped with summary markers; the engine masks the obs's KV.</a:t>
+            </a:r>
+          </a:p>
+        </p:txBody>
+      </p:sp>
+      <p:sp>
+        <p:nvSpPr>
+          <p:cNvPr id="27" name="TextBox 26"/>
+          <p:cNvSpPr txBox="1"/>
+          <p:nvPr/>
+        </p:nvSpPr>
+        <p:spPr>
+          <a:xfrm>
+            <a:off x="457200" y="6492240"/>
+            <a:ext cx="7315200" cy="274320"/>
+          </a:xfrm>
+          <a:prstGeom prst="rect">
+            <a:avLst/>
+          </a:prstGeom>
+          <a:noFill/>
+        </p:spPr>
+        <p:txBody>
+          <a:bodyPr wrap="square" lIns="0" rIns="0" tIns="0" bIns="0">
+            <a:spAutoFit/>
+          </a:bodyPr>
+          <a:lstStyle/>
+          <a:p>
+            <a:pPr algn="l"/>
+            <a:r>
+              <a:rPr sz="1000" b="0" i="0">
+                <a:solidFill>
+                  <a:srgbClr val="6B7280"/>
+                </a:solidFill>
+                <a:latin typeface="Calibri"/>
+              </a:rPr>
+              <a:t>AdaptiveCache · Vlad Cainamisir · Harvard</a:t>
+            </a:r>
+          </a:p>
+        </p:txBody>
+      </p:sp>
+      <p:sp>
+        <p:nvSpPr>
+          <p:cNvPr id="28" name="TextBox 27"/>
+          <p:cNvSpPr txBox="1"/>
+          <p:nvPr/>
+        </p:nvSpPr>
+        <p:spPr>
+          <a:xfrm>
+            <a:off x="8534095" y="6492240"/>
+            <a:ext cx="3200400" cy="274320"/>
+          </a:xfrm>
+          <a:prstGeom prst="rect">
+            <a:avLst/>
+          </a:prstGeom>
+          <a:noFill/>
+        </p:spPr>
+        <p:txBody>
+          <a:bodyPr wrap="square" lIns="0" rIns="0" tIns="0" bIns="0">
+            <a:spAutoFit/>
+          </a:bodyPr>
+          <a:lstStyle/>
+          <a:p>
+            <a:pPr algn="r"/>
+            <a:r>
+              <a:rPr sz="1000" b="0" i="0">
+                <a:solidFill>
+                  <a:srgbClr val="6B7280"/>
+                </a:solidFill>
+                <a:latin typeface="Calibri"/>
+              </a:rPr>
+              <a:t>23 / 28</a:t>
+            </a:r>
+          </a:p>
+        </p:txBody>
+      </p:sp>
+    </p:spTree>
+  </p:cSld>
+  <p:clrMapOvr>
+    <a:masterClrMapping/>
+  </p:clrMapOvr>
+</p:sld>
+</file>
+
+<file path=ppt/slides/slide24.xml><?xml version="1.0" encoding="utf-8"?>
+<p:sld xmlns:a="http://schemas.openxmlformats.org/drawingml/2006/main" xmlns:p="http://schemas.openxmlformats.org/presentationml/2006/main" xmlns:r="http://schemas.openxmlformats.org/officeDocument/2006/relationships">
+  <p:cSld>
+    <p:spTree>
+      <p:nvGrpSpPr>
+        <p:cNvPr id="1" name=""/>
+        <p:cNvGrpSpPr/>
+        <p:nvPr/>
+      </p:nvGrpSpPr>
+      <p:grpSpPr/>
+      <p:sp>
+        <p:nvSpPr>
+          <p:cNvPr id="2" name="Rectangle 1"/>
+          <p:cNvSpPr/>
+          <p:nvPr/>
+        </p:nvSpPr>
+        <p:spPr>
+          <a:xfrm>
+            <a:off x="0" y="0"/>
+            <a:ext cx="12191695" cy="6858000"/>
+          </a:xfrm>
+          <a:prstGeom prst="rect">
+            <a:avLst/>
+          </a:prstGeom>
+          <a:solidFill>
+            <a:srgbClr val="F8F6F0"/>
+          </a:solidFill>
+          <a:ln>
+            <a:noFill/>
+          </a:ln>
+          <a:effectLst/>
+        </p:spPr>
+        <p:style>
+          <a:lnRef idx="1">
+            <a:schemeClr val="accent1"/>
+          </a:lnRef>
+          <a:fillRef idx="3">
+            <a:schemeClr val="accent1"/>
+          </a:fillRef>
+          <a:effectRef idx="2">
+            <a:schemeClr val="accent1"/>
+          </a:effectRef>
+          <a:fontRef idx="minor">
+            <a:schemeClr val="lt1"/>
+          </a:fontRef>
+        </p:style>
+        <p:txBody>
+          <a:bodyPr rtlCol="0" anchor="ctr"/>
+          <a:lstStyle/>
+          <a:p>
+            <a:pPr algn="ctr"/>
+          </a:p>
+        </p:txBody>
+      </p:sp>
+      <p:sp>
+        <p:nvSpPr>
+          <p:cNvPr id="3" name="Rounded Rectangle 2"/>
+          <p:cNvSpPr/>
+          <p:nvPr/>
+        </p:nvSpPr>
+        <p:spPr>
+          <a:xfrm>
+            <a:off x="9859975" y="365760"/>
+            <a:ext cx="1783080" cy="384048"/>
+          </a:xfrm>
+          <a:prstGeom prst="roundRect">
+            <a:avLst/>
+          </a:prstGeom>
+          <a:solidFill>
+            <a:srgbClr val="E69F00"/>
+          </a:solidFill>
+          <a:ln>
+            <a:noFill/>
+          </a:ln>
+          <a:effectLst/>
+        </p:spPr>
+        <p:style>
+          <a:lnRef idx="1">
+            <a:schemeClr val="accent1"/>
+          </a:lnRef>
+          <a:fillRef idx="3">
+            <a:schemeClr val="accent1"/>
+          </a:fillRef>
+          <a:effectRef idx="2">
+            <a:schemeClr val="accent1"/>
+          </a:effectRef>
+          <a:fontRef idx="minor">
+            <a:schemeClr val="lt1"/>
+          </a:fontRef>
+        </p:style>
+        <p:txBody>
+          <a:bodyPr rtlCol="0" anchor="ctr"/>
+          <a:lstStyle/>
+          <a:p>
+            <a:pPr algn="ctr"/>
+          </a:p>
+        </p:txBody>
+      </p:sp>
+      <p:sp>
+        <p:nvSpPr>
+          <p:cNvPr id="4" name="TextBox 3"/>
+          <p:cNvSpPr txBox="1"/>
+          <p:nvPr/>
+        </p:nvSpPr>
+        <p:spPr>
+          <a:xfrm>
+            <a:off x="9859975" y="365760"/>
+            <a:ext cx="1783080" cy="384048"/>
+          </a:xfrm>
+          <a:prstGeom prst="rect">
+            <a:avLst/>
+          </a:prstGeom>
+          <a:noFill/>
+        </p:spPr>
+        <p:txBody>
+          <a:bodyPr wrap="square" lIns="0" rIns="0" tIns="0" bIns="0" anchor="ctr">
+            <a:spAutoFit/>
+          </a:bodyPr>
+          <a:lstStyle/>
+          <a:p>
+            <a:pPr algn="ctr"/>
+            <a:r>
+              <a:rPr sz="1000" b="1" i="0">
+                <a:solidFill>
+                  <a:srgbClr val="14255C"/>
+                </a:solidFill>
+                <a:latin typeface="Calibri"/>
+              </a:rPr>
+              <a:t>PAPER 2  ·  EXPLORATORY</a:t>
+            </a:r>
+          </a:p>
+        </p:txBody>
+      </p:sp>
+      <p:sp>
+        <p:nvSpPr>
+          <p:cNvPr id="5" name="TextBox 4"/>
+          <p:cNvSpPr txBox="1"/>
+          <p:nvPr/>
+        </p:nvSpPr>
+        <p:spPr>
+          <a:xfrm>
+            <a:off x="548640" y="365760"/>
+            <a:ext cx="9144000" cy="548640"/>
+          </a:xfrm>
+          <a:prstGeom prst="rect">
+            <a:avLst/>
+          </a:prstGeom>
+          <a:noFill/>
+        </p:spPr>
+        <p:txBody>
+          <a:bodyPr wrap="square" lIns="0" rIns="0" tIns="0" bIns="0">
+            <a:spAutoFit/>
+          </a:bodyPr>
+          <a:lstStyle/>
+          <a:p>
+            <a:pPr algn="l"/>
+            <a:r>
+              <a:rPr sz="2200" b="1" i="0">
+                <a:solidFill>
+                  <a:srgbClr val="1E3A8A"/>
+                </a:solidFill>
+                <a:latin typeface="Calibri"/>
+              </a:rPr>
+              <a:t>Retrieving a memento — what recall picks, and why</a:t>
+            </a:r>
+          </a:p>
+        </p:txBody>
+      </p:sp>
+      <p:sp>
+        <p:nvSpPr>
+          <p:cNvPr id="6" name="TextBox 5"/>
+          <p:cNvSpPr txBox="1"/>
+          <p:nvPr/>
+        </p:nvSpPr>
+        <p:spPr>
+          <a:xfrm>
+            <a:off x="548640" y="914400"/>
+            <a:ext cx="9144000" cy="365760"/>
+          </a:xfrm>
+          <a:prstGeom prst="rect">
+            <a:avLst/>
+          </a:prstGeom>
+          <a:noFill/>
+        </p:spPr>
+        <p:txBody>
+          <a:bodyPr wrap="square" lIns="0" rIns="0" tIns="0" bIns="0">
+            <a:spAutoFit/>
+          </a:bodyPr>
+          <a:lstStyle/>
+          <a:p>
+            <a:pPr algn="l"/>
+            <a:r>
+              <a:rPr sz="1200" b="0" i="1">
+                <a:solidFill>
+                  <a:srgbClr val="6B7280"/>
+                </a:solidFill>
+                <a:latin typeface="Calibri"/>
+              </a:rPr>
+              <a:t>Real trace from step 15 of the embedding-recall run. MiniLM scores the agent's recent reasoning against each memento; highest above threshold wins.</a:t>
+            </a:r>
+          </a:p>
+        </p:txBody>
+      </p:sp>
+      <p:sp>
+        <p:nvSpPr>
+          <p:cNvPr id="7" name="Rectangle 6"/>
+          <p:cNvSpPr/>
+          <p:nvPr/>
+        </p:nvSpPr>
+        <p:spPr>
+          <a:xfrm>
+            <a:off x="548640" y="1417320"/>
+            <a:ext cx="4114800" cy="457200"/>
+          </a:xfrm>
+          <a:prstGeom prst="rect">
+            <a:avLst/>
+          </a:prstGeom>
+          <a:solidFill>
+            <a:srgbClr val="1E3A8A"/>
+          </a:solidFill>
+          <a:ln>
+            <a:noFill/>
+          </a:ln>
+          <a:effectLst/>
+        </p:spPr>
+        <p:style>
+          <a:lnRef idx="1">
+            <a:schemeClr val="accent1"/>
+          </a:lnRef>
+          <a:fillRef idx="3">
+            <a:schemeClr val="accent1"/>
+          </a:fillRef>
+          <a:effectRef idx="2">
+            <a:schemeClr val="accent1"/>
+          </a:effectRef>
+          <a:fontRef idx="minor">
+            <a:schemeClr val="lt1"/>
+          </a:fontRef>
+        </p:style>
+        <p:txBody>
+          <a:bodyPr rtlCol="0" anchor="ctr"/>
+          <a:lstStyle/>
+          <a:p>
+            <a:pPr algn="ctr"/>
+          </a:p>
+        </p:txBody>
+      </p:sp>
+      <p:sp>
+        <p:nvSpPr>
+          <p:cNvPr id="8" name="TextBox 7"/>
+          <p:cNvSpPr txBox="1"/>
+          <p:nvPr/>
+        </p:nvSpPr>
+        <p:spPr>
+          <a:xfrm>
+            <a:off x="731520" y="1463040"/>
+            <a:ext cx="3749039" cy="411480"/>
+          </a:xfrm>
+          <a:prstGeom prst="rect">
+            <a:avLst/>
+          </a:prstGeom>
+          <a:noFill/>
+        </p:spPr>
+        <p:txBody>
+          <a:bodyPr wrap="square" lIns="0" rIns="0" tIns="0" bIns="0" anchor="ctr">
+            <a:spAutoFit/>
+          </a:bodyPr>
+          <a:lstStyle/>
+          <a:p>
+            <a:pPr algn="l"/>
+            <a:r>
+              <a:rPr sz="1300" b="1" i="0">
+                <a:solidFill>
+                  <a:srgbClr val="FFFFFF"/>
+                </a:solidFill>
+                <a:latin typeface="Calibri"/>
+              </a:rPr>
+              <a:t>Query — agent's recent context</a:t>
+            </a:r>
+          </a:p>
+        </p:txBody>
+      </p:sp>
+      <p:sp>
+        <p:nvSpPr>
+          <p:cNvPr id="9" name="Rectangle 8"/>
+          <p:cNvSpPr/>
+          <p:nvPr/>
+        </p:nvSpPr>
+        <p:spPr>
+          <a:xfrm>
+            <a:off x="548640" y="1874519"/>
+            <a:ext cx="4114800" cy="4297680"/>
+          </a:xfrm>
+          <a:prstGeom prst="rect">
+            <a:avLst/>
+          </a:prstGeom>
+          <a:solidFill>
+            <a:srgbClr val="FFFFFF"/>
+          </a:solidFill>
+          <a:ln w="15240">
+            <a:solidFill>
+              <a:srgbClr val="1E3A8A"/>
+            </a:solidFill>
+          </a:ln>
+          <a:effectLst/>
+        </p:spPr>
+        <p:style>
+          <a:lnRef idx="1">
+            <a:schemeClr val="accent1"/>
+          </a:lnRef>
+          <a:fillRef idx="3">
+            <a:schemeClr val="accent1"/>
+          </a:fillRef>
+          <a:effectRef idx="2">
+            <a:schemeClr val="accent1"/>
+          </a:effectRef>
+          <a:fontRef idx="minor">
+            <a:schemeClr val="lt1"/>
+          </a:fontRef>
+        </p:style>
+        <p:txBody>
+          <a:bodyPr rtlCol="0" anchor="ctr"/>
+          <a:lstStyle/>
+          <a:p>
+            <a:pPr algn="ctr"/>
+          </a:p>
+        </p:txBody>
+      </p:sp>
+      <p:sp>
+        <p:nvSpPr>
+          <p:cNvPr id="10" name="TextBox 9"/>
+          <p:cNvSpPr txBox="1"/>
+          <p:nvPr/>
+        </p:nvSpPr>
+        <p:spPr>
+          <a:xfrm>
+            <a:off x="731520" y="2057400"/>
+            <a:ext cx="3749039" cy="320040"/>
+          </a:xfrm>
+          <a:prstGeom prst="rect">
+            <a:avLst/>
+          </a:prstGeom>
+          <a:noFill/>
+        </p:spPr>
+        <p:txBody>
+          <a:bodyPr wrap="square" lIns="0" rIns="0" tIns="0" bIns="0">
+            <a:spAutoFit/>
+          </a:bodyPr>
+          <a:lstStyle/>
+          <a:p>
+            <a:pPr algn="l"/>
+            <a:r>
+              <a:rPr sz="1000" b="1" i="0">
+                <a:solidFill>
+                  <a:srgbClr val="1E3A8A"/>
+                </a:solidFill>
+                <a:latin typeface="Calibri"/>
+              </a:rPr>
+              <a:t>Last assistant turn (truncated):</a:t>
+            </a:r>
+          </a:p>
+        </p:txBody>
+      </p:sp>
+      <p:sp>
+        <p:nvSpPr>
+          <p:cNvPr id="11" name="TextBox 10"/>
+          <p:cNvSpPr txBox="1"/>
+          <p:nvPr/>
+        </p:nvSpPr>
+        <p:spPr>
+          <a:xfrm>
+            <a:off x="731520" y="2423160"/>
+            <a:ext cx="3749039" cy="1783080"/>
+          </a:xfrm>
+          <a:prstGeom prst="rect">
+            <a:avLst/>
+          </a:prstGeom>
+          <a:noFill/>
+        </p:spPr>
+        <p:txBody>
+          <a:bodyPr wrap="square" lIns="0" rIns="0" tIns="0" bIns="0">
+            <a:spAutoFit/>
+          </a:bodyPr>
+          <a:lstStyle/>
+          <a:p>
+            <a:pPr algn="l"/>
+            <a:r>
+              <a:rPr sz="1100" b="0" i="1">
+                <a:solidFill>
+                  <a:srgbClr val="1F2937"/>
+                </a:solidFill>
+                <a:latin typeface="Consolas"/>
+              </a:rPr>
+              <a:t>“Let me check the test for</a:t>
+            </a:r>
+          </a:p>
+          <a:p>
+            <a:pPr algn="l"/>
+            <a:r>
+              <a:rPr sz="1100" b="0" i="1">
+                <a:solidFill>
+                  <a:srgbClr val="1F2937"/>
+                </a:solidFill>
+                <a:latin typeface="Consolas"/>
+              </a:rPr>
+              <a:t>dynamically adding markers in the</a:t>
+            </a:r>
+          </a:p>
+          <a:p>
+            <a:pPr algn="l"/>
+            <a:r>
+              <a:rPr sz="1100" b="0" i="1">
+                <a:solidFill>
+                  <a:srgbClr val="1F2937"/>
+                </a:solidFill>
+                <a:latin typeface="Consolas"/>
+              </a:rPr>
+              <a:t>test_mark.py file.”</a:t>
+            </a:r>
+          </a:p>
+          <a:p>
+            <a:pPr algn="l"/>
+            <a:r>
+              <a:rPr sz="1100" b="0" i="1">
+                <a:solidFill>
+                  <a:srgbClr val="1F2937"/>
+                </a:solidFill>
+                <a:latin typeface="Consolas"/>
+              </a:rPr>
+              <a:t/>
+            </a:r>
+          </a:p>
+          <a:p>
+            <a:pPr algn="l"/>
+            <a:r>
+              <a:rPr sz="1100" b="0" i="1">
+                <a:solidFill>
+                  <a:srgbClr val="1F2937"/>
+                </a:solidFill>
+                <a:latin typeface="Consolas"/>
+              </a:rPr>
+              <a:t>+ tool_call: read_file(</a:t>
+            </a:r>
+          </a:p>
+          <a:p>
+            <a:pPr algn="l"/>
+            <a:r>
+              <a:rPr sz="1100" b="0" i="1">
+                <a:solidFill>
+                  <a:srgbClr val="1F2937"/>
+                </a:solidFill>
+                <a:latin typeface="Consolas"/>
+              </a:rPr>
+              <a:t>      path='testing/test_mark.py')</a:t>
+            </a:r>
+          </a:p>
+        </p:txBody>
+      </p:sp>
+      <p:sp>
+        <p:nvSpPr>
+          <p:cNvPr id="12" name="TextBox 11"/>
+          <p:cNvSpPr txBox="1"/>
+          <p:nvPr/>
+        </p:nvSpPr>
+        <p:spPr>
+          <a:xfrm>
+            <a:off x="731520" y="4343400"/>
+            <a:ext cx="3749039" cy="320040"/>
+          </a:xfrm>
+          <a:prstGeom prst="rect">
+            <a:avLst/>
+          </a:prstGeom>
+          <a:noFill/>
+        </p:spPr>
+        <p:txBody>
+          <a:bodyPr wrap="square" lIns="0" rIns="0" tIns="0" bIns="0">
+            <a:spAutoFit/>
+          </a:bodyPr>
+          <a:lstStyle/>
+          <a:p>
+            <a:pPr algn="l"/>
+            <a:r>
+              <a:rPr sz="1000" b="0" i="0">
+                <a:solidFill>
+                  <a:srgbClr val="6B7280"/>
+                </a:solidFill>
+                <a:latin typeface="Calibri"/>
+              </a:rPr>
+              <a:t>→ embedded by MiniLM (384-dim)</a:t>
+            </a:r>
+          </a:p>
+        </p:txBody>
+      </p:sp>
+      <p:sp>
+        <p:nvSpPr>
+          <p:cNvPr id="13" name="TextBox 12"/>
+          <p:cNvSpPr txBox="1"/>
+          <p:nvPr/>
+        </p:nvSpPr>
+        <p:spPr>
+          <a:xfrm>
+            <a:off x="731520" y="4709160"/>
+            <a:ext cx="3749039" cy="1371600"/>
+          </a:xfrm>
+          <a:prstGeom prst="rect">
+            <a:avLst/>
+          </a:prstGeom>
+          <a:noFill/>
+        </p:spPr>
+        <p:txBody>
+          <a:bodyPr wrap="square" lIns="0" rIns="0" tIns="0" bIns="0">
+            <a:spAutoFit/>
+          </a:bodyPr>
+          <a:lstStyle/>
+          <a:p>
+            <a:pPr algn="l"/>
+            <a:r>
+              <a:rPr sz="1000" b="0" i="0">
+                <a:solidFill>
+                  <a:srgbClr val="1F2937"/>
+                </a:solidFill>
+                <a:latin typeface="Calibri"/>
+              </a:rPr>
+              <a:t>Headroom check passes:</a:t>
+            </a:r>
+          </a:p>
+          <a:p>
+            <a:pPr algn="l"/>
+            <a:r>
+              <a:rPr sz="1000" b="0" i="0">
+                <a:solidFill>
+                  <a:srgbClr val="1F2937"/>
+                </a:solidFill>
+                <a:latin typeface="Calibri"/>
+              </a:rPr>
+              <a:t>  prompt ≈ 11K, low-water = 14.4K.</a:t>
+            </a:r>
+          </a:p>
+          <a:p>
+            <a:pPr algn="l"/>
+            <a:r>
+              <a:rPr sz="1000" b="0" i="0">
+                <a:solidFill>
+                  <a:srgbClr val="1F2937"/>
+                </a:solidFill>
+                <a:latin typeface="Calibri"/>
+              </a:rPr>
+              <a:t>  Recall is allowed to fire.</a:t>
+            </a:r>
+          </a:p>
+        </p:txBody>
+      </p:sp>
+      <p:sp>
+        <p:nvSpPr>
+          <p:cNvPr id="14" name="Rectangle 13"/>
+          <p:cNvSpPr/>
+          <p:nvPr/>
+        </p:nvSpPr>
+        <p:spPr>
+          <a:xfrm>
+            <a:off x="4937760" y="1417320"/>
+            <a:ext cx="6702552" cy="457200"/>
+          </a:xfrm>
+          <a:prstGeom prst="rect">
+            <a:avLst/>
+          </a:prstGeom>
+          <a:solidFill>
+            <a:srgbClr val="E69F00"/>
+          </a:solidFill>
+          <a:ln>
+            <a:noFill/>
+          </a:ln>
+          <a:effectLst/>
+        </p:spPr>
+        <p:style>
+          <a:lnRef idx="1">
+            <a:schemeClr val="accent1"/>
+          </a:lnRef>
+          <a:fillRef idx="3">
+            <a:schemeClr val="accent1"/>
+          </a:fillRef>
+          <a:effectRef idx="2">
+            <a:schemeClr val="accent1"/>
+          </a:effectRef>
+          <a:fontRef idx="minor">
+            <a:schemeClr val="lt1"/>
+          </a:fontRef>
+        </p:style>
+        <p:txBody>
+          <a:bodyPr rtlCol="0" anchor="ctr"/>
+          <a:lstStyle/>
+          <a:p>
+            <a:pPr algn="ctr"/>
+          </a:p>
+        </p:txBody>
+      </p:sp>
+      <p:sp>
+        <p:nvSpPr>
+          <p:cNvPr id="15" name="TextBox 14"/>
+          <p:cNvSpPr txBox="1"/>
+          <p:nvPr/>
+        </p:nvSpPr>
+        <p:spPr>
+          <a:xfrm>
+            <a:off x="5120640" y="1463040"/>
+            <a:ext cx="6336792" cy="411480"/>
+          </a:xfrm>
+          <a:prstGeom prst="rect">
+            <a:avLst/>
+          </a:prstGeom>
+          <a:noFill/>
+        </p:spPr>
+        <p:txBody>
+          <a:bodyPr wrap="square" lIns="0" rIns="0" tIns="0" bIns="0" anchor="ctr">
+            <a:spAutoFit/>
+          </a:bodyPr>
+          <a:lstStyle/>
+          <a:p>
+            <a:pPr algn="l"/>
+            <a:r>
+              <a:rPr sz="1300" b="1" i="0">
+                <a:solidFill>
+                  <a:srgbClr val="14255C"/>
+                </a:solidFill>
+                <a:latin typeface="Calibri"/>
+              </a:rPr>
+              <a:t>Candidates — 5 mementos, scored by cosine-sim</a:t>
+            </a:r>
+          </a:p>
+        </p:txBody>
+      </p:sp>
+      <p:sp>
+        <p:nvSpPr>
+          <p:cNvPr id="16" name="Rectangle 15"/>
+          <p:cNvSpPr/>
+          <p:nvPr/>
+        </p:nvSpPr>
+        <p:spPr>
+          <a:xfrm>
+            <a:off x="4937760" y="1874519"/>
+            <a:ext cx="6702552" cy="4297680"/>
+          </a:xfrm>
+          <a:prstGeom prst="rect">
+            <a:avLst/>
+          </a:prstGeom>
+          <a:solidFill>
+            <a:srgbClr val="FFFFFF"/>
+          </a:solidFill>
+          <a:ln w="15240">
+            <a:solidFill>
+              <a:srgbClr val="1E3A8A"/>
+            </a:solidFill>
+          </a:ln>
+          <a:effectLst/>
+        </p:spPr>
+        <p:style>
+          <a:lnRef idx="1">
+            <a:schemeClr val="accent1"/>
+          </a:lnRef>
+          <a:fillRef idx="3">
+            <a:schemeClr val="accent1"/>
+          </a:fillRef>
+          <a:effectRef idx="2">
+            <a:schemeClr val="accent1"/>
+          </a:effectRef>
+          <a:fontRef idx="minor">
+            <a:schemeClr val="lt1"/>
+          </a:fontRef>
+        </p:style>
+        <p:txBody>
+          <a:bodyPr rtlCol="0" anchor="ctr"/>
+          <a:lstStyle/>
+          <a:p>
+            <a:pPr algn="ctr"/>
+          </a:p>
+        </p:txBody>
+      </p:sp>
+      <p:sp>
+        <p:nvSpPr>
+          <p:cNvPr id="17" name="TextBox 16"/>
+          <p:cNvSpPr txBox="1"/>
+          <p:nvPr/>
+        </p:nvSpPr>
+        <p:spPr>
+          <a:xfrm>
+            <a:off x="5120640" y="2011680"/>
+            <a:ext cx="640080" cy="292608"/>
+          </a:xfrm>
+          <a:prstGeom prst="rect">
+            <a:avLst/>
+          </a:prstGeom>
+          <a:noFill/>
+        </p:spPr>
+        <p:txBody>
+          <a:bodyPr wrap="square" lIns="0" rIns="0" tIns="0" bIns="0" anchor="ctr">
+            <a:spAutoFit/>
+          </a:bodyPr>
+          <a:lstStyle/>
+          <a:p>
+            <a:pPr algn="l"/>
+            <a:r>
+              <a:rPr sz="1200" b="1" i="0">
+                <a:solidFill>
+                  <a:srgbClr val="009E73"/>
+                </a:solidFill>
+                <a:latin typeface="Consolas"/>
+              </a:rPr>
+              <a:t>0.71</a:t>
+            </a:r>
+          </a:p>
+        </p:txBody>
+      </p:sp>
+      <p:sp>
+        <p:nvSpPr>
+          <p:cNvPr id="18" name="TextBox 17"/>
+          <p:cNvSpPr txBox="1"/>
+          <p:nvPr/>
+        </p:nvSpPr>
+        <p:spPr>
+          <a:xfrm>
+            <a:off x="5806440" y="2011680"/>
+            <a:ext cx="5696712" cy="292608"/>
+          </a:xfrm>
+          <a:prstGeom prst="rect">
+            <a:avLst/>
+          </a:prstGeom>
+          <a:noFill/>
+        </p:spPr>
+        <p:txBody>
+          <a:bodyPr wrap="square" lIns="0" rIns="0" tIns="0" bIns="0">
+            <a:spAutoFit/>
+          </a:bodyPr>
+          <a:lstStyle/>
+          <a:p>
+            <a:pPr algn="l"/>
+            <a:r>
+              <a:rPr sz="1100" b="1" i="0">
+                <a:solidFill>
+                  <a:srgbClr val="009E73"/>
+                </a:solidFill>
+                <a:latin typeface="Calibri"/>
+              </a:rPr>
+              <a:t>msg[11] — test_mark.py</a:t>
+            </a:r>
+          </a:p>
+        </p:txBody>
+      </p:sp>
+      <p:sp>
+        <p:nvSpPr>
+          <p:cNvPr id="19" name="TextBox 18"/>
+          <p:cNvSpPr txBox="1"/>
+          <p:nvPr/>
+        </p:nvSpPr>
+        <p:spPr>
+          <a:xfrm>
+            <a:off x="5806440" y="2304288"/>
+            <a:ext cx="5696712" cy="502920"/>
+          </a:xfrm>
+          <a:prstGeom prst="rect">
+            <a:avLst/>
+          </a:prstGeom>
+          <a:noFill/>
+        </p:spPr>
+        <p:txBody>
+          <a:bodyPr wrap="square" lIns="0" rIns="0" tIns="0" bIns="0">
+            <a:spAutoFit/>
+          </a:bodyPr>
+          <a:lstStyle/>
+          <a:p>
+            <a:pPr algn="l"/>
+            <a:r>
+              <a:rPr sz="950" b="0" i="1">
+                <a:solidFill>
+                  <a:srgbClr val="1F2937"/>
+                </a:solidFill>
+                <a:latin typeface="Calibri"/>
+              </a:rPr>
+              <a:t>Test file for pytest marks functionality. TestMark class with test_pytest_exists_in_namespace_all, test_mark_with_param, …</a:t>
+            </a:r>
+          </a:p>
+        </p:txBody>
+      </p:sp>
+      <p:sp>
+        <p:nvSpPr>
+          <p:cNvPr id="20" name="TextBox 19"/>
+          <p:cNvSpPr txBox="1"/>
+          <p:nvPr/>
+        </p:nvSpPr>
+        <p:spPr>
+          <a:xfrm>
+            <a:off x="10268712" y="2011680"/>
+            <a:ext cx="1188720" cy="292608"/>
+          </a:xfrm>
+          <a:prstGeom prst="rect">
+            <a:avLst/>
+          </a:prstGeom>
+          <a:noFill/>
+        </p:spPr>
+        <p:txBody>
+          <a:bodyPr wrap="square" lIns="0" rIns="0" tIns="0" bIns="0" anchor="ctr">
+            <a:spAutoFit/>
+          </a:bodyPr>
+          <a:lstStyle/>
+          <a:p>
+            <a:pPr algn="r"/>
+            <a:r>
+              <a:rPr sz="1000" b="1" i="0">
+                <a:solidFill>
+                  <a:srgbClr val="009E73"/>
+                </a:solidFill>
+                <a:latin typeface="Calibri"/>
+              </a:rPr>
+              <a:t>PICKED ✓</a:t>
+            </a:r>
+          </a:p>
+        </p:txBody>
+      </p:sp>
+      <p:sp>
+        <p:nvSpPr>
+          <p:cNvPr id="21" name="TextBox 20"/>
+          <p:cNvSpPr txBox="1"/>
+          <p:nvPr/>
+        </p:nvSpPr>
+        <p:spPr>
+          <a:xfrm>
+            <a:off x="5120640" y="2852928"/>
+            <a:ext cx="640080" cy="292608"/>
+          </a:xfrm>
+          <a:prstGeom prst="rect">
+            <a:avLst/>
+          </a:prstGeom>
+          <a:noFill/>
+        </p:spPr>
+        <p:txBody>
+          <a:bodyPr wrap="square" lIns="0" rIns="0" tIns="0" bIns="0" anchor="ctr">
+            <a:spAutoFit/>
+          </a:bodyPr>
+          <a:lstStyle/>
+          <a:p>
+            <a:pPr algn="l"/>
+            <a:r>
+              <a:rPr sz="1200" b="1" i="0">
+                <a:solidFill>
+                  <a:srgbClr val="6B7280"/>
+                </a:solidFill>
+                <a:latin typeface="Consolas"/>
+              </a:rPr>
+              <a:t>0.42</a:t>
+            </a:r>
+          </a:p>
+        </p:txBody>
+      </p:sp>
+      <p:sp>
+        <p:nvSpPr>
+          <p:cNvPr id="22" name="TextBox 21"/>
+          <p:cNvSpPr txBox="1"/>
+          <p:nvPr/>
+        </p:nvSpPr>
+        <p:spPr>
+          <a:xfrm>
+            <a:off x="5806440" y="2852928"/>
+            <a:ext cx="5696712" cy="292608"/>
+          </a:xfrm>
+          <a:prstGeom prst="rect">
+            <a:avLst/>
+          </a:prstGeom>
+          <a:noFill/>
+        </p:spPr>
+        <p:txBody>
+          <a:bodyPr wrap="square" lIns="0" rIns="0" tIns="0" bIns="0">
+            <a:spAutoFit/>
+          </a:bodyPr>
+          <a:lstStyle/>
+          <a:p>
+            <a:pPr algn="l"/>
+            <a:r>
+              <a:rPr sz="1100" b="1" i="0">
+                <a:solidFill>
+                  <a:srgbClr val="1E3A8A"/>
+                </a:solidFill>
+                <a:latin typeface="Calibri"/>
+              </a:rPr>
+              <a:t>msg[23] — _pytest/python.py</a:t>
+            </a:r>
+          </a:p>
+        </p:txBody>
+      </p:sp>
+      <p:sp>
+        <p:nvSpPr>
+          <p:cNvPr id="23" name="TextBox 22"/>
+          <p:cNvSpPr txBox="1"/>
+          <p:nvPr/>
+        </p:nvSpPr>
+        <p:spPr>
+          <a:xfrm>
+            <a:off x="5806440" y="3145536"/>
+            <a:ext cx="5696712" cy="502920"/>
+          </a:xfrm>
+          <a:prstGeom prst="rect">
+            <a:avLst/>
+          </a:prstGeom>
+          <a:noFill/>
+        </p:spPr>
+        <p:txBody>
+          <a:bodyPr wrap="square" lIns="0" rIns="0" tIns="0" bIns="0">
+            <a:spAutoFit/>
+          </a:bodyPr>
+          <a:lstStyle/>
+          <a:p>
+            <a:pPr algn="l"/>
+            <a:r>
+              <a:rPr sz="950" b="0" i="1">
+                <a:solidFill>
+                  <a:srgbClr val="1F2937"/>
+                </a:solidFill>
+                <a:latin typeface="Calibri"/>
+              </a:rPr>
+              <a:t>pytest test discovery &amp; execution module; pytest_addoption registers marks, pytest_generate_tests parametrize, …</a:t>
+            </a:r>
+          </a:p>
+        </p:txBody>
+      </p:sp>
+      <p:sp>
+        <p:nvSpPr>
+          <p:cNvPr id="24" name="TextBox 23"/>
+          <p:cNvSpPr txBox="1"/>
+          <p:nvPr/>
+        </p:nvSpPr>
+        <p:spPr>
+          <a:xfrm>
+            <a:off x="5120640" y="3694176"/>
+            <a:ext cx="640080" cy="292608"/>
+          </a:xfrm>
+          <a:prstGeom prst="rect">
+            <a:avLst/>
+          </a:prstGeom>
+          <a:noFill/>
+        </p:spPr>
+        <p:txBody>
+          <a:bodyPr wrap="square" lIns="0" rIns="0" tIns="0" bIns="0" anchor="ctr">
+            <a:spAutoFit/>
+          </a:bodyPr>
+          <a:lstStyle/>
+          <a:p>
+            <a:pPr algn="l"/>
+            <a:r>
+              <a:rPr sz="1200" b="1" i="0">
+                <a:solidFill>
+                  <a:srgbClr val="6B7280"/>
+                </a:solidFill>
+                <a:latin typeface="Consolas"/>
+              </a:rPr>
+              <a:t>0.31</a:t>
+            </a:r>
+          </a:p>
+        </p:txBody>
+      </p:sp>
+      <p:sp>
+        <p:nvSpPr>
+          <p:cNvPr id="25" name="TextBox 24"/>
+          <p:cNvSpPr txBox="1"/>
+          <p:nvPr/>
+        </p:nvSpPr>
+        <p:spPr>
+          <a:xfrm>
+            <a:off x="5806440" y="3694176"/>
+            <a:ext cx="5696712" cy="292608"/>
+          </a:xfrm>
+          <a:prstGeom prst="rect">
+            <a:avLst/>
+          </a:prstGeom>
+          <a:noFill/>
+        </p:spPr>
+        <p:txBody>
+          <a:bodyPr wrap="square" lIns="0" rIns="0" tIns="0" bIns="0">
+            <a:spAutoFit/>
+          </a:bodyPr>
+          <a:lstStyle/>
+          <a:p>
+            <a:pPr algn="l"/>
+            <a:r>
+              <a:rPr sz="1100" b="1" i="0">
+                <a:solidFill>
+                  <a:srgbClr val="1E3A8A"/>
+                </a:solidFill>
+                <a:latin typeface="Calibri"/>
+              </a:rPr>
+              <a:t>msg[9]  — testing/ dir listing</a:t>
+            </a:r>
+          </a:p>
+        </p:txBody>
+      </p:sp>
+      <p:sp>
+        <p:nvSpPr>
+          <p:cNvPr id="26" name="TextBox 25"/>
+          <p:cNvSpPr txBox="1"/>
+          <p:nvPr/>
+        </p:nvSpPr>
+        <p:spPr>
+          <a:xfrm>
+            <a:off x="5806440" y="3986784"/>
+            <a:ext cx="5696712" cy="502920"/>
+          </a:xfrm>
+          <a:prstGeom prst="rect">
+            <a:avLst/>
+          </a:prstGeom>
+          <a:noFill/>
+        </p:spPr>
+        <p:txBody>
+          <a:bodyPr wrap="square" lIns="0" rIns="0" tIns="0" bIns="0">
+            <a:spAutoFit/>
+          </a:bodyPr>
+          <a:lstStyle/>
+          <a:p>
+            <a:pPr algn="l"/>
+            <a:r>
+              <a:rPr sz="950" b="0" i="1">
+                <a:solidFill>
+                  <a:srgbClr val="1F2937"/>
+                </a:solidFill>
+                <a:latin typeface="Calibri"/>
+              </a:rPr>
+              <a:t>path:testing/ contains: acceptance_test.py; conftest.py; subdirs: code/, examples/; test_argcomplete.py, test_assertion.py, …</a:t>
+            </a:r>
+          </a:p>
+        </p:txBody>
+      </p:sp>
+      <p:sp>
+        <p:nvSpPr>
+          <p:cNvPr id="27" name="TextBox 26"/>
+          <p:cNvSpPr txBox="1"/>
+          <p:nvPr/>
+        </p:nvSpPr>
+        <p:spPr>
+          <a:xfrm>
+            <a:off x="5120640" y="4535424"/>
+            <a:ext cx="640080" cy="292608"/>
+          </a:xfrm>
+          <a:prstGeom prst="rect">
+            <a:avLst/>
+          </a:prstGeom>
+          <a:noFill/>
+        </p:spPr>
+        <p:txBody>
+          <a:bodyPr wrap="square" lIns="0" rIns="0" tIns="0" bIns="0" anchor="ctr">
+            <a:spAutoFit/>
+          </a:bodyPr>
+          <a:lstStyle/>
+          <a:p>
+            <a:pPr algn="l"/>
+            <a:r>
+              <a:rPr sz="1200" b="1" i="0">
+                <a:solidFill>
+                  <a:srgbClr val="6B7280"/>
+                </a:solidFill>
+                <a:latin typeface="Consolas"/>
+              </a:rPr>
+              <a:t>0.18</a:t>
+            </a:r>
+          </a:p>
+        </p:txBody>
+      </p:sp>
+      <p:sp>
+        <p:nvSpPr>
+          <p:cNvPr id="28" name="TextBox 27"/>
+          <p:cNvSpPr txBox="1"/>
+          <p:nvPr/>
+        </p:nvSpPr>
+        <p:spPr>
+          <a:xfrm>
+            <a:off x="5806440" y="4535424"/>
+            <a:ext cx="5696712" cy="292608"/>
+          </a:xfrm>
+          <a:prstGeom prst="rect">
+            <a:avLst/>
+          </a:prstGeom>
+          <a:noFill/>
+        </p:spPr>
+        <p:txBody>
+          <a:bodyPr wrap="square" lIns="0" rIns="0" tIns="0" bIns="0">
+            <a:spAutoFit/>
+          </a:bodyPr>
+          <a:lstStyle/>
+          <a:p>
+            <a:pPr algn="l"/>
+            <a:r>
+              <a:rPr sz="1100" b="1" i="0">
+                <a:solidFill>
+                  <a:srgbClr val="1E3A8A"/>
+                </a:solidFill>
+                <a:latin typeface="Calibri"/>
+              </a:rPr>
+              <a:t>msg[7]  — root dir listing</a:t>
+            </a:r>
+          </a:p>
+        </p:txBody>
+      </p:sp>
+      <p:sp>
+        <p:nvSpPr>
+          <p:cNvPr id="29" name="TextBox 28"/>
+          <p:cNvSpPr txBox="1"/>
+          <p:nvPr/>
+        </p:nvSpPr>
+        <p:spPr>
+          <a:xfrm>
+            <a:off x="5806440" y="4828032"/>
+            <a:ext cx="5696712" cy="502920"/>
+          </a:xfrm>
+          <a:prstGeom prst="rect">
+            <a:avLst/>
+          </a:prstGeom>
+          <a:noFill/>
+        </p:spPr>
+        <p:txBody>
+          <a:bodyPr wrap="square" lIns="0" rIns="0" tIns="0" bIns="0">
+            <a:spAutoFit/>
+          </a:bodyPr>
+          <a:lstStyle/>
+          <a:p>
+            <a:pPr algn="l"/>
+            <a:r>
+              <a:rPr sz="950" b="0" i="1">
+                <a:solidFill>
+                  <a:srgbClr val="1F2937"/>
+                </a:solidFill>
+                <a:latin typeface="Calibri"/>
+              </a:rPr>
+              <a:t>Root directory: .coveragerc, .gitattributes, .github/, AUTHORS, CHANGELOG.rst, CITATION, …</a:t>
+            </a:r>
+          </a:p>
+        </p:txBody>
+      </p:sp>
+      <p:sp>
+        <p:nvSpPr>
+          <p:cNvPr id="30" name="TextBox 29"/>
+          <p:cNvSpPr txBox="1"/>
+          <p:nvPr/>
+        </p:nvSpPr>
+        <p:spPr>
+          <a:xfrm>
+            <a:off x="5120640" y="5376672"/>
+            <a:ext cx="640080" cy="292608"/>
+          </a:xfrm>
+          <a:prstGeom prst="rect">
+            <a:avLst/>
+          </a:prstGeom>
+          <a:noFill/>
+        </p:spPr>
+        <p:txBody>
+          <a:bodyPr wrap="square" lIns="0" rIns="0" tIns="0" bIns="0" anchor="ctr">
+            <a:spAutoFit/>
+          </a:bodyPr>
+          <a:lstStyle/>
+          <a:p>
+            <a:pPr algn="l"/>
+            <a:r>
+              <a:rPr sz="1200" b="1" i="0">
+                <a:solidFill>
+                  <a:srgbClr val="6B7280"/>
+                </a:solidFill>
+                <a:latin typeface="Consolas"/>
+              </a:rPr>
+              <a:t>0.15</a:t>
+            </a:r>
+          </a:p>
+        </p:txBody>
+      </p:sp>
+      <p:sp>
+        <p:nvSpPr>
+          <p:cNvPr id="31" name="TextBox 30"/>
+          <p:cNvSpPr txBox="1"/>
+          <p:nvPr/>
+        </p:nvSpPr>
+        <p:spPr>
+          <a:xfrm>
+            <a:off x="5806440" y="5376672"/>
+            <a:ext cx="5696712" cy="292608"/>
+          </a:xfrm>
+          <a:prstGeom prst="rect">
+            <a:avLst/>
+          </a:prstGeom>
+          <a:noFill/>
+        </p:spPr>
+        <p:txBody>
+          <a:bodyPr wrap="square" lIns="0" rIns="0" tIns="0" bIns="0">
+            <a:spAutoFit/>
+          </a:bodyPr>
+          <a:lstStyle/>
+          <a:p>
+            <a:pPr algn="l"/>
+            <a:r>
+              <a:rPr sz="1100" b="1" i="0">
+                <a:solidFill>
+                  <a:srgbClr val="1E3A8A"/>
+                </a:solidFill>
+                <a:latin typeface="Calibri"/>
+              </a:rPr>
+              <a:t>msg[25] — _pytest/nodes.py</a:t>
+            </a:r>
+          </a:p>
+        </p:txBody>
+      </p:sp>
+      <p:sp>
+        <p:nvSpPr>
+          <p:cNvPr id="32" name="TextBox 31"/>
+          <p:cNvSpPr txBox="1"/>
+          <p:nvPr/>
+        </p:nvSpPr>
+        <p:spPr>
+          <a:xfrm>
+            <a:off x="5806440" y="5669280"/>
+            <a:ext cx="5696712" cy="502920"/>
+          </a:xfrm>
+          <a:prstGeom prst="rect">
+            <a:avLst/>
+          </a:prstGeom>
+          <a:noFill/>
+        </p:spPr>
+        <p:txBody>
+          <a:bodyPr wrap="square" lIns="0" rIns="0" tIns="0" bIns="0">
+            <a:spAutoFit/>
+          </a:bodyPr>
+          <a:lstStyle/>
+          <a:p>
+            <a:pPr algn="l"/>
+            <a:r>
+              <a:rPr sz="950" b="0" i="1">
+                <a:solidFill>
+                  <a:srgbClr val="1F2937"/>
+                </a:solidFill>
+                <a:latin typeface="Calibri"/>
+              </a:rPr>
+              <a:t>Node base class for test collection tree; NodeMeta metaclass warns on direct instantiation; collect/iterations…</a:t>
+            </a:r>
+          </a:p>
+        </p:txBody>
+      </p:sp>
+      <p:sp>
+        <p:nvSpPr>
+          <p:cNvPr id="33" name="Rectangle 32"/>
+          <p:cNvSpPr/>
+          <p:nvPr/>
+        </p:nvSpPr>
+        <p:spPr>
+          <a:xfrm>
+            <a:off x="548640" y="6144768"/>
+            <a:ext cx="11091672" cy="292608"/>
+          </a:xfrm>
+          <a:prstGeom prst="rect">
+            <a:avLst/>
+          </a:prstGeom>
+          <a:solidFill>
+            <a:srgbClr val="14255C"/>
+          </a:solidFill>
+          <a:ln>
+            <a:noFill/>
+          </a:ln>
+          <a:effectLst/>
+        </p:spPr>
+        <p:style>
+          <a:lnRef idx="1">
+            <a:schemeClr val="accent1"/>
+          </a:lnRef>
+          <a:fillRef idx="3">
+            <a:schemeClr val="accent1"/>
+          </a:fillRef>
+          <a:effectRef idx="2">
+            <a:schemeClr val="accent1"/>
+          </a:effectRef>
+          <a:fontRef idx="minor">
+            <a:schemeClr val="lt1"/>
+          </a:fontRef>
+        </p:style>
+        <p:txBody>
+          <a:bodyPr rtlCol="0" anchor="ctr"/>
+          <a:lstStyle/>
+          <a:p>
+            <a:pPr algn="ctr"/>
+          </a:p>
+        </p:txBody>
+      </p:sp>
+      <p:sp>
+        <p:nvSpPr>
+          <p:cNvPr id="34" name="TextBox 33"/>
+          <p:cNvSpPr txBox="1"/>
+          <p:nvPr/>
+        </p:nvSpPr>
+        <p:spPr>
+          <a:xfrm>
+            <a:off x="731520" y="6144768"/>
+            <a:ext cx="10972800" cy="292608"/>
+          </a:xfrm>
+          <a:prstGeom prst="rect">
+            <a:avLst/>
+          </a:prstGeom>
+          <a:noFill/>
+        </p:spPr>
+        <p:txBody>
+          <a:bodyPr wrap="square" lIns="0" rIns="0" tIns="0" bIns="0" anchor="ctr">
+            <a:spAutoFit/>
+          </a:bodyPr>
+          <a:lstStyle/>
+          <a:p>
+            <a:pPr algn="l"/>
+            <a:r>
+              <a:rPr sz="1100" b="1" i="0">
+                <a:solidFill>
+                  <a:srgbClr val="FFFFFF"/>
+                </a:solidFill>
+                <a:latin typeface="Calibri"/>
+              </a:rPr>
+              <a:t>v1 effect:  prompt re-renders with full obs → re-prefills from the obs onward. v2 target: keep all KV, recover obs from offload, flip mask. Generation continues (next slide).</a:t>
+            </a:r>
+          </a:p>
+        </p:txBody>
+      </p:sp>
+      <p:sp>
+        <p:nvSpPr>
+          <p:cNvPr id="35" name="TextBox 34"/>
+          <p:cNvSpPr txBox="1"/>
+          <p:nvPr/>
+        </p:nvSpPr>
+        <p:spPr>
+          <a:xfrm>
+            <a:off x="457200" y="6492240"/>
+            <a:ext cx="7315200" cy="274320"/>
+          </a:xfrm>
+          <a:prstGeom prst="rect">
+            <a:avLst/>
+          </a:prstGeom>
+          <a:noFill/>
+        </p:spPr>
+        <p:txBody>
+          <a:bodyPr wrap="square" lIns="0" rIns="0" tIns="0" bIns="0">
+            <a:spAutoFit/>
+          </a:bodyPr>
+          <a:lstStyle/>
+          <a:p>
+            <a:pPr algn="l"/>
+            <a:r>
+              <a:rPr sz="1000" b="0" i="0">
+                <a:solidFill>
+                  <a:srgbClr val="6B7280"/>
+                </a:solidFill>
+                <a:latin typeface="Calibri"/>
+              </a:rPr>
+              <a:t>AdaptiveCache · Vlad Cainamisir · Harvard</a:t>
+            </a:r>
+          </a:p>
+        </p:txBody>
+      </p:sp>
+      <p:sp>
+        <p:nvSpPr>
+          <p:cNvPr id="36" name="TextBox 35"/>
+          <p:cNvSpPr txBox="1"/>
+          <p:nvPr/>
+        </p:nvSpPr>
+        <p:spPr>
+          <a:xfrm>
+            <a:off x="8534095" y="6492240"/>
+            <a:ext cx="3200400" cy="274320"/>
+          </a:xfrm>
+          <a:prstGeom prst="rect">
+            <a:avLst/>
+          </a:prstGeom>
+          <a:noFill/>
+        </p:spPr>
+        <p:txBody>
+          <a:bodyPr wrap="square" lIns="0" rIns="0" tIns="0" bIns="0">
+            <a:spAutoFit/>
+          </a:bodyPr>
+          <a:lstStyle/>
+          <a:p>
+            <a:pPr algn="r"/>
+            <a:r>
+              <a:rPr sz="1000" b="0" i="0">
+                <a:solidFill>
+                  <a:srgbClr val="6B7280"/>
+                </a:solidFill>
+                <a:latin typeface="Calibri"/>
+              </a:rPr>
+              <a:t>24 / 28</a:t>
+            </a:r>
+          </a:p>
+        </p:txBody>
+      </p:sp>
+    </p:spTree>
+  </p:cSld>
+  <p:clrMapOvr>
+    <a:masterClrMapping/>
+  </p:clrMapOvr>
+</p:sld>
+</file>
+
+<file path=ppt/slides/slide25.xml><?xml version="1.0" encoding="utf-8"?>
+<p:sld xmlns:a="http://schemas.openxmlformats.org/drawingml/2006/main" xmlns:p="http://schemas.openxmlformats.org/presentationml/2006/main" xmlns:r="http://schemas.openxmlformats.org/officeDocument/2006/relationships">
+  <p:cSld>
+    <p:spTree>
+      <p:nvGrpSpPr>
+        <p:cNvPr id="1" name=""/>
+        <p:cNvGrpSpPr/>
+        <p:nvPr/>
+      </p:nvGrpSpPr>
+      <p:grpSpPr/>
+      <p:sp>
+        <p:nvSpPr>
+          <p:cNvPr id="2" name="Rectangle 1"/>
+          <p:cNvSpPr/>
+          <p:nvPr/>
+        </p:nvSpPr>
+        <p:spPr>
+          <a:xfrm>
+            <a:off x="0" y="0"/>
+            <a:ext cx="12191695" cy="6858000"/>
+          </a:xfrm>
+          <a:prstGeom prst="rect">
+            <a:avLst/>
+          </a:prstGeom>
+          <a:solidFill>
+            <a:srgbClr val="F8F6F0"/>
+          </a:solidFill>
+          <a:ln>
+            <a:noFill/>
+          </a:ln>
+          <a:effectLst/>
+        </p:spPr>
+        <p:style>
+          <a:lnRef idx="1">
+            <a:schemeClr val="accent1"/>
+          </a:lnRef>
+          <a:fillRef idx="3">
+            <a:schemeClr val="accent1"/>
+          </a:fillRef>
+          <a:effectRef idx="2">
+            <a:schemeClr val="accent1"/>
+          </a:effectRef>
+          <a:fontRef idx="minor">
+            <a:schemeClr val="lt1"/>
+          </a:fontRef>
+        </p:style>
+        <p:txBody>
+          <a:bodyPr rtlCol="0" anchor="ctr"/>
+          <a:lstStyle/>
+          <a:p>
+            <a:pPr algn="ctr"/>
+          </a:p>
+        </p:txBody>
+      </p:sp>
+      <p:sp>
+        <p:nvSpPr>
+          <p:cNvPr id="3" name="Rounded Rectangle 2"/>
+          <p:cNvSpPr/>
+          <p:nvPr/>
+        </p:nvSpPr>
+        <p:spPr>
+          <a:xfrm>
+            <a:off x="9859975" y="365760"/>
+            <a:ext cx="1783080" cy="384048"/>
+          </a:xfrm>
+          <a:prstGeom prst="roundRect">
+            <a:avLst/>
+          </a:prstGeom>
+          <a:solidFill>
+            <a:srgbClr val="E69F00"/>
+          </a:solidFill>
+          <a:ln>
+            <a:noFill/>
+          </a:ln>
+          <a:effectLst/>
+        </p:spPr>
+        <p:style>
+          <a:lnRef idx="1">
+            <a:schemeClr val="accent1"/>
+          </a:lnRef>
+          <a:fillRef idx="3">
+            <a:schemeClr val="accent1"/>
+          </a:fillRef>
+          <a:effectRef idx="2">
+            <a:schemeClr val="accent1"/>
+          </a:effectRef>
+          <a:fontRef idx="minor">
+            <a:schemeClr val="lt1"/>
+          </a:fontRef>
+        </p:style>
+        <p:txBody>
+          <a:bodyPr rtlCol="0" anchor="ctr"/>
+          <a:lstStyle/>
+          <a:p>
+            <a:pPr algn="ctr"/>
+          </a:p>
+        </p:txBody>
+      </p:sp>
+      <p:sp>
+        <p:nvSpPr>
+          <p:cNvPr id="4" name="TextBox 3"/>
+          <p:cNvSpPr txBox="1"/>
+          <p:nvPr/>
+        </p:nvSpPr>
+        <p:spPr>
+          <a:xfrm>
+            <a:off x="9859975" y="365760"/>
+            <a:ext cx="1783080" cy="384048"/>
+          </a:xfrm>
+          <a:prstGeom prst="rect">
+            <a:avLst/>
+          </a:prstGeom>
+          <a:noFill/>
+        </p:spPr>
+        <p:txBody>
+          <a:bodyPr wrap="square" lIns="0" rIns="0" tIns="0" bIns="0" anchor="ctr">
+            <a:spAutoFit/>
+          </a:bodyPr>
+          <a:lstStyle/>
+          <a:p>
+            <a:pPr algn="ctr"/>
+            <a:r>
+              <a:rPr sz="1000" b="1" i="0">
+                <a:solidFill>
+                  <a:srgbClr val="14255C"/>
+                </a:solidFill>
+                <a:latin typeface="Calibri"/>
+              </a:rPr>
+              <a:t>PAPER 2  ·  EXPLORATORY</a:t>
+            </a:r>
+          </a:p>
+        </p:txBody>
+      </p:sp>
+      <p:sp>
+        <p:nvSpPr>
+          <p:cNvPr id="5" name="TextBox 4"/>
+          <p:cNvSpPr txBox="1"/>
+          <p:nvPr/>
+        </p:nvSpPr>
+        <p:spPr>
+          <a:xfrm>
+            <a:off x="548640" y="365760"/>
+            <a:ext cx="9144000" cy="548640"/>
+          </a:xfrm>
+          <a:prstGeom prst="rect">
+            <a:avLst/>
+          </a:prstGeom>
+          <a:noFill/>
+        </p:spPr>
+        <p:txBody>
+          <a:bodyPr wrap="square" lIns="0" rIns="0" tIns="0" bIns="0">
+            <a:spAutoFit/>
+          </a:bodyPr>
+          <a:lstStyle/>
+          <a:p>
+            <a:pPr algn="l"/>
+            <a:r>
+              <a:rPr sz="2200" b="1" i="0">
+                <a:solidFill>
+                  <a:srgbClr val="1E3A8A"/>
+                </a:solidFill>
+                <a:latin typeface="Calibri"/>
+              </a:rPr>
+              <a:t>v0 — memento bounds the prompt while baseline grows linearly</a:t>
+            </a:r>
+          </a:p>
+        </p:txBody>
+      </p:sp>
+      <p:sp>
+        <p:nvSpPr>
+          <p:cNvPr id="6" name="TextBox 5"/>
+          <p:cNvSpPr txBox="1"/>
+          <p:nvPr/>
+        </p:nvSpPr>
+        <p:spPr>
+          <a:xfrm>
+            <a:off x="548640" y="960120"/>
+            <a:ext cx="9144000" cy="365760"/>
+          </a:xfrm>
+          <a:prstGeom prst="rect">
+            <a:avLst/>
+          </a:prstGeom>
+          <a:noFill/>
+        </p:spPr>
+        <p:txBody>
+          <a:bodyPr wrap="square" lIns="0" rIns="0" tIns="0" bIns="0">
+            <a:spAutoFit/>
+          </a:bodyPr>
+          <a:lstStyle/>
+          <a:p>
+            <a:pPr algn="l"/>
+            <a:r>
+              <a:rPr sz="1300" b="0" i="1">
+                <a:solidFill>
+                  <a:srgbClr val="6B7280"/>
+                </a:solidFill>
+                <a:latin typeface="Calibri"/>
+              </a:rPr>
+              <a:t>vLLM 0.13.0 + Memento overlay + lazy policy. Real pytest-7490 agent loop. Both runs clean — no crashes.</a:t>
+            </a:r>
+          </a:p>
+        </p:txBody>
+      </p:sp>
+      <p:pic>
+        <p:nvPicPr>
+          <p:cNvPr id="7" name="Picture 6" descr="fig_memento_v0_per_step.png"/>
+          <p:cNvPicPr>
+            <a:picLocks noChangeAspect="1"/>
+          </p:cNvPicPr>
+          <p:nvPr/>
+        </p:nvPicPr>
+        <p:blipFill>
+          <a:blip r:embed="rId2"/>
+          <a:stretch>
+            <a:fillRect/>
+          </a:stretch>
+        </p:blipFill>
+        <p:spPr>
+          <a:xfrm>
+            <a:off x="548640" y="1710679"/>
+            <a:ext cx="7863840" cy="4076721"/>
+          </a:xfrm>
+          <a:prstGeom prst="rect">
+            <a:avLst/>
+          </a:prstGeom>
+        </p:spPr>
+      </p:pic>
+      <p:sp>
+        <p:nvSpPr>
+          <p:cNvPr id="8" name="Rectangle 7"/>
+          <p:cNvSpPr/>
+          <p:nvPr/>
+        </p:nvSpPr>
+        <p:spPr>
+          <a:xfrm>
+            <a:off x="8686800" y="1645920"/>
+            <a:ext cx="2926080" cy="1325880"/>
+          </a:xfrm>
+          <a:prstGeom prst="rect">
+            <a:avLst/>
+          </a:prstGeom>
+          <a:solidFill>
+            <a:srgbClr val="1E3A8A"/>
+          </a:solidFill>
+          <a:ln>
+            <a:noFill/>
+          </a:ln>
+          <a:effectLst/>
+        </p:spPr>
+        <p:style>
+          <a:lnRef idx="1">
+            <a:schemeClr val="accent1"/>
+          </a:lnRef>
+          <a:fillRef idx="3">
+            <a:schemeClr val="accent1"/>
+          </a:fillRef>
+          <a:effectRef idx="2">
+            <a:schemeClr val="accent1"/>
+          </a:effectRef>
+          <a:fontRef idx="minor">
+            <a:schemeClr val="lt1"/>
+          </a:fontRef>
+        </p:style>
+        <p:txBody>
+          <a:bodyPr rtlCol="0" anchor="ctr"/>
+          <a:lstStyle/>
+          <a:p>
+            <a:pPr algn="ctr"/>
+          </a:p>
+        </p:txBody>
+      </p:sp>
+      <p:sp>
+        <p:nvSpPr>
+          <p:cNvPr id="9" name="TextBox 8"/>
+          <p:cNvSpPr txBox="1"/>
+          <p:nvPr/>
+        </p:nvSpPr>
+        <p:spPr>
+          <a:xfrm>
+            <a:off x="8686800" y="1737360"/>
+            <a:ext cx="2926080" cy="640080"/>
+          </a:xfrm>
+          <a:prstGeom prst="rect">
+            <a:avLst/>
+          </a:prstGeom>
+          <a:noFill/>
+        </p:spPr>
+        <p:txBody>
+          <a:bodyPr wrap="square" lIns="0" rIns="0" tIns="0" bIns="0" anchor="ctr">
+            <a:spAutoFit/>
+          </a:bodyPr>
+          <a:lstStyle/>
+          <a:p>
+            <a:pPr algn="ctr"/>
+            <a:r>
+              <a:rPr sz="3200" b="1" i="0">
+                <a:solidFill>
+                  <a:srgbClr val="E69F00"/>
+                </a:solidFill>
+                <a:latin typeface="Calibri"/>
+              </a:rPr>
+              <a:t>-31%</a:t>
+            </a:r>
+          </a:p>
+        </p:txBody>
+      </p:sp>
+      <p:sp>
+        <p:nvSpPr>
+          <p:cNvPr id="10" name="TextBox 9"/>
+          <p:cNvSpPr txBox="1"/>
+          <p:nvPr/>
+        </p:nvSpPr>
+        <p:spPr>
+          <a:xfrm>
+            <a:off x="8778240" y="2423160"/>
+            <a:ext cx="2743200" cy="502920"/>
+          </a:xfrm>
+          <a:prstGeom prst="rect">
+            <a:avLst/>
+          </a:prstGeom>
+          <a:noFill/>
+        </p:spPr>
+        <p:txBody>
+          <a:bodyPr wrap="square" lIns="0" rIns="0" tIns="0" bIns="0">
+            <a:spAutoFit/>
+          </a:bodyPr>
+          <a:lstStyle/>
+          <a:p>
+            <a:pPr algn="ctr"/>
+            <a:r>
+              <a:rPr sz="1100" b="0" i="0">
+                <a:solidFill>
+                  <a:srgbClr val="E8ECF5"/>
+                </a:solidFill>
+                <a:latin typeface="Calibri"/>
+              </a:rPr>
+              <a:t>chat wall (13.3s vs 19.3s)</a:t>
+            </a:r>
+          </a:p>
+        </p:txBody>
+      </p:sp>
+      <p:sp>
+        <p:nvSpPr>
+          <p:cNvPr id="11" name="Rectangle 10"/>
+          <p:cNvSpPr/>
+          <p:nvPr/>
+        </p:nvSpPr>
+        <p:spPr>
+          <a:xfrm>
+            <a:off x="8686800" y="3154680"/>
+            <a:ext cx="2926080" cy="1325880"/>
+          </a:xfrm>
+          <a:prstGeom prst="rect">
+            <a:avLst/>
+          </a:prstGeom>
+          <a:solidFill>
+            <a:srgbClr val="1E3A8A"/>
+          </a:solidFill>
+          <a:ln>
+            <a:noFill/>
+          </a:ln>
+          <a:effectLst/>
+        </p:spPr>
+        <p:style>
+          <a:lnRef idx="1">
+            <a:schemeClr val="accent1"/>
+          </a:lnRef>
+          <a:fillRef idx="3">
+            <a:schemeClr val="accent1"/>
+          </a:fillRef>
+          <a:effectRef idx="2">
+            <a:schemeClr val="accent1"/>
+          </a:effectRef>
+          <a:fontRef idx="minor">
+            <a:schemeClr val="lt1"/>
+          </a:fontRef>
+        </p:style>
+        <p:txBody>
+          <a:bodyPr rtlCol="0" anchor="ctr"/>
+          <a:lstStyle/>
+          <a:p>
+            <a:pPr algn="ctr"/>
+          </a:p>
+        </p:txBody>
+      </p:sp>
+      <p:sp>
+        <p:nvSpPr>
+          <p:cNvPr id="12" name="TextBox 11"/>
+          <p:cNvSpPr txBox="1"/>
+          <p:nvPr/>
+        </p:nvSpPr>
+        <p:spPr>
+          <a:xfrm>
+            <a:off x="8686800" y="3246120"/>
+            <a:ext cx="2926080" cy="640080"/>
+          </a:xfrm>
+          <a:prstGeom prst="rect">
+            <a:avLst/>
+          </a:prstGeom>
+          <a:noFill/>
+        </p:spPr>
+        <p:txBody>
+          <a:bodyPr wrap="square" lIns="0" rIns="0" tIns="0" bIns="0" anchor="ctr">
+            <a:spAutoFit/>
+          </a:bodyPr>
+          <a:lstStyle/>
+          <a:p>
+            <a:pPr algn="ctr"/>
+            <a:r>
+              <a:rPr sz="3200" b="1" i="0">
+                <a:solidFill>
+                  <a:srgbClr val="E69F00"/>
+                </a:solidFill>
+                <a:latin typeface="Calibri"/>
+              </a:rPr>
+              <a:t>-66%</a:t>
+            </a:r>
+          </a:p>
+        </p:txBody>
+      </p:sp>
+      <p:sp>
+        <p:nvSpPr>
+          <p:cNvPr id="13" name="TextBox 12"/>
+          <p:cNvSpPr txBox="1"/>
+          <p:nvPr/>
+        </p:nvSpPr>
+        <p:spPr>
+          <a:xfrm>
+            <a:off x="8778240" y="3931920"/>
+            <a:ext cx="2743200" cy="502920"/>
+          </a:xfrm>
+          <a:prstGeom prst="rect">
+            <a:avLst/>
+          </a:prstGeom>
+          <a:noFill/>
+        </p:spPr>
+        <p:txBody>
+          <a:bodyPr wrap="square" lIns="0" rIns="0" tIns="0" bIns="0">
+            <a:spAutoFit/>
+          </a:bodyPr>
+          <a:lstStyle/>
+          <a:p>
+            <a:pPr algn="ctr"/>
+            <a:r>
+              <a:rPr sz="1100" b="0" i="0">
+                <a:solidFill>
+                  <a:srgbClr val="E8ECF5"/>
+                </a:solidFill>
+                <a:latin typeface="Calibri"/>
+              </a:rPr>
+              <a:t>final prompt (8K vs 23K)</a:t>
+            </a:r>
+          </a:p>
+        </p:txBody>
+      </p:sp>
+      <p:sp>
+        <p:nvSpPr>
+          <p:cNvPr id="14" name="Rectangle 13"/>
+          <p:cNvSpPr/>
+          <p:nvPr/>
+        </p:nvSpPr>
+        <p:spPr>
+          <a:xfrm>
+            <a:off x="8686800" y="4663440"/>
+            <a:ext cx="2926080" cy="1325880"/>
+          </a:xfrm>
+          <a:prstGeom prst="rect">
+            <a:avLst/>
+          </a:prstGeom>
+          <a:solidFill>
+            <a:srgbClr val="1E3A8A"/>
+          </a:solidFill>
+          <a:ln>
+            <a:noFill/>
+          </a:ln>
+          <a:effectLst/>
+        </p:spPr>
+        <p:style>
+          <a:lnRef idx="1">
+            <a:schemeClr val="accent1"/>
+          </a:lnRef>
+          <a:fillRef idx="3">
+            <a:schemeClr val="accent1"/>
+          </a:fillRef>
+          <a:effectRef idx="2">
+            <a:schemeClr val="accent1"/>
+          </a:effectRef>
+          <a:fontRef idx="minor">
+            <a:schemeClr val="lt1"/>
+          </a:fontRef>
+        </p:style>
+        <p:txBody>
+          <a:bodyPr rtlCol="0" anchor="ctr"/>
+          <a:lstStyle/>
+          <a:p>
+            <a:pPr algn="ctr"/>
+          </a:p>
+        </p:txBody>
+      </p:sp>
+      <p:sp>
+        <p:nvSpPr>
+          <p:cNvPr id="15" name="TextBox 14"/>
+          <p:cNvSpPr txBox="1"/>
+          <p:nvPr/>
+        </p:nvSpPr>
+        <p:spPr>
+          <a:xfrm>
+            <a:off x="8686800" y="4754879"/>
+            <a:ext cx="2926080" cy="640080"/>
+          </a:xfrm>
+          <a:prstGeom prst="rect">
+            <a:avLst/>
+          </a:prstGeom>
+          <a:noFill/>
+        </p:spPr>
+        <p:txBody>
+          <a:bodyPr wrap="square" lIns="0" rIns="0" tIns="0" bIns="0" anchor="ctr">
+            <a:spAutoFit/>
+          </a:bodyPr>
+          <a:lstStyle/>
+          <a:p>
+            <a:pPr algn="ctr"/>
+            <a:r>
+              <a:rPr sz="3200" b="1" i="0">
+                <a:solidFill>
+                  <a:srgbClr val="E69F00"/>
+                </a:solidFill>
+                <a:latin typeface="Calibri"/>
+              </a:rPr>
+              <a:t>5</a:t>
+            </a:r>
+          </a:p>
+        </p:txBody>
+      </p:sp>
+      <p:sp>
+        <p:nvSpPr>
+          <p:cNvPr id="16" name="TextBox 15"/>
+          <p:cNvSpPr txBox="1"/>
+          <p:nvPr/>
+        </p:nvSpPr>
+        <p:spPr>
+          <a:xfrm>
+            <a:off x="8778240" y="5440679"/>
+            <a:ext cx="2743200" cy="502920"/>
+          </a:xfrm>
+          <a:prstGeom prst="rect">
+            <a:avLst/>
+          </a:prstGeom>
+          <a:noFill/>
+        </p:spPr>
+        <p:txBody>
+          <a:bodyPr wrap="square" lIns="0" rIns="0" tIns="0" bIns="0">
+            <a:spAutoFit/>
+          </a:bodyPr>
+          <a:lstStyle/>
+          <a:p>
+            <a:pPr algn="ctr"/>
+            <a:r>
+              <a:rPr sz="1100" b="0" i="0">
+                <a:solidFill>
+                  <a:srgbClr val="E8ECF5"/>
+                </a:solidFill>
+                <a:latin typeface="Calibri"/>
+              </a:rPr>
+              <a:t>compactions fired (lazy policy)</a:t>
+            </a:r>
+          </a:p>
+        </p:txBody>
+      </p:sp>
+      <p:sp>
+        <p:nvSpPr>
+          <p:cNvPr id="17" name="TextBox 16"/>
+          <p:cNvSpPr txBox="1"/>
+          <p:nvPr/>
+        </p:nvSpPr>
+        <p:spPr>
+          <a:xfrm>
+            <a:off x="457200" y="6492240"/>
+            <a:ext cx="7315200" cy="274320"/>
+          </a:xfrm>
+          <a:prstGeom prst="rect">
+            <a:avLst/>
+          </a:prstGeom>
+          <a:noFill/>
+        </p:spPr>
+        <p:txBody>
+          <a:bodyPr wrap="square" lIns="0" rIns="0" tIns="0" bIns="0">
+            <a:spAutoFit/>
+          </a:bodyPr>
+          <a:lstStyle/>
+          <a:p>
+            <a:pPr algn="l"/>
+            <a:r>
+              <a:rPr sz="1000" b="0" i="0">
+                <a:solidFill>
+                  <a:srgbClr val="6B7280"/>
+                </a:solidFill>
+                <a:latin typeface="Calibri"/>
+              </a:rPr>
+              <a:t>AdaptiveCache · Vlad Cainamisir · Harvard</a:t>
+            </a:r>
+          </a:p>
+        </p:txBody>
+      </p:sp>
+      <p:sp>
+        <p:nvSpPr>
+          <p:cNvPr id="18" name="TextBox 17"/>
+          <p:cNvSpPr txBox="1"/>
+          <p:nvPr/>
+        </p:nvSpPr>
+        <p:spPr>
+          <a:xfrm>
+            <a:off x="8534095" y="6492240"/>
+            <a:ext cx="3200400" cy="274320"/>
+          </a:xfrm>
+          <a:prstGeom prst="rect">
+            <a:avLst/>
+          </a:prstGeom>
+          <a:noFill/>
+        </p:spPr>
+        <p:txBody>
+          <a:bodyPr wrap="square" lIns="0" rIns="0" tIns="0" bIns="0">
+            <a:spAutoFit/>
+          </a:bodyPr>
+          <a:lstStyle/>
+          <a:p>
+            <a:pPr algn="r"/>
+            <a:r>
+              <a:rPr sz="1000" b="0" i="0">
+                <a:solidFill>
+                  <a:srgbClr val="6B7280"/>
+                </a:solidFill>
+                <a:latin typeface="Calibri"/>
+              </a:rPr>
+              <a:t>25 / 28</a:t>
+            </a:r>
+          </a:p>
+        </p:txBody>
+      </p:sp>
+    </p:spTree>
+  </p:cSld>
+  <p:clrMapOvr>
+    <a:masterClrMapping/>
+  </p:clrMapOvr>
+</p:sld>
+</file>
+
+<file path=ppt/slides/slide26.xml><?xml version="1.0" encoding="utf-8"?>
+<p:sld xmlns:a="http://schemas.openxmlformats.org/drawingml/2006/main" xmlns:p="http://schemas.openxmlformats.org/presentationml/2006/main" xmlns:r="http://schemas.openxmlformats.org/officeDocument/2006/relationships">
+  <p:cSld>
+    <p:spTree>
+      <p:nvGrpSpPr>
+        <p:cNvPr id="1" name=""/>
+        <p:cNvGrpSpPr/>
+        <p:nvPr/>
+      </p:nvGrpSpPr>
+      <p:grpSpPr/>
+      <p:sp>
+        <p:nvSpPr>
+          <p:cNvPr id="2" name="Rectangle 1"/>
+          <p:cNvSpPr/>
+          <p:nvPr/>
+        </p:nvSpPr>
+        <p:spPr>
+          <a:xfrm>
+            <a:off x="0" y="0"/>
+            <a:ext cx="12191695" cy="6858000"/>
+          </a:xfrm>
+          <a:prstGeom prst="rect">
+            <a:avLst/>
+          </a:prstGeom>
+          <a:solidFill>
+            <a:srgbClr val="F8F6F0"/>
+          </a:solidFill>
+          <a:ln>
+            <a:noFill/>
+          </a:ln>
+          <a:effectLst/>
+        </p:spPr>
+        <p:style>
+          <a:lnRef idx="1">
+            <a:schemeClr val="accent1"/>
+          </a:lnRef>
+          <a:fillRef idx="3">
+            <a:schemeClr val="accent1"/>
+          </a:fillRef>
+          <a:effectRef idx="2">
+            <a:schemeClr val="accent1"/>
+          </a:effectRef>
+          <a:fontRef idx="minor">
+            <a:schemeClr val="lt1"/>
+          </a:fontRef>
+        </p:style>
+        <p:txBody>
+          <a:bodyPr rtlCol="0" anchor="ctr"/>
+          <a:lstStyle/>
+          <a:p>
+            <a:pPr algn="ctr"/>
+          </a:p>
+        </p:txBody>
+      </p:sp>
+      <p:sp>
+        <p:nvSpPr>
+          <p:cNvPr id="3" name="Rounded Rectangle 2"/>
+          <p:cNvSpPr/>
+          <p:nvPr/>
+        </p:nvSpPr>
+        <p:spPr>
+          <a:xfrm>
+            <a:off x="9859975" y="365760"/>
+            <a:ext cx="1783080" cy="384048"/>
+          </a:xfrm>
+          <a:prstGeom prst="roundRect">
+            <a:avLst/>
+          </a:prstGeom>
+          <a:solidFill>
+            <a:srgbClr val="E69F00"/>
+          </a:solidFill>
+          <a:ln>
+            <a:noFill/>
+          </a:ln>
+          <a:effectLst/>
+        </p:spPr>
+        <p:style>
+          <a:lnRef idx="1">
+            <a:schemeClr val="accent1"/>
+          </a:lnRef>
+          <a:fillRef idx="3">
+            <a:schemeClr val="accent1"/>
+          </a:fillRef>
+          <a:effectRef idx="2">
+            <a:schemeClr val="accent1"/>
+          </a:effectRef>
+          <a:fontRef idx="minor">
+            <a:schemeClr val="lt1"/>
+          </a:fontRef>
+        </p:style>
+        <p:txBody>
+          <a:bodyPr rtlCol="0" anchor="ctr"/>
+          <a:lstStyle/>
+          <a:p>
+            <a:pPr algn="ctr"/>
+          </a:p>
+        </p:txBody>
+      </p:sp>
+      <p:sp>
+        <p:nvSpPr>
+          <p:cNvPr id="4" name="TextBox 3"/>
+          <p:cNvSpPr txBox="1"/>
+          <p:nvPr/>
+        </p:nvSpPr>
+        <p:spPr>
+          <a:xfrm>
+            <a:off x="9859975" y="365760"/>
+            <a:ext cx="1783080" cy="384048"/>
+          </a:xfrm>
+          <a:prstGeom prst="rect">
+            <a:avLst/>
+          </a:prstGeom>
+          <a:noFill/>
+        </p:spPr>
+        <p:txBody>
+          <a:bodyPr wrap="square" lIns="0" rIns="0" tIns="0" bIns="0" anchor="ctr">
+            <a:spAutoFit/>
+          </a:bodyPr>
+          <a:lstStyle/>
+          <a:p>
+            <a:pPr algn="ctr"/>
+            <a:r>
+              <a:rPr sz="1000" b="1" i="0">
+                <a:solidFill>
+                  <a:srgbClr val="14255C"/>
+                </a:solidFill>
+                <a:latin typeface="Calibri"/>
+              </a:rPr>
+              <a:t>PAPER 2  ·  EXPLORATORY</a:t>
+            </a:r>
+          </a:p>
+        </p:txBody>
+      </p:sp>
+      <p:sp>
+        <p:nvSpPr>
+          <p:cNvPr id="5" name="TextBox 4"/>
+          <p:cNvSpPr txBox="1"/>
+          <p:nvPr/>
+        </p:nvSpPr>
+        <p:spPr>
+          <a:xfrm>
+            <a:off x="548640" y="365760"/>
+            <a:ext cx="9144000" cy="548640"/>
+          </a:xfrm>
+          <a:prstGeom prst="rect">
+            <a:avLst/>
+          </a:prstGeom>
+          <a:noFill/>
+        </p:spPr>
+        <p:txBody>
+          <a:bodyPr wrap="square" lIns="0" rIns="0" tIns="0" bIns="0">
+            <a:spAutoFit/>
+          </a:bodyPr>
+          <a:lstStyle/>
+          <a:p>
+            <a:pPr algn="l"/>
+            <a:r>
+              <a:rPr sz="2200" b="1" i="0">
+                <a:solidFill>
+                  <a:srgbClr val="1E3A8A"/>
+                </a:solidFill>
+                <a:latin typeface="Calibri"/>
+              </a:rPr>
+              <a:t>v1 — three recall triggers, head-to-head</a:t>
+            </a:r>
+          </a:p>
+        </p:txBody>
+      </p:sp>
+      <p:sp>
+        <p:nvSpPr>
+          <p:cNvPr id="6" name="TextBox 5"/>
+          <p:cNvSpPr txBox="1"/>
+          <p:nvPr/>
+        </p:nvSpPr>
+        <p:spPr>
+          <a:xfrm>
+            <a:off x="548640" y="960120"/>
+            <a:ext cx="9144000" cy="365760"/>
+          </a:xfrm>
+          <a:prstGeom prst="rect">
+            <a:avLst/>
+          </a:prstGeom>
+          <a:noFill/>
+        </p:spPr>
+        <p:txBody>
+          <a:bodyPr wrap="square" lIns="0" rIns="0" tIns="0" bIns="0">
+            <a:spAutoFit/>
+          </a:bodyPr>
+          <a:lstStyle/>
+          <a:p>
+            <a:pPr algn="l"/>
+            <a:r>
+              <a:rPr sz="1300" b="0" i="1">
+                <a:solidFill>
+                  <a:srgbClr val="6B7280"/>
+                </a:solidFill>
+                <a:latin typeface="Calibri"/>
+              </a:rPr>
+              <a:t>N=3 seeds · T=0.6 · pytest-dev/pytest-7490 · LRU and embedding both fire correctly. Wall time drops ~40% under either.</a:t>
+            </a:r>
+          </a:p>
+        </p:txBody>
+      </p:sp>
+      <p:pic>
+        <p:nvPicPr>
+          <p:cNvPr id="7" name="Picture 6" descr="fig_memento_multi_seed.png"/>
+          <p:cNvPicPr>
+            <a:picLocks noChangeAspect="1"/>
+          </p:cNvPicPr>
+          <p:nvPr/>
+        </p:nvPicPr>
+        <p:blipFill>
+          <a:blip r:embed="rId2"/>
+          <a:stretch>
+            <a:fillRect/>
+          </a:stretch>
+        </p:blipFill>
+        <p:spPr>
+          <a:xfrm>
+            <a:off x="920270" y="1417320"/>
+            <a:ext cx="10348410" cy="3200400"/>
+          </a:xfrm>
+          <a:prstGeom prst="rect">
+            <a:avLst/>
+          </a:prstGeom>
+        </p:spPr>
+      </p:pic>
+      <p:sp>
+        <p:nvSpPr>
+          <p:cNvPr id="8" name="TextBox 7"/>
+          <p:cNvSpPr txBox="1"/>
+          <p:nvPr/>
+        </p:nvSpPr>
+        <p:spPr>
+          <a:xfrm>
+            <a:off x="548640" y="4846320"/>
+            <a:ext cx="11091672" cy="365760"/>
+          </a:xfrm>
+          <a:prstGeom prst="rect">
+            <a:avLst/>
+          </a:prstGeom>
+          <a:noFill/>
+        </p:spPr>
+        <p:txBody>
+          <a:bodyPr wrap="square" lIns="0" rIns="0" tIns="0" bIns="0">
+            <a:spAutoFit/>
+          </a:bodyPr>
+          <a:lstStyle/>
+          <a:p>
+            <a:pPr algn="l"/>
+            <a:r>
+              <a:rPr sz="1300" b="1" i="0">
+                <a:solidFill>
+                  <a:srgbClr val="1E3A8A"/>
+                </a:solidFill>
+                <a:latin typeface="Calibri"/>
+              </a:rPr>
+              <a:t>What's working:</a:t>
+            </a:r>
+          </a:p>
+        </p:txBody>
+      </p:sp>
+      <p:sp>
+        <p:nvSpPr>
+          <p:cNvPr id="9" name="TextBox 8"/>
+          <p:cNvSpPr txBox="1"/>
+          <p:nvPr/>
+        </p:nvSpPr>
+        <p:spPr>
+          <a:xfrm>
+            <a:off x="777240" y="5212080"/>
+            <a:ext cx="10972800" cy="365760"/>
+          </a:xfrm>
+          <a:prstGeom prst="rect">
+            <a:avLst/>
+          </a:prstGeom>
+          <a:noFill/>
+        </p:spPr>
+        <p:txBody>
+          <a:bodyPr wrap="square" lIns="0" rIns="0" tIns="0" bIns="0">
+            <a:spAutoFit/>
+          </a:bodyPr>
+          <a:lstStyle/>
+          <a:p>
+            <a:pPr algn="l"/>
+            <a:r>
+              <a:rPr sz="1200" b="0" i="0">
+                <a:solidFill>
+                  <a:srgbClr val="1F2937"/>
+                </a:solidFill>
+                <a:latin typeface="Calibri"/>
+              </a:rPr>
+              <a:t>·   Plumbing fires correctly: LRU 2.0 recalls/run; embedding model loads + scores in real time.</a:t>
+            </a:r>
+          </a:p>
+        </p:txBody>
+      </p:sp>
+      <p:sp>
+        <p:nvSpPr>
+          <p:cNvPr id="10" name="TextBox 9"/>
+          <p:cNvSpPr txBox="1"/>
+          <p:nvPr/>
+        </p:nvSpPr>
+        <p:spPr>
+          <a:xfrm>
+            <a:off x="777240" y="5577840"/>
+            <a:ext cx="10972800" cy="365760"/>
+          </a:xfrm>
+          <a:prstGeom prst="rect">
+            <a:avLst/>
+          </a:prstGeom>
+          <a:noFill/>
+        </p:spPr>
+        <p:txBody>
+          <a:bodyPr wrap="square" lIns="0" rIns="0" tIns="0" bIns="0">
+            <a:spAutoFit/>
+          </a:bodyPr>
+          <a:lstStyle/>
+          <a:p>
+            <a:pPr algn="l"/>
+            <a:r>
+              <a:rPr sz="1200" b="0" i="0">
+                <a:solidFill>
+                  <a:srgbClr val="1F2937"/>
+                </a:solidFill>
+                <a:latin typeface="Calibri"/>
+              </a:rPr>
+              <a:t>·   Wall-time and read-count benefit replicates across seeds (~40% faster than no-recall).</a:t>
+            </a:r>
+          </a:p>
+        </p:txBody>
+      </p:sp>
+      <p:sp>
+        <p:nvSpPr>
+          <p:cNvPr id="11" name="TextBox 10"/>
+          <p:cNvSpPr txBox="1"/>
+          <p:nvPr/>
+        </p:nvSpPr>
+        <p:spPr>
+          <a:xfrm>
+            <a:off x="777240" y="5943600"/>
+            <a:ext cx="10972800" cy="365760"/>
+          </a:xfrm>
+          <a:prstGeom prst="rect">
+            <a:avLst/>
+          </a:prstGeom>
+          <a:noFill/>
+        </p:spPr>
+        <p:txBody>
+          <a:bodyPr wrap="square" lIns="0" rIns="0" tIns="0" bIns="0">
+            <a:spAutoFit/>
+          </a:bodyPr>
+          <a:lstStyle/>
+          <a:p>
+            <a:pPr algn="l"/>
+            <a:r>
+              <a:rPr sz="1200" b="0" i="0">
+                <a:solidFill>
+                  <a:srgbClr val="1F2937"/>
+                </a:solidFill>
+                <a:latin typeface="Calibri"/>
+              </a:rPr>
+              <a:t>·   The T=0 single-seed “embedding wins” was noise — multi-seed flips it: LRU narrowly best on this task.</a:t>
+            </a:r>
+          </a:p>
+        </p:txBody>
+      </p:sp>
+      <p:sp>
+        <p:nvSpPr>
+          <p:cNvPr id="12" name="TextBox 11"/>
+          <p:cNvSpPr txBox="1"/>
+          <p:nvPr/>
+        </p:nvSpPr>
+        <p:spPr>
+          <a:xfrm>
+            <a:off x="457200" y="6492240"/>
+            <a:ext cx="7315200" cy="274320"/>
+          </a:xfrm>
+          <a:prstGeom prst="rect">
+            <a:avLst/>
+          </a:prstGeom>
+          <a:noFill/>
+        </p:spPr>
+        <p:txBody>
+          <a:bodyPr wrap="square" lIns="0" rIns="0" tIns="0" bIns="0">
+            <a:spAutoFit/>
+          </a:bodyPr>
+          <a:lstStyle/>
+          <a:p>
+            <a:pPr algn="l"/>
+            <a:r>
+              <a:rPr sz="1000" b="0" i="0">
+                <a:solidFill>
+                  <a:srgbClr val="6B7280"/>
+                </a:solidFill>
+                <a:latin typeface="Calibri"/>
+              </a:rPr>
+              <a:t>AdaptiveCache · Vlad Cainamisir · Harvard</a:t>
+            </a:r>
+          </a:p>
+        </p:txBody>
+      </p:sp>
+      <p:sp>
+        <p:nvSpPr>
+          <p:cNvPr id="13" name="TextBox 12"/>
+          <p:cNvSpPr txBox="1"/>
+          <p:nvPr/>
+        </p:nvSpPr>
+        <p:spPr>
+          <a:xfrm>
+            <a:off x="8534095" y="6492240"/>
+            <a:ext cx="3200400" cy="274320"/>
+          </a:xfrm>
+          <a:prstGeom prst="rect">
+            <a:avLst/>
+          </a:prstGeom>
+          <a:noFill/>
+        </p:spPr>
+        <p:txBody>
+          <a:bodyPr wrap="square" lIns="0" rIns="0" tIns="0" bIns="0">
+            <a:spAutoFit/>
+          </a:bodyPr>
+          <a:lstStyle/>
+          <a:p>
+            <a:pPr algn="r"/>
+            <a:r>
+              <a:rPr sz="1000" b="0" i="0">
+                <a:solidFill>
+                  <a:srgbClr val="6B7280"/>
+                </a:solidFill>
+                <a:latin typeface="Calibri"/>
+              </a:rPr>
+              <a:t>26 / 28</a:t>
+            </a:r>
+          </a:p>
+        </p:txBody>
+      </p:sp>
+    </p:spTree>
+  </p:cSld>
+  <p:clrMapOvr>
+    <a:masterClrMapping/>
+  </p:clrMapOvr>
+</p:sld>
+</file>
+
+<file path=ppt/slides/slide27.xml><?xml version="1.0" encoding="utf-8"?>
+<p:sld xmlns:a="http://schemas.openxmlformats.org/drawingml/2006/main" xmlns:p="http://schemas.openxmlformats.org/presentationml/2006/main" xmlns:r="http://schemas.openxmlformats.org/officeDocument/2006/relationships">
+  <p:cSld>
+    <p:spTree>
+      <p:nvGrpSpPr>
+        <p:cNvPr id="1" name=""/>
+        <p:cNvGrpSpPr/>
+        <p:nvPr/>
+      </p:nvGrpSpPr>
+      <p:grpSpPr/>
+      <p:sp>
+        <p:nvSpPr>
+          <p:cNvPr id="2" name="Rectangle 1"/>
+          <p:cNvSpPr/>
+          <p:nvPr/>
+        </p:nvSpPr>
+        <p:spPr>
+          <a:xfrm>
+            <a:off x="0" y="0"/>
+            <a:ext cx="12191695" cy="6858000"/>
+          </a:xfrm>
+          <a:prstGeom prst="rect">
+            <a:avLst/>
+          </a:prstGeom>
+          <a:solidFill>
+            <a:srgbClr val="F8F6F0"/>
+          </a:solidFill>
+          <a:ln>
+            <a:noFill/>
+          </a:ln>
+          <a:effectLst/>
+        </p:spPr>
+        <p:style>
+          <a:lnRef idx="1">
+            <a:schemeClr val="accent1"/>
+          </a:lnRef>
+          <a:fillRef idx="3">
+            <a:schemeClr val="accent1"/>
+          </a:fillRef>
+          <a:effectRef idx="2">
+            <a:schemeClr val="accent1"/>
+          </a:effectRef>
+          <a:fontRef idx="minor">
+            <a:schemeClr val="lt1"/>
+          </a:fontRef>
+        </p:style>
+        <p:txBody>
+          <a:bodyPr rtlCol="0" anchor="ctr"/>
+          <a:lstStyle/>
+          <a:p>
+            <a:pPr algn="ctr"/>
+          </a:p>
+        </p:txBody>
+      </p:sp>
+      <p:sp>
+        <p:nvSpPr>
+          <p:cNvPr id="3" name="Rounded Rectangle 2"/>
+          <p:cNvSpPr/>
+          <p:nvPr/>
+        </p:nvSpPr>
+        <p:spPr>
+          <a:xfrm>
+            <a:off x="9859975" y="365760"/>
+            <a:ext cx="1783080" cy="384048"/>
+          </a:xfrm>
+          <a:prstGeom prst="roundRect">
+            <a:avLst/>
+          </a:prstGeom>
+          <a:solidFill>
+            <a:srgbClr val="E69F00"/>
+          </a:solidFill>
+          <a:ln>
+            <a:noFill/>
+          </a:ln>
+          <a:effectLst/>
+        </p:spPr>
+        <p:style>
+          <a:lnRef idx="1">
+            <a:schemeClr val="accent1"/>
+          </a:lnRef>
+          <a:fillRef idx="3">
+            <a:schemeClr val="accent1"/>
+          </a:fillRef>
+          <a:effectRef idx="2">
+            <a:schemeClr val="accent1"/>
+          </a:effectRef>
+          <a:fontRef idx="minor">
+            <a:schemeClr val="lt1"/>
+          </a:fontRef>
+        </p:style>
+        <p:txBody>
+          <a:bodyPr rtlCol="0" anchor="ctr"/>
+          <a:lstStyle/>
+          <a:p>
+            <a:pPr algn="ctr"/>
+          </a:p>
+        </p:txBody>
+      </p:sp>
+      <p:sp>
+        <p:nvSpPr>
+          <p:cNvPr id="4" name="TextBox 3"/>
+          <p:cNvSpPr txBox="1"/>
+          <p:nvPr/>
+        </p:nvSpPr>
+        <p:spPr>
+          <a:xfrm>
+            <a:off x="9859975" y="365760"/>
+            <a:ext cx="1783080" cy="384048"/>
+          </a:xfrm>
+          <a:prstGeom prst="rect">
+            <a:avLst/>
+          </a:prstGeom>
+          <a:noFill/>
+        </p:spPr>
+        <p:txBody>
+          <a:bodyPr wrap="square" lIns="0" rIns="0" tIns="0" bIns="0" anchor="ctr">
+            <a:spAutoFit/>
+          </a:bodyPr>
+          <a:lstStyle/>
+          <a:p>
+            <a:pPr algn="ctr"/>
+            <a:r>
+              <a:rPr sz="1000" b="1" i="0">
+                <a:solidFill>
+                  <a:srgbClr val="14255C"/>
+                </a:solidFill>
+                <a:latin typeface="Calibri"/>
+              </a:rPr>
+              <a:t>PAPER 2  ·  EXPLORATORY</a:t>
+            </a:r>
+          </a:p>
+        </p:txBody>
+      </p:sp>
+      <p:sp>
+        <p:nvSpPr>
+          <p:cNvPr id="5" name="TextBox 4"/>
+          <p:cNvSpPr txBox="1"/>
+          <p:nvPr/>
+        </p:nvSpPr>
+        <p:spPr>
+          <a:xfrm>
+            <a:off x="548640" y="365760"/>
+            <a:ext cx="9144000" cy="548640"/>
+          </a:xfrm>
+          <a:prstGeom prst="rect">
+            <a:avLst/>
+          </a:prstGeom>
+          <a:noFill/>
+        </p:spPr>
+        <p:txBody>
+          <a:bodyPr wrap="square" lIns="0" rIns="0" tIns="0" bIns="0">
+            <a:spAutoFit/>
+          </a:bodyPr>
+          <a:lstStyle/>
+          <a:p>
+            <a:pPr algn="l"/>
+            <a:r>
+              <a:rPr sz="2200" b="1" i="0">
+                <a:solidFill>
+                  <a:srgbClr val="1E3A8A"/>
+                </a:solidFill>
+                <a:latin typeface="Calibri"/>
+              </a:rPr>
+              <a:t>v1 vs v2 — keep the KV, flip the mask, keep going</a:t>
+            </a:r>
+          </a:p>
+        </p:txBody>
+      </p:sp>
+      <p:sp>
+        <p:nvSpPr>
+          <p:cNvPr id="6" name="TextBox 5"/>
+          <p:cNvSpPr txBox="1"/>
+          <p:nvPr/>
+        </p:nvSpPr>
+        <p:spPr>
+          <a:xfrm>
+            <a:off x="548640" y="914400"/>
+            <a:ext cx="9144000" cy="365760"/>
+          </a:xfrm>
+          <a:prstGeom prst="rect">
+            <a:avLst/>
+          </a:prstGeom>
+          <a:noFill/>
+        </p:spPr>
+        <p:txBody>
+          <a:bodyPr wrap="square" lIns="0" rIns="0" tIns="0" bIns="0">
+            <a:spAutoFit/>
+          </a:bodyPr>
+          <a:lstStyle/>
+          <a:p>
+            <a:pPr algn="l"/>
+            <a:r>
+              <a:rPr sz="1200" b="0" i="1">
+                <a:solidFill>
+                  <a:srgbClr val="6B7280"/>
+                </a:solidFill>
+                <a:latin typeface="Calibri"/>
+              </a:rPr>
+              <a:t>v1 today: re-prefill from the obs.  v2 target: obs KV from offload, suffix KV stays as historical truth, mask flipped — generation just continues.</a:t>
+            </a:r>
+          </a:p>
+        </p:txBody>
+      </p:sp>
+      <p:pic>
+        <p:nvPicPr>
+          <p:cNvPr id="7" name="Picture 6" descr="fig_memento_v1_vs_v2.png"/>
+          <p:cNvPicPr>
+            <a:picLocks noChangeAspect="1"/>
+          </p:cNvPicPr>
+          <p:nvPr/>
+        </p:nvPicPr>
+        <p:blipFill>
+          <a:blip r:embed="rId2"/>
+          <a:stretch>
+            <a:fillRect/>
+          </a:stretch>
+        </p:blipFill>
+        <p:spPr>
+          <a:xfrm>
+            <a:off x="1833513" y="1417320"/>
+            <a:ext cx="8521925" cy="4297680"/>
+          </a:xfrm>
+          <a:prstGeom prst="rect">
+            <a:avLst/>
+          </a:prstGeom>
+        </p:spPr>
+      </p:pic>
+      <p:sp>
+        <p:nvSpPr>
+          <p:cNvPr id="8" name="Rectangle 7"/>
+          <p:cNvSpPr/>
+          <p:nvPr/>
+        </p:nvSpPr>
+        <p:spPr>
+          <a:xfrm>
+            <a:off x="548640" y="5760720"/>
+            <a:ext cx="5440680" cy="685800"/>
+          </a:xfrm>
+          <a:prstGeom prst="rect">
+            <a:avLst/>
+          </a:prstGeom>
+          <a:solidFill>
+            <a:srgbClr val="FFFFFF"/>
+          </a:solidFill>
+          <a:ln w="15240">
+            <a:solidFill>
+              <a:srgbClr val="1E3A8A"/>
+            </a:solidFill>
+          </a:ln>
+          <a:effectLst/>
+        </p:spPr>
+        <p:style>
+          <a:lnRef idx="1">
+            <a:schemeClr val="accent1"/>
+          </a:lnRef>
+          <a:fillRef idx="3">
+            <a:schemeClr val="accent1"/>
+          </a:fillRef>
+          <a:effectRef idx="2">
+            <a:schemeClr val="accent1"/>
+          </a:effectRef>
+          <a:fontRef idx="minor">
+            <a:schemeClr val="lt1"/>
+          </a:fontRef>
+        </p:style>
+        <p:txBody>
+          <a:bodyPr rtlCol="0" anchor="ctr"/>
+          <a:lstStyle/>
+          <a:p>
+            <a:pPr algn="ctr"/>
+          </a:p>
+        </p:txBody>
+      </p:sp>
+      <p:sp>
+        <p:nvSpPr>
+          <p:cNvPr id="9" name="Rectangle 8"/>
+          <p:cNvSpPr/>
+          <p:nvPr/>
+        </p:nvSpPr>
+        <p:spPr>
+          <a:xfrm>
+            <a:off x="548640" y="5760720"/>
+            <a:ext cx="320040" cy="685800"/>
+          </a:xfrm>
+          <a:prstGeom prst="rect">
+            <a:avLst/>
+          </a:prstGeom>
+          <a:solidFill>
+            <a:srgbClr val="E69F00"/>
+          </a:solidFill>
+          <a:ln>
+            <a:noFill/>
+          </a:ln>
+          <a:effectLst/>
+        </p:spPr>
+        <p:style>
+          <a:lnRef idx="1">
+            <a:schemeClr val="accent1"/>
+          </a:lnRef>
+          <a:fillRef idx="3">
+            <a:schemeClr val="accent1"/>
+          </a:fillRef>
+          <a:effectRef idx="2">
+            <a:schemeClr val="accent1"/>
+          </a:effectRef>
+          <a:fontRef idx="minor">
+            <a:schemeClr val="lt1"/>
+          </a:fontRef>
+        </p:style>
+        <p:txBody>
+          <a:bodyPr rtlCol="0" anchor="ctr"/>
+          <a:lstStyle/>
+          <a:p>
+            <a:pPr algn="ctr"/>
+          </a:p>
+        </p:txBody>
+      </p:sp>
+      <p:sp>
+        <p:nvSpPr>
+          <p:cNvPr id="10" name="TextBox 9"/>
+          <p:cNvSpPr txBox="1"/>
+          <p:nvPr/>
+        </p:nvSpPr>
+        <p:spPr>
+          <a:xfrm>
+            <a:off x="1005840" y="5806440"/>
+            <a:ext cx="4892040" cy="274320"/>
+          </a:xfrm>
+          <a:prstGeom prst="rect">
+            <a:avLst/>
+          </a:prstGeom>
+          <a:noFill/>
+        </p:spPr>
+        <p:txBody>
+          <a:bodyPr wrap="square" lIns="0" rIns="0" tIns="0" bIns="0">
+            <a:spAutoFit/>
+          </a:bodyPr>
+          <a:lstStyle/>
+          <a:p>
+            <a:pPr algn="l"/>
+            <a:r>
+              <a:rPr sz="1200" b="1" i="0">
+                <a:solidFill>
+                  <a:srgbClr val="1E3A8A"/>
+                </a:solidFill>
+                <a:latin typeface="Calibri"/>
+              </a:rPr>
+              <a:t>v1 (today):  re-prefill from the obs onward.</a:t>
+            </a:r>
+          </a:p>
+        </p:txBody>
+      </p:sp>
+      <p:sp>
+        <p:nvSpPr>
+          <p:cNvPr id="11" name="TextBox 10"/>
+          <p:cNvSpPr txBox="1"/>
+          <p:nvPr/>
+        </p:nvSpPr>
+        <p:spPr>
+          <a:xfrm>
+            <a:off x="1005840" y="6108192"/>
+            <a:ext cx="4892040" cy="292608"/>
+          </a:xfrm>
+          <a:prstGeom prst="rect">
+            <a:avLst/>
+          </a:prstGeom>
+          <a:noFill/>
+        </p:spPr>
+        <p:txBody>
+          <a:bodyPr wrap="square" lIns="0" rIns="0" tIns="0" bIns="0">
+            <a:spAutoFit/>
+          </a:bodyPr>
+          <a:lstStyle/>
+          <a:p>
+            <a:pPr algn="l"/>
+            <a:r>
+              <a:rPr sz="1050" b="0" i="1">
+                <a:solidFill>
+                  <a:srgbClr val="1F2937"/>
+                </a:solidFill>
+                <a:latin typeface="Calibri"/>
+              </a:rPr>
+              <a:t>Cost = obs_len + suffix_len.  Bounded prompt size still wins — wall ↓ ~40% over no-recall.</a:t>
+            </a:r>
+          </a:p>
+        </p:txBody>
+      </p:sp>
+      <p:sp>
+        <p:nvSpPr>
+          <p:cNvPr id="12" name="Rectangle 11"/>
+          <p:cNvSpPr/>
+          <p:nvPr/>
+        </p:nvSpPr>
+        <p:spPr>
+          <a:xfrm>
+            <a:off x="6217920" y="5760720"/>
+            <a:ext cx="5440680" cy="685800"/>
+          </a:xfrm>
+          <a:prstGeom prst="rect">
+            <a:avLst/>
+          </a:prstGeom>
+          <a:solidFill>
+            <a:srgbClr val="FFFFFF"/>
+          </a:solidFill>
+          <a:ln w="15240">
+            <a:solidFill>
+              <a:srgbClr val="1E3A8A"/>
+            </a:solidFill>
+          </a:ln>
+          <a:effectLst/>
+        </p:spPr>
+        <p:style>
+          <a:lnRef idx="1">
+            <a:schemeClr val="accent1"/>
+          </a:lnRef>
+          <a:fillRef idx="3">
+            <a:schemeClr val="accent1"/>
+          </a:fillRef>
+          <a:effectRef idx="2">
+            <a:schemeClr val="accent1"/>
+          </a:effectRef>
+          <a:fontRef idx="minor">
+            <a:schemeClr val="lt1"/>
+          </a:fontRef>
+        </p:style>
+        <p:txBody>
+          <a:bodyPr rtlCol="0" anchor="ctr"/>
+          <a:lstStyle/>
+          <a:p>
+            <a:pPr algn="ctr"/>
+          </a:p>
+        </p:txBody>
+      </p:sp>
+      <p:sp>
+        <p:nvSpPr>
+          <p:cNvPr id="13" name="Rectangle 12"/>
+          <p:cNvSpPr/>
+          <p:nvPr/>
+        </p:nvSpPr>
+        <p:spPr>
+          <a:xfrm>
+            <a:off x="6217920" y="5760720"/>
+            <a:ext cx="320040" cy="685800"/>
+          </a:xfrm>
+          <a:prstGeom prst="rect">
+            <a:avLst/>
+          </a:prstGeom>
+          <a:solidFill>
+            <a:srgbClr val="009E73"/>
+          </a:solidFill>
+          <a:ln>
+            <a:noFill/>
+          </a:ln>
+          <a:effectLst/>
+        </p:spPr>
+        <p:style>
+          <a:lnRef idx="1">
+            <a:schemeClr val="accent1"/>
+          </a:lnRef>
+          <a:fillRef idx="3">
+            <a:schemeClr val="accent1"/>
+          </a:fillRef>
+          <a:effectRef idx="2">
+            <a:schemeClr val="accent1"/>
+          </a:effectRef>
+          <a:fontRef idx="minor">
+            <a:schemeClr val="lt1"/>
+          </a:fontRef>
+        </p:style>
+        <p:txBody>
+          <a:bodyPr rtlCol="0" anchor="ctr"/>
+          <a:lstStyle/>
+          <a:p>
+            <a:pPr algn="ctr"/>
+          </a:p>
+        </p:txBody>
+      </p:sp>
+      <p:sp>
+        <p:nvSpPr>
+          <p:cNvPr id="14" name="TextBox 13"/>
+          <p:cNvSpPr txBox="1"/>
+          <p:nvPr/>
+        </p:nvSpPr>
+        <p:spPr>
+          <a:xfrm>
+            <a:off x="6675120" y="5806440"/>
+            <a:ext cx="4892040" cy="274320"/>
+          </a:xfrm>
+          <a:prstGeom prst="rect">
+            <a:avLst/>
+          </a:prstGeom>
+          <a:noFill/>
+        </p:spPr>
+        <p:txBody>
+          <a:bodyPr wrap="square" lIns="0" rIns="0" tIns="0" bIns="0">
+            <a:spAutoFit/>
+          </a:bodyPr>
+          <a:lstStyle/>
+          <a:p>
+            <a:pPr algn="l"/>
+            <a:r>
+              <a:rPr sz="1200" b="1" i="0">
+                <a:solidFill>
+                  <a:srgbClr val="1E3A8A"/>
+                </a:solidFill>
+                <a:latin typeface="Calibri"/>
+              </a:rPr>
+              <a:t>v2 (target):  keep KV; obs from offload; flip the mask.</a:t>
+            </a:r>
+          </a:p>
+        </p:txBody>
+      </p:sp>
+      <p:sp>
+        <p:nvSpPr>
+          <p:cNvPr id="15" name="TextBox 14"/>
+          <p:cNvSpPr txBox="1"/>
+          <p:nvPr/>
+        </p:nvSpPr>
+        <p:spPr>
+          <a:xfrm>
+            <a:off x="6675120" y="6108192"/>
+            <a:ext cx="4892040" cy="292608"/>
+          </a:xfrm>
+          <a:prstGeom prst="rect">
+            <a:avLst/>
+          </a:prstGeom>
+          <a:noFill/>
+        </p:spPr>
+        <p:txBody>
+          <a:bodyPr wrap="square" lIns="0" rIns="0" tIns="0" bIns="0">
+            <a:spAutoFit/>
+          </a:bodyPr>
+          <a:lstStyle/>
+          <a:p>
+            <a:pPr algn="l"/>
+            <a:r>
+              <a:rPr sz="1050" b="0" i="1">
+                <a:solidFill>
+                  <a:srgbClr val="1F2937"/>
+                </a:solidFill>
+                <a:latin typeface="Calibri"/>
+              </a:rPr>
+              <a:t>Cost ≈ 0.  Suffix KV is the historical truth — agent really did proceed memento-only. New generation sees both.</a:t>
+            </a:r>
+          </a:p>
+        </p:txBody>
+      </p:sp>
+      <p:sp>
+        <p:nvSpPr>
+          <p:cNvPr id="16" name="TextBox 15"/>
+          <p:cNvSpPr txBox="1"/>
+          <p:nvPr/>
+        </p:nvSpPr>
+        <p:spPr>
+          <a:xfrm>
+            <a:off x="457200" y="6492240"/>
+            <a:ext cx="7315200" cy="274320"/>
+          </a:xfrm>
+          <a:prstGeom prst="rect">
+            <a:avLst/>
+          </a:prstGeom>
+          <a:noFill/>
+        </p:spPr>
+        <p:txBody>
+          <a:bodyPr wrap="square" lIns="0" rIns="0" tIns="0" bIns="0">
+            <a:spAutoFit/>
+          </a:bodyPr>
+          <a:lstStyle/>
+          <a:p>
+            <a:pPr algn="l"/>
+            <a:r>
+              <a:rPr sz="1000" b="0" i="0">
+                <a:solidFill>
+                  <a:srgbClr val="6B7280"/>
+                </a:solidFill>
+                <a:latin typeface="Calibri"/>
+              </a:rPr>
+              <a:t>AdaptiveCache · Vlad Cainamisir · Harvard</a:t>
+            </a:r>
+          </a:p>
+        </p:txBody>
+      </p:sp>
+      <p:sp>
+        <p:nvSpPr>
+          <p:cNvPr id="17" name="TextBox 16"/>
+          <p:cNvSpPr txBox="1"/>
+          <p:nvPr/>
+        </p:nvSpPr>
+        <p:spPr>
+          <a:xfrm>
+            <a:off x="8534095" y="6492240"/>
+            <a:ext cx="3200400" cy="274320"/>
+          </a:xfrm>
+          <a:prstGeom prst="rect">
+            <a:avLst/>
+          </a:prstGeom>
+          <a:noFill/>
+        </p:spPr>
+        <p:txBody>
+          <a:bodyPr wrap="square" lIns="0" rIns="0" tIns="0" bIns="0">
+            <a:spAutoFit/>
+          </a:bodyPr>
+          <a:lstStyle/>
+          <a:p>
+            <a:pPr algn="r"/>
+            <a:r>
+              <a:rPr sz="1000" b="0" i="0">
+                <a:solidFill>
+                  <a:srgbClr val="6B7280"/>
+                </a:solidFill>
+                <a:latin typeface="Calibri"/>
+              </a:rPr>
+              <a:t>27 / 28</a:t>
+            </a:r>
+          </a:p>
+        </p:txBody>
+      </p:sp>
+    </p:spTree>
+  </p:cSld>
+  <p:clrMapOvr>
+    <a:masterClrMapping/>
+  </p:clrMapOvr>
+</p:sld>
+</file>
+
+<file path=ppt/slides/slide28.xml><?xml version="1.0" encoding="utf-8"?>
+<p:sld xmlns:a="http://schemas.openxmlformats.org/drawingml/2006/main" xmlns:p="http://schemas.openxmlformats.org/presentationml/2006/main" xmlns:r="http://schemas.openxmlformats.org/officeDocument/2006/relationships">
+  <p:cSld>
+    <p:spTree>
+      <p:nvGrpSpPr>
+        <p:cNvPr id="1" name=""/>
+        <p:cNvGrpSpPr/>
+        <p:nvPr/>
+      </p:nvGrpSpPr>
+      <p:grpSpPr/>
+      <p:sp>
+        <p:nvSpPr>
+          <p:cNvPr id="2" name="Rectangle 1"/>
+          <p:cNvSpPr/>
+          <p:nvPr/>
+        </p:nvSpPr>
+        <p:spPr>
+          <a:xfrm>
+            <a:off x="0" y="0"/>
+            <a:ext cx="12191695" cy="6858000"/>
+          </a:xfrm>
+          <a:prstGeom prst="rect">
+            <a:avLst/>
+          </a:prstGeom>
+          <a:solidFill>
+            <a:srgbClr val="14255C"/>
+          </a:solidFill>
+          <a:ln>
+            <a:noFill/>
+          </a:ln>
+          <a:effectLst/>
+        </p:spPr>
+        <p:style>
+          <a:lnRef idx="1">
+            <a:schemeClr val="accent1"/>
+          </a:lnRef>
+          <a:fillRef idx="3">
+            <a:schemeClr val="accent1"/>
+          </a:fillRef>
+          <a:effectRef idx="2">
+            <a:schemeClr val="accent1"/>
+          </a:effectRef>
+          <a:fontRef idx="minor">
+            <a:schemeClr val="lt1"/>
+          </a:fontRef>
+        </p:style>
+        <p:txBody>
+          <a:bodyPr rtlCol="0" anchor="ctr"/>
+          <a:lstStyle/>
+          <a:p>
+            <a:pPr algn="ctr"/>
+          </a:p>
+        </p:txBody>
+      </p:sp>
+      <p:sp>
+        <p:nvSpPr>
+          <p:cNvPr id="3" name="Rectangle 2"/>
+          <p:cNvSpPr/>
+          <p:nvPr/>
+        </p:nvSpPr>
+        <p:spPr>
+          <a:xfrm>
+            <a:off x="0" y="0"/>
+            <a:ext cx="320040" cy="6858000"/>
+          </a:xfrm>
+          <a:prstGeom prst="rect">
+            <a:avLst/>
+          </a:prstGeom>
+          <a:solidFill>
+            <a:srgbClr val="E69F00"/>
+          </a:solidFill>
+          <a:ln>
+            <a:noFill/>
+          </a:ln>
+          <a:effectLst/>
+        </p:spPr>
+        <p:style>
+          <a:lnRef idx="1">
+            <a:schemeClr val="accent1"/>
+          </a:lnRef>
+          <a:fillRef idx="3">
+            <a:schemeClr val="accent1"/>
+          </a:fillRef>
+          <a:effectRef idx="2">
+            <a:schemeClr val="accent1"/>
+          </a:effectRef>
+          <a:fontRef idx="minor">
+            <a:schemeClr val="lt1"/>
+          </a:fontRef>
+        </p:style>
+        <p:txBody>
+          <a:bodyPr rtlCol="0" anchor="ctr"/>
+          <a:lstStyle/>
+          <a:p>
+            <a:pPr algn="ctr"/>
+          </a:p>
+        </p:txBody>
+      </p:sp>
+      <p:sp>
+        <p:nvSpPr>
+          <p:cNvPr id="4" name="TextBox 3"/>
+          <p:cNvSpPr txBox="1"/>
+          <p:nvPr/>
+        </p:nvSpPr>
+        <p:spPr>
+          <a:xfrm>
+            <a:off x="1097280" y="502920"/>
+            <a:ext cx="10058400" cy="457200"/>
+          </a:xfrm>
+          <a:prstGeom prst="rect">
+            <a:avLst/>
+          </a:prstGeom>
+          <a:noFill/>
+        </p:spPr>
+        <p:txBody>
+          <a:bodyPr wrap="square" lIns="0" rIns="0" tIns="0" bIns="0">
+            <a:spAutoFit/>
+          </a:bodyPr>
+          <a:lstStyle/>
+          <a:p>
+            <a:pPr algn="l"/>
+            <a:r>
+              <a:rPr sz="1400" b="1" i="0">
+                <a:solidFill>
+                  <a:srgbClr val="E69F00"/>
+                </a:solidFill>
+                <a:latin typeface="Calibri"/>
+              </a:rPr>
+              <a:t>WHAT'S HARD</a:t>
+            </a:r>
+          </a:p>
+        </p:txBody>
+      </p:sp>
+      <p:sp>
+        <p:nvSpPr>
+          <p:cNvPr id="5" name="TextBox 4"/>
+          <p:cNvSpPr txBox="1"/>
+          <p:nvPr/>
+        </p:nvSpPr>
+        <p:spPr>
+          <a:xfrm>
+            <a:off x="1097280" y="960120"/>
+            <a:ext cx="10058400" cy="822960"/>
+          </a:xfrm>
+          <a:prstGeom prst="rect">
+            <a:avLst/>
+          </a:prstGeom>
+          <a:noFill/>
+        </p:spPr>
+        <p:txBody>
+          <a:bodyPr wrap="square" lIns="0" rIns="0" tIns="0" bIns="0">
+            <a:spAutoFit/>
+          </a:bodyPr>
+          <a:lstStyle/>
+          <a:p>
+            <a:pPr algn="l"/>
+            <a:r>
+              <a:rPr sz="2800" b="1" i="0">
+                <a:solidFill>
+                  <a:srgbClr val="FFFFFF"/>
+                </a:solidFill>
+                <a:latin typeface="Calibri"/>
+              </a:rPr>
+              <a:t>The mechanism works. The agent doesn't.</a:t>
+            </a:r>
+          </a:p>
+        </p:txBody>
+      </p:sp>
+      <p:pic>
+        <p:nvPicPr>
+          <p:cNvPr id="6" name="Picture 5" descr="fig_memento_oracle_gap.png"/>
+          <p:cNvPicPr>
+            <a:picLocks noChangeAspect="1"/>
+          </p:cNvPicPr>
+          <p:nvPr/>
+        </p:nvPicPr>
+        <p:blipFill>
+          <a:blip r:embed="rId2"/>
+          <a:stretch>
+            <a:fillRect/>
+          </a:stretch>
+        </p:blipFill>
+        <p:spPr>
+          <a:xfrm>
+            <a:off x="548640" y="2249410"/>
+            <a:ext cx="6400800" cy="3365019"/>
+          </a:xfrm>
+          <a:prstGeom prst="rect">
+            <a:avLst/>
+          </a:prstGeom>
+        </p:spPr>
+      </p:pic>
+      <p:sp>
+        <p:nvSpPr>
+          <p:cNvPr id="7" name="Rectangle 6"/>
+          <p:cNvSpPr/>
+          <p:nvPr/>
+        </p:nvSpPr>
+        <p:spPr>
+          <a:xfrm>
+            <a:off x="7315200" y="1920240"/>
+            <a:ext cx="4434840" cy="4023360"/>
+          </a:xfrm>
+          <a:prstGeom prst="rect">
+            <a:avLst/>
+          </a:prstGeom>
+          <a:solidFill>
+            <a:srgbClr val="1E3A8A"/>
+          </a:solidFill>
+          <a:ln>
+            <a:noFill/>
+          </a:ln>
+          <a:effectLst/>
+        </p:spPr>
+        <p:style>
+          <a:lnRef idx="1">
+            <a:schemeClr val="accent1"/>
+          </a:lnRef>
+          <a:fillRef idx="3">
+            <a:schemeClr val="accent1"/>
+          </a:fillRef>
+          <a:effectRef idx="2">
+            <a:schemeClr val="accent1"/>
+          </a:effectRef>
+          <a:fontRef idx="minor">
+            <a:schemeClr val="lt1"/>
+          </a:fontRef>
+        </p:style>
+        <p:txBody>
+          <a:bodyPr rtlCol="0" anchor="ctr"/>
+          <a:lstStyle/>
+          <a:p>
+            <a:pPr algn="ctr"/>
+          </a:p>
+        </p:txBody>
+      </p:sp>
+      <p:sp>
+        <p:nvSpPr>
+          <p:cNvPr id="8" name="TextBox 7"/>
+          <p:cNvSpPr txBox="1"/>
+          <p:nvPr/>
+        </p:nvSpPr>
+        <p:spPr>
+          <a:xfrm>
+            <a:off x="7543800" y="2103120"/>
+            <a:ext cx="3977639" cy="457200"/>
+          </a:xfrm>
+          <a:prstGeom prst="rect">
+            <a:avLst/>
+          </a:prstGeom>
+          <a:noFill/>
+        </p:spPr>
+        <p:txBody>
+          <a:bodyPr wrap="square" lIns="0" rIns="0" tIns="0" bIns="0">
+            <a:spAutoFit/>
+          </a:bodyPr>
+          <a:lstStyle/>
+          <a:p>
+            <a:pPr algn="l"/>
+            <a:r>
+              <a:rPr sz="1400" b="1" i="0">
+                <a:solidFill>
+                  <a:srgbClr val="E69F00"/>
+                </a:solidFill>
+                <a:latin typeface="Calibri"/>
+              </a:rPr>
+              <a:t>The honest read</a:t>
+            </a:r>
+          </a:p>
+        </p:txBody>
+      </p:sp>
+      <p:sp>
+        <p:nvSpPr>
+          <p:cNvPr id="9" name="TextBox 8"/>
+          <p:cNvSpPr txBox="1"/>
+          <p:nvPr/>
+        </p:nvSpPr>
+        <p:spPr>
+          <a:xfrm>
+            <a:off x="7589520" y="2697480"/>
+            <a:ext cx="365760" cy="411480"/>
+          </a:xfrm>
+          <a:prstGeom prst="rect">
+            <a:avLst/>
+          </a:prstGeom>
+          <a:noFill/>
+        </p:spPr>
+        <p:txBody>
+          <a:bodyPr wrap="square" lIns="0" rIns="0" tIns="0" bIns="0" anchor="ctr">
+            <a:spAutoFit/>
+          </a:bodyPr>
+          <a:lstStyle/>
+          <a:p>
+            <a:pPr algn="l"/>
+            <a:r>
+              <a:rPr sz="1800" b="1" i="0">
+                <a:solidFill>
+                  <a:srgbClr val="009E73"/>
+                </a:solidFill>
+                <a:latin typeface="Calibri"/>
+              </a:rPr>
+              <a:t>✓</a:t>
+            </a:r>
+          </a:p>
+        </p:txBody>
+      </p:sp>
+      <p:sp>
+        <p:nvSpPr>
+          <p:cNvPr id="10" name="TextBox 9"/>
+          <p:cNvSpPr txBox="1"/>
+          <p:nvPr/>
+        </p:nvSpPr>
+        <p:spPr>
+          <a:xfrm>
+            <a:off x="8092440" y="2697480"/>
+            <a:ext cx="3428999" cy="411480"/>
+          </a:xfrm>
+          <a:prstGeom prst="rect">
+            <a:avLst/>
+          </a:prstGeom>
+          <a:noFill/>
+        </p:spPr>
+        <p:txBody>
+          <a:bodyPr wrap="square" lIns="0" rIns="0" tIns="0" bIns="0" anchor="ctr">
+            <a:spAutoFit/>
+          </a:bodyPr>
+          <a:lstStyle/>
+          <a:p>
+            <a:pPr algn="l"/>
+            <a:r>
+              <a:rPr sz="1200" b="0" i="0">
+                <a:solidFill>
+                  <a:srgbClr val="FFFFFF"/>
+                </a:solidFill>
+                <a:latin typeface="Calibri"/>
+              </a:rPr>
+              <a:t>v0 + v1 plumbing — shipped, validated</a:t>
+            </a:r>
+          </a:p>
+        </p:txBody>
+      </p:sp>
+      <p:sp>
+        <p:nvSpPr>
+          <p:cNvPr id="11" name="TextBox 10"/>
+          <p:cNvSpPr txBox="1"/>
+          <p:nvPr/>
+        </p:nvSpPr>
+        <p:spPr>
+          <a:xfrm>
+            <a:off x="7589520" y="3246120"/>
+            <a:ext cx="365760" cy="411480"/>
+          </a:xfrm>
+          <a:prstGeom prst="rect">
+            <a:avLst/>
+          </a:prstGeom>
+          <a:noFill/>
+        </p:spPr>
+        <p:txBody>
+          <a:bodyPr wrap="square" lIns="0" rIns="0" tIns="0" bIns="0" anchor="ctr">
+            <a:spAutoFit/>
+          </a:bodyPr>
+          <a:lstStyle/>
+          <a:p>
+            <a:pPr algn="l"/>
+            <a:r>
+              <a:rPr sz="1800" b="1" i="0">
+                <a:solidFill>
+                  <a:srgbClr val="009E73"/>
+                </a:solidFill>
+                <a:latin typeface="Calibri"/>
+              </a:rPr>
+              <a:t>✓</a:t>
+            </a:r>
+          </a:p>
+        </p:txBody>
+      </p:sp>
+      <p:sp>
+        <p:nvSpPr>
+          <p:cNvPr id="12" name="TextBox 11"/>
+          <p:cNvSpPr txBox="1"/>
+          <p:nvPr/>
+        </p:nvSpPr>
+        <p:spPr>
+          <a:xfrm>
+            <a:off x="8092440" y="3246120"/>
+            <a:ext cx="3428999" cy="411480"/>
+          </a:xfrm>
+          <a:prstGeom prst="rect">
+            <a:avLst/>
+          </a:prstGeom>
+          <a:noFill/>
+        </p:spPr>
+        <p:txBody>
+          <a:bodyPr wrap="square" lIns="0" rIns="0" tIns="0" bIns="0" anchor="ctr">
+            <a:spAutoFit/>
+          </a:bodyPr>
+          <a:lstStyle/>
+          <a:p>
+            <a:pPr algn="l"/>
+            <a:r>
+              <a:rPr sz="1200" b="0" i="0">
+                <a:solidFill>
+                  <a:srgbClr val="FFFFFF"/>
+                </a:solidFill>
+                <a:latin typeface="Calibri"/>
+              </a:rPr>
+              <a:t>Wall time + read count — real benefit</a:t>
+            </a:r>
+          </a:p>
+        </p:txBody>
+      </p:sp>
+      <p:sp>
+        <p:nvSpPr>
+          <p:cNvPr id="13" name="TextBox 12"/>
+          <p:cNvSpPr txBox="1"/>
+          <p:nvPr/>
+        </p:nvSpPr>
+        <p:spPr>
+          <a:xfrm>
+            <a:off x="7589520" y="3794760"/>
+            <a:ext cx="365760" cy="411480"/>
+          </a:xfrm>
+          <a:prstGeom prst="rect">
+            <a:avLst/>
+          </a:prstGeom>
+          <a:noFill/>
+        </p:spPr>
+        <p:txBody>
+          <a:bodyPr wrap="square" lIns="0" rIns="0" tIns="0" bIns="0" anchor="ctr">
+            <a:spAutoFit/>
+          </a:bodyPr>
+          <a:lstStyle/>
+          <a:p>
+            <a:pPr algn="l"/>
+            <a:r>
+              <a:rPr sz="1800" b="1" i="0">
+                <a:solidFill>
+                  <a:srgbClr val="E69F00"/>
+                </a:solidFill>
+                <a:latin typeface="Calibri"/>
+              </a:rPr>
+              <a:t>✗</a:t>
+            </a:r>
+          </a:p>
+        </p:txBody>
+      </p:sp>
+      <p:sp>
+        <p:nvSpPr>
+          <p:cNvPr id="14" name="TextBox 13"/>
+          <p:cNvSpPr txBox="1"/>
+          <p:nvPr/>
+        </p:nvSpPr>
+        <p:spPr>
+          <a:xfrm>
+            <a:off x="8092440" y="3794760"/>
+            <a:ext cx="3428999" cy="411480"/>
+          </a:xfrm>
+          <a:prstGeom prst="rect">
+            <a:avLst/>
+          </a:prstGeom>
+          <a:noFill/>
+        </p:spPr>
+        <p:txBody>
+          <a:bodyPr wrap="square" lIns="0" rIns="0" tIns="0" bIns="0" anchor="ctr">
+            <a:spAutoFit/>
+          </a:bodyPr>
+          <a:lstStyle/>
+          <a:p>
+            <a:pPr algn="l"/>
+            <a:r>
+              <a:rPr sz="1200" b="0" i="0">
+                <a:solidFill>
+                  <a:srgbClr val="FFFFFF"/>
+                </a:solidFill>
+                <a:latin typeface="Calibri"/>
+              </a:rPr>
+              <a:t>Real-test FAIL_TO_PASS — no improvement</a:t>
+            </a:r>
+          </a:p>
+        </p:txBody>
+      </p:sp>
+      <p:sp>
+        <p:nvSpPr>
+          <p:cNvPr id="15" name="TextBox 14"/>
+          <p:cNvSpPr txBox="1"/>
+          <p:nvPr/>
+        </p:nvSpPr>
+        <p:spPr>
+          <a:xfrm>
+            <a:off x="7589520" y="4526280"/>
+            <a:ext cx="3886200" cy="1280160"/>
+          </a:xfrm>
+          <a:prstGeom prst="rect">
+            <a:avLst/>
+          </a:prstGeom>
+          <a:noFill/>
+        </p:spPr>
+        <p:txBody>
+          <a:bodyPr wrap="square" lIns="0" rIns="0" tIns="0" bIns="0">
+            <a:spAutoFit/>
+          </a:bodyPr>
+          <a:lstStyle/>
+          <a:p>
+            <a:pPr algn="l"/>
+            <a:r>
+              <a:rPr sz="1200" b="0" i="1">
+                <a:solidFill>
+                  <a:srgbClr val="E8ECF5"/>
+                </a:solidFill>
+                <a:latin typeface="Calibri"/>
+              </a:rPr>
+              <a:t>Qwen3-30B at single seed × 20 steps cannot fix pytest-7490 regardless of context strategy.</a:t>
+            </a:r>
+          </a:p>
+        </p:txBody>
+      </p:sp>
+      <p:sp>
+        <p:nvSpPr>
+          <p:cNvPr id="16" name="TextBox 15"/>
+          <p:cNvSpPr txBox="1"/>
+          <p:nvPr/>
+        </p:nvSpPr>
+        <p:spPr>
+          <a:xfrm>
+            <a:off x="548640" y="6126480"/>
+            <a:ext cx="10972800" cy="365760"/>
+          </a:xfrm>
+          <a:prstGeom prst="rect">
+            <a:avLst/>
+          </a:prstGeom>
+          <a:noFill/>
+        </p:spPr>
+        <p:txBody>
+          <a:bodyPr wrap="square" lIns="0" rIns="0" tIns="0" bIns="0">
+            <a:spAutoFit/>
+          </a:bodyPr>
+          <a:lstStyle/>
+          <a:p>
+            <a:pPr algn="l"/>
+            <a:r>
+              <a:rPr sz="1200" b="0" i="1">
+                <a:solidFill>
+                  <a:srgbClr val="E8ECF5"/>
+                </a:solidFill>
+                <a:latin typeface="Calibri"/>
+              </a:rPr>
+              <a:t>Next  ·  Haiku-as-agent re-test (Paper 1's strong-agent setup)  ·  attention-driven recall (RQ2 #3)  ·  multi-task expansion</a:t>
+            </a:r>
+          </a:p>
+        </p:txBody>
+      </p:sp>
+      <p:sp>
+        <p:nvSpPr>
+          <p:cNvPr id="17" name="TextBox 16"/>
+          <p:cNvSpPr txBox="1"/>
+          <p:nvPr/>
+        </p:nvSpPr>
+        <p:spPr>
+          <a:xfrm>
+            <a:off x="457200" y="6492240"/>
+            <a:ext cx="7315200" cy="274320"/>
+          </a:xfrm>
+          <a:prstGeom prst="rect">
+            <a:avLst/>
+          </a:prstGeom>
+          <a:noFill/>
+        </p:spPr>
+        <p:txBody>
+          <a:bodyPr wrap="square" lIns="0" rIns="0" tIns="0" bIns="0">
+            <a:spAutoFit/>
+          </a:bodyPr>
+          <a:lstStyle/>
+          <a:p>
+            <a:pPr algn="l"/>
+            <a:r>
+              <a:rPr sz="1000" b="0" i="0">
+                <a:solidFill>
+                  <a:srgbClr val="E8ECF5"/>
+                </a:solidFill>
+                <a:latin typeface="Calibri"/>
+              </a:rPr>
+              <a:t>AdaptiveCache · Vlad Cainamisir · Harvard</a:t>
+            </a:r>
+          </a:p>
+        </p:txBody>
+      </p:sp>
+      <p:sp>
+        <p:nvSpPr>
+          <p:cNvPr id="18" name="TextBox 17"/>
+          <p:cNvSpPr txBox="1"/>
+          <p:nvPr/>
+        </p:nvSpPr>
+        <p:spPr>
+          <a:xfrm>
+            <a:off x="8534095" y="6492240"/>
+            <a:ext cx="3200400" cy="274320"/>
+          </a:xfrm>
+          <a:prstGeom prst="rect">
+            <a:avLst/>
+          </a:prstGeom>
+          <a:noFill/>
+        </p:spPr>
+        <p:txBody>
+          <a:bodyPr wrap="square" lIns="0" rIns="0" tIns="0" bIns="0">
+            <a:spAutoFit/>
+          </a:bodyPr>
+          <a:lstStyle/>
+          <a:p>
+            <a:pPr algn="r"/>
+            <a:r>
+              <a:rPr sz="1000" b="0" i="0">
+                <a:solidFill>
+                  <a:srgbClr val="E8ECF5"/>
+                </a:solidFill>
+                <a:latin typeface="Calibri"/>
+              </a:rPr>
+              <a:t>28 / 28</a:t>
             </a:r>
           </a:p>
         </p:txBody>
@@ -8877,7 +17720,7 @@
                 </a:solidFill>
                 <a:latin typeface="Calibri"/>
               </a:rPr>
-              <a:t>3 / 17</a:t>
+              <a:t>3 / 28</a:t>
             </a:r>
           </a:p>
         </p:txBody>
@@ -9103,7 +17946,7 @@
                 </a:solidFill>
                 <a:latin typeface="Calibri"/>
               </a:rPr>
-              <a:t>4 / 17</a:t>
+              <a:t>4 / 28</a:t>
             </a:r>
           </a:p>
         </p:txBody>
@@ -9533,7 +18376,7 @@
                 </a:solidFill>
                 <a:latin typeface="Calibri"/>
               </a:rPr>
-              <a:t>5 / 17</a:t>
+              <a:t>5 / 28</a:t>
             </a:r>
           </a:p>
         </p:txBody>
@@ -9963,7 +18806,7 @@
                 </a:solidFill>
                 <a:latin typeface="Calibri"/>
               </a:rPr>
-              <a:t>6 / 17</a:t>
+              <a:t>6 / 28</a:t>
             </a:r>
           </a:p>
         </p:txBody>
@@ -10393,7 +19236,7 @@
                 </a:solidFill>
                 <a:latin typeface="Calibri"/>
               </a:rPr>
-              <a:t>7 / 17</a:t>
+              <a:t>7 / 28</a:t>
             </a:r>
           </a:p>
         </p:txBody>
@@ -10823,7 +19666,7 @@
                 </a:solidFill>
                 <a:latin typeface="Calibri"/>
               </a:rPr>
-              <a:t>8 / 17</a:t>
+              <a:t>8 / 28</a:t>
             </a:r>
           </a:p>
         </p:txBody>
@@ -11253,7 +20096,7 @@
                 </a:solidFill>
                 <a:latin typeface="Calibri"/>
               </a:rPr>
-              <a:t>9 / 17</a:t>
+              <a:t>9 / 28</a:t>
             </a:r>
           </a:p>
         </p:txBody>
